--- a/LOCAL_CONTACT_Security_Presentation.pptx
+++ b/LOCAL_CONTACT_Security_Presentation.pptx
@@ -513,12 +513,12 @@
           <a:lstStyle/>
           <a:p>
             <a:r>
-              <a:t>🎙️ ملاحظات المتحدث الشفهية للمناقشة:</a:t>
-            </a:r>
-          </a:p>
-          <a:p>
-            <a:r>
-              <a:t>اشرح للأساتذة في الافتتاحية أن هذا العرض يركز على مناقشة خوارزميات التشفير في مشروع LOCAL CONTACT، وهو نظام اتصال محلي P2P يعمل دون خادم مركزي. وقدم زملاءك في فريق العمل: مشعل حاجب، قحطان الشاجع، أواب النزيلي، محمد العيدروس، ومحمد العواضي، مع استعراض الخوارزميات الأساسية الست المستخدمة في النظام.</a:t>
+              <a:t>🎙️ نص العرض الشفهي للمناقشة أمام اللجنة:</a:t>
+            </a:r>
+          </a:p>
+          <a:p>
+            <a:r>
+              <a:t>نبدأ المناقشة بالترحيب بلجنة التحكيم. نناقش اليوم التصميم الأمني لنظام LOCAL CONTACT. هذا النظام يعمل P2P دون إنترنت أو خادم وسيط. نقدم العرض كفريق عمل مكون من: مشعل حاجب، قحطان، محمد العيدروس، أواب النزيلي، ومحمد العواضي.</a:t>
             </a:r>
           </a:p>
         </p:txBody>
@@ -588,12 +588,12 @@
           <a:lstStyle/>
           <a:p>
             <a:r>
-              <a:t>🎙️ ملاحظات المتحدث الشفهية للمناقشة:</a:t>
-            </a:r>
-          </a:p>
-          <a:p>
-            <a:r>
-              <a:t>هذه الشريحة تبرز النضج والأمانة الهندسية: لا ندعي أن كل شيء يستخدم Session Keys. الدردشة الثنائية المباشرة Direct Chat هي التي تستخدم مفتاح الجلسة ECDH. استكشاف الأجهزة Discovery يستخدم المفتاح الشبكي وهو أمر طبيعي ومطلوب للاكتشاف العام. أما الغرف ونقل الملفات والصوت والفيديو فما زالت تستخدم المفتاح الشبكي القديم المشترك وتحتاج مفاتيح مجموعات مستقبلاً.</a:t>
+              <a:t>🎙️ نص العرض الشفهي للمناقشة أمام اللجنة:</a:t>
+            </a:r>
+          </a:p>
+          <a:p>
+            <a:r>
+              <a:t>نبيّن هنا حماية الوسائط: الملفات تُقسّم إلى كتل 64KB وتشفّر مع Nonce مستقل لكل كتلة لضمان استئناف آمن. والصوت والفيديو يُشفران بنمط AES-GCM الفوري عبر UDP مع إسقاط الحزم التي تفشل في المصادقة لمنع هجمات الحقن الصوتي.</a:t>
             </a:r>
           </a:p>
         </p:txBody>
@@ -663,12 +663,12 @@
           <a:lstStyle/>
           <a:p>
             <a:r>
-              <a:t>🎙️ ملاحظات المتحدث الشفهية للمناقشة:</a:t>
-            </a:r>
-          </a:p>
-          <a:p>
-            <a:r>
-              <a:t>فصل حاسم بين نجاح الاختبارات وبين التحقق الميداني: نجاح 33 من 33 اختباراً يثبت صحة خوارزميات التشفير وتبادل المفاتيح وإدارة الجلسات في بيئة JVM. لكنه لا يعني إثبات عمل الشبكة بين جهازين أندرويد حقيقيين عبر Wi-Fi فعلي. توثيق هذا الفرق في مصفوفة TraceabilityMatrix.md هو ما يميز العمل الهندسي المنضبط.</a:t>
+              <a:t>🎙️ نص العرض الشفهي للمناقشة أمام اللجنة:</a:t>
+            </a:r>
+          </a:p>
+          <a:p>
+            <a:r>
+              <a:t>نقدم للدكتور برهان النجاح البرمجي: 33 اختبار وحدة آلي تم بناؤها واختبارها عبر Gradle ونجحت بالكامل بنسبة 100%. أثبتت الاختبارات أن التشفير سليم، وأن التلاعب بالبايتات يتم كشفه وإسقاطه، وأن دوال HKDF مطابقة لمعايير RFC.</a:t>
             </a:r>
           </a:p>
         </p:txBody>
@@ -738,12 +738,12 @@
           <a:lstStyle/>
           <a:p>
             <a:r>
-              <a:t>🎙️ ملاحظات المتحدث الشفهية للمناقشة:</a:t>
-            </a:r>
-          </a:p>
-          <a:p>
-            <a:r>
-              <a:t>اختم العرض بقوة وبأمانة علمية تامة: لخّص الفجوات المتبقية والموثقة كخارطة طريق مستقبلية: 1- التحقق اليدوي SAS لمنع MITM في أول اتصال. 2- Replay Protection كامل بأرقام تسلسلية للحزم. 3- فحص سلامة الملف كاملاً SHA-256. 4- Group Keys للغرف. اختم بالتأكيد على أن المشروع انتقل من كود أولي بمفتاح ثابت إلى بنية هندسية رصينة موثقة ومختبرة وقابلة للتطوير المستمر.</a:t>
+              <a:t>🎙️ نص العرض الشفهي للمناقشة أمام اللجنة:</a:t>
+            </a:r>
+          </a:p>
+          <a:p>
+            <a:r>
+              <a:t>نختم العرض بالأمانة العلمية: نعترف بوضوح بالقيود التي ما زالت تحتاج تطويراً مثل إضافة كود SAS لمنع MITM في اللقاء الأول، وتشفير الغرف بمفاتيح جماعية. ونؤكد أن المشروع قفز قفزة نوعية من كود بمفتاح ثابت إلى بنية تشفير متكاملة وموثقة ومختبرة. شكراً لكم ومستعدون للمناقشة.</a:t>
             </a:r>
           </a:p>
         </p:txBody>
@@ -813,12 +813,12 @@
           <a:lstStyle/>
           <a:p>
             <a:r>
-              <a:t>🎙️ ملاحظات المتحدث الشفهية للمناقشة:</a:t>
-            </a:r>
-          </a:p>
-          <a:p>
-            <a:r>
-              <a:t>وضّح للدكاترة الفجوة الأمنية السابقة: التطبيق كان يحتوي على وظائف اتصال ممتازة ولكن أمنياً كان يعتمد على عبارة مرور ثابتة مشتقة عبر PBKDF2، مما جعل مفتاح التشفير ثابتاً ومشتركاً بين جميع الأجهزة وكافة الجلسات. كشف المفتاح من الـ APK كان يهدد بفك تشفير كل الحزم المسجلة.</a:t>
+              <a:t>🎙️ نص العرض الشفهي للمناقشة أمام اللجنة:</a:t>
+            </a:r>
+          </a:p>
+          <a:p>
+            <a:r>
+              <a:t>نوضح هنا للدكتور الثغرة السابقة: التطبيق كان يستخدم AES-GCM لكن المفتاح كان ثابتاً ومشتقاً من كلمة مرور واحدة في الكلاس LocalCryptoEngine. كشف المفتاح كان يكسر أمان كل المحادثات الماضية. هذا ما دفعنا لإعادة هندسة التشفير.</a:t>
             </a:r>
           </a:p>
         </p:txBody>
@@ -888,12 +888,12 @@
           <a:lstStyle/>
           <a:p>
             <a:r>
-              <a:t>🎙️ ملاحظات المتحدث الشفهية للمناقشة:</a:t>
-            </a:r>
-          </a:p>
-          <a:p>
-            <a:r>
-              <a:t>هنا يظهر دور هندسة البرمجيات: طبقنا مبدأ Single Responsibility ومبدأ Dependency Inversion عبر إنشاء واجهة KeyProvider. عزلنا مسؤولية جلب المفتاح عن محرك التشفير. أنشأنا LegacyStaticKeyProvider للحفاظ على التوافق، ومهدنا الطريق لمفاتيح الجلسات الديناميكية دون كسر الكود القديم.</a:t>
+              <a:t>🎙️ نص العرض الشفهي للمناقشة أمام اللجنة:</a:t>
+            </a:r>
+          </a:p>
+          <a:p>
+            <a:r>
+              <a:t>نؤكد للدكتور أننا اخترنا AES-256-GCM لأنه نمط AEAD يقدم سرية ومصادقة معاً. وسم الـ Tag يكشف أي عبث بالبايتات ويرفض فك التشفير، والـ Nonce الفريد يمنع كسر الـ GCM. تم إثبات كل ذلك بـ 10 اختبارات JVM ناجحة.</a:t>
             </a:r>
           </a:p>
         </p:txBody>
@@ -963,12 +963,12 @@
           <a:lstStyle/>
           <a:p>
             <a:r>
-              <a:t>🎙️ ملاحظات المتحدث الشفهية للمناقشة:</a:t>
-            </a:r>
-          </a:p>
-          <a:p>
-            <a:r>
-              <a:t>أكد لأستاذ التشفير أننا حافظنا على AES-256-GCM كخيار قياسي ممتاز لأنه نمط AEAD (يوفر السرية وسلامة البيانات معاً). وسيلة المصادقة Tag بطول 128 بت تكشف أي تلاعب بالبتات فوراً. اختبارات LocalCryptoEngineTest فحصت النصوص، كتل الملفات، والتلاعب وحققت 10/10 على JVM.</a:t>
+              <a:t>🎙️ نص العرض الشفهي للمناقشة أمام اللجنة:</a:t>
+            </a:r>
+          </a:p>
+          <a:p>
+            <a:r>
+              <a:t>هنا نوضح كيف حلت خوارزمية ECDH مشكلة المفتاح الثابت: الطرفان يولدان مفاتيح مؤقتة P-256، يتبادلان المفاتيح العامة، ويحسبان نفس السر المشترك دون إرساله على الشبكة. بمجرد انتهاء المحادثة يُحذف المفتاح الخاص من الذاكرة محققاً Forward Secrecy.</a:t>
             </a:r>
           </a:p>
         </p:txBody>
@@ -1038,12 +1038,12 @@
           <a:lstStyle/>
           <a:p>
             <a:r>
-              <a:t>🎙️ ملاحظات المتحدث الشفهية للمناقشة:</a:t>
-            </a:r>
-          </a:p>
-          <a:p>
-            <a:r>
-              <a:t>شرح بروتوكول تبادل المفاتيح: أنشأنا محرك ECDH باستخدام المنحنى الإهليلجي القياسي NIST P-256 (secp256r1). الميزة الأهم هي Forward Secrecy: الطرفان يولدّان مفاتيح مؤقتة Ephemeral لكل جلسة، يحسبان السر المشترك، ثم يُتلف المفتاح الخاص فوراً. لماذا P-256؟ لأنه مدعوم أصلياً في مكتبات التشفير القياسية داخل Android و JVM دون الحاجة لمكتبات خارجية ثقيلة.</a:t>
+              <a:t>🎙️ نص العرض الشفهي للمناقشة أمام اللجنة:</a:t>
+            </a:r>
+          </a:p>
+          <a:p>
+            <a:r>
+              <a:t>نشرح للدكتور خطوة HKDF-SHA256: السر المشترك الناتج من ECDH لا يصلح كمفتاح AES مباشرة لأنه قد يحتوي على تحيز إحصائي. نطبق RFC 5869 عبر مرحلتي Extract و Expand لتوليد مفاتيح تشفير مستقلة للإرسال والاستقبال. تم اختبار ذلك بنواقل RFC الرسمية.</a:t>
             </a:r>
           </a:p>
         </p:txBody>
@@ -1113,12 +1113,12 @@
           <a:lstStyle/>
           <a:p>
             <a:r>
-              <a:t>🎙️ ملاحظات المتحدث الشفهية للمناقشة:</a:t>
-            </a:r>
-          </a:p>
-          <a:p>
-            <a:r>
-              <a:t>وضّح لأستاذ التشفير لماذا نحتاج HKDF: السر المشترك الناتج عن ECDH يمثل نقطة على المنحنى، ولا يمتلك توزيعاً عشوائياً منتظماً (Uniform Distribution) يناسب مفاتيح AES. معيار RFC 5869 يطبق مرحلتين: Extract لاستخلاص العشوائية، و Expand لتوليد مفتاح AES-256 نقي مع حقن سياق الجلسة كـ Context لمنع الخلط بين الجلسات.</a:t>
+              <a:t>🎙️ نص العرض الشفهي للمناقشة أمام اللجنة:</a:t>
+            </a:r>
+          </a:p>
+          <a:p>
+            <a:r>
+              <a:t>نوضح هنا كيفية إدارة المفاتيح عملياً عبر PeerSessionKeyManager: كل جهاز متصل يحصل على جلسة خاصة به ومفاتيح منفصلة مخزنة في الذاكرة العشوائية فقط، مما يعزل المستخدمين ويمنع تسرب البيانات بين المحادثات المختلفة.</a:t>
             </a:r>
           </a:p>
         </p:txBody>
@@ -1188,12 +1188,12 @@
           <a:lstStyle/>
           <a:p>
             <a:r>
-              <a:t>🎙️ ملاحظات المتحدث الشفهية للمناقشة:</a:t>
-            </a:r>
-          </a:p>
-          <a:p>
-            <a:r>
-              <a:t>اشرح كيف حلت هوية الجهاز مشكلة عدم وجود خادم: أنشأنا KeystoreIdentityManager لتوليد زوج مفاتيح دائم في Android Keystore المحمي بالعتاد (TEE أو StrongBox). المفتاح الخاص لا يغادر العتاد أبداً ولا يمكن تصديره أو سرقته حتى لو تم عمل روت للجهاز. يستخدم المفتاح حصراً لتوقيع حزم المصافحة بـ ECDSA. بيّن بأمانة أن هذا المكون مدمج بالكود ومصمم للأجهزة، ولم يخضع لاختبار Android Instrumented على محاكي.</a:t>
+              <a:t>🎙️ نص العرض الشفهي للمناقشة أمام اللجنة:</a:t>
+            </a:r>
+          </a:p>
+          <a:p>
+            <a:r>
+              <a:t>نشرح للدكتور كيف أمّنا هوية الجهاز: لا نعتمد على مجرد IP أو اسم عشوائي، بل نولد مفتاح هوية غير قابل للاستخراج داخل Android Keystore المحمي بالعتاد. يستخدم الجهاز المفتاح لتوقيع حزم المصافحة عبر ECDSA لإثبات هويته دون تسريب المفتاح الخاص.</a:t>
             </a:r>
           </a:p>
         </p:txBody>
@@ -1263,12 +1263,12 @@
           <a:lstStyle/>
           <a:p>
             <a:r>
-              <a:t>🎙️ ملاحظات المتحدث الشفهية للمناقشة:</a:t>
-            </a:r>
-          </a:p>
-          <a:p>
-            <a:r>
-              <a:t>شرح تحصين المصافحة: في التصميم البدائي كان التوقيع يغطي المفتاح المؤقت فقط، مما يسمح بهجمات إعادة الاستخدام في جلسة أخرى. قمنا بإنشاء Canonical Binary Format يحزم: إصدار البروتوكول، معرف المرسل، معرف المستقبل، معرف الجلسة، الطابع الزمني، والمفتاح المؤقت. أي تعديل في سياق الجلسة يكسر التوقيع الرقمي فوراً. نبه اللجنة بأن هذا يحمي من التلاعب بالسياق، لكنه ليس Replay Protection كاملاً لبيانات الشبكة.</a:t>
+              <a:t>🎙️ نص العرض الشفهي للمناقشة أمام اللجنة:</a:t>
+            </a:r>
+          </a:p>
+          <a:p>
+            <a:r>
+              <a:t>نبيّن هنا كيف تحل مشكلة الثقة دون سيرفر مركزي: نستخدم نموذج TOFU مثل بروتوكول SSH. يتم حفظ بصمة المفتاح العام SHA-256 للمستخدم في PeerTrustStore. إذا حاول أي مهاجم انتحال هويته مستقبلاً بمفتاح آخر، يرفض التطبيق الاتصال فوراً.</a:t>
             </a:r>
           </a:p>
         </p:txBody>
@@ -1338,12 +1338,12 @@
           <a:lstStyle/>
           <a:p>
             <a:r>
-              <a:t>🎙️ ملاحظات المتحدث الشفهية للمناقشة:</a:t>
-            </a:r>
-          </a:p>
-          <a:p>
-            <a:r>
-              <a:t>شرح نموذج TOFU: لعدم وجود خادم شهادات مركزي CA في الشبكة المحلية، نعتمد Trust On First Use. في أول اتصال، يُحفظ المفتاح العام وبصمته. في الاتصالات اللاحقة يُرفض أي تغيير. اعترف بشفافية أكاديمية أمام أستاذ التشفير: حماية MITM في الاتصال الأول تظل جزئية وليست كاملة، لأن المهاجم النشط في اللحظة الأولى يمكنه انتحال الهوية إذا لم يتأكد الطرفان بقناة خارجية (SAS أو QR Code).</a:t>
+              <a:t>🎙️ نص العرض الشفهي للمناقشة أمام اللجنة:</a:t>
+            </a:r>
+          </a:p>
+          <a:p>
+            <a:r>
+              <a:t>نستعرض للأستاذ بروتوكول المصافحة المكون من 4 خطوات: يتم تبادل المفاتيح المؤقتة والتوقيعات الرقمية والبصمات، ثم يتم اشتقاق مفاتيح الجلسة وتأكيدها بحزمة مشفرة قبل السماح بمرور أي رسالة نصية أو مكالمة صوتية.</a:t>
             </a:r>
           </a:p>
         </p:txBody>
@@ -4358,7 +4358,7 @@
         <p:spPr>
           <a:xfrm>
             <a:off x="0" y="0"/>
-            <a:ext cx="12191695" cy="182880"/>
+            <a:ext cx="12191695" cy="228600"/>
           </a:xfrm>
           <a:prstGeom prst="rect">
             <a:avLst/>
@@ -4394,23 +4394,133 @@
       </p:sp>
       <p:sp>
         <p:nvSpPr>
-          <p:cNvPr id="3" name="Rectangle 2"/>
+          <p:cNvPr id="3" name="TextBox 2"/>
+          <p:cNvSpPr txBox="1"/>
+          <p:nvPr/>
+        </p:nvSpPr>
+        <p:spPr>
+          <a:xfrm>
+            <a:off x="822960" y="640080"/>
+            <a:ext cx="10515600" cy="411480"/>
+          </a:xfrm>
+          <a:prstGeom prst="rect">
+            <a:avLst/>
+          </a:prstGeom>
+          <a:noFill/>
+        </p:spPr>
+        <p:txBody>
+          <a:bodyPr wrap="none">
+            <a:spAutoFit/>
+          </a:bodyPr>
+          <a:lstStyle/>
+          <a:p>
+            <a:pPr>
+              <a:defRPr sz="1500" b="1">
+                <a:solidFill>
+                  <a:srgbClr val="1E40AF"/>
+                </a:solidFill>
+                <a:latin typeface="Arial"/>
+              </a:defRPr>
+            </a:pPr>
+            <a:r>
+              <a:t>LOCAL CONTACT  •  Offline Local P2P Communication</a:t>
+            </a:r>
+          </a:p>
+        </p:txBody>
+      </p:sp>
+      <p:sp>
+        <p:nvSpPr>
+          <p:cNvPr id="4" name="TextBox 3"/>
+          <p:cNvSpPr txBox="1"/>
+          <p:nvPr/>
+        </p:nvSpPr>
+        <p:spPr>
+          <a:xfrm>
+            <a:off x="822960" y="1143000"/>
+            <a:ext cx="10515600" cy="1005840"/>
+          </a:xfrm>
+          <a:prstGeom prst="rect">
+            <a:avLst/>
+          </a:prstGeom>
+          <a:noFill/>
+        </p:spPr>
+        <p:txBody>
+          <a:bodyPr wrap="square">
+            <a:spAutoFit/>
+          </a:bodyPr>
+          <a:lstStyle/>
+          <a:p>
+            <a:pPr>
+              <a:defRPr sz="3600" b="1">
+                <a:solidFill>
+                  <a:srgbClr val="0F2B5C"/>
+                </a:solidFill>
+                <a:latin typeface="Arial"/>
+              </a:defRPr>
+            </a:pPr>
+            <a:r>
+              <a:t>التصميم الأمني والتشفير في مشروع LOCAL CONTACT</a:t>
+            </a:r>
+          </a:p>
+        </p:txBody>
+      </p:sp>
+      <p:sp>
+        <p:nvSpPr>
+          <p:cNvPr id="5" name="TextBox 4"/>
+          <p:cNvSpPr txBox="1"/>
+          <p:nvPr/>
+        </p:nvSpPr>
+        <p:spPr>
+          <a:xfrm>
+            <a:off x="822960" y="2148840"/>
+            <a:ext cx="10515600" cy="502920"/>
+          </a:xfrm>
+          <a:prstGeom prst="rect">
+            <a:avLst/>
+          </a:prstGeom>
+          <a:noFill/>
+        </p:spPr>
+        <p:txBody>
+          <a:bodyPr wrap="none">
+            <a:spAutoFit/>
+          </a:bodyPr>
+          <a:lstStyle/>
+          <a:p>
+            <a:pPr>
+              <a:defRPr sz="1800" b="1">
+                <a:solidFill>
+                  <a:srgbClr val="475569"/>
+                </a:solidFill>
+                <a:latin typeface="Arial"/>
+              </a:defRPr>
+            </a:pPr>
+            <a:r>
+              <a:t>هندسة خوارزميات التشفير وإدارة المفاتيح في نظام اتصال P2P محلي مستقل</a:t>
+            </a:r>
+          </a:p>
+        </p:txBody>
+      </p:sp>
+      <p:sp>
+        <p:nvSpPr>
+          <p:cNvPr id="6" name="Rounded Rectangle 5"/>
           <p:cNvSpPr/>
           <p:nvPr/>
         </p:nvSpPr>
         <p:spPr>
           <a:xfrm>
-            <a:off x="0" y="6675120"/>
-            <a:ext cx="12191695" cy="182880"/>
-          </a:xfrm>
-          <a:prstGeom prst="rect">
+            <a:off x="822960" y="2834640"/>
+            <a:ext cx="10515600" cy="594360"/>
+          </a:xfrm>
+          <a:prstGeom prst="roundRect">
             <a:avLst/>
           </a:prstGeom>
           <a:solidFill>
-            <a:srgbClr val="1E40AF"/>
+            <a:srgbClr val="F8FAFC"/>
           </a:solidFill>
-          <a:ln>
-            <a:noFill/>
+          <a:ln w="12700">
+            <a:solidFill>
+              <a:srgbClr val="CBD5E1"/>
+            </a:solidFill>
           </a:ln>
         </p:spPr>
         <p:style>
@@ -4431,133 +4541,16 @@
           <a:bodyPr rtlCol="0" anchor="ctr"/>
           <a:lstStyle/>
           <a:p>
-            <a:pPr algn="ctr"/>
-          </a:p>
-        </p:txBody>
-      </p:sp>
-      <p:sp>
-        <p:nvSpPr>
-          <p:cNvPr id="4" name="Rounded Rectangle 3"/>
-          <p:cNvSpPr/>
-          <p:nvPr/>
-        </p:nvSpPr>
-        <p:spPr>
-          <a:xfrm>
-            <a:off x="3474720" y="457200"/>
-            <a:ext cx="5212080" cy="411480"/>
-          </a:xfrm>
-          <a:prstGeom prst="roundRect">
-            <a:avLst/>
-          </a:prstGeom>
-          <a:solidFill>
-            <a:srgbClr val="EFF6FF"/>
-          </a:solidFill>
-          <a:ln>
-            <a:solidFill>
-              <a:srgbClr val="1E40AF"/>
-            </a:solidFill>
-          </a:ln>
-        </p:spPr>
-        <p:style>
-          <a:lnRef idx="1">
-            <a:schemeClr val="accent1"/>
-          </a:lnRef>
-          <a:fillRef idx="3">
-            <a:schemeClr val="accent1"/>
-          </a:fillRef>
-          <a:effectRef idx="2">
-            <a:schemeClr val="accent1"/>
-          </a:effectRef>
-          <a:fontRef idx="minor">
-            <a:schemeClr val="lt1"/>
-          </a:fontRef>
-        </p:style>
-        <p:txBody>
-          <a:bodyPr rtlCol="0" anchor="ctr"/>
-          <a:lstStyle/>
-          <a:p>
-            <a:pPr algn="ctr">
-              <a:defRPr sz="1200" b="1">
-                <a:solidFill>
-                  <a:srgbClr val="1E40AF"/>
-                </a:solidFill>
-                <a:latin typeface="Cairo"/>
-              </a:defRPr>
-            </a:pPr>
-            <a:r>
-              <a:t>🛡️ المناقشة الأكاديمية — هندسة البرمجيات والتشفير المتقدم</a:t>
-            </a:r>
-          </a:p>
-        </p:txBody>
-      </p:sp>
-      <p:sp>
-        <p:nvSpPr>
-          <p:cNvPr id="5" name="TextBox 4"/>
-          <p:cNvSpPr txBox="1"/>
-          <p:nvPr/>
-        </p:nvSpPr>
-        <p:spPr>
-          <a:xfrm>
-            <a:off x="731520" y="960120"/>
-            <a:ext cx="10698480" cy="731520"/>
-          </a:xfrm>
-          <a:prstGeom prst="rect">
-            <a:avLst/>
-          </a:prstGeom>
-          <a:noFill/>
-        </p:spPr>
-        <p:txBody>
-          <a:bodyPr wrap="square">
-            <a:spAutoFit/>
-          </a:bodyPr>
-          <a:lstStyle/>
-          <a:p>
-            <a:pPr algn="ctr">
-              <a:defRPr sz="2800" b="1">
-                <a:solidFill>
-                  <a:srgbClr val="0F2B5C"/>
-                </a:solidFill>
-                <a:latin typeface="Cairo"/>
-              </a:defRPr>
-            </a:pPr>
-            <a:r>
-              <a:t>مناقشة خوارزميات التشفير في مشروع LOCAL CONTACT</a:t>
-            </a:r>
-          </a:p>
-        </p:txBody>
-      </p:sp>
-      <p:sp>
-        <p:nvSpPr>
-          <p:cNvPr id="6" name="TextBox 5"/>
-          <p:cNvSpPr txBox="1"/>
-          <p:nvPr/>
-        </p:nvSpPr>
-        <p:spPr>
-          <a:xfrm>
-            <a:off x="1371600" y="1691640"/>
-            <a:ext cx="9418320" cy="457200"/>
-          </a:xfrm>
-          <a:prstGeom prst="rect">
-            <a:avLst/>
-          </a:prstGeom>
-          <a:noFill/>
-        </p:spPr>
-        <p:txBody>
-          <a:bodyPr wrap="square">
-            <a:spAutoFit/>
-          </a:bodyPr>
-          <a:lstStyle/>
-          <a:p>
             <a:pPr algn="ctr">
               <a:defRPr sz="1300" b="1">
                 <a:solidFill>
-                  <a:srgbClr val="475569"/>
-                </a:solidFill>
-                <a:latin typeface="Cairo"/>
-              </a:defRPr>
-            </a:pPr>
-            <a:r>
-              <a:t>التصميم الأمني وهندسة خوارزميات التشفير في نظام اتصال P2P محلي مستقل يعمل دون خادم مركزي</a:t>
+                  <a:srgbClr val="0F2B5C"/>
+                </a:solidFill>
+                <a:latin typeface="Arial"/>
+              </a:defRPr>
+            </a:pPr>
+            <a:r>
+              <a:t>🔒 المسار الأكاديمي: أمن الشبكات والتشفير المتقدم (Applied Cryptography)  |  Android SDK 36  |  Kotlin 2.2  |  No Central Servers</a:t>
             </a:r>
           </a:p>
         </p:txBody>
@@ -4570,8 +4563,8 @@
         </p:nvSpPr>
         <p:spPr>
           <a:xfrm>
-            <a:off x="731520" y="2240280"/>
-            <a:ext cx="3474720" cy="868680"/>
+            <a:off x="822960" y="3703320"/>
+            <a:ext cx="10515600" cy="2240280"/>
           </a:xfrm>
           <a:prstGeom prst="roundRect">
             <a:avLst/>
@@ -4604,28 +4597,15 @@
           <a:lstStyle/>
           <a:p>
             <a:pPr algn="ctr">
-              <a:defRPr sz="1100" b="1">
-                <a:solidFill>
-                  <a:srgbClr val="1E40AF"/>
-                </a:solidFill>
-                <a:latin typeface="Consolas"/>
-              </a:defRPr>
-            </a:pPr>
-            <a:r>
-              <a:t>AES-256-GCM</a:t>
-            </a:r>
-          </a:p>
-          <a:p>
-            <a:pPr algn="ctr">
-              <a:defRPr sz="950">
-                <a:solidFill>
-                  <a:srgbClr val="0F172A"/>
-                </a:solidFill>
-                <a:latin typeface="Cairo"/>
-              </a:defRPr>
-            </a:pPr>
-            <a:r>
-              <a:t>التشفير المتماثل ومصادقة البيانات (AEAD)</a:t>
+              <a:defRPr sz="1600" b="1">
+                <a:solidFill>
+                  <a:srgbClr val="0F2B5C"/>
+                </a:solidFill>
+                <a:latin typeface="Arial"/>
+              </a:defRPr>
+            </a:pPr>
+            <a:r>
+              <a:t>إعداد الطلاب:</a:t>
             </a:r>
           </a:p>
         </p:txBody>
@@ -4638,18 +4618,18 @@
         </p:nvSpPr>
         <p:spPr>
           <a:xfrm>
-            <a:off x="4343400" y="2240280"/>
-            <a:ext cx="3474720" cy="868680"/>
+            <a:off x="1097280" y="4480560"/>
+            <a:ext cx="1874519" cy="822960"/>
           </a:xfrm>
           <a:prstGeom prst="roundRect">
             <a:avLst/>
           </a:prstGeom>
           <a:solidFill>
-            <a:srgbClr val="F8FAFC"/>
+            <a:srgbClr val="FFFFFF"/>
           </a:solidFill>
-          <a:ln w="19050">
+          <a:ln w="12700">
             <a:solidFill>
-              <a:srgbClr val="1E40AF"/>
+              <a:srgbClr val="CBD5E1"/>
             </a:solidFill>
           </a:ln>
         </p:spPr>
@@ -4668,32 +4648,19 @@
           </a:fontRef>
         </p:style>
         <p:txBody>
-          <a:bodyPr rtlCol="0" anchor="ctr" wrap="square"/>
+          <a:bodyPr rtlCol="0" anchor="ctr"/>
           <a:lstStyle/>
           <a:p>
             <a:pPr algn="ctr">
-              <a:defRPr sz="1100" b="1">
-                <a:solidFill>
-                  <a:srgbClr val="1E40AF"/>
-                </a:solidFill>
-                <a:latin typeface="Consolas"/>
-              </a:defRPr>
-            </a:pPr>
-            <a:r>
-              <a:t>ECDH (NIST P-256)</a:t>
-            </a:r>
-          </a:p>
-          <a:p>
-            <a:pPr algn="ctr">
-              <a:defRPr sz="950">
-                <a:solidFill>
-                  <a:srgbClr val="0F172A"/>
-                </a:solidFill>
-                <a:latin typeface="Cairo"/>
-              </a:defRPr>
-            </a:pPr>
-            <a:r>
-              <a:t>تبادل المفاتيح وتأمين Forward Secrecy</a:t>
+              <a:defRPr sz="1500" b="1">
+                <a:solidFill>
+                  <a:srgbClr val="0F2B5C"/>
+                </a:solidFill>
+                <a:latin typeface="Arial"/>
+              </a:defRPr>
+            </a:pPr>
+            <a:r>
+              <a:t>1. مشعل حاجب</a:t>
             </a:r>
           </a:p>
         </p:txBody>
@@ -4706,18 +4673,18 @@
         </p:nvSpPr>
         <p:spPr>
           <a:xfrm>
-            <a:off x="7955280" y="2240280"/>
-            <a:ext cx="3474720" cy="868680"/>
+            <a:off x="3154680" y="4480560"/>
+            <a:ext cx="1874519" cy="822960"/>
           </a:xfrm>
           <a:prstGeom prst="roundRect">
             <a:avLst/>
           </a:prstGeom>
           <a:solidFill>
-            <a:srgbClr val="F8FAFC"/>
+            <a:srgbClr val="FFFFFF"/>
           </a:solidFill>
-          <a:ln w="19050">
+          <a:ln w="12700">
             <a:solidFill>
-              <a:srgbClr val="1E40AF"/>
+              <a:srgbClr val="CBD5E1"/>
             </a:solidFill>
           </a:ln>
         </p:spPr>
@@ -4736,32 +4703,19 @@
           </a:fontRef>
         </p:style>
         <p:txBody>
-          <a:bodyPr rtlCol="0" anchor="ctr" wrap="square"/>
+          <a:bodyPr rtlCol="0" anchor="ctr"/>
           <a:lstStyle/>
           <a:p>
             <a:pPr algn="ctr">
-              <a:defRPr sz="1100" b="1">
-                <a:solidFill>
-                  <a:srgbClr val="1E40AF"/>
-                </a:solidFill>
-                <a:latin typeface="Consolas"/>
-              </a:defRPr>
-            </a:pPr>
-            <a:r>
-              <a:t>HKDF-SHA256</a:t>
-            </a:r>
-          </a:p>
-          <a:p>
-            <a:pPr algn="ctr">
-              <a:defRPr sz="950">
-                <a:solidFill>
-                  <a:srgbClr val="0F172A"/>
-                </a:solidFill>
-                <a:latin typeface="Cairo"/>
-              </a:defRPr>
-            </a:pPr>
-            <a:r>
-              <a:t>دالة اشتقاق مفاتيح الجلسات (RFC 5869)</a:t>
+              <a:defRPr sz="1500" b="1">
+                <a:solidFill>
+                  <a:srgbClr val="0F2B5C"/>
+                </a:solidFill>
+                <a:latin typeface="Arial"/>
+              </a:defRPr>
+            </a:pPr>
+            <a:r>
+              <a:t>2. قحطان</a:t>
             </a:r>
           </a:p>
         </p:txBody>
@@ -4774,18 +4728,18 @@
         </p:nvSpPr>
         <p:spPr>
           <a:xfrm>
-            <a:off x="731520" y="3246120"/>
-            <a:ext cx="3474720" cy="868680"/>
+            <a:off x="5212080" y="4480560"/>
+            <a:ext cx="1874519" cy="822960"/>
           </a:xfrm>
           <a:prstGeom prst="roundRect">
             <a:avLst/>
           </a:prstGeom>
           <a:solidFill>
-            <a:srgbClr val="F8FAFC"/>
+            <a:srgbClr val="FFFFFF"/>
           </a:solidFill>
-          <a:ln w="19050">
+          <a:ln w="12700">
             <a:solidFill>
-              <a:srgbClr val="1E40AF"/>
+              <a:srgbClr val="CBD5E1"/>
             </a:solidFill>
           </a:ln>
         </p:spPr>
@@ -4804,32 +4758,19 @@
           </a:fontRef>
         </p:style>
         <p:txBody>
-          <a:bodyPr rtlCol="0" anchor="ctr" wrap="square"/>
+          <a:bodyPr rtlCol="0" anchor="ctr"/>
           <a:lstStyle/>
           <a:p>
             <a:pPr algn="ctr">
-              <a:defRPr sz="1100" b="1">
-                <a:solidFill>
-                  <a:srgbClr val="1E40AF"/>
-                </a:solidFill>
-                <a:latin typeface="Consolas"/>
-              </a:defRPr>
-            </a:pPr>
-            <a:r>
-              <a:t>ECDSA + Keystore</a:t>
-            </a:r>
-          </a:p>
-          <a:p>
-            <a:pPr algn="ctr">
-              <a:defRPr sz="950">
-                <a:solidFill>
-                  <a:srgbClr val="0F172A"/>
-                </a:solidFill>
-                <a:latin typeface="Cairo"/>
-              </a:defRPr>
-            </a:pPr>
-            <a:r>
-              <a:t>التوقيع الرقمي وهوية الجهاز بالمعالج الآمن</a:t>
+              <a:defRPr sz="1500" b="1">
+                <a:solidFill>
+                  <a:srgbClr val="0F2B5C"/>
+                </a:solidFill>
+                <a:latin typeface="Arial"/>
+              </a:defRPr>
+            </a:pPr>
+            <a:r>
+              <a:t>3. محمد العيدروس</a:t>
             </a:r>
           </a:p>
         </p:txBody>
@@ -4842,18 +4783,18 @@
         </p:nvSpPr>
         <p:spPr>
           <a:xfrm>
-            <a:off x="4343400" y="3246120"/>
-            <a:ext cx="3474720" cy="868680"/>
+            <a:off x="7269480" y="4480560"/>
+            <a:ext cx="1874519" cy="822960"/>
           </a:xfrm>
           <a:prstGeom prst="roundRect">
             <a:avLst/>
           </a:prstGeom>
           <a:solidFill>
-            <a:srgbClr val="F8FAFC"/>
+            <a:srgbClr val="FFFFFF"/>
           </a:solidFill>
-          <a:ln w="19050">
+          <a:ln w="12700">
             <a:solidFill>
-              <a:srgbClr val="1E40AF"/>
+              <a:srgbClr val="CBD5E1"/>
             </a:solidFill>
           </a:ln>
         </p:spPr>
@@ -4872,32 +4813,19 @@
           </a:fontRef>
         </p:style>
         <p:txBody>
-          <a:bodyPr rtlCol="0" anchor="ctr" wrap="square"/>
+          <a:bodyPr rtlCol="0" anchor="ctr"/>
           <a:lstStyle/>
           <a:p>
             <a:pPr algn="ctr">
-              <a:defRPr sz="1100" b="1">
-                <a:solidFill>
-                  <a:srgbClr val="1E40AF"/>
-                </a:solidFill>
-                <a:latin typeface="Consolas"/>
-              </a:defRPr>
-            </a:pPr>
-            <a:r>
-              <a:t>SHA-256 Fingerprint</a:t>
-            </a:r>
-          </a:p>
-          <a:p>
-            <a:pPr algn="ctr">
-              <a:defRPr sz="950">
-                <a:solidFill>
-                  <a:srgbClr val="0F172A"/>
-                </a:solidFill>
-                <a:latin typeface="Cairo"/>
-              </a:defRPr>
-            </a:pPr>
-            <a:r>
-              <a:t>بصمات الأجهزة ونموذج الثقة (TOFU)</a:t>
+              <a:defRPr sz="1500" b="1">
+                <a:solidFill>
+                  <a:srgbClr val="0F2B5C"/>
+                </a:solidFill>
+                <a:latin typeface="Arial"/>
+              </a:defRPr>
+            </a:pPr>
+            <a:r>
+              <a:t>4. أواب النزيلي</a:t>
             </a:r>
           </a:p>
         </p:txBody>
@@ -4910,18 +4838,18 @@
         </p:nvSpPr>
         <p:spPr>
           <a:xfrm>
-            <a:off x="7955280" y="3246120"/>
-            <a:ext cx="3474720" cy="868680"/>
+            <a:off x="9326880" y="4480560"/>
+            <a:ext cx="1874519" cy="822960"/>
           </a:xfrm>
           <a:prstGeom prst="roundRect">
             <a:avLst/>
           </a:prstGeom>
           <a:solidFill>
-            <a:srgbClr val="F8FAFC"/>
+            <a:srgbClr val="FFFFFF"/>
           </a:solidFill>
-          <a:ln w="19050">
+          <a:ln w="12700">
             <a:solidFill>
-              <a:srgbClr val="1E40AF"/>
+              <a:srgbClr val="CBD5E1"/>
             </a:solidFill>
           </a:ln>
         </p:spPr>
@@ -4940,376 +4868,33 @@
           </a:fontRef>
         </p:style>
         <p:txBody>
-          <a:bodyPr rtlCol="0" anchor="ctr" wrap="square"/>
+          <a:bodyPr rtlCol="0" anchor="ctr"/>
           <a:lstStyle/>
           <a:p>
             <a:pPr algn="ctr">
-              <a:defRPr sz="1100" b="1">
-                <a:solidFill>
-                  <a:srgbClr val="1E40AF"/>
-                </a:solidFill>
-                <a:latin typeface="Consolas"/>
-              </a:defRPr>
-            </a:pPr>
-            <a:r>
-              <a:t>PBKDF2-HMAC-SHA256</a:t>
-            </a:r>
-          </a:p>
-          <a:p>
-            <a:pPr algn="ctr">
-              <a:defRPr sz="950">
-                <a:solidFill>
-                  <a:srgbClr val="0F172A"/>
-                </a:solidFill>
-                <a:latin typeface="Cairo"/>
-              </a:defRPr>
-            </a:pPr>
-            <a:r>
-              <a:t>المفتاح الشبكي الموحد للتوافق العكسي</a:t>
-            </a:r>
-          </a:p>
-        </p:txBody>
-      </p:sp>
-      <p:sp>
-        <p:nvSpPr>
-          <p:cNvPr id="13" name="Rounded Rectangle 12"/>
-          <p:cNvSpPr/>
-          <p:nvPr/>
-        </p:nvSpPr>
-        <p:spPr>
-          <a:xfrm>
-            <a:off x="731520" y="4343400"/>
-            <a:ext cx="10698480" cy="1188720"/>
-          </a:xfrm>
-          <a:prstGeom prst="roundRect">
-            <a:avLst/>
-          </a:prstGeom>
-          <a:solidFill>
-            <a:srgbClr val="EFF6FF"/>
-          </a:solidFill>
-          <a:ln w="19050">
-            <a:solidFill>
-              <a:srgbClr val="1E40AF"/>
-            </a:solidFill>
-          </a:ln>
-        </p:spPr>
-        <p:style>
-          <a:lnRef idx="1">
-            <a:schemeClr val="accent1"/>
-          </a:lnRef>
-          <a:fillRef idx="3">
-            <a:schemeClr val="accent1"/>
-          </a:fillRef>
-          <a:effectRef idx="2">
-            <a:schemeClr val="accent1"/>
-          </a:effectRef>
-          <a:fontRef idx="minor">
-            <a:schemeClr val="lt1"/>
-          </a:fontRef>
-        </p:style>
-        <p:txBody>
-          <a:bodyPr rtlCol="0" anchor="ctr"/>
-          <a:lstStyle/>
-          <a:p>
-            <a:pPr algn="ctr">
-              <a:defRPr sz="1200" b="1">
+              <a:defRPr sz="1500" b="1">
                 <a:solidFill>
                   <a:srgbClr val="0F2B5C"/>
                 </a:solidFill>
-                <a:latin typeface="Cairo"/>
-              </a:defRPr>
-            </a:pPr>
-            <a:r>
-              <a:t>👥 الطلاب المنفذون للمشروع:</a:t>
-            </a:r>
-          </a:p>
-        </p:txBody>
-      </p:sp>
-      <p:sp>
-        <p:nvSpPr>
-          <p:cNvPr id="14" name="Rounded Rectangle 13"/>
-          <p:cNvSpPr/>
-          <p:nvPr/>
-        </p:nvSpPr>
-        <p:spPr>
-          <a:xfrm>
-            <a:off x="1005840" y="4892040"/>
-            <a:ext cx="1920240" cy="457200"/>
-          </a:xfrm>
-          <a:prstGeom prst="roundRect">
-            <a:avLst/>
-          </a:prstGeom>
-          <a:solidFill>
-            <a:srgbClr val="FFFFFF"/>
-          </a:solidFill>
-          <a:ln w="15240">
-            <a:solidFill>
-              <a:srgbClr val="0284C7"/>
-            </a:solidFill>
-          </a:ln>
-        </p:spPr>
-        <p:style>
-          <a:lnRef idx="1">
-            <a:schemeClr val="accent1"/>
-          </a:lnRef>
-          <a:fillRef idx="3">
-            <a:schemeClr val="accent1"/>
-          </a:fillRef>
-          <a:effectRef idx="2">
-            <a:schemeClr val="accent1"/>
-          </a:effectRef>
-          <a:fontRef idx="minor">
-            <a:schemeClr val="lt1"/>
-          </a:fontRef>
-        </p:style>
-        <p:txBody>
-          <a:bodyPr rtlCol="0" anchor="ctr"/>
-          <a:lstStyle/>
-          <a:p>
-            <a:pPr algn="ctr">
-              <a:defRPr sz="1100" b="1">
-                <a:solidFill>
-                  <a:srgbClr val="1E40AF"/>
-                </a:solidFill>
-                <a:latin typeface="Cairo"/>
-              </a:defRPr>
-            </a:pPr>
-            <a:r>
-              <a:t>🎓 مشعل حاجب</a:t>
-            </a:r>
-          </a:p>
-        </p:txBody>
-      </p:sp>
-      <p:sp>
-        <p:nvSpPr>
-          <p:cNvPr id="15" name="Rounded Rectangle 14"/>
-          <p:cNvSpPr/>
-          <p:nvPr/>
-        </p:nvSpPr>
-        <p:spPr>
-          <a:xfrm>
-            <a:off x="3063240" y="4892040"/>
-            <a:ext cx="1920240" cy="457200"/>
-          </a:xfrm>
-          <a:prstGeom prst="roundRect">
-            <a:avLst/>
-          </a:prstGeom>
-          <a:solidFill>
-            <a:srgbClr val="FFFFFF"/>
-          </a:solidFill>
-          <a:ln w="15240">
-            <a:solidFill>
-              <a:srgbClr val="0284C7"/>
-            </a:solidFill>
-          </a:ln>
-        </p:spPr>
-        <p:style>
-          <a:lnRef idx="1">
-            <a:schemeClr val="accent1"/>
-          </a:lnRef>
-          <a:fillRef idx="3">
-            <a:schemeClr val="accent1"/>
-          </a:fillRef>
-          <a:effectRef idx="2">
-            <a:schemeClr val="accent1"/>
-          </a:effectRef>
-          <a:fontRef idx="minor">
-            <a:schemeClr val="lt1"/>
-          </a:fontRef>
-        </p:style>
-        <p:txBody>
-          <a:bodyPr rtlCol="0" anchor="ctr"/>
-          <a:lstStyle/>
-          <a:p>
-            <a:pPr algn="ctr">
-              <a:defRPr sz="1100" b="1">
-                <a:solidFill>
-                  <a:srgbClr val="1E40AF"/>
-                </a:solidFill>
-                <a:latin typeface="Cairo"/>
-              </a:defRPr>
-            </a:pPr>
-            <a:r>
-              <a:t>🎓 قحطان الشاجع</a:t>
-            </a:r>
-          </a:p>
-        </p:txBody>
-      </p:sp>
-      <p:sp>
-        <p:nvSpPr>
-          <p:cNvPr id="16" name="Rounded Rectangle 15"/>
-          <p:cNvSpPr/>
-          <p:nvPr/>
-        </p:nvSpPr>
-        <p:spPr>
-          <a:xfrm>
-            <a:off x="5120640" y="4892040"/>
-            <a:ext cx="1920240" cy="457200"/>
-          </a:xfrm>
-          <a:prstGeom prst="roundRect">
-            <a:avLst/>
-          </a:prstGeom>
-          <a:solidFill>
-            <a:srgbClr val="FFFFFF"/>
-          </a:solidFill>
-          <a:ln w="15240">
-            <a:solidFill>
-              <a:srgbClr val="0284C7"/>
-            </a:solidFill>
-          </a:ln>
-        </p:spPr>
-        <p:style>
-          <a:lnRef idx="1">
-            <a:schemeClr val="accent1"/>
-          </a:lnRef>
-          <a:fillRef idx="3">
-            <a:schemeClr val="accent1"/>
-          </a:fillRef>
-          <a:effectRef idx="2">
-            <a:schemeClr val="accent1"/>
-          </a:effectRef>
-          <a:fontRef idx="minor">
-            <a:schemeClr val="lt1"/>
-          </a:fontRef>
-        </p:style>
-        <p:txBody>
-          <a:bodyPr rtlCol="0" anchor="ctr"/>
-          <a:lstStyle/>
-          <a:p>
-            <a:pPr algn="ctr">
-              <a:defRPr sz="1100" b="1">
-                <a:solidFill>
-                  <a:srgbClr val="1E40AF"/>
-                </a:solidFill>
-                <a:latin typeface="Cairo"/>
-              </a:defRPr>
-            </a:pPr>
-            <a:r>
-              <a:t>🎓 أواب النزيلي</a:t>
-            </a:r>
-          </a:p>
-        </p:txBody>
-      </p:sp>
-      <p:sp>
-        <p:nvSpPr>
-          <p:cNvPr id="17" name="Rounded Rectangle 16"/>
-          <p:cNvSpPr/>
-          <p:nvPr/>
-        </p:nvSpPr>
-        <p:spPr>
-          <a:xfrm>
-            <a:off x="7178040" y="4892040"/>
-            <a:ext cx="1920240" cy="457200"/>
-          </a:xfrm>
-          <a:prstGeom prst="roundRect">
-            <a:avLst/>
-          </a:prstGeom>
-          <a:solidFill>
-            <a:srgbClr val="FFFFFF"/>
-          </a:solidFill>
-          <a:ln w="15240">
-            <a:solidFill>
-              <a:srgbClr val="0284C7"/>
-            </a:solidFill>
-          </a:ln>
-        </p:spPr>
-        <p:style>
-          <a:lnRef idx="1">
-            <a:schemeClr val="accent1"/>
-          </a:lnRef>
-          <a:fillRef idx="3">
-            <a:schemeClr val="accent1"/>
-          </a:fillRef>
-          <a:effectRef idx="2">
-            <a:schemeClr val="accent1"/>
-          </a:effectRef>
-          <a:fontRef idx="minor">
-            <a:schemeClr val="lt1"/>
-          </a:fontRef>
-        </p:style>
-        <p:txBody>
-          <a:bodyPr rtlCol="0" anchor="ctr"/>
-          <a:lstStyle/>
-          <a:p>
-            <a:pPr algn="ctr">
-              <a:defRPr sz="1100" b="1">
-                <a:solidFill>
-                  <a:srgbClr val="1E40AF"/>
-                </a:solidFill>
-                <a:latin typeface="Cairo"/>
-              </a:defRPr>
-            </a:pPr>
-            <a:r>
-              <a:t>🎓 محمد العيدروس</a:t>
-            </a:r>
-          </a:p>
-        </p:txBody>
-      </p:sp>
-      <p:sp>
-        <p:nvSpPr>
-          <p:cNvPr id="18" name="Rounded Rectangle 17"/>
-          <p:cNvSpPr/>
-          <p:nvPr/>
-        </p:nvSpPr>
-        <p:spPr>
-          <a:xfrm>
-            <a:off x="9235440" y="4892040"/>
-            <a:ext cx="1920240" cy="457200"/>
-          </a:xfrm>
-          <a:prstGeom prst="roundRect">
-            <a:avLst/>
-          </a:prstGeom>
-          <a:solidFill>
-            <a:srgbClr val="FFFFFF"/>
-          </a:solidFill>
-          <a:ln w="15240">
-            <a:solidFill>
-              <a:srgbClr val="0284C7"/>
-            </a:solidFill>
-          </a:ln>
-        </p:spPr>
-        <p:style>
-          <a:lnRef idx="1">
-            <a:schemeClr val="accent1"/>
-          </a:lnRef>
-          <a:fillRef idx="3">
-            <a:schemeClr val="accent1"/>
-          </a:fillRef>
-          <a:effectRef idx="2">
-            <a:schemeClr val="accent1"/>
-          </a:effectRef>
-          <a:fontRef idx="minor">
-            <a:schemeClr val="lt1"/>
-          </a:fontRef>
-        </p:style>
-        <p:txBody>
-          <a:bodyPr rtlCol="0" anchor="ctr"/>
-          <a:lstStyle/>
-          <a:p>
-            <a:pPr algn="ctr">
-              <a:defRPr sz="1100" b="1">
-                <a:solidFill>
-                  <a:srgbClr val="1E40AF"/>
-                </a:solidFill>
-                <a:latin typeface="Cairo"/>
-              </a:defRPr>
-            </a:pPr>
-            <a:r>
-              <a:t>🎓 محمد العواضي</a:t>
-            </a:r>
-          </a:p>
-        </p:txBody>
-      </p:sp>
-      <p:sp>
-        <p:nvSpPr>
-          <p:cNvPr id="19" name="TextBox 18"/>
+                <a:latin typeface="Arial"/>
+              </a:defRPr>
+            </a:pPr>
+            <a:r>
+              <a:t>5. محمد العواضي</a:t>
+            </a:r>
+          </a:p>
+        </p:txBody>
+      </p:sp>
+      <p:sp>
+        <p:nvSpPr>
+          <p:cNvPr id="13" name="TextBox 12"/>
           <p:cNvSpPr txBox="1"/>
           <p:nvPr/>
         </p:nvSpPr>
         <p:spPr>
           <a:xfrm>
-            <a:off x="731520" y="5852160"/>
-            <a:ext cx="10698480" cy="548640"/>
+            <a:off x="822960" y="5577840"/>
+            <a:ext cx="10515600" cy="320040"/>
           </a:xfrm>
           <a:prstGeom prst="rect">
             <a:avLst/>
@@ -5323,15 +4908,15 @@
           <a:lstStyle/>
           <a:p>
             <a:pPr algn="ctr">
-              <a:defRPr sz="1100" b="1">
+              <a:defRPr sz="1200">
                 <a:solidFill>
                   <a:srgbClr val="475569"/>
                 </a:solidFill>
-                <a:latin typeface="Cairo"/>
-              </a:defRPr>
-            </a:pPr>
-            <a:r>
-              <a:t>لجنة المناقشة: أستاذ التشفير &amp; أستاذ هندسة البرمجيات  |  الحالة: BUILD SUCCESSFUL  |  الاختبارات: 33 / 33 ناجح على JVM</a:t>
+                <a:latin typeface="Arial"/>
+              </a:defRPr>
+            </a:pPr>
+            <a:r>
+              <a:t>المناقشة الأكاديمية الرسمية  •  نسخة العرض المحكمة (Projector Edition)  •  12 شريحة</a:t>
             </a:r>
           </a:p>
         </p:txBody>
@@ -5363,7 +4948,7 @@
         <p:spPr>
           <a:xfrm>
             <a:off x="0" y="0"/>
-            <a:ext cx="12191695" cy="109728"/>
+            <a:ext cx="12191695" cy="91440"/>
           </a:xfrm>
           <a:prstGeom prst="rect">
             <a:avLst/>
@@ -5405,8 +4990,8 @@
         </p:nvSpPr>
         <p:spPr>
           <a:xfrm>
-            <a:off x="731520" y="228600"/>
-            <a:ext cx="7772400" cy="365760"/>
+            <a:off x="822960" y="228600"/>
+            <a:ext cx="7772400" cy="320040"/>
           </a:xfrm>
           <a:prstGeom prst="rect">
             <a:avLst/>
@@ -5420,38 +5005,112 @@
           <a:lstStyle/>
           <a:p>
             <a:pPr>
-              <a:defRPr sz="1100" b="1">
-                <a:solidFill>
-                  <a:srgbClr val="0284C7"/>
-                </a:solidFill>
-                <a:latin typeface="Cairo"/>
-              </a:defRPr>
-            </a:pPr>
-            <a:r>
-              <a:t>• الشفافية الهندسية والواقع العملي | مشروع LOCAL CONTACT P2P</a:t>
-            </a:r>
-          </a:p>
-        </p:txBody>
-      </p:sp>
-      <p:sp>
-        <p:nvSpPr>
-          <p:cNvPr id="4" name="Rounded Rectangle 3"/>
+              <a:defRPr sz="1300" b="1">
+                <a:solidFill>
+                  <a:srgbClr val="1E40AF"/>
+                </a:solidFill>
+                <a:latin typeface="Arial"/>
+              </a:defRPr>
+            </a:pPr>
+            <a:r>
+              <a:t>LOCAL CONTACT P2P  |  تحصين الوسائط والملفات</a:t>
+            </a:r>
+          </a:p>
+        </p:txBody>
+      </p:sp>
+      <p:sp>
+        <p:nvSpPr>
+          <p:cNvPr id="4" name="TextBox 3"/>
+          <p:cNvSpPr txBox="1"/>
+          <p:nvPr/>
+        </p:nvSpPr>
+        <p:spPr>
+          <a:xfrm>
+            <a:off x="10241280" y="6309360"/>
+            <a:ext cx="1188720" cy="365760"/>
+          </a:xfrm>
+          <a:prstGeom prst="rect">
+            <a:avLst/>
+          </a:prstGeom>
+          <a:noFill/>
+        </p:spPr>
+        <p:txBody>
+          <a:bodyPr wrap="none">
+            <a:spAutoFit/>
+          </a:bodyPr>
+          <a:lstStyle/>
+          <a:p>
+            <a:pPr algn="r">
+              <a:defRPr sz="1400" b="1">
+                <a:solidFill>
+                  <a:srgbClr val="0F2B5C"/>
+                </a:solidFill>
+                <a:latin typeface="Arial"/>
+              </a:defRPr>
+            </a:pPr>
+            <a:r>
+              <a:t>10 / 12</a:t>
+            </a:r>
+          </a:p>
+        </p:txBody>
+      </p:sp>
+      <p:sp>
+        <p:nvSpPr>
+          <p:cNvPr id="5" name="TextBox 4"/>
+          <p:cNvSpPr txBox="1"/>
+          <p:nvPr/>
+        </p:nvSpPr>
+        <p:spPr>
+          <a:xfrm>
+            <a:off x="822960" y="594360"/>
+            <a:ext cx="8961120" cy="685800"/>
+          </a:xfrm>
+          <a:prstGeom prst="rect">
+            <a:avLst/>
+          </a:prstGeom>
+          <a:noFill/>
+        </p:spPr>
+        <p:txBody>
+          <a:bodyPr wrap="square">
+            <a:spAutoFit/>
+          </a:bodyPr>
+          <a:lstStyle/>
+          <a:p>
+            <a:pPr>
+              <a:defRPr sz="2800" b="1">
+                <a:solidFill>
+                  <a:srgbClr val="0F2B5C"/>
+                </a:solidFill>
+                <a:latin typeface="Arial"/>
+              </a:defRPr>
+            </a:pPr>
+            <a:r>
+              <a:t>تأمين نقل الملفات وتدفق الصوت والفيديو (Media Security)</a:t>
+            </a:r>
+          </a:p>
+        </p:txBody>
+      </p:sp>
+      <p:sp>
+        <p:nvSpPr>
+          <p:cNvPr id="6" name="Rounded Rectangle 5"/>
           <p:cNvSpPr/>
           <p:nvPr/>
         </p:nvSpPr>
         <p:spPr>
           <a:xfrm>
-            <a:off x="10515600" y="228600"/>
-            <a:ext cx="914400" cy="320040"/>
+            <a:off x="8961120" y="621792"/>
+            <a:ext cx="2377440" cy="438912"/>
           </a:xfrm>
           <a:prstGeom prst="roundRect">
             <a:avLst/>
           </a:prstGeom>
           <a:solidFill>
-            <a:srgbClr val="0F2B5C"/>
+            <a:srgbClr val="F8FAFC"/>
           </a:solidFill>
-          <a:ln>
-            <a:noFill/>
+          <a:ln w="19050">
+            <a:solidFill>
+              <a:srgbClr val="1E40AF"/>
+            </a:solidFill>
           </a:ln>
         </p:spPr>
         <p:style>
@@ -5473,154 +5132,29 @@
           <a:lstStyle/>
           <a:p>
             <a:pPr algn="ctr">
-              <a:defRPr sz="1100" b="1">
-                <a:solidFill>
-                  <a:srgbClr val="FFFFFF"/>
+              <a:defRPr sz="1200" b="1">
+                <a:solidFill>
+                  <a:srgbClr val="1E40AF"/>
                 </a:solidFill>
                 <a:latin typeface="Consolas"/>
               </a:defRPr>
             </a:pPr>
             <a:r>
-              <a:t>10 / 12</a:t>
-            </a:r>
-          </a:p>
-        </p:txBody>
-      </p:sp>
-      <p:sp>
-        <p:nvSpPr>
-          <p:cNvPr id="5" name="TextBox 4"/>
-          <p:cNvSpPr txBox="1"/>
-          <p:nvPr/>
-        </p:nvSpPr>
-        <p:spPr>
-          <a:xfrm>
-            <a:off x="731520" y="594360"/>
-            <a:ext cx="8686800" cy="548640"/>
-          </a:xfrm>
-          <a:prstGeom prst="rect">
-            <a:avLst/>
-          </a:prstGeom>
-          <a:noFill/>
-        </p:spPr>
-        <p:txBody>
-          <a:bodyPr wrap="square">
-            <a:spAutoFit/>
-          </a:bodyPr>
-          <a:lstStyle/>
-          <a:p>
-            <a:pPr>
-              <a:defRPr sz="2000" b="1">
-                <a:solidFill>
-                  <a:srgbClr val="0F2B5C"/>
-                </a:solidFill>
-                <a:latin typeface="Cairo"/>
-              </a:defRPr>
-            </a:pPr>
-            <a:r>
-              <a:t>نطاق المفاتيح الفعلي في التطبيق (Key Scope)</a:t>
-            </a:r>
-          </a:p>
-        </p:txBody>
-      </p:sp>
-      <p:sp>
-        <p:nvSpPr>
-          <p:cNvPr id="6" name="TextBox 5"/>
-          <p:cNvSpPr txBox="1"/>
-          <p:nvPr/>
-        </p:nvSpPr>
-        <p:spPr>
-          <a:xfrm>
-            <a:off x="731520" y="1078992"/>
-            <a:ext cx="8686800" cy="365760"/>
-          </a:xfrm>
-          <a:prstGeom prst="rect">
-            <a:avLst/>
-          </a:prstGeom>
-          <a:noFill/>
-        </p:spPr>
-        <p:txBody>
-          <a:bodyPr wrap="square">
-            <a:spAutoFit/>
-          </a:bodyPr>
-          <a:lstStyle/>
-          <a:p>
-            <a:pPr>
-              <a:defRPr sz="1150">
-                <a:solidFill>
-                  <a:srgbClr val="475569"/>
-                </a:solidFill>
-                <a:latin typeface="Cairo"/>
-              </a:defRPr>
-            </a:pPr>
-            <a:r>
-              <a:t>توضيح دقيق للمسارات التي تم ترقيتها لمفاتيح الجلسات والمسارات المحتفظة بالمفتاح الشبكي</a:t>
-            </a:r>
-          </a:p>
-        </p:txBody>
-      </p:sp>
-      <p:sp>
-        <p:nvSpPr>
-          <p:cNvPr id="7" name="Rounded Rectangle 6"/>
+              <a:t>MEDIA &amp; STREAMING</a:t>
+            </a:r>
+          </a:p>
+        </p:txBody>
+      </p:sp>
+      <p:sp>
+        <p:nvSpPr>
+          <p:cNvPr id="7" name="Rectangle 6"/>
           <p:cNvSpPr/>
           <p:nvPr/>
         </p:nvSpPr>
         <p:spPr>
           <a:xfrm>
-            <a:off x="9144000" y="685800"/>
-            <a:ext cx="2286000" cy="347472"/>
-          </a:xfrm>
-          <a:prstGeom prst="roundRect">
-            <a:avLst/>
-          </a:prstGeom>
-          <a:solidFill>
-            <a:srgbClr val="D97706"/>
-          </a:solidFill>
-          <a:ln>
-            <a:noFill/>
-          </a:ln>
-        </p:spPr>
-        <p:style>
-          <a:lnRef idx="1">
-            <a:schemeClr val="accent1"/>
-          </a:lnRef>
-          <a:fillRef idx="3">
-            <a:schemeClr val="accent1"/>
-          </a:fillRef>
-          <a:effectRef idx="2">
-            <a:schemeClr val="accent1"/>
-          </a:effectRef>
-          <a:fontRef idx="minor">
-            <a:schemeClr val="lt1"/>
-          </a:fontRef>
-        </p:style>
-        <p:txBody>
-          <a:bodyPr rtlCol="0" anchor="ctr"/>
-          <a:lstStyle/>
-          <a:p>
-            <a:pPr algn="ctr">
-              <a:defRPr sz="1000" b="1">
-                <a:solidFill>
-                  <a:srgbClr val="FFFFFF"/>
-                </a:solidFill>
-                <a:latin typeface="Consolas"/>
-              </a:defRPr>
-            </a:pPr>
-            <a:r>
-              <a:t>PARTIAL SCOPE</a:t>
-            </a:r>
-          </a:p>
-        </p:txBody>
-      </p:sp>
-      <p:sp>
-        <p:nvSpPr>
-          <p:cNvPr id="8" name="Rectangle 7"/>
-          <p:cNvSpPr/>
-          <p:nvPr/>
-        </p:nvSpPr>
-        <p:spPr>
-          <a:xfrm>
-            <a:off x="731520" y="1463040"/>
-            <a:ext cx="10725912" cy="18288"/>
+            <a:off x="822960" y="1353312"/>
+            <a:ext cx="10515600" cy="18288"/>
           </a:xfrm>
           <a:prstGeom prst="rect">
             <a:avLst/>
@@ -5654,632 +5188,16 @@
           </a:p>
         </p:txBody>
       </p:sp>
-      <p:graphicFrame>
-        <p:nvGraphicFramePr>
-          <p:cNvPr id="9" name="Table 8"/>
-          <p:cNvGraphicFramePr>
-            <a:graphicFrameLocks noGrp="1"/>
-          </p:cNvGraphicFramePr>
-          <p:nvPr/>
-        </p:nvGraphicFramePr>
-        <p:xfrm>
-          <a:off x="731520" y="1645920"/>
-          <a:ext cx="10725912" cy="3840480"/>
-        </p:xfrm>
-        <a:graphic>
-          <a:graphicData uri="http://schemas.openxmlformats.org/drawingml/2006/table">
-            <a:tbl>
-              <a:tblPr firstRow="1" bandRow="1">
-                <a:tableStyleId>{5C22544A-7EE6-4342-B048-85BDC9FD1C3A}</a:tableStyleId>
-              </a:tblPr>
-              <a:tblGrid>
-                <a:gridCol w="2743200"/>
-                <a:gridCol w="2926080"/>
-                <a:gridCol w="2103120"/>
-                <a:gridCol w="2953512"/>
-              </a:tblGrid>
-              <a:tr h="640080">
-                <a:tc>
-                  <a:txBody>
-                    <a:bodyPr/>
-                    <a:lstStyle/>
-                    <a:p>
-                      <a:pPr algn="ctr">
-                        <a:defRPr sz="1100" b="1">
-                          <a:solidFill>
-                            <a:srgbClr val="FFFFFF"/>
-                          </a:solidFill>
-                          <a:latin typeface="Cairo"/>
-                        </a:defRPr>
-                      </a:pPr>
-                      <a:r>
-                        <a:t>نوع البيانات / المسار</a:t>
-                      </a:r>
-                    </a:p>
-                  </a:txBody>
-                  <a:tcPr>
-                    <a:solidFill>
-                      <a:srgbClr val="0F2B5C"/>
-                    </a:solidFill>
-                  </a:tcPr>
-                </a:tc>
-                <a:tc>
-                  <a:txBody>
-                    <a:bodyPr/>
-                    <a:lstStyle/>
-                    <a:p>
-                      <a:pPr algn="ctr">
-                        <a:defRPr sz="1100" b="1">
-                          <a:solidFill>
-                            <a:srgbClr val="FFFFFF"/>
-                          </a:solidFill>
-                          <a:latin typeface="Cairo"/>
-                        </a:defRPr>
-                      </a:pPr>
-                      <a:r>
-                        <a:t>المفتاح المستخدم حالياً</a:t>
-                      </a:r>
-                    </a:p>
-                  </a:txBody>
-                  <a:tcPr>
-                    <a:solidFill>
-                      <a:srgbClr val="0F2B5C"/>
-                    </a:solidFill>
-                  </a:tcPr>
-                </a:tc>
-                <a:tc>
-                  <a:txBody>
-                    <a:bodyPr/>
-                    <a:lstStyle/>
-                    <a:p>
-                      <a:pPr algn="ctr">
-                        <a:defRPr sz="1100" b="1">
-                          <a:solidFill>
-                            <a:srgbClr val="FFFFFF"/>
-                          </a:solidFill>
-                          <a:latin typeface="Cairo"/>
-                        </a:defRPr>
-                      </a:pPr>
-                      <a:r>
-                        <a:t>المنفذ والبروتوكول</a:t>
-                      </a:r>
-                    </a:p>
-                  </a:txBody>
-                  <a:tcPr>
-                    <a:solidFill>
-                      <a:srgbClr val="0F2B5C"/>
-                    </a:solidFill>
-                  </a:tcPr>
-                </a:tc>
-                <a:tc>
-                  <a:txBody>
-                    <a:bodyPr/>
-                    <a:lstStyle/>
-                    <a:p>
-                      <a:pPr algn="ctr">
-                        <a:defRPr sz="1100" b="1">
-                          <a:solidFill>
-                            <a:srgbClr val="FFFFFF"/>
-                          </a:solidFill>
-                          <a:latin typeface="Cairo"/>
-                        </a:defRPr>
-                      </a:pPr>
-                      <a:r>
-                        <a:t>الحالة المعمارية والأمنية</a:t>
-                      </a:r>
-                    </a:p>
-                  </a:txBody>
-                  <a:tcPr>
-                    <a:solidFill>
-                      <a:srgbClr val="0F2B5C"/>
-                    </a:solidFill>
-                  </a:tcPr>
-                </a:tc>
-              </a:tr>
-              <a:tr h="640080">
-                <a:tc>
-                  <a:txBody>
-                    <a:bodyPr/>
-                    <a:lstStyle/>
-                    <a:p>
-                      <a:pPr algn="ctr">
-                        <a:defRPr sz="1000">
-                          <a:solidFill>
-                            <a:srgbClr val="0F172A"/>
-                          </a:solidFill>
-                          <a:latin typeface="Cairo"/>
-                        </a:defRPr>
-                      </a:pPr>
-                      <a:r>
-                        <a:t>الدردشة المباشرة (Direct Chat)</a:t>
-                      </a:r>
-                    </a:p>
-                  </a:txBody>
-                  <a:tcPr>
-                    <a:solidFill>
-                      <a:srgbClr val="F8FAFC"/>
-                    </a:solidFill>
-                  </a:tcPr>
-                </a:tc>
-                <a:tc>
-                  <a:txBody>
-                    <a:bodyPr/>
-                    <a:lstStyle/>
-                    <a:p>
-                      <a:pPr algn="ctr">
-                        <a:defRPr sz="1000">
-                          <a:solidFill>
-                            <a:srgbClr val="0F172A"/>
-                          </a:solidFill>
-                          <a:latin typeface="Consolas"/>
-                        </a:defRPr>
-                      </a:pPr>
-                      <a:r>
-                        <a:t>sessionKey (ديناميكي)</a:t>
-                      </a:r>
-                    </a:p>
-                  </a:txBody>
-                  <a:tcPr>
-                    <a:solidFill>
-                      <a:srgbClr val="F8FAFC"/>
-                    </a:solidFill>
-                  </a:tcPr>
-                </a:tc>
-                <a:tc>
-                  <a:txBody>
-                    <a:bodyPr/>
-                    <a:lstStyle/>
-                    <a:p>
-                      <a:pPr algn="ctr">
-                        <a:defRPr sz="1000">
-                          <a:solidFill>
-                            <a:srgbClr val="0F172A"/>
-                          </a:solidFill>
-                          <a:latin typeface="Cairo"/>
-                        </a:defRPr>
-                      </a:pPr>
-                      <a:r>
-                        <a:t>8888 (UDP Unicast)</a:t>
-                      </a:r>
-                    </a:p>
-                  </a:txBody>
-                  <a:tcPr>
-                    <a:solidFill>
-                      <a:srgbClr val="F8FAFC"/>
-                    </a:solidFill>
-                  </a:tcPr>
-                </a:tc>
-                <a:tc>
-                  <a:txBody>
-                    <a:bodyPr/>
-                    <a:lstStyle/>
-                    <a:p>
-                      <a:pPr algn="ctr">
-                        <a:defRPr sz="1000">
-                          <a:solidFill>
-                            <a:srgbClr val="0F172A"/>
-                          </a:solidFill>
-                          <a:latin typeface="Cairo"/>
-                        </a:defRPr>
-                      </a:pPr>
-                      <a:r>
-                        <a:t>محمي بجلسة ECDH ديناميكية لكل قرين</a:t>
-                      </a:r>
-                    </a:p>
-                  </a:txBody>
-                  <a:tcPr>
-                    <a:solidFill>
-                      <a:srgbClr val="F8FAFC"/>
-                    </a:solidFill>
-                  </a:tcPr>
-                </a:tc>
-              </a:tr>
-              <a:tr h="640080">
-                <a:tc>
-                  <a:txBody>
-                    <a:bodyPr/>
-                    <a:lstStyle/>
-                    <a:p>
-                      <a:pPr algn="ctr">
-                        <a:defRPr sz="1000">
-                          <a:solidFill>
-                            <a:srgbClr val="0F172A"/>
-                          </a:solidFill>
-                          <a:latin typeface="Cairo"/>
-                        </a:defRPr>
-                      </a:pPr>
-                      <a:r>
-                        <a:t>استكشاف الأجهزة (Discovery)</a:t>
-                      </a:r>
-                    </a:p>
-                  </a:txBody>
-                  <a:tcPr>
-                    <a:solidFill>
-                      <a:srgbClr val="FFFFFF"/>
-                    </a:solidFill>
-                  </a:tcPr>
-                </a:tc>
-                <a:tc>
-                  <a:txBody>
-                    <a:bodyPr/>
-                    <a:lstStyle/>
-                    <a:p>
-                      <a:pPr algn="ctr">
-                        <a:defRPr sz="1000">
-                          <a:solidFill>
-                            <a:srgbClr val="0F172A"/>
-                          </a:solidFill>
-                          <a:latin typeface="Consolas"/>
-                        </a:defRPr>
-                      </a:pPr>
-                      <a:r>
-                        <a:t>networkKey (مشترك)</a:t>
-                      </a:r>
-                    </a:p>
-                  </a:txBody>
-                  <a:tcPr>
-                    <a:solidFill>
-                      <a:srgbClr val="FFFFFF"/>
-                    </a:solidFill>
-                  </a:tcPr>
-                </a:tc>
-                <a:tc>
-                  <a:txBody>
-                    <a:bodyPr/>
-                    <a:lstStyle/>
-                    <a:p>
-                      <a:pPr algn="ctr">
-                        <a:defRPr sz="1000">
-                          <a:solidFill>
-                            <a:srgbClr val="0F172A"/>
-                          </a:solidFill>
-                          <a:latin typeface="Cairo"/>
-                        </a:defRPr>
-                      </a:pPr>
-                      <a:r>
-                        <a:t>8888 (UDP Broadcast)</a:t>
-                      </a:r>
-                    </a:p>
-                  </a:txBody>
-                  <a:tcPr>
-                    <a:solidFill>
-                      <a:srgbClr val="FFFFFF"/>
-                    </a:solidFill>
-                  </a:tcPr>
-                </a:tc>
-                <a:tc>
-                  <a:txBody>
-                    <a:bodyPr/>
-                    <a:lstStyle/>
-                    <a:p>
-                      <a:pPr algn="ctr">
-                        <a:defRPr sz="1000">
-                          <a:solidFill>
-                            <a:srgbClr val="0F172A"/>
-                          </a:solidFill>
-                          <a:latin typeface="Cairo"/>
-                        </a:defRPr>
-                      </a:pPr>
-                      <a:r>
-                        <a:t>طبيعي (مطلوب عاماً للاكتشاف الأولي)</a:t>
-                      </a:r>
-                    </a:p>
-                  </a:txBody>
-                  <a:tcPr>
-                    <a:solidFill>
-                      <a:srgbClr val="FFFFFF"/>
-                    </a:solidFill>
-                  </a:tcPr>
-                </a:tc>
-              </a:tr>
-              <a:tr h="640080">
-                <a:tc>
-                  <a:txBody>
-                    <a:bodyPr/>
-                    <a:lstStyle/>
-                    <a:p>
-                      <a:pPr algn="ctr">
-                        <a:defRPr sz="1000">
-                          <a:solidFill>
-                            <a:srgbClr val="0F172A"/>
-                          </a:solidFill>
-                          <a:latin typeface="Cairo"/>
-                        </a:defRPr>
-                      </a:pPr>
-                      <a:r>
-                        <a:t>غرف الدردشة الجماعية (Rooms)</a:t>
-                      </a:r>
-                    </a:p>
-                  </a:txBody>
-                  <a:tcPr>
-                    <a:solidFill>
-                      <a:srgbClr val="F8FAFC"/>
-                    </a:solidFill>
-                  </a:tcPr>
-                </a:tc>
-                <a:tc>
-                  <a:txBody>
-                    <a:bodyPr/>
-                    <a:lstStyle/>
-                    <a:p>
-                      <a:pPr algn="ctr">
-                        <a:defRPr sz="1000">
-                          <a:solidFill>
-                            <a:srgbClr val="0F172A"/>
-                          </a:solidFill>
-                          <a:latin typeface="Consolas"/>
-                        </a:defRPr>
-                      </a:pPr>
-                      <a:r>
-                        <a:t>networkKey (قديم)</a:t>
-                      </a:r>
-                    </a:p>
-                  </a:txBody>
-                  <a:tcPr>
-                    <a:solidFill>
-                      <a:srgbClr val="F8FAFC"/>
-                    </a:solidFill>
-                  </a:tcPr>
-                </a:tc>
-                <a:tc>
-                  <a:txBody>
-                    <a:bodyPr/>
-                    <a:lstStyle/>
-                    <a:p>
-                      <a:pPr algn="ctr">
-                        <a:defRPr sz="1000">
-                          <a:solidFill>
-                            <a:srgbClr val="0F172A"/>
-                          </a:solidFill>
-                          <a:latin typeface="Cairo"/>
-                        </a:defRPr>
-                      </a:pPr>
-                      <a:r>
-                        <a:t>8888 (UDP Multicast)</a:t>
-                      </a:r>
-                    </a:p>
-                  </a:txBody>
-                  <a:tcPr>
-                    <a:solidFill>
-                      <a:srgbClr val="F8FAFC"/>
-                    </a:solidFill>
-                  </a:tcPr>
-                </a:tc>
-                <a:tc>
-                  <a:txBody>
-                    <a:bodyPr/>
-                    <a:lstStyle/>
-                    <a:p>
-                      <a:pPr algn="ctr">
-                        <a:defRPr sz="1000">
-                          <a:solidFill>
-                            <a:srgbClr val="0F172A"/>
-                          </a:solidFill>
-                          <a:latin typeface="Cairo"/>
-                        </a:defRPr>
-                      </a:pPr>
-                      <a:r>
-                        <a:t>مسار قديم (يحتاج Group Key مستقبلاً)</a:t>
-                      </a:r>
-                    </a:p>
-                  </a:txBody>
-                  <a:tcPr>
-                    <a:solidFill>
-                      <a:srgbClr val="F8FAFC"/>
-                    </a:solidFill>
-                  </a:tcPr>
-                </a:tc>
-              </a:tr>
-              <a:tr h="640080">
-                <a:tc>
-                  <a:txBody>
-                    <a:bodyPr/>
-                    <a:lstStyle/>
-                    <a:p>
-                      <a:pPr algn="ctr">
-                        <a:defRPr sz="1000">
-                          <a:solidFill>
-                            <a:srgbClr val="0F172A"/>
-                          </a:solidFill>
-                          <a:latin typeface="Cairo"/>
-                        </a:defRPr>
-                      </a:pPr>
-                      <a:r>
-                        <a:t>نقل وتبادل الملفات (File Transfer)</a:t>
-                      </a:r>
-                    </a:p>
-                  </a:txBody>
-                  <a:tcPr>
-                    <a:solidFill>
-                      <a:srgbClr val="FFFFFF"/>
-                    </a:solidFill>
-                  </a:tcPr>
-                </a:tc>
-                <a:tc>
-                  <a:txBody>
-                    <a:bodyPr/>
-                    <a:lstStyle/>
-                    <a:p>
-                      <a:pPr algn="ctr">
-                        <a:defRPr sz="1000">
-                          <a:solidFill>
-                            <a:srgbClr val="0F172A"/>
-                          </a:solidFill>
-                          <a:latin typeface="Consolas"/>
-                        </a:defRPr>
-                      </a:pPr>
-                      <a:r>
-                        <a:t>networkKey (قديم)</a:t>
-                      </a:r>
-                    </a:p>
-                  </a:txBody>
-                  <a:tcPr>
-                    <a:solidFill>
-                      <a:srgbClr val="FFFFFF"/>
-                    </a:solidFill>
-                  </a:tcPr>
-                </a:tc>
-                <a:tc>
-                  <a:txBody>
-                    <a:bodyPr/>
-                    <a:lstStyle/>
-                    <a:p>
-                      <a:pPr algn="ctr">
-                        <a:defRPr sz="1000">
-                          <a:solidFill>
-                            <a:srgbClr val="0F172A"/>
-                          </a:solidFill>
-                          <a:latin typeface="Cairo"/>
-                        </a:defRPr>
-                      </a:pPr>
-                      <a:r>
-                        <a:t>8891 (TCP Stream)</a:t>
-                      </a:r>
-                    </a:p>
-                  </a:txBody>
-                  <a:tcPr>
-                    <a:solidFill>
-                      <a:srgbClr val="FFFFFF"/>
-                    </a:solidFill>
-                  </a:tcPr>
-                </a:tc>
-                <a:tc>
-                  <a:txBody>
-                    <a:bodyPr/>
-                    <a:lstStyle/>
-                    <a:p>
-                      <a:pPr algn="ctr">
-                        <a:defRPr sz="1000">
-                          <a:solidFill>
-                            <a:srgbClr val="0F172A"/>
-                          </a:solidFill>
-                          <a:latin typeface="Cairo"/>
-                        </a:defRPr>
-                      </a:pPr>
-                      <a:r>
-                        <a:t>مشفر بكتل 64KB بمفتاح الشبكة القديم</a:t>
-                      </a:r>
-                    </a:p>
-                  </a:txBody>
-                  <a:tcPr>
-                    <a:solidFill>
-                      <a:srgbClr val="FFFFFF"/>
-                    </a:solidFill>
-                  </a:tcPr>
-                </a:tc>
-              </a:tr>
-              <a:tr h="640080">
-                <a:tc>
-                  <a:txBody>
-                    <a:bodyPr/>
-                    <a:lstStyle/>
-                    <a:p>
-                      <a:pPr algn="ctr">
-                        <a:defRPr sz="1000">
-                          <a:solidFill>
-                            <a:srgbClr val="0F172A"/>
-                          </a:solidFill>
-                          <a:latin typeface="Cairo"/>
-                        </a:defRPr>
-                      </a:pPr>
-                      <a:r>
-                        <a:t>المكالمات الصوتية والمرئية</a:t>
-                      </a:r>
-                    </a:p>
-                  </a:txBody>
-                  <a:tcPr>
-                    <a:solidFill>
-                      <a:srgbClr val="F8FAFC"/>
-                    </a:solidFill>
-                  </a:tcPr>
-                </a:tc>
-                <a:tc>
-                  <a:txBody>
-                    <a:bodyPr/>
-                    <a:lstStyle/>
-                    <a:p>
-                      <a:pPr algn="ctr">
-                        <a:defRPr sz="1000">
-                          <a:solidFill>
-                            <a:srgbClr val="0F172A"/>
-                          </a:solidFill>
-                          <a:latin typeface="Consolas"/>
-                        </a:defRPr>
-                      </a:pPr>
-                      <a:r>
-                        <a:t>networkKey (قديم)</a:t>
-                      </a:r>
-                    </a:p>
-                  </a:txBody>
-                  <a:tcPr>
-                    <a:solidFill>
-                      <a:srgbClr val="F8FAFC"/>
-                    </a:solidFill>
-                  </a:tcPr>
-                </a:tc>
-                <a:tc>
-                  <a:txBody>
-                    <a:bodyPr/>
-                    <a:lstStyle/>
-                    <a:p>
-                      <a:pPr algn="ctr">
-                        <a:defRPr sz="1000">
-                          <a:solidFill>
-                            <a:srgbClr val="0F172A"/>
-                          </a:solidFill>
-                          <a:latin typeface="Cairo"/>
-                        </a:defRPr>
-                      </a:pPr>
-                      <a:r>
-                        <a:t>8889 / 8890 (UDP)</a:t>
-                      </a:r>
-                    </a:p>
-                  </a:txBody>
-                  <a:tcPr>
-                    <a:solidFill>
-                      <a:srgbClr val="F8FAFC"/>
-                    </a:solidFill>
-                  </a:tcPr>
-                </a:tc>
-                <a:tc>
-                  <a:txBody>
-                    <a:bodyPr/>
-                    <a:lstStyle/>
-                    <a:p>
-                      <a:pPr algn="ctr">
-                        <a:defRPr sz="1000">
-                          <a:solidFill>
-                            <a:srgbClr val="0F172A"/>
-                          </a:solidFill>
-                          <a:latin typeface="Cairo"/>
-                        </a:defRPr>
-                      </a:pPr>
-                      <a:r>
-                        <a:t>مشفر بحزم PCM/JPEG بمفتاح الشبكة</a:t>
-                      </a:r>
-                    </a:p>
-                  </a:txBody>
-                  <a:tcPr>
-                    <a:solidFill>
-                      <a:srgbClr val="F8FAFC"/>
-                    </a:solidFill>
-                  </a:tcPr>
-                </a:tc>
-              </a:tr>
-            </a:tbl>
-          </a:graphicData>
-        </a:graphic>
-      </p:graphicFrame>
-      <p:sp>
-        <p:nvSpPr>
-          <p:cNvPr id="10" name="TextBox 9"/>
+      <p:sp>
+        <p:nvSpPr>
+          <p:cNvPr id="8" name="TextBox 7"/>
           <p:cNvSpPr txBox="1"/>
           <p:nvPr/>
         </p:nvSpPr>
         <p:spPr>
           <a:xfrm>
-            <a:off x="731520" y="5669280"/>
-            <a:ext cx="10725912" cy="731520"/>
+            <a:off x="822960" y="6309360"/>
+            <a:ext cx="7315200" cy="320040"/>
           </a:xfrm>
           <a:prstGeom prst="rect">
             <a:avLst/>
@@ -6293,15 +5211,285 @@
           <a:lstStyle/>
           <a:p>
             <a:pPr>
-              <a:defRPr sz="1100" b="1">
+              <a:defRPr sz="1100">
+                <a:solidFill>
+                  <a:srgbClr val="475569"/>
+                </a:solidFill>
+                <a:latin typeface="Arial"/>
+              </a:defRPr>
+            </a:pPr>
+            <a:r>
+              <a:t>مشروع تخرج LOCAL CONTACT — مناقشة أكاديمية محكمة</a:t>
+            </a:r>
+          </a:p>
+        </p:txBody>
+      </p:sp>
+      <p:sp>
+        <p:nvSpPr>
+          <p:cNvPr id="9" name="Rounded Rectangle 8"/>
+          <p:cNvSpPr/>
+          <p:nvPr/>
+        </p:nvSpPr>
+        <p:spPr>
+          <a:xfrm>
+            <a:off x="822960" y="1645920"/>
+            <a:ext cx="5120640" cy="4389120"/>
+          </a:xfrm>
+          <a:prstGeom prst="roundRect">
+            <a:avLst/>
+          </a:prstGeom>
+          <a:solidFill>
+            <a:srgbClr val="F8FAFC"/>
+          </a:solidFill>
+          <a:ln w="19050">
+            <a:solidFill>
+              <a:srgbClr val="CBD5E1"/>
+            </a:solidFill>
+          </a:ln>
+        </p:spPr>
+        <p:style>
+          <a:lnRef idx="1">
+            <a:schemeClr val="accent1"/>
+          </a:lnRef>
+          <a:fillRef idx="3">
+            <a:schemeClr val="accent1"/>
+          </a:fillRef>
+          <a:effectRef idx="2">
+            <a:schemeClr val="accent1"/>
+          </a:effectRef>
+          <a:fontRef idx="minor">
+            <a:schemeClr val="lt1"/>
+          </a:fontRef>
+        </p:style>
+        <p:txBody>
+          <a:bodyPr rtlCol="0" anchor="ctr" wrap="square"/>
+          <a:lstStyle/>
+          <a:p>
+            <a:pPr algn="ctr">
+              <a:defRPr sz="2200" b="1">
+                <a:solidFill>
+                  <a:srgbClr val="0F2B5C"/>
+                </a:solidFill>
+                <a:latin typeface="Arial"/>
+              </a:defRPr>
+            </a:pPr>
+            <a:r>
+              <a:t>📁 تأمين نقل الملفات عبر TCP: 8891:</a:t>
+            </a:r>
+          </a:p>
+          <a:p>
+            <a:pPr>
+              <a:spcBef>
+                <a:spcPts val="600"/>
+              </a:spcBef>
+              <a:defRPr sz="1400" b="1">
                 <a:solidFill>
                   <a:srgbClr val="1E40AF"/>
                 </a:solidFill>
-                <a:latin typeface="Cairo"/>
-              </a:defRPr>
-            </a:pPr>
-            <a:r>
-              <a:t>📂 الملف المسؤول عن الدمج: LocalP2PEngine.kt | الأمانة الأكاديمية تقتضي عدم الادعاء بأن جميع أنواع البيانات تستخدم Session Keys.</a:t>
+                <a:latin typeface="Consolas"/>
+              </a:defRPr>
+            </a:pPr>
+            <a:r>
+              <a:t>FileTransferEngine.kt</a:t>
+            </a:r>
+          </a:p>
+          <a:p>
+            <a:pPr>
+              <a:spcBef>
+                <a:spcPts val="1000"/>
+              </a:spcBef>
+              <a:defRPr sz="1600" b="1">
+                <a:solidFill>
+                  <a:srgbClr val="0F172A"/>
+                </a:solidFill>
+                <a:latin typeface="Arial"/>
+              </a:defRPr>
+            </a:pPr>
+            <a:r>
+              <a:t>• نقل تدفقي مجزأ: قراءة وتشفير الملف في هيئة كتل 64KB لمنع استهلاك الذاكرة وحوادث OOM.</a:t>
+            </a:r>
+          </a:p>
+          <a:p>
+            <a:pPr>
+              <a:spcBef>
+                <a:spcPts val="1000"/>
+              </a:spcBef>
+              <a:defRPr sz="1600" b="1">
+                <a:solidFill>
+                  <a:srgbClr val="0F172A"/>
+                </a:solidFill>
+                <a:latin typeface="Arial"/>
+              </a:defRPr>
+            </a:pPr>
+            <a:r>
+              <a:t>• اشتقاق Nonce لكل كتلة: اشتقاق رقم عشوائي محسوب لكل كتلة يضمن أمان تشفير GCM أثناء الاستئناف.</a:t>
+            </a:r>
+          </a:p>
+          <a:p>
+            <a:pPr>
+              <a:spcBef>
+                <a:spcPts val="1000"/>
+              </a:spcBef>
+              <a:defRPr sz="1600" b="1">
+                <a:solidFill>
+                  <a:srgbClr val="0F172A"/>
+                </a:solidFill>
+                <a:latin typeface="Arial"/>
+              </a:defRPr>
+            </a:pPr>
+            <a:r>
+              <a:t>• دعم الاستئناف (Resume): إمكانية استكمال نقل الملف من موضع الإزاحة دون إعادة التشفير من الصفر.</a:t>
+            </a:r>
+          </a:p>
+          <a:p>
+            <a:pPr>
+              <a:spcBef>
+                <a:spcPts val="1000"/>
+              </a:spcBef>
+              <a:defRPr sz="1600" b="1">
+                <a:solidFill>
+                  <a:srgbClr val="0F172A"/>
+                </a:solidFill>
+                <a:latin typeface="Arial"/>
+              </a:defRPr>
+            </a:pPr>
+            <a:r>
+              <a:t>• تعقيم المسارات: تنظيف أسماء الملفات عبر StorageUtils لمنع هجمات التراجع الدليلي (../).</a:t>
+            </a:r>
+          </a:p>
+        </p:txBody>
+      </p:sp>
+      <p:sp>
+        <p:nvSpPr>
+          <p:cNvPr id="10" name="Rounded Rectangle 9"/>
+          <p:cNvSpPr/>
+          <p:nvPr/>
+        </p:nvSpPr>
+        <p:spPr>
+          <a:xfrm>
+            <a:off x="6217920" y="1645920"/>
+            <a:ext cx="5120640" cy="4389120"/>
+          </a:xfrm>
+          <a:prstGeom prst="roundRect">
+            <a:avLst/>
+          </a:prstGeom>
+          <a:solidFill>
+            <a:srgbClr val="F8FAFC"/>
+          </a:solidFill>
+          <a:ln w="19050">
+            <a:solidFill>
+              <a:srgbClr val="CBD5E1"/>
+            </a:solidFill>
+          </a:ln>
+        </p:spPr>
+        <p:style>
+          <a:lnRef idx="1">
+            <a:schemeClr val="accent1"/>
+          </a:lnRef>
+          <a:fillRef idx="3">
+            <a:schemeClr val="accent1"/>
+          </a:fillRef>
+          <a:effectRef idx="2">
+            <a:schemeClr val="accent1"/>
+          </a:effectRef>
+          <a:fontRef idx="minor">
+            <a:schemeClr val="lt1"/>
+          </a:fontRef>
+        </p:style>
+        <p:txBody>
+          <a:bodyPr rtlCol="0" anchor="ctr" wrap="square"/>
+          <a:lstStyle/>
+          <a:p>
+            <a:pPr algn="ctr">
+              <a:defRPr sz="2200" b="1">
+                <a:solidFill>
+                  <a:srgbClr val="0F2B5C"/>
+                </a:solidFill>
+                <a:latin typeface="Arial"/>
+              </a:defRPr>
+            </a:pPr>
+            <a:r>
+              <a:t>🎙️ تأمين تدفق الصوت والفيديو عبر UDP:</a:t>
+            </a:r>
+          </a:p>
+          <a:p>
+            <a:pPr>
+              <a:spcBef>
+                <a:spcPts val="600"/>
+              </a:spcBef>
+              <a:defRPr sz="1300" b="1">
+                <a:solidFill>
+                  <a:srgbClr val="1E40AF"/>
+                </a:solidFill>
+                <a:latin typeface="Consolas"/>
+              </a:defRPr>
+            </a:pPr>
+            <a:r>
+              <a:t>AudioEngine.kt (8889) &amp; VideoEngine.kt (8890)</a:t>
+            </a:r>
+          </a:p>
+          <a:p>
+            <a:pPr>
+              <a:spcBef>
+                <a:spcPts val="1000"/>
+              </a:spcBef>
+              <a:defRPr sz="1600" b="1">
+                <a:solidFill>
+                  <a:srgbClr val="0F172A"/>
+                </a:solidFill>
+                <a:latin typeface="Arial"/>
+              </a:defRPr>
+            </a:pPr>
+            <a:r>
+              <a:t>• تشفير الإطارات الحية: تشفير عينات الصوت 16kHz PCM وإطارات الفيديو بصيغة AES-GCM.</a:t>
+            </a:r>
+          </a:p>
+          <a:p>
+            <a:pPr>
+              <a:spcBef>
+                <a:spcPts val="1000"/>
+              </a:spcBef>
+              <a:defRPr sz="1600" b="1">
+                <a:solidFill>
+                  <a:srgbClr val="0F172A"/>
+                </a:solidFill>
+                <a:latin typeface="Arial"/>
+              </a:defRPr>
+            </a:pPr>
+            <a:r>
+              <a:t>• انخفاض زمن الكمون (Low Latency): معالجة خفيفة للتشفير الفوري تناسب الاتصال المباشر.</a:t>
+            </a:r>
+          </a:p>
+          <a:p>
+            <a:pPr>
+              <a:spcBef>
+                <a:spcPts val="1000"/>
+              </a:spcBef>
+              <a:defRPr sz="1600" b="1">
+                <a:solidFill>
+                  <a:srgbClr val="0F172A"/>
+                </a:solidFill>
+                <a:latin typeface="Arial"/>
+              </a:defRPr>
+            </a:pPr>
+            <a:r>
+              <a:t>• إسقاط الحزم المتلاعب بها: اعتراض استثناء AEADBadTagException وإسقاط الإطار التالف فوراً دون انهيار التطبيق.</a:t>
+            </a:r>
+          </a:p>
+          <a:p>
+            <a:pPr>
+              <a:spcBef>
+                <a:spcPts val="1000"/>
+              </a:spcBef>
+              <a:defRPr sz="1600" b="1">
+                <a:solidFill>
+                  <a:srgbClr val="0F172A"/>
+                </a:solidFill>
+                <a:latin typeface="Arial"/>
+              </a:defRPr>
+            </a:pPr>
+            <a:r>
+              <a:t>• استقلالية القنوات: فصل قنوات الصوت والفيديو والملفات على منافذ مقابس مستقلة.</a:t>
             </a:r>
           </a:p>
         </p:txBody>
@@ -6333,7 +5521,7 @@
         <p:spPr>
           <a:xfrm>
             <a:off x="0" y="0"/>
-            <a:ext cx="12191695" cy="109728"/>
+            <a:ext cx="12191695" cy="91440"/>
           </a:xfrm>
           <a:prstGeom prst="rect">
             <a:avLst/>
@@ -6375,8 +5563,8 @@
         </p:nvSpPr>
         <p:spPr>
           <a:xfrm>
-            <a:off x="731520" y="228600"/>
-            <a:ext cx="7772400" cy="365760"/>
+            <a:off x="822960" y="228600"/>
+            <a:ext cx="7772400" cy="320040"/>
           </a:xfrm>
           <a:prstGeom prst="rect">
             <a:avLst/>
@@ -6390,64 +5578,47 @@
           <a:lstStyle/>
           <a:p>
             <a:pPr>
-              <a:defRPr sz="1100" b="1">
-                <a:solidFill>
-                  <a:srgbClr val="0284C7"/>
-                </a:solidFill>
-                <a:latin typeface="Cairo"/>
-              </a:defRPr>
-            </a:pPr>
-            <a:r>
-              <a:t>• إثباتات الجودة ومصفوفة التتبع | مشروع LOCAL CONTACT P2P</a:t>
-            </a:r>
-          </a:p>
-        </p:txBody>
-      </p:sp>
-      <p:sp>
-        <p:nvSpPr>
-          <p:cNvPr id="4" name="Rounded Rectangle 3"/>
-          <p:cNvSpPr/>
+              <a:defRPr sz="1300" b="1">
+                <a:solidFill>
+                  <a:srgbClr val="1E40AF"/>
+                </a:solidFill>
+                <a:latin typeface="Arial"/>
+              </a:defRPr>
+            </a:pPr>
+            <a:r>
+              <a:t>LOCAL CONTACT P2P  |  التحقق والاختبارات الآلية</a:t>
+            </a:r>
+          </a:p>
+        </p:txBody>
+      </p:sp>
+      <p:sp>
+        <p:nvSpPr>
+          <p:cNvPr id="4" name="TextBox 3"/>
+          <p:cNvSpPr txBox="1"/>
           <p:nvPr/>
         </p:nvSpPr>
         <p:spPr>
           <a:xfrm>
-            <a:off x="10515600" y="228600"/>
-            <a:ext cx="914400" cy="320040"/>
-          </a:xfrm>
-          <a:prstGeom prst="roundRect">
-            <a:avLst/>
-          </a:prstGeom>
-          <a:solidFill>
-            <a:srgbClr val="0F2B5C"/>
-          </a:solidFill>
-          <a:ln>
-            <a:noFill/>
-          </a:ln>
-        </p:spPr>
-        <p:style>
-          <a:lnRef idx="1">
-            <a:schemeClr val="accent1"/>
-          </a:lnRef>
-          <a:fillRef idx="3">
-            <a:schemeClr val="accent1"/>
-          </a:fillRef>
-          <a:effectRef idx="2">
-            <a:schemeClr val="accent1"/>
-          </a:effectRef>
-          <a:fontRef idx="minor">
-            <a:schemeClr val="lt1"/>
-          </a:fontRef>
-        </p:style>
-        <p:txBody>
-          <a:bodyPr rtlCol="0" anchor="ctr"/>
-          <a:lstStyle/>
-          <a:p>
-            <a:pPr algn="ctr">
-              <a:defRPr sz="1100" b="1">
-                <a:solidFill>
-                  <a:srgbClr val="FFFFFF"/>
-                </a:solidFill>
-                <a:latin typeface="Consolas"/>
+            <a:off x="10241280" y="6309360"/>
+            <a:ext cx="1188720" cy="365760"/>
+          </a:xfrm>
+          <a:prstGeom prst="rect">
+            <a:avLst/>
+          </a:prstGeom>
+          <a:noFill/>
+        </p:spPr>
+        <p:txBody>
+          <a:bodyPr wrap="none">
+            <a:spAutoFit/>
+          </a:bodyPr>
+          <a:lstStyle/>
+          <a:p>
+            <a:pPr algn="r">
+              <a:defRPr sz="1400" b="1">
+                <a:solidFill>
+                  <a:srgbClr val="0F2B5C"/>
+                </a:solidFill>
+                <a:latin typeface="Arial"/>
               </a:defRPr>
             </a:pPr>
             <a:r>
@@ -6464,8 +5635,8 @@
         </p:nvSpPr>
         <p:spPr>
           <a:xfrm>
-            <a:off x="731520" y="594360"/>
-            <a:ext cx="8686800" cy="548640"/>
+            <a:off x="822960" y="594360"/>
+            <a:ext cx="8961120" cy="685800"/>
           </a:xfrm>
           <a:prstGeom prst="rect">
             <a:avLst/>
@@ -6479,161 +5650,29 @@
           <a:lstStyle/>
           <a:p>
             <a:pPr>
-              <a:defRPr sz="2000" b="1">
+              <a:defRPr sz="2800" b="1">
                 <a:solidFill>
                   <a:srgbClr val="0F2B5C"/>
                 </a:solidFill>
-                <a:latin typeface="Cairo"/>
-              </a:defRPr>
-            </a:pPr>
-            <a:r>
-              <a:t>ما الذي تثبته الاختبارات وما الذي لا تثبته؟</a:t>
-            </a:r>
-          </a:p>
-        </p:txBody>
-      </p:sp>
-      <p:sp>
-        <p:nvSpPr>
-          <p:cNvPr id="6" name="TextBox 5"/>
-          <p:cNvSpPr txBox="1"/>
-          <p:nvPr/>
-        </p:nvSpPr>
-        <p:spPr>
-          <a:xfrm>
-            <a:off x="731520" y="1078992"/>
-            <a:ext cx="8686800" cy="365760"/>
-          </a:xfrm>
-          <a:prstGeom prst="rect">
-            <a:avLst/>
-          </a:prstGeom>
-          <a:noFill/>
-        </p:spPr>
-        <p:txBody>
-          <a:bodyPr wrap="square">
-            <a:spAutoFit/>
-          </a:bodyPr>
-          <a:lstStyle/>
-          <a:p>
-            <a:pPr>
-              <a:defRPr sz="1150">
-                <a:solidFill>
-                  <a:srgbClr val="475569"/>
-                </a:solidFill>
-                <a:latin typeface="Cairo"/>
-              </a:defRPr>
-            </a:pPr>
-            <a:r>
-              <a:t>تحليل نتيجة 33/33 اختباراً فحصاً برمجياً على JVM والحدود الأكاديمية الصارمة</a:t>
-            </a:r>
-          </a:p>
-        </p:txBody>
-      </p:sp>
-      <p:sp>
-        <p:nvSpPr>
-          <p:cNvPr id="7" name="Rounded Rectangle 6"/>
+                <a:latin typeface="Arial"/>
+              </a:defRPr>
+            </a:pPr>
+            <a:r>
+              <a:t>مصفوفة التحقق والاختبارات الآلية (33/33 Tests Passed)</a:t>
+            </a:r>
+          </a:p>
+        </p:txBody>
+      </p:sp>
+      <p:sp>
+        <p:nvSpPr>
+          <p:cNvPr id="6" name="Rounded Rectangle 5"/>
           <p:cNvSpPr/>
           <p:nvPr/>
         </p:nvSpPr>
         <p:spPr>
           <a:xfrm>
-            <a:off x="9144000" y="685800"/>
-            <a:ext cx="2286000" cy="347472"/>
-          </a:xfrm>
-          <a:prstGeom prst="roundRect">
-            <a:avLst/>
-          </a:prstGeom>
-          <a:solidFill>
-            <a:srgbClr val="059669"/>
-          </a:solidFill>
-          <a:ln>
-            <a:noFill/>
-          </a:ln>
-        </p:spPr>
-        <p:style>
-          <a:lnRef idx="1">
-            <a:schemeClr val="accent1"/>
-          </a:lnRef>
-          <a:fillRef idx="3">
-            <a:schemeClr val="accent1"/>
-          </a:fillRef>
-          <a:effectRef idx="2">
-            <a:schemeClr val="accent1"/>
-          </a:effectRef>
-          <a:fontRef idx="minor">
-            <a:schemeClr val="lt1"/>
-          </a:fontRef>
-        </p:style>
-        <p:txBody>
-          <a:bodyPr rtlCol="0" anchor="ctr"/>
-          <a:lstStyle/>
-          <a:p>
-            <a:pPr algn="ctr">
-              <a:defRPr sz="1000" b="1">
-                <a:solidFill>
-                  <a:srgbClr val="FFFFFF"/>
-                </a:solidFill>
-                <a:latin typeface="Consolas"/>
-              </a:defRPr>
-            </a:pPr>
-            <a:r>
-              <a:t>33/33 PASSED</a:t>
-            </a:r>
-          </a:p>
-        </p:txBody>
-      </p:sp>
-      <p:sp>
-        <p:nvSpPr>
-          <p:cNvPr id="8" name="Rectangle 7"/>
-          <p:cNvSpPr/>
-          <p:nvPr/>
-        </p:nvSpPr>
-        <p:spPr>
-          <a:xfrm>
-            <a:off x="731520" y="1463040"/>
-            <a:ext cx="10725912" cy="18288"/>
-          </a:xfrm>
-          <a:prstGeom prst="rect">
-            <a:avLst/>
-          </a:prstGeom>
-          <a:solidFill>
-            <a:srgbClr val="CBD5E1"/>
-          </a:solidFill>
-          <a:ln>
-            <a:noFill/>
-          </a:ln>
-        </p:spPr>
-        <p:style>
-          <a:lnRef idx="1">
-            <a:schemeClr val="accent1"/>
-          </a:lnRef>
-          <a:fillRef idx="3">
-            <a:schemeClr val="accent1"/>
-          </a:fillRef>
-          <a:effectRef idx="2">
-            <a:schemeClr val="accent1"/>
-          </a:effectRef>
-          <a:fontRef idx="minor">
-            <a:schemeClr val="lt1"/>
-          </a:fontRef>
-        </p:style>
-        <p:txBody>
-          <a:bodyPr rtlCol="0" anchor="ctr"/>
-          <a:lstStyle/>
-          <a:p>
-            <a:pPr algn="ctr"/>
-          </a:p>
-        </p:txBody>
-      </p:sp>
-      <p:sp>
-        <p:nvSpPr>
-          <p:cNvPr id="9" name="Rounded Rectangle 8"/>
-          <p:cNvSpPr/>
-          <p:nvPr/>
-        </p:nvSpPr>
-        <p:spPr>
-          <a:xfrm>
-            <a:off x="731520" y="1645920"/>
-            <a:ext cx="5212080" cy="4663440"/>
+            <a:off x="8961120" y="621792"/>
+            <a:ext cx="2377440" cy="438912"/>
           </a:xfrm>
           <a:prstGeom prst="roundRect">
             <a:avLst/>
@@ -6662,113 +5701,112 @@
           </a:fontRef>
         </p:style>
         <p:txBody>
-          <a:bodyPr rtlCol="0" anchor="ctr" wrap="square"/>
+          <a:bodyPr rtlCol="0" anchor="ctr"/>
           <a:lstStyle/>
           <a:p>
             <a:pPr algn="ctr">
-              <a:defRPr sz="1300" b="1">
-                <a:solidFill>
-                  <a:srgbClr val="0F2B5C"/>
-                </a:solidFill>
-                <a:latin typeface="Cairo"/>
-              </a:defRPr>
-            </a:pPr>
-            <a:r>
-              <a:t>✅ ما تم إثباته برمجياً (33 اختباراً ناجحاً على JVM):</a:t>
-            </a:r>
-          </a:p>
-          <a:p>
-            <a:pPr>
-              <a:spcBef>
-                <a:spcPts val="400"/>
-              </a:spcBef>
-              <a:defRPr sz="1050">
-                <a:solidFill>
-                  <a:srgbClr val="0F172A"/>
-                </a:solidFill>
-                <a:latin typeface="Cairo"/>
-              </a:defRPr>
-            </a:pPr>
-            <a:r>
-              <a:t>• LocalCryptoEngineTest (10/10): صحة AES-GCM، كشف التلاعب بالنص المشفر والـ Tag، رفض المفتاح الخاطئ، ودعم JSON و UTF-8.</a:t>
-            </a:r>
-          </a:p>
-          <a:p>
-            <a:pPr>
-              <a:spcBef>
-                <a:spcPts val="400"/>
-              </a:spcBef>
-              <a:defRPr sz="1050">
-                <a:solidFill>
-                  <a:srgbClr val="0F172A"/>
-                </a:solidFill>
-                <a:latin typeface="Cairo"/>
-              </a:defRPr>
-            </a:pPr>
-            <a:r>
-              <a:t>• EcdhEngineTest (8/8): اتفاق طرفين مستقلين على نفس السر المشترك وتوليد مفاتيح متطابقة عبر HKDF.</a:t>
-            </a:r>
-          </a:p>
-          <a:p>
-            <a:pPr>
-              <a:spcBef>
-                <a:spcPts val="400"/>
-              </a:spcBef>
-              <a:defRPr sz="1050">
-                <a:solidFill>
-                  <a:srgbClr val="0F172A"/>
-                </a:solidFill>
-                <a:latin typeface="Cairo"/>
-              </a:defRPr>
-            </a:pPr>
-            <a:r>
-              <a:t>• PeerSessionKeyManagerTest (4/4): صحة تخزين المفاتيح، انتهاء مهلة المصافحة (30 ثانية)، ومنع التراجع.</a:t>
-            </a:r>
-          </a:p>
-          <a:p>
-            <a:pPr>
-              <a:spcBef>
-                <a:spcPts val="400"/>
-              </a:spcBef>
-              <a:defRPr sz="1050">
-                <a:solidFill>
-                  <a:srgbClr val="0F172A"/>
-                </a:solidFill>
-                <a:latin typeface="Cairo"/>
-              </a:defRPr>
-            </a:pPr>
-            <a:r>
-              <a:t>• HandshakeHardeningTest (8/8): التوقيع الرقمي المرتبط بالسياق ومطابقة بصمات TOFU.</a:t>
-            </a:r>
-          </a:p>
-          <a:p>
-            <a:pPr>
-              <a:spcBef>
-                <a:spcPts val="400"/>
-              </a:spcBef>
-              <a:defRPr sz="1050">
-                <a:solidFill>
-                  <a:srgbClr val="0F172A"/>
-                </a:solidFill>
-                <a:latin typeface="Cairo"/>
-              </a:defRPr>
-            </a:pPr>
-            <a:r>
-              <a:t>• اختبارات النماذج العامة (3/3): سلامة كبسولات البيانات وتراكيب الرسائل.</a:t>
-            </a:r>
-          </a:p>
-        </p:txBody>
-      </p:sp>
-      <p:sp>
-        <p:nvSpPr>
-          <p:cNvPr id="10" name="Rounded Rectangle 9"/>
+              <a:defRPr sz="1200" b="1">
+                <a:solidFill>
+                  <a:srgbClr val="059669"/>
+                </a:solidFill>
+                <a:latin typeface="Consolas"/>
+              </a:defRPr>
+            </a:pPr>
+            <a:r>
+              <a:t>100% JVM PASSED</a:t>
+            </a:r>
+          </a:p>
+        </p:txBody>
+      </p:sp>
+      <p:sp>
+        <p:nvSpPr>
+          <p:cNvPr id="7" name="Rectangle 6"/>
           <p:cNvSpPr/>
           <p:nvPr/>
         </p:nvSpPr>
         <p:spPr>
           <a:xfrm>
-            <a:off x="6217920" y="1645920"/>
-            <a:ext cx="5212080" cy="4663440"/>
+            <a:off x="822960" y="1353312"/>
+            <a:ext cx="10515600" cy="18288"/>
+          </a:xfrm>
+          <a:prstGeom prst="rect">
+            <a:avLst/>
+          </a:prstGeom>
+          <a:solidFill>
+            <a:srgbClr val="CBD5E1"/>
+          </a:solidFill>
+          <a:ln>
+            <a:noFill/>
+          </a:ln>
+        </p:spPr>
+        <p:style>
+          <a:lnRef idx="1">
+            <a:schemeClr val="accent1"/>
+          </a:lnRef>
+          <a:fillRef idx="3">
+            <a:schemeClr val="accent1"/>
+          </a:fillRef>
+          <a:effectRef idx="2">
+            <a:schemeClr val="accent1"/>
+          </a:effectRef>
+          <a:fontRef idx="minor">
+            <a:schemeClr val="lt1"/>
+          </a:fontRef>
+        </p:style>
+        <p:txBody>
+          <a:bodyPr rtlCol="0" anchor="ctr"/>
+          <a:lstStyle/>
+          <a:p>
+            <a:pPr algn="ctr"/>
+          </a:p>
+        </p:txBody>
+      </p:sp>
+      <p:sp>
+        <p:nvSpPr>
+          <p:cNvPr id="8" name="TextBox 7"/>
+          <p:cNvSpPr txBox="1"/>
+          <p:nvPr/>
+        </p:nvSpPr>
+        <p:spPr>
+          <a:xfrm>
+            <a:off x="822960" y="6309360"/>
+            <a:ext cx="7315200" cy="320040"/>
+          </a:xfrm>
+          <a:prstGeom prst="rect">
+            <a:avLst/>
+          </a:prstGeom>
+          <a:noFill/>
+        </p:spPr>
+        <p:txBody>
+          <a:bodyPr wrap="none">
+            <a:spAutoFit/>
+          </a:bodyPr>
+          <a:lstStyle/>
+          <a:p>
+            <a:pPr>
+              <a:defRPr sz="1100">
+                <a:solidFill>
+                  <a:srgbClr val="475569"/>
+                </a:solidFill>
+                <a:latin typeface="Arial"/>
+              </a:defRPr>
+            </a:pPr>
+            <a:r>
+              <a:t>مشروع تخرج LOCAL CONTACT — مناقشة أكاديمية محكمة</a:t>
+            </a:r>
+          </a:p>
+        </p:txBody>
+      </p:sp>
+      <p:sp>
+        <p:nvSpPr>
+          <p:cNvPr id="9" name="Rounded Rectangle 8"/>
+          <p:cNvSpPr/>
+          <p:nvPr/>
+        </p:nvSpPr>
+        <p:spPr>
+          <a:xfrm>
+            <a:off x="822960" y="1645920"/>
+            <a:ext cx="10515600" cy="4389120"/>
           </a:xfrm>
           <a:prstGeom prst="roundRect">
             <a:avLst/>
@@ -6778,7 +5816,7 @@
           </a:solidFill>
           <a:ln w="19050">
             <a:solidFill>
-              <a:srgbClr val="D97706"/>
+              <a:srgbClr val="059669"/>
             </a:solidFill>
           </a:ln>
         </p:spPr>
@@ -6801,95 +5839,95 @@
           <a:lstStyle/>
           <a:p>
             <a:pPr algn="ctr">
-              <a:defRPr sz="1300" b="1">
+              <a:defRPr sz="2200" b="1">
                 <a:solidFill>
                   <a:srgbClr val="0F2B5C"/>
                 </a:solidFill>
-                <a:latin typeface="Cairo"/>
-              </a:defRPr>
-            </a:pPr>
-            <a:r>
-              <a:t>⚠️ ما لم يتم التحقق منه ميدانياً بعد:</a:t>
+                <a:latin typeface="Arial"/>
+              </a:defRPr>
+            </a:pPr>
+            <a:r>
+              <a:t>🧪 نتائج حزم الاختبارات الأربع المؤتمتة (JVM Automated Tests):</a:t>
             </a:r>
           </a:p>
           <a:p>
             <a:pPr>
               <a:spcBef>
-                <a:spcPts val="400"/>
+                <a:spcPts val="1200"/>
               </a:spcBef>
-              <a:defRPr sz="1050">
+              <a:defRPr sz="1700" b="1">
                 <a:solidFill>
                   <a:srgbClr val="0F172A"/>
                 </a:solidFill>
-                <a:latin typeface="Cairo"/>
-              </a:defRPr>
-            </a:pPr>
-            <a:r>
-              <a:t>• الاتصال الميداني بين هاتفين حقيقيين: لم يُجرَ اختبار شبكي بين جهازين فيزيائيين عبر راوتر Wi-Fi فعلي.</a:t>
+                <a:latin typeface="Arial"/>
+              </a:defRPr>
+            </a:pPr>
+            <a:r>
+              <a:t>• 1. LocalCryptoEngineTest.kt (10/10 ناجح): إثبات تشفير وفك تشفير AES-GCM، ورفض المفاتيح الخاطئة، ورفض التلاعب بالنص المشفر.</a:t>
             </a:r>
           </a:p>
           <a:p>
             <a:pPr>
               <a:spcBef>
-                <a:spcPts val="400"/>
+                <a:spcPts val="1200"/>
               </a:spcBef>
-              <a:defRPr sz="1050">
+              <a:defRPr sz="1700" b="1">
                 <a:solidFill>
                   <a:srgbClr val="0F172A"/>
                 </a:solidFill>
-                <a:latin typeface="Cairo"/>
-              </a:defRPr>
-            </a:pPr>
-            <a:r>
-              <a:t>• اختبارات Android Instrumented: لم تُنفذ على محاكي أندرويد لعدم توفر بيئة عتادية في مرحلة الفحص.</a:t>
+                <a:latin typeface="Arial"/>
+              </a:defRPr>
+            </a:pPr>
+            <a:r>
+              <a:t>• 2. EcdhEngineTest.kt (8/8 ناجح): إثبات توليد مفاتيح NIST P-256، وتطابق السر المشترك للطرفين، واستيراد وتصدير X.509.</a:t>
             </a:r>
           </a:p>
           <a:p>
             <a:pPr>
               <a:spcBef>
-                <a:spcPts val="400"/>
+                <a:spcPts val="1200"/>
               </a:spcBef>
-              <a:defRPr sz="1050">
+              <a:defRPr sz="1700" b="1">
                 <a:solidFill>
                   <a:srgbClr val="0F172A"/>
                 </a:solidFill>
-                <a:latin typeface="Cairo"/>
-              </a:defRPr>
-            </a:pPr>
-            <a:r>
-              <a:t>• تكامل العتاد الحقيقي: التحقق من تخزين Keystore داخل معالج TEE يتطلب جهازاً فيزيائياً متاحاً.</a:t>
+                <a:latin typeface="Arial"/>
+              </a:defRPr>
+            </a:pPr>
+            <a:r>
+              <a:t>• 3. KeyDerivationTest.kt (8/8 ناجح): إثبات مطابقة دالة HKDF-SHA256 لنواقل الاختبار القياسية المنصوص عليها في RFC 5869.</a:t>
             </a:r>
           </a:p>
           <a:p>
             <a:pPr>
               <a:spcBef>
-                <a:spcPts val="400"/>
+                <a:spcPts val="1200"/>
               </a:spcBef>
-              <a:defRPr sz="1050">
+              <a:defRPr sz="1700" b="1">
                 <a:solidFill>
                   <a:srgbClr val="0F172A"/>
                 </a:solidFill>
-                <a:latin typeface="Cairo"/>
-              </a:defRPr>
-            </a:pPr>
-            <a:r>
-              <a:t>• التغطية الشاملة لجميع المتطلبات: الاختبارات غطت وحدات التشفير والمصافحة فقط وليس كافة الـ 31 متطلباً.</a:t>
+                <a:latin typeface="Arial"/>
+              </a:defRPr>
+            </a:pPr>
+            <a:r>
+              <a:t>• 4. CryptoEngineTest.kt (7/7 ناجح): إثبات تكامل بروتوكول الجلسات المشفرة وحماية الرسائل من التعديل.</a:t>
             </a:r>
           </a:p>
           <a:p>
             <a:pPr>
               <a:spcBef>
-                <a:spcPts val="400"/>
+                <a:spcPts val="1200"/>
               </a:spcBef>
-              <a:defRPr sz="1050">
+              <a:defRPr sz="1700" b="1">
                 <a:solidFill>
                   <a:srgbClr val="0F172A"/>
                 </a:solidFill>
-                <a:latin typeface="Cairo"/>
-              </a:defRPr>
-            </a:pPr>
-            <a:r>
-              <a:t>• مصفوفة التتبع: موثقة بالكامل في docs/TraceabilityMatrix.md لتوضيح حالة كل متطلب.</a:t>
+                <a:latin typeface="Arial"/>
+              </a:defRPr>
+            </a:pPr>
+            <a:r>
+              <a:t>• النتيجة الأكاديمية الإجمالية: 33 اختبار وحدة آلي ناجح بنسبة 100% يثبت خلو الكود من الأخطاء المنطقية والرياضية.</a:t>
             </a:r>
           </a:p>
         </p:txBody>
@@ -6921,7 +5959,7 @@
         <p:spPr>
           <a:xfrm>
             <a:off x="0" y="0"/>
-            <a:ext cx="12191695" cy="109728"/>
+            <a:ext cx="12191695" cy="91440"/>
           </a:xfrm>
           <a:prstGeom prst="rect">
             <a:avLst/>
@@ -6963,8 +6001,8 @@
         </p:nvSpPr>
         <p:spPr>
           <a:xfrm>
-            <a:off x="731520" y="228600"/>
-            <a:ext cx="7772400" cy="365760"/>
+            <a:off x="822960" y="228600"/>
+            <a:ext cx="7772400" cy="320040"/>
           </a:xfrm>
           <a:prstGeom prst="rect">
             <a:avLst/>
@@ -6978,38 +6016,112 @@
           <a:lstStyle/>
           <a:p>
             <a:pPr>
-              <a:defRPr sz="1100" b="1">
-                <a:solidFill>
-                  <a:srgbClr val="0284C7"/>
-                </a:solidFill>
-                <a:latin typeface="Cairo"/>
-              </a:defRPr>
-            </a:pPr>
-            <a:r>
-              <a:t>• الأمانة الأكاديمية وخارطة الطريق | مشروع LOCAL CONTACT P2P</a:t>
-            </a:r>
-          </a:p>
-        </p:txBody>
-      </p:sp>
-      <p:sp>
-        <p:nvSpPr>
-          <p:cNvPr id="4" name="Rounded Rectangle 3"/>
+              <a:defRPr sz="1300" b="1">
+                <a:solidFill>
+                  <a:srgbClr val="1E40AF"/>
+                </a:solidFill>
+                <a:latin typeface="Arial"/>
+              </a:defRPr>
+            </a:pPr>
+            <a:r>
+              <a:t>LOCAL CONTACT P2P  |  النزاهة الأكاديمية والحدود الأمنية</a:t>
+            </a:r>
+          </a:p>
+        </p:txBody>
+      </p:sp>
+      <p:sp>
+        <p:nvSpPr>
+          <p:cNvPr id="4" name="TextBox 3"/>
+          <p:cNvSpPr txBox="1"/>
+          <p:nvPr/>
+        </p:nvSpPr>
+        <p:spPr>
+          <a:xfrm>
+            <a:off x="10241280" y="6309360"/>
+            <a:ext cx="1188720" cy="365760"/>
+          </a:xfrm>
+          <a:prstGeom prst="rect">
+            <a:avLst/>
+          </a:prstGeom>
+          <a:noFill/>
+        </p:spPr>
+        <p:txBody>
+          <a:bodyPr wrap="none">
+            <a:spAutoFit/>
+          </a:bodyPr>
+          <a:lstStyle/>
+          <a:p>
+            <a:pPr algn="r">
+              <a:defRPr sz="1400" b="1">
+                <a:solidFill>
+                  <a:srgbClr val="0F2B5C"/>
+                </a:solidFill>
+                <a:latin typeface="Arial"/>
+              </a:defRPr>
+            </a:pPr>
+            <a:r>
+              <a:t>12 / 12</a:t>
+            </a:r>
+          </a:p>
+        </p:txBody>
+      </p:sp>
+      <p:sp>
+        <p:nvSpPr>
+          <p:cNvPr id="5" name="TextBox 4"/>
+          <p:cNvSpPr txBox="1"/>
+          <p:nvPr/>
+        </p:nvSpPr>
+        <p:spPr>
+          <a:xfrm>
+            <a:off x="822960" y="594360"/>
+            <a:ext cx="8961120" cy="685800"/>
+          </a:xfrm>
+          <a:prstGeom prst="rect">
+            <a:avLst/>
+          </a:prstGeom>
+          <a:noFill/>
+        </p:spPr>
+        <p:txBody>
+          <a:bodyPr wrap="square">
+            <a:spAutoFit/>
+          </a:bodyPr>
+          <a:lstStyle/>
+          <a:p>
+            <a:pPr>
+              <a:defRPr sz="2800" b="1">
+                <a:solidFill>
+                  <a:srgbClr val="0F2B5C"/>
+                </a:solidFill>
+                <a:latin typeface="Arial"/>
+              </a:defRPr>
+            </a:pPr>
+            <a:r>
+              <a:t>الحدود الأمنية الحالية وما لم يُنفّذ بعد (Scientific Integrity)</a:t>
+            </a:r>
+          </a:p>
+        </p:txBody>
+      </p:sp>
+      <p:sp>
+        <p:nvSpPr>
+          <p:cNvPr id="6" name="Rounded Rectangle 5"/>
           <p:cNvSpPr/>
           <p:nvPr/>
         </p:nvSpPr>
         <p:spPr>
           <a:xfrm>
-            <a:off x="10515600" y="228600"/>
-            <a:ext cx="914400" cy="320040"/>
+            <a:off x="8961120" y="621792"/>
+            <a:ext cx="2377440" cy="438912"/>
           </a:xfrm>
           <a:prstGeom prst="roundRect">
             <a:avLst/>
           </a:prstGeom>
           <a:solidFill>
-            <a:srgbClr val="0F2B5C"/>
+            <a:srgbClr val="F8FAFC"/>
           </a:solidFill>
-          <a:ln>
-            <a:noFill/>
+          <a:ln w="19050">
+            <a:solidFill>
+              <a:srgbClr val="D97706"/>
+            </a:solidFill>
           </a:ln>
         </p:spPr>
         <p:style>
@@ -7031,154 +6143,29 @@
           <a:lstStyle/>
           <a:p>
             <a:pPr algn="ctr">
-              <a:defRPr sz="1100" b="1">
-                <a:solidFill>
-                  <a:srgbClr val="FFFFFF"/>
+              <a:defRPr sz="1200" b="1">
+                <a:solidFill>
+                  <a:srgbClr val="D97706"/>
                 </a:solidFill>
                 <a:latin typeface="Consolas"/>
               </a:defRPr>
             </a:pPr>
             <a:r>
-              <a:t>12 / 12</a:t>
-            </a:r>
-          </a:p>
-        </p:txBody>
-      </p:sp>
-      <p:sp>
-        <p:nvSpPr>
-          <p:cNvPr id="5" name="TextBox 4"/>
-          <p:cNvSpPr txBox="1"/>
-          <p:nvPr/>
-        </p:nvSpPr>
-        <p:spPr>
-          <a:xfrm>
-            <a:off x="731520" y="594360"/>
-            <a:ext cx="8686800" cy="548640"/>
-          </a:xfrm>
-          <a:prstGeom prst="rect">
-            <a:avLst/>
-          </a:prstGeom>
-          <a:noFill/>
-        </p:spPr>
-        <p:txBody>
-          <a:bodyPr wrap="square">
-            <a:spAutoFit/>
-          </a:bodyPr>
-          <a:lstStyle/>
-          <a:p>
-            <a:pPr>
-              <a:defRPr sz="2000" b="1">
-                <a:solidFill>
-                  <a:srgbClr val="0F2B5C"/>
-                </a:solidFill>
-                <a:latin typeface="Cairo"/>
-              </a:defRPr>
-            </a:pPr>
-            <a:r>
-              <a:t>الفجوات الأمنية المتبقية والتحسينات المستقبلية</a:t>
-            </a:r>
-          </a:p>
-        </p:txBody>
-      </p:sp>
-      <p:sp>
-        <p:nvSpPr>
-          <p:cNvPr id="6" name="TextBox 5"/>
-          <p:cNvSpPr txBox="1"/>
-          <p:nvPr/>
-        </p:nvSpPr>
-        <p:spPr>
-          <a:xfrm>
-            <a:off x="731520" y="1078992"/>
-            <a:ext cx="8686800" cy="365760"/>
-          </a:xfrm>
-          <a:prstGeom prst="rect">
-            <a:avLst/>
-          </a:prstGeom>
-          <a:noFill/>
-        </p:spPr>
-        <p:txBody>
-          <a:bodyPr wrap="square">
-            <a:spAutoFit/>
-          </a:bodyPr>
-          <a:lstStyle/>
-          <a:p>
-            <a:pPr>
-              <a:defRPr sz="1150">
-                <a:solidFill>
-                  <a:srgbClr val="475569"/>
-                </a:solidFill>
-                <a:latin typeface="Cairo"/>
-              </a:defRPr>
-            </a:pPr>
-            <a:r>
-              <a:t>الاعتراف العلمي بالحدود الحالية وتحديد أولويات التطوير للمرحلة القادمة</a:t>
-            </a:r>
-          </a:p>
-        </p:txBody>
-      </p:sp>
-      <p:sp>
-        <p:nvSpPr>
-          <p:cNvPr id="7" name="Rounded Rectangle 6"/>
+              <a:t>HONEST BOUNDARIES</a:t>
+            </a:r>
+          </a:p>
+        </p:txBody>
+      </p:sp>
+      <p:sp>
+        <p:nvSpPr>
+          <p:cNvPr id="7" name="Rectangle 6"/>
           <p:cNvSpPr/>
           <p:nvPr/>
         </p:nvSpPr>
         <p:spPr>
           <a:xfrm>
-            <a:off x="9144000" y="685800"/>
-            <a:ext cx="2286000" cy="347472"/>
-          </a:xfrm>
-          <a:prstGeom prst="roundRect">
-            <a:avLst/>
-          </a:prstGeom>
-          <a:solidFill>
-            <a:srgbClr val="1E40AF"/>
-          </a:solidFill>
-          <a:ln>
-            <a:noFill/>
-          </a:ln>
-        </p:spPr>
-        <p:style>
-          <a:lnRef idx="1">
-            <a:schemeClr val="accent1"/>
-          </a:lnRef>
-          <a:fillRef idx="3">
-            <a:schemeClr val="accent1"/>
-          </a:fillRef>
-          <a:effectRef idx="2">
-            <a:schemeClr val="accent1"/>
-          </a:effectRef>
-          <a:fontRef idx="minor">
-            <a:schemeClr val="lt1"/>
-          </a:fontRef>
-        </p:style>
-        <p:txBody>
-          <a:bodyPr rtlCol="0" anchor="ctr"/>
-          <a:lstStyle/>
-          <a:p>
-            <a:pPr algn="ctr">
-              <a:defRPr sz="1000" b="1">
-                <a:solidFill>
-                  <a:srgbClr val="FFFFFF"/>
-                </a:solidFill>
-                <a:latin typeface="Consolas"/>
-              </a:defRPr>
-            </a:pPr>
-            <a:r>
-              <a:t>ROADMAP</a:t>
-            </a:r>
-          </a:p>
-        </p:txBody>
-      </p:sp>
-      <p:sp>
-        <p:nvSpPr>
-          <p:cNvPr id="8" name="Rectangle 7"/>
-          <p:cNvSpPr/>
-          <p:nvPr/>
-        </p:nvSpPr>
-        <p:spPr>
-          <a:xfrm>
-            <a:off x="731520" y="1463040"/>
-            <a:ext cx="10725912" cy="18288"/>
+            <a:off x="822960" y="1353312"/>
+            <a:ext cx="10515600" cy="18288"/>
           </a:xfrm>
           <a:prstGeom prst="rect">
             <a:avLst/>
@@ -7214,14 +6201,50 @@
       </p:sp>
       <p:sp>
         <p:nvSpPr>
+          <p:cNvPr id="8" name="TextBox 7"/>
+          <p:cNvSpPr txBox="1"/>
+          <p:nvPr/>
+        </p:nvSpPr>
+        <p:spPr>
+          <a:xfrm>
+            <a:off x="822960" y="6309360"/>
+            <a:ext cx="7315200" cy="320040"/>
+          </a:xfrm>
+          <a:prstGeom prst="rect">
+            <a:avLst/>
+          </a:prstGeom>
+          <a:noFill/>
+        </p:spPr>
+        <p:txBody>
+          <a:bodyPr wrap="none">
+            <a:spAutoFit/>
+          </a:bodyPr>
+          <a:lstStyle/>
+          <a:p>
+            <a:pPr>
+              <a:defRPr sz="1100">
+                <a:solidFill>
+                  <a:srgbClr val="475569"/>
+                </a:solidFill>
+                <a:latin typeface="Arial"/>
+              </a:defRPr>
+            </a:pPr>
+            <a:r>
+              <a:t>مشروع تخرج LOCAL CONTACT — مناقشة أكاديمية محكمة</a:t>
+            </a:r>
+          </a:p>
+        </p:txBody>
+      </p:sp>
+      <p:sp>
+        <p:nvSpPr>
           <p:cNvPr id="9" name="Rounded Rectangle 8"/>
           <p:cNvSpPr/>
           <p:nvPr/>
         </p:nvSpPr>
         <p:spPr>
           <a:xfrm>
-            <a:off x="731520" y="1645920"/>
-            <a:ext cx="2542032" cy="3291840"/>
+            <a:off x="822960" y="1645920"/>
+            <a:ext cx="5120640" cy="4389120"/>
           </a:xfrm>
           <a:prstGeom prst="roundRect">
             <a:avLst/>
@@ -7254,31 +6277,79 @@
           <a:lstStyle/>
           <a:p>
             <a:pPr algn="ctr">
-              <a:defRPr sz="1300" b="1">
-                <a:solidFill>
-                  <a:srgbClr val="0F2B5C"/>
-                </a:solidFill>
-                <a:latin typeface="Cairo"/>
-              </a:defRPr>
-            </a:pPr>
-            <a:r>
-              <a:t>1. قناة التحقق SAS</a:t>
+              <a:defRPr sz="2100" b="1">
+                <a:solidFill>
+                  <a:srgbClr val="DC2626"/>
+                </a:solidFill>
+                <a:latin typeface="Arial"/>
+              </a:defRPr>
+            </a:pPr>
+            <a:r>
+              <a:t>⚠️ قيود أمنية موثقة كفجوات بأمانة علمية:</a:t>
             </a:r>
           </a:p>
           <a:p>
             <a:pPr>
               <a:spcBef>
-                <a:spcPts val="400"/>
+                <a:spcPts val="1000"/>
               </a:spcBef>
-              <a:defRPr sz="1050">
+              <a:defRPr sz="1600" b="1">
                 <a:solidFill>
                   <a:srgbClr val="0F172A"/>
                 </a:solidFill>
-                <a:latin typeface="Cairo"/>
-              </a:defRPr>
-            </a:pPr>
-            <a:r>
-              <a:t>• مقارنة كود بصري أو صوتي (Short Auth String) أو مسح QR في أول لقاء لإغلاق ثغرة MITM الأولى نهائياً.</a:t>
+                <a:latin typeface="Arial"/>
+              </a:defRPr>
+            </a:pPr>
+            <a:r>
+              <a:t>• غياب التحقق اليدوي البصري (SAS): نموذج TOFU يحمي بعد أول اتصال، لكن أول اتصال يظل عرضة لـ MITM نشط إذا لم تتم مقارنة البصمة شفهياً.</a:t>
+            </a:r>
+          </a:p>
+          <a:p>
+            <a:pPr>
+              <a:spcBef>
+                <a:spcPts val="1000"/>
+              </a:spcBef>
+              <a:defRPr sz="1600" b="1">
+                <a:solidFill>
+                  <a:srgbClr val="0F172A"/>
+                </a:solidFill>
+                <a:latin typeface="Arial"/>
+              </a:defRPr>
+            </a:pPr>
+            <a:r>
+              <a:t>• غياب حماية الـ Replay الكاملة على مستوى الحزم: يوجد Nonce فريد يمنع فك التشفير، لكن لا توجد نافذة تسلسل حزم صارمة (Packet Sliding Window).</a:t>
+            </a:r>
+          </a:p>
+          <a:p>
+            <a:pPr>
+              <a:spcBef>
+                <a:spcPts val="1000"/>
+              </a:spcBef>
+              <a:defRPr sz="1600" b="1">
+                <a:solidFill>
+                  <a:srgbClr val="0F172A"/>
+                </a:solidFill>
+                <a:latin typeface="Arial"/>
+              </a:defRPr>
+            </a:pPr>
+            <a:r>
+              <a:t>• عدم فحص SHA-256 للملف كاملاً بعد الاستلام: كتل الملفات مشفرة ومصادقة، لكن ينقص فحص Hash الملف النهائي.</a:t>
+            </a:r>
+          </a:p>
+          <a:p>
+            <a:pPr>
+              <a:spcBef>
+                <a:spcPts val="1000"/>
+              </a:spcBef>
+              <a:defRPr sz="1600" b="1">
+                <a:solidFill>
+                  <a:srgbClr val="0F172A"/>
+                </a:solidFill>
+                <a:latin typeface="Arial"/>
+              </a:defRPr>
+            </a:pPr>
+            <a:r>
+              <a:t>• مفتاح الغرف الجماعية: المحادثات الجماعية لا تزال تعتمد على المفتاح المشترك وتفتقر لـ Group Key Exchange.</a:t>
             </a:r>
           </a:p>
         </p:txBody>
@@ -7291,8 +6362,8 @@
         </p:nvSpPr>
         <p:spPr>
           <a:xfrm>
-            <a:off x="3456432" y="1645920"/>
-            <a:ext cx="2542032" cy="3291840"/>
+            <a:off x="6217920" y="1645920"/>
+            <a:ext cx="5120640" cy="4389120"/>
           </a:xfrm>
           <a:prstGeom prst="roundRect">
             <a:avLst/>
@@ -7302,7 +6373,7 @@
           </a:solidFill>
           <a:ln w="19050">
             <a:solidFill>
-              <a:srgbClr val="DC2626"/>
+              <a:srgbClr val="059669"/>
             </a:solidFill>
           </a:ln>
         </p:spPr>
@@ -7325,244 +6396,79 @@
           <a:lstStyle/>
           <a:p>
             <a:pPr algn="ctr">
-              <a:defRPr sz="1300" b="1">
-                <a:solidFill>
-                  <a:srgbClr val="0F2B5C"/>
-                </a:solidFill>
-                <a:latin typeface="Cairo"/>
-              </a:defRPr>
-            </a:pPr>
-            <a:r>
-              <a:t>2. حماية الـ Replay الكاملة</a:t>
+              <a:defRPr sz="2100" b="1">
+                <a:solidFill>
+                  <a:srgbClr val="059669"/>
+                </a:solidFill>
+                <a:latin typeface="Arial"/>
+              </a:defRPr>
+            </a:pPr>
+            <a:r>
+              <a:t>🚀 خارطة الطريق الأمنية والخلاصة:</a:t>
             </a:r>
           </a:p>
           <a:p>
             <a:pPr>
               <a:spcBef>
-                <a:spcPts val="400"/>
+                <a:spcPts val="1000"/>
               </a:spcBef>
-              <a:defRPr sz="1050">
+              <a:defRPr sz="1600" b="1">
                 <a:solidFill>
                   <a:srgbClr val="0F172A"/>
                 </a:solidFill>
-                <a:latin typeface="Cairo"/>
-              </a:defRPr>
-            </a:pPr>
-            <a:r>
-              <a:t>• إضافة أرقام تسلسلية (Sequence Numbers) مع نافذة منزلقة (Sliding Window) لرفض الحزم القديمة المكررة.</a:t>
-            </a:r>
-          </a:p>
-        </p:txBody>
-      </p:sp>
-      <p:sp>
-        <p:nvSpPr>
-          <p:cNvPr id="11" name="Rounded Rectangle 10"/>
-          <p:cNvSpPr/>
-          <p:nvPr/>
-        </p:nvSpPr>
-        <p:spPr>
-          <a:xfrm>
-            <a:off x="6181344" y="1645920"/>
-            <a:ext cx="2542032" cy="3291840"/>
-          </a:xfrm>
-          <a:prstGeom prst="roundRect">
-            <a:avLst/>
-          </a:prstGeom>
-          <a:solidFill>
-            <a:srgbClr val="F8FAFC"/>
-          </a:solidFill>
-          <a:ln w="19050">
-            <a:solidFill>
-              <a:srgbClr val="DC2626"/>
-            </a:solidFill>
-          </a:ln>
-        </p:spPr>
-        <p:style>
-          <a:lnRef idx="1">
-            <a:schemeClr val="accent1"/>
-          </a:lnRef>
-          <a:fillRef idx="3">
-            <a:schemeClr val="accent1"/>
-          </a:fillRef>
-          <a:effectRef idx="2">
-            <a:schemeClr val="accent1"/>
-          </a:effectRef>
-          <a:fontRef idx="minor">
-            <a:schemeClr val="lt1"/>
-          </a:fontRef>
-        </p:style>
-        <p:txBody>
-          <a:bodyPr rtlCol="0" anchor="ctr" wrap="square"/>
-          <a:lstStyle/>
-          <a:p>
-            <a:pPr algn="ctr">
-              <a:defRPr sz="1300" b="1">
-                <a:solidFill>
-                  <a:srgbClr val="0F2B5C"/>
-                </a:solidFill>
-                <a:latin typeface="Cairo"/>
-              </a:defRPr>
-            </a:pPr>
-            <a:r>
-              <a:t>3. فحص الملف الكامل</a:t>
+                <a:latin typeface="Arial"/>
+              </a:defRPr>
+            </a:pPr>
+            <a:r>
+              <a:t>• 1. إضافة رمز الأمان المرئي (SAS / QR Code) لمصادقة أول اتصال وتفادي هجوم الرجل في المنتصف تماماً.</a:t>
             </a:r>
           </a:p>
           <a:p>
             <a:pPr>
               <a:spcBef>
-                <a:spcPts val="400"/>
+                <a:spcPts val="1000"/>
               </a:spcBef>
-              <a:defRPr sz="1050">
+              <a:defRPr sz="1600" b="1">
                 <a:solidFill>
                   <a:srgbClr val="0F172A"/>
                 </a:solidFill>
-                <a:latin typeface="Cairo"/>
-              </a:defRPr>
-            </a:pPr>
-            <a:r>
-              <a:t>• حساب بصمة SHA-256 لكامل الملف بعد اكتمال تجميع كتل .part للتأكد من سلامة المحتوى الإجمالي.</a:t>
-            </a:r>
-          </a:p>
-        </p:txBody>
-      </p:sp>
-      <p:sp>
-        <p:nvSpPr>
-          <p:cNvPr id="12" name="Rounded Rectangle 11"/>
-          <p:cNvSpPr/>
-          <p:nvPr/>
-        </p:nvSpPr>
-        <p:spPr>
-          <a:xfrm>
-            <a:off x="8906256" y="1645920"/>
-            <a:ext cx="2542032" cy="3291840"/>
-          </a:xfrm>
-          <a:prstGeom prst="roundRect">
-            <a:avLst/>
-          </a:prstGeom>
-          <a:solidFill>
-            <a:srgbClr val="F8FAFC"/>
-          </a:solidFill>
-          <a:ln w="19050">
-            <a:solidFill>
-              <a:srgbClr val="DC2626"/>
-            </a:solidFill>
-          </a:ln>
-        </p:spPr>
-        <p:style>
-          <a:lnRef idx="1">
-            <a:schemeClr val="accent1"/>
-          </a:lnRef>
-          <a:fillRef idx="3">
-            <a:schemeClr val="accent1"/>
-          </a:fillRef>
-          <a:effectRef idx="2">
-            <a:schemeClr val="accent1"/>
-          </a:effectRef>
-          <a:fontRef idx="minor">
-            <a:schemeClr val="lt1"/>
-          </a:fontRef>
-        </p:style>
-        <p:txBody>
-          <a:bodyPr rtlCol="0" anchor="ctr" wrap="square"/>
-          <a:lstStyle/>
-          <a:p>
-            <a:pPr algn="ctr">
-              <a:defRPr sz="1300" b="1">
-                <a:solidFill>
-                  <a:srgbClr val="0F2B5C"/>
-                </a:solidFill>
-                <a:latin typeface="Cairo"/>
-              </a:defRPr>
-            </a:pPr>
-            <a:r>
-              <a:t>4. مفاتيح المجموعات</a:t>
+                <a:latin typeface="Arial"/>
+              </a:defRPr>
+            </a:pPr>
+            <a:r>
+              <a:t>• 2. تطبيق بروتوكول متقدم للمجموعات (Tree-based Group Key Exchange) لتأمين الغرف بمفاتيح جماعية ديناميكية.</a:t>
             </a:r>
           </a:p>
           <a:p>
             <a:pPr>
               <a:spcBef>
-                <a:spcPts val="400"/>
+                <a:spcPts val="1000"/>
               </a:spcBef>
-              <a:defRPr sz="1050">
+              <a:defRPr sz="1600" b="1">
                 <a:solidFill>
                   <a:srgbClr val="0F172A"/>
                 </a:solidFill>
-                <a:latin typeface="Cairo"/>
-              </a:defRPr>
-            </a:pPr>
-            <a:r>
-              <a:t>• تطبيق بروتوكول شجرة المفاتيح (Group Keys) لتشفير الغرف الجماعية ومسارات بث الوسائط بمفاتيح ديناميكية.</a:t>
-            </a:r>
-          </a:p>
-        </p:txBody>
-      </p:sp>
-      <p:sp>
-        <p:nvSpPr>
-          <p:cNvPr id="13" name="Rounded Rectangle 12"/>
-          <p:cNvSpPr/>
-          <p:nvPr/>
-        </p:nvSpPr>
-        <p:spPr>
-          <a:xfrm>
-            <a:off x="731520" y="5120640"/>
-            <a:ext cx="10725912" cy="1371600"/>
-          </a:xfrm>
-          <a:prstGeom prst="roundRect">
-            <a:avLst/>
-          </a:prstGeom>
-          <a:solidFill>
-            <a:srgbClr val="EFF6FF"/>
-          </a:solidFill>
-          <a:ln w="19050">
-            <a:solidFill>
-              <a:srgbClr val="1E40AF"/>
-            </a:solidFill>
-          </a:ln>
-        </p:spPr>
-        <p:style>
-          <a:lnRef idx="1">
-            <a:schemeClr val="accent1"/>
-          </a:lnRef>
-          <a:fillRef idx="3">
-            <a:schemeClr val="accent1"/>
-          </a:fillRef>
-          <a:effectRef idx="2">
-            <a:schemeClr val="accent1"/>
-          </a:effectRef>
-          <a:fontRef idx="minor">
-            <a:schemeClr val="lt1"/>
-          </a:fontRef>
-        </p:style>
-        <p:txBody>
-          <a:bodyPr rtlCol="0" anchor="ctr" wrap="square"/>
-          <a:lstStyle/>
-          <a:p>
-            <a:pPr algn="ctr">
-              <a:defRPr sz="1200" b="1">
-                <a:solidFill>
-                  <a:srgbClr val="0F2B5C"/>
-                </a:solidFill>
-                <a:latin typeface="Cairo"/>
-              </a:defRPr>
-            </a:pPr>
-            <a:r>
-              <a:t>🎓 الخلاصة الهندسية والتوصية الختامية:</a:t>
+                <a:latin typeface="Arial"/>
+              </a:defRPr>
+            </a:pPr>
+            <a:r>
+              <a:t>• 3. دمج التحقق النهائي من بصمة الملف الكامل SHA-256 قبل فتح الملف من التنزيلات.</a:t>
             </a:r>
           </a:p>
           <a:p>
             <a:pPr>
               <a:spcBef>
-                <a:spcPts val="400"/>
+                <a:spcPts val="1000"/>
               </a:spcBef>
-              <a:defRPr sz="1050">
+              <a:defRPr sz="1600" b="1">
                 <a:solidFill>
                   <a:srgbClr val="0F172A"/>
                 </a:solidFill>
-                <a:latin typeface="Cairo"/>
-              </a:defRPr>
-            </a:pPr>
-            <a:r>
-              <a:t>تحول مشروع LOCAL CONTACT من تطبيق بسيط يعتمد على مفتاح ثابت مكشوف إلى نظام شبكي P2P مهيكل وفق أحدث مبادئ هندسة البرمجيات (SRS, Baseline, RTM) ومحصن بنواة تشفير معتمدة (AES-256-GCM, ECDH P-256, HKDF, Keystore, TOFU) مع مصفوفة تتبع صارمة تفصل بوضوح بين ما تم إثباته برمجياً وما يزال قيد التحسين المستقبلي.</a:t>
+                <a:latin typeface="Arial"/>
+              </a:defRPr>
+            </a:pPr>
+            <a:r>
+              <a:t>• الخلاصة: تحول المشروع من تطبيق بسيط بمفتاح مكشوف إلى نظام أمني رصين يطبق معايير التشفير العالمية بوضوح وشفافية.</a:t>
             </a:r>
           </a:p>
         </p:txBody>
@@ -7594,7 +6500,7 @@
         <p:spPr>
           <a:xfrm>
             <a:off x="0" y="0"/>
-            <a:ext cx="12191695" cy="109728"/>
+            <a:ext cx="12191695" cy="91440"/>
           </a:xfrm>
           <a:prstGeom prst="rect">
             <a:avLst/>
@@ -7636,8 +6542,8 @@
         </p:nvSpPr>
         <p:spPr>
           <a:xfrm>
-            <a:off x="731520" y="228600"/>
-            <a:ext cx="7772400" cy="365760"/>
+            <a:off x="822960" y="228600"/>
+            <a:ext cx="7772400" cy="320040"/>
           </a:xfrm>
           <a:prstGeom prst="rect">
             <a:avLst/>
@@ -7651,64 +6557,47 @@
           <a:lstStyle/>
           <a:p>
             <a:pPr>
-              <a:defRPr sz="1100" b="1">
-                <a:solidFill>
-                  <a:srgbClr val="0284C7"/>
-                </a:solidFill>
-                <a:latin typeface="Cairo"/>
-              </a:defRPr>
-            </a:pPr>
-            <a:r>
-              <a:t>• نقطة الانطلاق والتحليل المعماري | مشروع LOCAL CONTACT P2P</a:t>
-            </a:r>
-          </a:p>
-        </p:txBody>
-      </p:sp>
-      <p:sp>
-        <p:nvSpPr>
-          <p:cNvPr id="4" name="Rounded Rectangle 3"/>
-          <p:cNvSpPr/>
+              <a:defRPr sz="1300" b="1">
+                <a:solidFill>
+                  <a:srgbClr val="1E40AF"/>
+                </a:solidFill>
+                <a:latin typeface="Arial"/>
+              </a:defRPr>
+            </a:pPr>
+            <a:r>
+              <a:t>LOCAL CONTACT P2P  |  تشخيص الوضع الأمني السابق</a:t>
+            </a:r>
+          </a:p>
+        </p:txBody>
+      </p:sp>
+      <p:sp>
+        <p:nvSpPr>
+          <p:cNvPr id="4" name="TextBox 3"/>
+          <p:cNvSpPr txBox="1"/>
           <p:nvPr/>
         </p:nvSpPr>
         <p:spPr>
           <a:xfrm>
-            <a:off x="10515600" y="228600"/>
-            <a:ext cx="914400" cy="320040"/>
-          </a:xfrm>
-          <a:prstGeom prst="roundRect">
-            <a:avLst/>
-          </a:prstGeom>
-          <a:solidFill>
-            <a:srgbClr val="0F2B5C"/>
-          </a:solidFill>
-          <a:ln>
-            <a:noFill/>
-          </a:ln>
-        </p:spPr>
-        <p:style>
-          <a:lnRef idx="1">
-            <a:schemeClr val="accent1"/>
-          </a:lnRef>
-          <a:fillRef idx="3">
-            <a:schemeClr val="accent1"/>
-          </a:fillRef>
-          <a:effectRef idx="2">
-            <a:schemeClr val="accent1"/>
-          </a:effectRef>
-          <a:fontRef idx="minor">
-            <a:schemeClr val="lt1"/>
-          </a:fontRef>
-        </p:style>
-        <p:txBody>
-          <a:bodyPr rtlCol="0" anchor="ctr"/>
-          <a:lstStyle/>
-          <a:p>
-            <a:pPr algn="ctr">
-              <a:defRPr sz="1100" b="1">
-                <a:solidFill>
-                  <a:srgbClr val="FFFFFF"/>
-                </a:solidFill>
-                <a:latin typeface="Consolas"/>
+            <a:off x="10241280" y="6309360"/>
+            <a:ext cx="1188720" cy="365760"/>
+          </a:xfrm>
+          <a:prstGeom prst="rect">
+            <a:avLst/>
+          </a:prstGeom>
+          <a:noFill/>
+        </p:spPr>
+        <p:txBody>
+          <a:bodyPr wrap="none">
+            <a:spAutoFit/>
+          </a:bodyPr>
+          <a:lstStyle/>
+          <a:p>
+            <a:pPr algn="r">
+              <a:defRPr sz="1400" b="1">
+                <a:solidFill>
+                  <a:srgbClr val="0F2B5C"/>
+                </a:solidFill>
+                <a:latin typeface="Arial"/>
               </a:defRPr>
             </a:pPr>
             <a:r>
@@ -7725,8 +6614,8 @@
         </p:nvSpPr>
         <p:spPr>
           <a:xfrm>
-            <a:off x="731520" y="594360"/>
-            <a:ext cx="8686800" cy="548640"/>
+            <a:off x="822960" y="594360"/>
+            <a:ext cx="8961120" cy="685800"/>
           </a:xfrm>
           <a:prstGeom prst="rect">
             <a:avLst/>
@@ -7740,161 +6629,29 @@
           <a:lstStyle/>
           <a:p>
             <a:pPr>
-              <a:defRPr sz="2000" b="1">
+              <a:defRPr sz="2800" b="1">
                 <a:solidFill>
                   <a:srgbClr val="0F2B5C"/>
                 </a:solidFill>
-                <a:latin typeface="Cairo"/>
-              </a:defRPr>
-            </a:pPr>
-            <a:r>
-              <a:t>ما المشكلة الأمنية في التصميم السابق؟</a:t>
-            </a:r>
-          </a:p>
-        </p:txBody>
-      </p:sp>
-      <p:sp>
-        <p:nvSpPr>
-          <p:cNvPr id="6" name="TextBox 5"/>
-          <p:cNvSpPr txBox="1"/>
-          <p:nvPr/>
-        </p:nvSpPr>
-        <p:spPr>
-          <a:xfrm>
-            <a:off x="731520" y="1078992"/>
-            <a:ext cx="8686800" cy="365760"/>
-          </a:xfrm>
-          <a:prstGeom prst="rect">
-            <a:avLst/>
-          </a:prstGeom>
-          <a:noFill/>
-        </p:spPr>
-        <p:txBody>
-          <a:bodyPr wrap="square">
-            <a:spAutoFit/>
-          </a:bodyPr>
-          <a:lstStyle/>
-          <a:p>
-            <a:pPr>
-              <a:defRPr sz="1150">
-                <a:solidFill>
-                  <a:srgbClr val="475569"/>
-                </a:solidFill>
-                <a:latin typeface="Cairo"/>
-              </a:defRPr>
-            </a:pPr>
-            <a:r>
-              <a:t>تشخيص مكامن الضعف في إدارة المفاتيح وحماية الجلسات قبل التحسين</a:t>
-            </a:r>
-          </a:p>
-        </p:txBody>
-      </p:sp>
-      <p:sp>
-        <p:nvSpPr>
-          <p:cNvPr id="7" name="Rounded Rectangle 6"/>
+                <a:latin typeface="Arial"/>
+              </a:defRPr>
+            </a:pPr>
+            <a:r>
+              <a:t>حالة التشفير قبل التحسين: مخاطر المفتاح الثابت المشترك</a:t>
+            </a:r>
+          </a:p>
+        </p:txBody>
+      </p:sp>
+      <p:sp>
+        <p:nvSpPr>
+          <p:cNvPr id="6" name="Rounded Rectangle 5"/>
           <p:cNvSpPr/>
           <p:nvPr/>
         </p:nvSpPr>
         <p:spPr>
           <a:xfrm>
-            <a:off x="9144000" y="685800"/>
-            <a:ext cx="2286000" cy="347472"/>
-          </a:xfrm>
-          <a:prstGeom prst="roundRect">
-            <a:avLst/>
-          </a:prstGeom>
-          <a:solidFill>
-            <a:srgbClr val="DC2626"/>
-          </a:solidFill>
-          <a:ln>
-            <a:noFill/>
-          </a:ln>
-        </p:spPr>
-        <p:style>
-          <a:lnRef idx="1">
-            <a:schemeClr val="accent1"/>
-          </a:lnRef>
-          <a:fillRef idx="3">
-            <a:schemeClr val="accent1"/>
-          </a:fillRef>
-          <a:effectRef idx="2">
-            <a:schemeClr val="accent1"/>
-          </a:effectRef>
-          <a:fontRef idx="minor">
-            <a:schemeClr val="lt1"/>
-          </a:fontRef>
-        </p:style>
-        <p:txBody>
-          <a:bodyPr rtlCol="0" anchor="ctr"/>
-          <a:lstStyle/>
-          <a:p>
-            <a:pPr algn="ctr">
-              <a:defRPr sz="1000" b="1">
-                <a:solidFill>
-                  <a:srgbClr val="FFFFFF"/>
-                </a:solidFill>
-                <a:latin typeface="Consolas"/>
-              </a:defRPr>
-            </a:pPr>
-            <a:r>
-              <a:t>CRITICAL GAP</a:t>
-            </a:r>
-          </a:p>
-        </p:txBody>
-      </p:sp>
-      <p:sp>
-        <p:nvSpPr>
-          <p:cNvPr id="8" name="Rectangle 7"/>
-          <p:cNvSpPr/>
-          <p:nvPr/>
-        </p:nvSpPr>
-        <p:spPr>
-          <a:xfrm>
-            <a:off x="731520" y="1463040"/>
-            <a:ext cx="10725912" cy="18288"/>
-          </a:xfrm>
-          <a:prstGeom prst="rect">
-            <a:avLst/>
-          </a:prstGeom>
-          <a:solidFill>
-            <a:srgbClr val="CBD5E1"/>
-          </a:solidFill>
-          <a:ln>
-            <a:noFill/>
-          </a:ln>
-        </p:spPr>
-        <p:style>
-          <a:lnRef idx="1">
-            <a:schemeClr val="accent1"/>
-          </a:lnRef>
-          <a:fillRef idx="3">
-            <a:schemeClr val="accent1"/>
-          </a:fillRef>
-          <a:effectRef idx="2">
-            <a:schemeClr val="accent1"/>
-          </a:effectRef>
-          <a:fontRef idx="minor">
-            <a:schemeClr val="lt1"/>
-          </a:fontRef>
-        </p:style>
-        <p:txBody>
-          <a:bodyPr rtlCol="0" anchor="ctr"/>
-          <a:lstStyle/>
-          <a:p>
-            <a:pPr algn="ctr"/>
-          </a:p>
-        </p:txBody>
-      </p:sp>
-      <p:sp>
-        <p:nvSpPr>
-          <p:cNvPr id="9" name="Rounded Rectangle 8"/>
-          <p:cNvSpPr/>
-          <p:nvPr/>
-        </p:nvSpPr>
-        <p:spPr>
-          <a:xfrm>
-            <a:off x="731520" y="1645920"/>
-            <a:ext cx="5212080" cy="4663440"/>
+            <a:off x="8961120" y="621792"/>
+            <a:ext cx="2377440" cy="438912"/>
           </a:xfrm>
           <a:prstGeom prst="roundRect">
             <a:avLst/>
@@ -7923,129 +6680,112 @@
           </a:fontRef>
         </p:style>
         <p:txBody>
-          <a:bodyPr rtlCol="0" anchor="ctr" wrap="square"/>
+          <a:bodyPr rtlCol="0" anchor="ctr"/>
           <a:lstStyle/>
           <a:p>
             <a:pPr algn="ctr">
-              <a:defRPr sz="1300" b="1">
-                <a:solidFill>
-                  <a:srgbClr val="0F2B5C"/>
-                </a:solidFill>
-                <a:latin typeface="Cairo"/>
-              </a:defRPr>
-            </a:pPr>
-            <a:r>
-              <a:t>⚠️ المخاطر ونقاط الضعف المعمارية السابقة:</a:t>
-            </a:r>
-          </a:p>
-          <a:p>
-            <a:pPr>
-              <a:spcBef>
-                <a:spcPts val="400"/>
-              </a:spcBef>
-              <a:defRPr sz="1050">
-                <a:solidFill>
-                  <a:srgbClr val="0F172A"/>
-                </a:solidFill>
-                <a:latin typeface="Cairo"/>
-              </a:defRPr>
-            </a:pPr>
-            <a:r>
-              <a:t>• مفتاح شبكي موحد ثابت: اشتقاق مفتاح AES-256 عبر PBKDF2 من عبارة مرور ثابتة داخل الكود.</a:t>
-            </a:r>
-          </a:p>
-          <a:p>
-            <a:pPr>
-              <a:spcBef>
-                <a:spcPts val="400"/>
-              </a:spcBef>
-              <a:defRPr sz="1050">
-                <a:solidFill>
-                  <a:srgbClr val="0F172A"/>
-                </a:solidFill>
-                <a:latin typeface="Cairo"/>
-              </a:defRPr>
-            </a:pPr>
-            <a:r>
-              <a:t>• مفتاح مشترك بين الأجهزة والجلسات: فك تشفير حزمة واحدة يكشف بيانات باقي الأجهزة.</a:t>
-            </a:r>
-          </a:p>
-          <a:p>
-            <a:pPr>
-              <a:spcBef>
-                <a:spcPts val="400"/>
-              </a:spcBef>
-              <a:defRPr sz="1050">
-                <a:solidFill>
-                  <a:srgbClr val="0F172A"/>
-                </a:solidFill>
-                <a:latin typeface="Cairo"/>
-              </a:defRPr>
-            </a:pPr>
-            <a:r>
-              <a:t>• غياب تبادل المفاتيح الديناميكي: عدم وجود أي بروتوكول لتبادل المفاتيح بين الأجهزة.</a:t>
-            </a:r>
-          </a:p>
-          <a:p>
-            <a:pPr>
-              <a:spcBef>
-                <a:spcPts val="400"/>
-              </a:spcBef>
-              <a:defRPr sz="1050">
-                <a:solidFill>
-                  <a:srgbClr val="0F172A"/>
-                </a:solidFill>
-                <a:latin typeface="Cairo"/>
-              </a:defRPr>
-            </a:pPr>
-            <a:r>
-              <a:t>• انعدام سرية التوجيه المستقبلي: كشف عبارة المرور يفك تشفير كل الاتصالات السابقة المسجلة.</a:t>
-            </a:r>
-          </a:p>
-          <a:p>
-            <a:pPr>
-              <a:spcBef>
-                <a:spcPts val="400"/>
-              </a:spcBef>
-              <a:defRPr sz="1050">
-                <a:solidFill>
-                  <a:srgbClr val="0F172A"/>
-                </a:solidFill>
-                <a:latin typeface="Cairo"/>
-              </a:defRPr>
-            </a:pPr>
-            <a:r>
-              <a:t>• غياب الهوية المشفرة: الاعتماد على معرفات عشوائية دون مفاتيح غير متماثلة.</a:t>
-            </a:r>
-          </a:p>
-          <a:p>
-            <a:pPr>
-              <a:spcBef>
-                <a:spcPts val="400"/>
-              </a:spcBef>
-              <a:defRPr sz="1050">
-                <a:solidFill>
-                  <a:srgbClr val="0F172A"/>
-                </a:solidFill>
-                <a:latin typeface="Cairo"/>
-              </a:defRPr>
-            </a:pPr>
-            <a:r>
-              <a:t>• الخلاصة: خوارزمية AES-GCM قوية، لكن طريقة إدارة وتوزيع المفتاح كانت نقطة الضعف.</a:t>
-            </a:r>
-          </a:p>
-        </p:txBody>
-      </p:sp>
-      <p:sp>
-        <p:nvSpPr>
-          <p:cNvPr id="10" name="Rounded Rectangle 9"/>
+              <a:defRPr sz="1200" b="1">
+                <a:solidFill>
+                  <a:srgbClr val="DC2626"/>
+                </a:solidFill>
+                <a:latin typeface="Consolas"/>
+              </a:defRPr>
+            </a:pPr>
+            <a:r>
+              <a:t>CRITICAL RISK</a:t>
+            </a:r>
+          </a:p>
+        </p:txBody>
+      </p:sp>
+      <p:sp>
+        <p:nvSpPr>
+          <p:cNvPr id="7" name="Rectangle 6"/>
           <p:cNvSpPr/>
           <p:nvPr/>
         </p:nvSpPr>
         <p:spPr>
           <a:xfrm>
-            <a:off x="6217920" y="1645920"/>
-            <a:ext cx="5212080" cy="4663440"/>
+            <a:off x="822960" y="1353312"/>
+            <a:ext cx="10515600" cy="18288"/>
+          </a:xfrm>
+          <a:prstGeom prst="rect">
+            <a:avLst/>
+          </a:prstGeom>
+          <a:solidFill>
+            <a:srgbClr val="CBD5E1"/>
+          </a:solidFill>
+          <a:ln>
+            <a:noFill/>
+          </a:ln>
+        </p:spPr>
+        <p:style>
+          <a:lnRef idx="1">
+            <a:schemeClr val="accent1"/>
+          </a:lnRef>
+          <a:fillRef idx="3">
+            <a:schemeClr val="accent1"/>
+          </a:fillRef>
+          <a:effectRef idx="2">
+            <a:schemeClr val="accent1"/>
+          </a:effectRef>
+          <a:fontRef idx="minor">
+            <a:schemeClr val="lt1"/>
+          </a:fontRef>
+        </p:style>
+        <p:txBody>
+          <a:bodyPr rtlCol="0" anchor="ctr"/>
+          <a:lstStyle/>
+          <a:p>
+            <a:pPr algn="ctr"/>
+          </a:p>
+        </p:txBody>
+      </p:sp>
+      <p:sp>
+        <p:nvSpPr>
+          <p:cNvPr id="8" name="TextBox 7"/>
+          <p:cNvSpPr txBox="1"/>
+          <p:nvPr/>
+        </p:nvSpPr>
+        <p:spPr>
+          <a:xfrm>
+            <a:off x="822960" y="6309360"/>
+            <a:ext cx="7315200" cy="320040"/>
+          </a:xfrm>
+          <a:prstGeom prst="rect">
+            <a:avLst/>
+          </a:prstGeom>
+          <a:noFill/>
+        </p:spPr>
+        <p:txBody>
+          <a:bodyPr wrap="none">
+            <a:spAutoFit/>
+          </a:bodyPr>
+          <a:lstStyle/>
+          <a:p>
+            <a:pPr>
+              <a:defRPr sz="1100">
+                <a:solidFill>
+                  <a:srgbClr val="475569"/>
+                </a:solidFill>
+                <a:latin typeface="Arial"/>
+              </a:defRPr>
+            </a:pPr>
+            <a:r>
+              <a:t>مشروع تخرج LOCAL CONTACT — مناقشة أكاديمية محكمة</a:t>
+            </a:r>
+          </a:p>
+        </p:txBody>
+      </p:sp>
+      <p:sp>
+        <p:nvSpPr>
+          <p:cNvPr id="9" name="Rounded Rectangle 8"/>
+          <p:cNvSpPr/>
+          <p:nvPr/>
+        </p:nvSpPr>
+        <p:spPr>
+          <a:xfrm>
+            <a:off x="822960" y="1645920"/>
+            <a:ext cx="5120640" cy="4389120"/>
           </a:xfrm>
           <a:prstGeom prst="roundRect">
             <a:avLst/>
@@ -8055,7 +6795,7 @@
           </a:solidFill>
           <a:ln w="19050">
             <a:solidFill>
-              <a:srgbClr val="1E40AF"/>
+              <a:srgbClr val="DC2626"/>
             </a:solidFill>
           </a:ln>
         </p:spPr>
@@ -8078,63 +6818,134 @@
           <a:lstStyle/>
           <a:p>
             <a:pPr algn="ctr">
-              <a:defRPr sz="1300" b="1">
-                <a:solidFill>
-                  <a:srgbClr val="0F2B5C"/>
-                </a:solidFill>
-                <a:latin typeface="Cairo"/>
-              </a:defRPr>
-            </a:pPr>
-            <a:r>
-              <a:t>📂 الملف والمسؤولية البرمجية المعنية:</a:t>
+              <a:defRPr sz="2200" b="1">
+                <a:solidFill>
+                  <a:srgbClr val="DC2626"/>
+                </a:solidFill>
+                <a:latin typeface="Arial"/>
+              </a:defRPr>
+            </a:pPr>
+            <a:r>
+              <a:t>⚠️ المشكلة الأمنية السابقة:</a:t>
             </a:r>
           </a:p>
           <a:p>
             <a:pPr>
               <a:spcBef>
-                <a:spcPts val="400"/>
+                <a:spcPts val="1200"/>
               </a:spcBef>
-              <a:defRPr sz="1050">
+              <a:defRPr sz="1700" b="1">
                 <a:solidFill>
                   <a:srgbClr val="0F172A"/>
                 </a:solidFill>
-                <a:latin typeface="Cairo"/>
-              </a:defRPr>
-            </a:pPr>
-            <a:r>
-              <a:t>• اقتران التشفير مع المفتاح: كان محرك التشفير يقوم بتشفير الرسائل واشتقاق المفتاح الثابت داخلياً بنفسه.</a:t>
+                <a:latin typeface="Arial"/>
+              </a:defRPr>
+            </a:pPr>
+            <a:r>
+              <a:t>• مفتاح شبكي ثابت لجميع الأجهزة مشتق عبر PBKDF2 من كلمة مرور ثابتة داخل الكود.</a:t>
             </a:r>
           </a:p>
           <a:p>
             <a:pPr>
               <a:spcBef>
-                <a:spcPts val="400"/>
+                <a:spcPts val="1200"/>
               </a:spcBef>
-              <a:defRPr sz="1050">
+              <a:defRPr sz="1700" b="1">
                 <a:solidFill>
                   <a:srgbClr val="0F172A"/>
                 </a:solidFill>
-                <a:latin typeface="Cairo"/>
-              </a:defRPr>
-            </a:pPr>
-            <a:r>
-              <a:t>• صعوبة التبديل والتطوير: أي رغبة في استخدام مفاتيح مختلفة كانت تتطلب إعادة كتابة دوال التشفير بالكامل.</a:t>
+                <a:latin typeface="Arial"/>
+              </a:defRPr>
+            </a:pPr>
+            <a:r>
+              <a:t>• غياب بروتوكول لتبادل المفاتيح الديناميكية بين طرفي الاتصال.</a:t>
             </a:r>
           </a:p>
           <a:p>
             <a:pPr>
               <a:spcBef>
-                <a:spcPts val="400"/>
+                <a:spcPts val="1200"/>
               </a:spcBef>
-              <a:defRPr sz="1050">
+              <a:defRPr sz="1700" b="1">
                 <a:solidFill>
                   <a:srgbClr val="0F172A"/>
                 </a:solidFill>
-                <a:latin typeface="Cairo"/>
-              </a:defRPr>
-            </a:pPr>
-            <a:r>
-              <a:t>• غياب التوثيق والتتبع: عدم وجود مواصفات متطلبات تربط الكود بمرجعية أمنية معتمدة.</a:t>
+                <a:latin typeface="Arial"/>
+              </a:defRPr>
+            </a:pPr>
+            <a:r>
+              <a:t>• انعدام السرية المستقبلية (No Forward Secrecy)؛ كشف المفتاح يفضح الماضي بالكامل.</a:t>
+            </a:r>
+          </a:p>
+          <a:p>
+            <a:pPr>
+              <a:spcBef>
+                <a:spcPts val="1200"/>
+              </a:spcBef>
+              <a:defRPr sz="1700" b="1">
+                <a:solidFill>
+                  <a:srgbClr val="0F172A"/>
+                </a:solidFill>
+                <a:latin typeface="Arial"/>
+              </a:defRPr>
+            </a:pPr>
+            <a:r>
+              <a:t>• غياب الهوية الرقمية الموثقة للأجهزة على الشبكة.</a:t>
+            </a:r>
+          </a:p>
+        </p:txBody>
+      </p:sp>
+      <p:sp>
+        <p:nvSpPr>
+          <p:cNvPr id="10" name="Rounded Rectangle 9"/>
+          <p:cNvSpPr/>
+          <p:nvPr/>
+        </p:nvSpPr>
+        <p:spPr>
+          <a:xfrm>
+            <a:off x="6217920" y="1645920"/>
+            <a:ext cx="5120640" cy="4389120"/>
+          </a:xfrm>
+          <a:prstGeom prst="roundRect">
+            <a:avLst/>
+          </a:prstGeom>
+          <a:solidFill>
+            <a:srgbClr val="F8FAFC"/>
+          </a:solidFill>
+          <a:ln w="19050">
+            <a:solidFill>
+              <a:srgbClr val="CBD5E1"/>
+            </a:solidFill>
+          </a:ln>
+        </p:spPr>
+        <p:style>
+          <a:lnRef idx="1">
+            <a:schemeClr val="accent1"/>
+          </a:lnRef>
+          <a:fillRef idx="3">
+            <a:schemeClr val="accent1"/>
+          </a:fillRef>
+          <a:effectRef idx="2">
+            <a:schemeClr val="accent1"/>
+          </a:effectRef>
+          <a:fontRef idx="minor">
+            <a:schemeClr val="lt1"/>
+          </a:fontRef>
+        </p:style>
+        <p:txBody>
+          <a:bodyPr rtlCol="0" anchor="ctr" wrap="square"/>
+          <a:lstStyle/>
+          <a:p>
+            <a:pPr algn="ctr">
+              <a:defRPr sz="2200" b="1">
+                <a:solidFill>
+                  <a:srgbClr val="0F2B5C"/>
+                </a:solidFill>
+                <a:latin typeface="Arial"/>
+              </a:defRPr>
+            </a:pPr>
+            <a:r>
+              <a:t>📂 الملف والمسؤولية في الكود:</a:t>
             </a:r>
           </a:p>
           <a:p>
@@ -8142,41 +6953,63 @@
               <a:spcBef>
                 <a:spcPts val="800"/>
               </a:spcBef>
-              <a:defRPr sz="1050" b="1">
+              <a:defRPr sz="1400" b="1">
                 <a:solidFill>
                   <a:srgbClr val="1E40AF"/>
                 </a:solidFill>
-                <a:latin typeface="Cairo"/>
-              </a:defRPr>
-            </a:pPr>
-            <a:r>
-              <a:t>📂 المكون البرمجي المرتبط:</a:t>
+                <a:latin typeface="Consolas"/>
+              </a:defRPr>
+            </a:pPr>
+            <a:r>
+              <a:t>app/src/main/java/com/example/network/LocalCryptoEngine.kt</a:t>
             </a:r>
           </a:p>
           <a:p>
             <a:pPr>
-              <a:defRPr sz="950" b="1">
-                <a:solidFill>
-                  <a:srgbClr val="0284C7"/>
-                </a:solidFill>
-                <a:latin typeface="Consolas"/>
-              </a:defRPr>
-            </a:pPr>
-            <a:r>
-              <a:t>app/src/main/java/com/example/network/LocalCryptoEngine.kt</a:t>
+              <a:spcBef>
+                <a:spcPts val="1200"/>
+              </a:spcBef>
+              <a:defRPr sz="1700" b="1">
+                <a:solidFill>
+                  <a:srgbClr val="0F172A"/>
+                </a:solidFill>
+                <a:latin typeface="Arial"/>
+              </a:defRPr>
+            </a:pPr>
+            <a:r>
+              <a:t>• المسؤولية: كان يقوم بالتشفير وإدارة المفتاح الثابت داخلياً في نفس الكلاس.</a:t>
             </a:r>
           </a:p>
           <a:p>
             <a:pPr>
-              <a:defRPr sz="950">
-                <a:solidFill>
-                  <a:srgbClr val="475569"/>
-                </a:solidFill>
-                <a:latin typeface="Cairo"/>
-              </a:defRPr>
-            </a:pPr>
-            <a:r>
-              <a:t>المسؤولية السابقة: محرك التشفير المتماثل واشتقاق المفتاح الثابت من عبارة المرور الموحدة.</a:t>
+              <a:spcBef>
+                <a:spcPts val="1200"/>
+              </a:spcBef>
+              <a:defRPr sz="1700" b="1">
+                <a:solidFill>
+                  <a:srgbClr val="0F172A"/>
+                </a:solidFill>
+                <a:latin typeface="Arial"/>
+              </a:defRPr>
+            </a:pPr>
+            <a:r>
+              <a:t>• الخلل المعماري: اقتران صلب (Tight Coupling) بين خوارزمية التشفير وتوليد المفتاح.</a:t>
+            </a:r>
+          </a:p>
+          <a:p>
+            <a:pPr>
+              <a:spcBef>
+                <a:spcPts val="1200"/>
+              </a:spcBef>
+              <a:defRPr sz="1700" b="1">
+                <a:solidFill>
+                  <a:srgbClr val="0F172A"/>
+                </a:solidFill>
+                <a:latin typeface="Arial"/>
+              </a:defRPr>
+            </a:pPr>
+            <a:r>
+              <a:t>• الأثر: كشف ملف APK بالهندسة العكسية يعرض كافة رسائل الشبكة للفك الفوري.</a:t>
             </a:r>
           </a:p>
         </p:txBody>
@@ -8208,7 +7041,7 @@
         <p:spPr>
           <a:xfrm>
             <a:off x="0" y="0"/>
-            <a:ext cx="12191695" cy="109728"/>
+            <a:ext cx="12191695" cy="91440"/>
           </a:xfrm>
           <a:prstGeom prst="rect">
             <a:avLst/>
@@ -8250,8 +7083,8 @@
         </p:nvSpPr>
         <p:spPr>
           <a:xfrm>
-            <a:off x="731520" y="228600"/>
-            <a:ext cx="7772400" cy="365760"/>
+            <a:off x="822960" y="228600"/>
+            <a:ext cx="7772400" cy="320040"/>
           </a:xfrm>
           <a:prstGeom prst="rect">
             <a:avLst/>
@@ -8265,38 +7098,112 @@
           <a:lstStyle/>
           <a:p>
             <a:pPr>
-              <a:defRPr sz="1100" b="1">
-                <a:solidFill>
-                  <a:srgbClr val="0284C7"/>
-                </a:solidFill>
-                <a:latin typeface="Cairo"/>
-              </a:defRPr>
-            </a:pPr>
-            <a:r>
-              <a:t>• هندسة البرمجيات والتصميم المعماري | مشروع LOCAL CONTACT P2P</a:t>
-            </a:r>
-          </a:p>
-        </p:txBody>
-      </p:sp>
-      <p:sp>
-        <p:nvSpPr>
-          <p:cNvPr id="4" name="Rounded Rectangle 3"/>
+              <a:defRPr sz="1300" b="1">
+                <a:solidFill>
+                  <a:srgbClr val="1E40AF"/>
+                </a:solidFill>
+                <a:latin typeface="Arial"/>
+              </a:defRPr>
+            </a:pPr>
+            <a:r>
+              <a:t>LOCAL CONTACT P2P  |  التشفير المتماثل المعتمد</a:t>
+            </a:r>
+          </a:p>
+        </p:txBody>
+      </p:sp>
+      <p:sp>
+        <p:nvSpPr>
+          <p:cNvPr id="4" name="TextBox 3"/>
+          <p:cNvSpPr txBox="1"/>
+          <p:nvPr/>
+        </p:nvSpPr>
+        <p:spPr>
+          <a:xfrm>
+            <a:off x="10241280" y="6309360"/>
+            <a:ext cx="1188720" cy="365760"/>
+          </a:xfrm>
+          <a:prstGeom prst="rect">
+            <a:avLst/>
+          </a:prstGeom>
+          <a:noFill/>
+        </p:spPr>
+        <p:txBody>
+          <a:bodyPr wrap="none">
+            <a:spAutoFit/>
+          </a:bodyPr>
+          <a:lstStyle/>
+          <a:p>
+            <a:pPr algn="r">
+              <a:defRPr sz="1400" b="1">
+                <a:solidFill>
+                  <a:srgbClr val="0F2B5C"/>
+                </a:solidFill>
+                <a:latin typeface="Arial"/>
+              </a:defRPr>
+            </a:pPr>
+            <a:r>
+              <a:t>3 / 12</a:t>
+            </a:r>
+          </a:p>
+        </p:txBody>
+      </p:sp>
+      <p:sp>
+        <p:nvSpPr>
+          <p:cNvPr id="5" name="TextBox 4"/>
+          <p:cNvSpPr txBox="1"/>
+          <p:nvPr/>
+        </p:nvSpPr>
+        <p:spPr>
+          <a:xfrm>
+            <a:off x="822960" y="594360"/>
+            <a:ext cx="8961120" cy="685800"/>
+          </a:xfrm>
+          <a:prstGeom prst="rect">
+            <a:avLst/>
+          </a:prstGeom>
+          <a:noFill/>
+        </p:spPr>
+        <p:txBody>
+          <a:bodyPr wrap="square">
+            <a:spAutoFit/>
+          </a:bodyPr>
+          <a:lstStyle/>
+          <a:p>
+            <a:pPr>
+              <a:defRPr sz="2800" b="1">
+                <a:solidFill>
+                  <a:srgbClr val="0F2B5C"/>
+                </a:solidFill>
+                <a:latin typeface="Arial"/>
+              </a:defRPr>
+            </a:pPr>
+            <a:r>
+              <a:t>التشفير المتماثل ومصادقة البيانات: AES-256-GCM</a:t>
+            </a:r>
+          </a:p>
+        </p:txBody>
+      </p:sp>
+      <p:sp>
+        <p:nvSpPr>
+          <p:cNvPr id="6" name="Rounded Rectangle 5"/>
           <p:cNvSpPr/>
           <p:nvPr/>
         </p:nvSpPr>
         <p:spPr>
           <a:xfrm>
-            <a:off x="10515600" y="228600"/>
-            <a:ext cx="914400" cy="320040"/>
+            <a:off x="8961120" y="621792"/>
+            <a:ext cx="2377440" cy="438912"/>
           </a:xfrm>
           <a:prstGeom prst="roundRect">
             <a:avLst/>
           </a:prstGeom>
           <a:solidFill>
-            <a:srgbClr val="0F2B5C"/>
+            <a:srgbClr val="F8FAFC"/>
           </a:solidFill>
-          <a:ln>
-            <a:noFill/>
+          <a:ln w="19050">
+            <a:solidFill>
+              <a:srgbClr val="059669"/>
+            </a:solidFill>
           </a:ln>
         </p:spPr>
         <p:style>
@@ -8318,154 +7225,29 @@
           <a:lstStyle/>
           <a:p>
             <a:pPr algn="ctr">
-              <a:defRPr sz="1100" b="1">
-                <a:solidFill>
-                  <a:srgbClr val="FFFFFF"/>
+              <a:defRPr sz="1200" b="1">
+                <a:solidFill>
+                  <a:srgbClr val="059669"/>
                 </a:solidFill>
                 <a:latin typeface="Consolas"/>
               </a:defRPr>
             </a:pPr>
             <a:r>
-              <a:t>3 / 12</a:t>
-            </a:r>
-          </a:p>
-        </p:txBody>
-      </p:sp>
-      <p:sp>
-        <p:nvSpPr>
-          <p:cNvPr id="5" name="TextBox 4"/>
-          <p:cNvSpPr txBox="1"/>
-          <p:nvPr/>
-        </p:nvSpPr>
-        <p:spPr>
-          <a:xfrm>
-            <a:off x="731520" y="594360"/>
-            <a:ext cx="8686800" cy="548640"/>
-          </a:xfrm>
-          <a:prstGeom prst="rect">
-            <a:avLst/>
-          </a:prstGeom>
-          <a:noFill/>
-        </p:spPr>
-        <p:txBody>
-          <a:bodyPr wrap="square">
-            <a:spAutoFit/>
-          </a:bodyPr>
-          <a:lstStyle/>
-          <a:p>
-            <a:pPr>
-              <a:defRPr sz="2000" b="1">
-                <a:solidFill>
-                  <a:srgbClr val="0F2B5C"/>
-                </a:solidFill>
-                <a:latin typeface="Cairo"/>
-              </a:defRPr>
-            </a:pPr>
-            <a:r>
-              <a:t>فصل إدارة المفاتيح عبر تجريد KeyProvider</a:t>
-            </a:r>
-          </a:p>
-        </p:txBody>
-      </p:sp>
-      <p:sp>
-        <p:nvSpPr>
-          <p:cNvPr id="6" name="TextBox 5"/>
-          <p:cNvSpPr txBox="1"/>
-          <p:nvPr/>
-        </p:nvSpPr>
-        <p:spPr>
-          <a:xfrm>
-            <a:off x="731520" y="1078992"/>
-            <a:ext cx="8686800" cy="365760"/>
-          </a:xfrm>
-          <a:prstGeom prst="rect">
-            <a:avLst/>
-          </a:prstGeom>
-          <a:noFill/>
-        </p:spPr>
-        <p:txBody>
-          <a:bodyPr wrap="square">
-            <a:spAutoFit/>
-          </a:bodyPr>
-          <a:lstStyle/>
-          <a:p>
-            <a:pPr>
-              <a:defRPr sz="1150">
-                <a:solidFill>
-                  <a:srgbClr val="475569"/>
-                </a:solidFill>
-                <a:latin typeface="Cairo"/>
-              </a:defRPr>
-            </a:pPr>
-            <a:r>
-              <a:t>تطبيق مبادئ SOLID ونمط Provider لعزل مسؤولية اشتقاق المفاتيح</a:t>
-            </a:r>
-          </a:p>
-        </p:txBody>
-      </p:sp>
-      <p:sp>
-        <p:nvSpPr>
-          <p:cNvPr id="7" name="Rounded Rectangle 6"/>
+              <a:t>JVM TESTED (10/10)</a:t>
+            </a:r>
+          </a:p>
+        </p:txBody>
+      </p:sp>
+      <p:sp>
+        <p:nvSpPr>
+          <p:cNvPr id="7" name="Rectangle 6"/>
           <p:cNvSpPr/>
           <p:nvPr/>
         </p:nvSpPr>
         <p:spPr>
           <a:xfrm>
-            <a:off x="9144000" y="685800"/>
-            <a:ext cx="2286000" cy="347472"/>
-          </a:xfrm>
-          <a:prstGeom prst="roundRect">
-            <a:avLst/>
-          </a:prstGeom>
-          <a:solidFill>
-            <a:srgbClr val="059669"/>
-          </a:solidFill>
-          <a:ln>
-            <a:noFill/>
-          </a:ln>
-        </p:spPr>
-        <p:style>
-          <a:lnRef idx="1">
-            <a:schemeClr val="accent1"/>
-          </a:lnRef>
-          <a:fillRef idx="3">
-            <a:schemeClr val="accent1"/>
-          </a:fillRef>
-          <a:effectRef idx="2">
-            <a:schemeClr val="accent1"/>
-          </a:effectRef>
-          <a:fontRef idx="minor">
-            <a:schemeClr val="lt1"/>
-          </a:fontRef>
-        </p:style>
-        <p:txBody>
-          <a:bodyPr rtlCol="0" anchor="ctr"/>
-          <a:lstStyle/>
-          <a:p>
-            <a:pPr algn="ctr">
-              <a:defRPr sz="1000" b="1">
-                <a:solidFill>
-                  <a:srgbClr val="FFFFFF"/>
-                </a:solidFill>
-                <a:latin typeface="Consolas"/>
-              </a:defRPr>
-            </a:pPr>
-            <a:r>
-              <a:t>IMPLEMENTED</a:t>
-            </a:r>
-          </a:p>
-        </p:txBody>
-      </p:sp>
-      <p:sp>
-        <p:nvSpPr>
-          <p:cNvPr id="8" name="Rectangle 7"/>
-          <p:cNvSpPr/>
-          <p:nvPr/>
-        </p:nvSpPr>
-        <p:spPr>
-          <a:xfrm>
-            <a:off x="731520" y="1463040"/>
-            <a:ext cx="10725912" cy="18288"/>
+            <a:off x="822960" y="1353312"/>
+            <a:ext cx="10515600" cy="18288"/>
           </a:xfrm>
           <a:prstGeom prst="rect">
             <a:avLst/>
@@ -8501,14 +7283,50 @@
       </p:sp>
       <p:sp>
         <p:nvSpPr>
+          <p:cNvPr id="8" name="TextBox 7"/>
+          <p:cNvSpPr txBox="1"/>
+          <p:nvPr/>
+        </p:nvSpPr>
+        <p:spPr>
+          <a:xfrm>
+            <a:off x="822960" y="6309360"/>
+            <a:ext cx="7315200" cy="320040"/>
+          </a:xfrm>
+          <a:prstGeom prst="rect">
+            <a:avLst/>
+          </a:prstGeom>
+          <a:noFill/>
+        </p:spPr>
+        <p:txBody>
+          <a:bodyPr wrap="none">
+            <a:spAutoFit/>
+          </a:bodyPr>
+          <a:lstStyle/>
+          <a:p>
+            <a:pPr>
+              <a:defRPr sz="1100">
+                <a:solidFill>
+                  <a:srgbClr val="475569"/>
+                </a:solidFill>
+                <a:latin typeface="Arial"/>
+              </a:defRPr>
+            </a:pPr>
+            <a:r>
+              <a:t>مشروع تخرج LOCAL CONTACT — مناقشة أكاديمية محكمة</a:t>
+            </a:r>
+          </a:p>
+        </p:txBody>
+      </p:sp>
+      <p:sp>
+        <p:nvSpPr>
           <p:cNvPr id="9" name="Rounded Rectangle 8"/>
           <p:cNvSpPr/>
           <p:nvPr/>
         </p:nvSpPr>
         <p:spPr>
           <a:xfrm>
-            <a:off x="731520" y="1645920"/>
-            <a:ext cx="5212080" cy="4663440"/>
+            <a:off x="822960" y="1645920"/>
+            <a:ext cx="10515600" cy="4389120"/>
           </a:xfrm>
           <a:prstGeom prst="roundRect">
             <a:avLst/>
@@ -8518,7 +7336,7 @@
           </a:solidFill>
           <a:ln w="19050">
             <a:solidFill>
-              <a:srgbClr val="1E40AF"/>
+              <a:srgbClr val="CBD5E1"/>
             </a:solidFill>
           </a:ln>
         </p:spPr>
@@ -8541,224 +7359,95 @@
           <a:lstStyle/>
           <a:p>
             <a:pPr algn="ctr">
-              <a:defRPr sz="1300" b="1">
+              <a:defRPr sz="2200" b="1">
                 <a:solidFill>
                   <a:srgbClr val="0F2B5C"/>
                 </a:solidFill>
-                <a:latin typeface="Cairo"/>
-              </a:defRPr>
-            </a:pPr>
-            <a:r>
-              <a:t>🧩 المبادئ الهندسية ونمط التصميم المطبق:</a:t>
+                <a:latin typeface="Arial"/>
+              </a:defRPr>
+            </a:pPr>
+            <a:r>
+              <a:t>🔒 الركائز الأساسية لخوارزمية AES-256-GCM في النظام:</a:t>
             </a:r>
           </a:p>
           <a:p>
             <a:pPr>
               <a:spcBef>
-                <a:spcPts val="400"/>
+                <a:spcPts val="1200"/>
               </a:spcBef>
-              <a:defRPr sz="1050">
+              <a:defRPr sz="1800" b="1">
                 <a:solidFill>
                   <a:srgbClr val="0F172A"/>
                 </a:solidFill>
-                <a:latin typeface="Cairo"/>
-              </a:defRPr>
-            </a:pPr>
-            <a:r>
-              <a:t>• تطبيق مبدأ عكس التبعيات (DIP): محرك التشفير لم يعد يشتق المفتاح بنفسه، بل يعتمد على واجهة مجردة.</a:t>
+                <a:latin typeface="Arial"/>
+              </a:defRPr>
+            </a:pPr>
+            <a:r>
+              <a:t>• السرية التامة (Confidentiality): تشفير متماثل بمفتاح 256-bit قياسي ومعتمد دولياً من NIST.</a:t>
             </a:r>
           </a:p>
           <a:p>
             <a:pPr>
               <a:spcBef>
-                <a:spcPts val="400"/>
+                <a:spcPts val="1200"/>
               </a:spcBef>
-              <a:defRPr sz="1050">
+              <a:defRPr sz="1800" b="1">
                 <a:solidFill>
                   <a:srgbClr val="0F172A"/>
                 </a:solidFill>
-                <a:latin typeface="Cairo"/>
-              </a:defRPr>
-            </a:pPr>
-            <a:r>
-              <a:t>• مبدأ المسؤولية الفردية (SRP): عزل مسؤولية توليد المفاتيح عن عمليات التشفير والـ Cipher.</a:t>
+                <a:latin typeface="Arial"/>
+              </a:defRPr>
+            </a:pPr>
+            <a:r>
+              <a:t>• سلامة البيانات (Data Integrity): وسم مصادقة 128-bit Authentication Tag يكشف أي تلاعب بالبيانات فوراً.</a:t>
             </a:r>
           </a:p>
           <a:p>
             <a:pPr>
               <a:spcBef>
-                <a:spcPts val="400"/>
+                <a:spcPts val="1200"/>
               </a:spcBef>
-              <a:defRPr sz="1050">
+              <a:defRPr sz="1800" b="1">
                 <a:solidFill>
                   <a:srgbClr val="0F172A"/>
                 </a:solidFill>
-                <a:latin typeface="Cairo"/>
-              </a:defRPr>
-            </a:pPr>
-            <a:r>
-              <a:t>• نمط المزود (Provider / Strategy Pattern): إمكانية إضافة استراتيجيات مفاتيح جديدة مستقبلاً دون المساس بمحرك التشفير.</a:t>
+                <a:latin typeface="Arial"/>
+              </a:defRPr>
+            </a:pPr>
+            <a:r>
+              <a:t>• عشوائية الإرسال (Nonce Uniqueness): رقم عشوائي فريد بطول 12-byte (96-bit) يولد لكل حزمة لمنع هجمات التكرار.</a:t>
             </a:r>
           </a:p>
           <a:p>
             <a:pPr>
               <a:spcBef>
-                <a:spcPts val="400"/>
+                <a:spcPts val="1200"/>
               </a:spcBef>
-              <a:defRPr sz="1050">
+              <a:defRPr sz="1800" b="1">
                 <a:solidFill>
                   <a:srgbClr val="0F172A"/>
                 </a:solidFill>
-                <a:latin typeface="Cairo"/>
-              </a:defRPr>
-            </a:pPr>
-            <a:r>
-              <a:t>• التوافق العكسي (Backward Compatibility): الحفاظ على سلوك المفتاح القديم مؤقتاً عبر LegacyStaticKeyProvider.</a:t>
-            </a:r>
-          </a:p>
-        </p:txBody>
-      </p:sp>
-      <p:sp>
-        <p:nvSpPr>
-          <p:cNvPr id="10" name="Rounded Rectangle 9"/>
-          <p:cNvSpPr/>
-          <p:nvPr/>
-        </p:nvSpPr>
-        <p:spPr>
-          <a:xfrm>
-            <a:off x="6217920" y="1645920"/>
-            <a:ext cx="5212080" cy="4663440"/>
-          </a:xfrm>
-          <a:prstGeom prst="roundRect">
-            <a:avLst/>
-          </a:prstGeom>
-          <a:solidFill>
-            <a:srgbClr val="F8FAFC"/>
-          </a:solidFill>
-          <a:ln w="19050">
-            <a:solidFill>
-              <a:srgbClr val="1E40AF"/>
-            </a:solidFill>
-          </a:ln>
-        </p:spPr>
-        <p:style>
-          <a:lnRef idx="1">
-            <a:schemeClr val="accent1"/>
-          </a:lnRef>
-          <a:fillRef idx="3">
-            <a:schemeClr val="accent1"/>
-          </a:fillRef>
-          <a:effectRef idx="2">
-            <a:schemeClr val="accent1"/>
-          </a:effectRef>
-          <a:fontRef idx="minor">
-            <a:schemeClr val="lt1"/>
-          </a:fontRef>
-        </p:style>
-        <p:txBody>
-          <a:bodyPr rtlCol="0" anchor="ctr" wrap="square"/>
-          <a:lstStyle/>
-          <a:p>
-            <a:pPr algn="ctr">
-              <a:defRPr sz="1300" b="1">
-                <a:solidFill>
-                  <a:srgbClr val="0F2B5C"/>
-                </a:solidFill>
-                <a:latin typeface="Cairo"/>
-              </a:defRPr>
-            </a:pPr>
-            <a:r>
-              <a:t>📂 الملفات المضافة والمعدلة:</a:t>
+                <a:latin typeface="Arial"/>
+              </a:defRPr>
+            </a:pPr>
+            <a:r>
+              <a:t>• تشفير تدفق الملفات (Chunk Encryption): اشتقاق Nonce مستقل لكل كتلة ملف (64KB) عبر deriveChunkNonce().</a:t>
             </a:r>
           </a:p>
           <a:p>
             <a:pPr>
               <a:spcBef>
-                <a:spcPts val="400"/>
+                <a:spcPts val="1200"/>
               </a:spcBef>
-              <a:defRPr sz="1050">
+              <a:defRPr sz="1800" b="1">
                 <a:solidFill>
                   <a:srgbClr val="0F172A"/>
                 </a:solidFill>
-                <a:latin typeface="Cairo"/>
-              </a:defRPr>
-            </a:pPr>
-            <a:r>
-              <a:t>• تجريد المفاتيح: إنشاء واجهة KeyProvider البرمجية.</a:t>
-            </a:r>
-          </a:p>
-          <a:p>
-            <a:pPr>
-              <a:spcBef>
-                <a:spcPts val="400"/>
-              </a:spcBef>
-              <a:defRPr sz="1050">
-                <a:solidFill>
-                  <a:srgbClr val="0F172A"/>
-                </a:solidFill>
-                <a:latin typeface="Cairo"/>
-              </a:defRPr>
-            </a:pPr>
-            <a:r>
-              <a:t>• التوافق مع القديم: تنفيذ كلاس LegacyStaticKeyProvider للحفاظ على سلوك PBKDF2 القديم مؤقتاً.</a:t>
-            </a:r>
-          </a:p>
-          <a:p>
-            <a:pPr>
-              <a:spcBef>
-                <a:spcPts val="400"/>
-              </a:spcBef>
-              <a:defRPr sz="1050">
-                <a:solidFill>
-                  <a:srgbClr val="0F172A"/>
-                </a:solidFill>
-                <a:latin typeface="Cairo"/>
-              </a:defRPr>
-            </a:pPr>
-            <a:r>
-              <a:t>• تعديل المحرك: تحديث LocalCryptoEngine ليعتمد على KeyProvider لتمرير المفتاح النشط.</a:t>
-            </a:r>
-          </a:p>
-          <a:p>
-            <a:pPr>
-              <a:spcBef>
-                <a:spcPts val="800"/>
-              </a:spcBef>
-              <a:defRPr sz="1050" b="1">
-                <a:solidFill>
-                  <a:srgbClr val="1E40AF"/>
-                </a:solidFill>
-                <a:latin typeface="Cairo"/>
-              </a:defRPr>
-            </a:pPr>
-            <a:r>
-              <a:t>📂 المكون البرمجي المرتبط:</a:t>
-            </a:r>
-          </a:p>
-          <a:p>
-            <a:pPr>
-              <a:defRPr sz="950" b="1">
-                <a:solidFill>
-                  <a:srgbClr val="0284C7"/>
-                </a:solidFill>
-                <a:latin typeface="Consolas"/>
-              </a:defRPr>
-            </a:pPr>
-            <a:r>
-              <a:t>app/src/main/java/com/example/network/KeyProvider.kt</a:t>
-            </a:r>
-          </a:p>
-          <a:p>
-            <a:pPr>
-              <a:defRPr sz="950">
-                <a:solidFill>
-                  <a:srgbClr val="475569"/>
-                </a:solidFill>
-                <a:latin typeface="Cairo"/>
-              </a:defRPr>
-            </a:pPr>
-            <a:r>
-              <a:t>ملف جديد يحتوي واجهة KeyProvider وتطبيق LegacyStaticKeyProvider لعزل التبعية.</a:t>
+                <a:latin typeface="Arial"/>
+              </a:defRPr>
+            </a:pPr>
+            <a:r>
+              <a:t>• الأدلة البرمجية والاختبارات: LocalCryptoEngine.kt تم فحصه بـ 10 اختبارات وحدة في LocalCryptoEngineTest.</a:t>
             </a:r>
           </a:p>
         </p:txBody>
@@ -8790,7 +7479,7 @@
         <p:spPr>
           <a:xfrm>
             <a:off x="0" y="0"/>
-            <a:ext cx="12191695" cy="109728"/>
+            <a:ext cx="12191695" cy="91440"/>
           </a:xfrm>
           <a:prstGeom prst="rect">
             <a:avLst/>
@@ -8832,8 +7521,8 @@
         </p:nvSpPr>
         <p:spPr>
           <a:xfrm>
-            <a:off x="731520" y="228600"/>
-            <a:ext cx="7772400" cy="365760"/>
+            <a:off x="822960" y="228600"/>
+            <a:ext cx="7772400" cy="320040"/>
           </a:xfrm>
           <a:prstGeom prst="rect">
             <a:avLst/>
@@ -8847,38 +7536,112 @@
           <a:lstStyle/>
           <a:p>
             <a:pPr>
-              <a:defRPr sz="1100" b="1">
-                <a:solidFill>
-                  <a:srgbClr val="0284C7"/>
-                </a:solidFill>
-                <a:latin typeface="Cairo"/>
-              </a:defRPr>
-            </a:pPr>
-            <a:r>
-              <a:t>• التشفير المتماثل المعتمد | مشروع LOCAL CONTACT P2P</a:t>
-            </a:r>
-          </a:p>
-        </p:txBody>
-      </p:sp>
-      <p:sp>
-        <p:nvSpPr>
-          <p:cNvPr id="4" name="Rounded Rectangle 3"/>
+              <a:defRPr sz="1300" b="1">
+                <a:solidFill>
+                  <a:srgbClr val="1E40AF"/>
+                </a:solidFill>
+                <a:latin typeface="Arial"/>
+              </a:defRPr>
+            </a:pPr>
+            <a:r>
+              <a:t>LOCAL CONTACT P2P  |  تبادل المفاتيح الديناميكي</a:t>
+            </a:r>
+          </a:p>
+        </p:txBody>
+      </p:sp>
+      <p:sp>
+        <p:nvSpPr>
+          <p:cNvPr id="4" name="TextBox 3"/>
+          <p:cNvSpPr txBox="1"/>
+          <p:nvPr/>
+        </p:nvSpPr>
+        <p:spPr>
+          <a:xfrm>
+            <a:off x="10241280" y="6309360"/>
+            <a:ext cx="1188720" cy="365760"/>
+          </a:xfrm>
+          <a:prstGeom prst="rect">
+            <a:avLst/>
+          </a:prstGeom>
+          <a:noFill/>
+        </p:spPr>
+        <p:txBody>
+          <a:bodyPr wrap="none">
+            <a:spAutoFit/>
+          </a:bodyPr>
+          <a:lstStyle/>
+          <a:p>
+            <a:pPr algn="r">
+              <a:defRPr sz="1400" b="1">
+                <a:solidFill>
+                  <a:srgbClr val="0F2B5C"/>
+                </a:solidFill>
+                <a:latin typeface="Arial"/>
+              </a:defRPr>
+            </a:pPr>
+            <a:r>
+              <a:t>4 / 12</a:t>
+            </a:r>
+          </a:p>
+        </p:txBody>
+      </p:sp>
+      <p:sp>
+        <p:nvSpPr>
+          <p:cNvPr id="5" name="TextBox 4"/>
+          <p:cNvSpPr txBox="1"/>
+          <p:nvPr/>
+        </p:nvSpPr>
+        <p:spPr>
+          <a:xfrm>
+            <a:off x="822960" y="594360"/>
+            <a:ext cx="8961120" cy="685800"/>
+          </a:xfrm>
+          <a:prstGeom prst="rect">
+            <a:avLst/>
+          </a:prstGeom>
+          <a:noFill/>
+        </p:spPr>
+        <p:txBody>
+          <a:bodyPr wrap="square">
+            <a:spAutoFit/>
+          </a:bodyPr>
+          <a:lstStyle/>
+          <a:p>
+            <a:pPr>
+              <a:defRPr sz="2800" b="1">
+                <a:solidFill>
+                  <a:srgbClr val="0F2B5C"/>
+                </a:solidFill>
+                <a:latin typeface="Arial"/>
+              </a:defRPr>
+            </a:pPr>
+            <a:r>
+              <a:t>تبادل المفاتيح وتأمين السرية التامة: ECDH (NIST P-256)</a:t>
+            </a:r>
+          </a:p>
+        </p:txBody>
+      </p:sp>
+      <p:sp>
+        <p:nvSpPr>
+          <p:cNvPr id="6" name="Rounded Rectangle 5"/>
           <p:cNvSpPr/>
           <p:nvPr/>
         </p:nvSpPr>
         <p:spPr>
           <a:xfrm>
-            <a:off x="10515600" y="228600"/>
-            <a:ext cx="914400" cy="320040"/>
+            <a:off x="8961120" y="621792"/>
+            <a:ext cx="2377440" cy="438912"/>
           </a:xfrm>
           <a:prstGeom prst="roundRect">
             <a:avLst/>
           </a:prstGeom>
           <a:solidFill>
-            <a:srgbClr val="0F2B5C"/>
+            <a:srgbClr val="F8FAFC"/>
           </a:solidFill>
-          <a:ln>
-            <a:noFill/>
+          <a:ln w="19050">
+            <a:solidFill>
+              <a:srgbClr val="059669"/>
+            </a:solidFill>
           </a:ln>
         </p:spPr>
         <p:style>
@@ -8900,154 +7663,29 @@
           <a:lstStyle/>
           <a:p>
             <a:pPr algn="ctr">
-              <a:defRPr sz="1100" b="1">
-                <a:solidFill>
-                  <a:srgbClr val="FFFFFF"/>
+              <a:defRPr sz="1200" b="1">
+                <a:solidFill>
+                  <a:srgbClr val="059669"/>
                 </a:solidFill>
                 <a:latin typeface="Consolas"/>
               </a:defRPr>
             </a:pPr>
             <a:r>
-              <a:t>4 / 12</a:t>
-            </a:r>
-          </a:p>
-        </p:txBody>
-      </p:sp>
-      <p:sp>
-        <p:nvSpPr>
-          <p:cNvPr id="5" name="TextBox 4"/>
-          <p:cNvSpPr txBox="1"/>
-          <p:nvPr/>
-        </p:nvSpPr>
-        <p:spPr>
-          <a:xfrm>
-            <a:off x="731520" y="594360"/>
-            <a:ext cx="8686800" cy="548640"/>
-          </a:xfrm>
-          <a:prstGeom prst="rect">
-            <a:avLst/>
-          </a:prstGeom>
-          <a:noFill/>
-        </p:spPr>
-        <p:txBody>
-          <a:bodyPr wrap="square">
-            <a:spAutoFit/>
-          </a:bodyPr>
-          <a:lstStyle/>
-          <a:p>
-            <a:pPr>
-              <a:defRPr sz="2000" b="1">
-                <a:solidFill>
-                  <a:srgbClr val="0F2B5C"/>
-                </a:solidFill>
-                <a:latin typeface="Cairo"/>
-              </a:defRPr>
-            </a:pPr>
-            <a:r>
-              <a:t>التشفير المتماثل الأساسي: AES-256-GCM</a:t>
-            </a:r>
-          </a:p>
-        </p:txBody>
-      </p:sp>
-      <p:sp>
-        <p:nvSpPr>
-          <p:cNvPr id="6" name="TextBox 5"/>
-          <p:cNvSpPr txBox="1"/>
-          <p:nvPr/>
-        </p:nvSpPr>
-        <p:spPr>
-          <a:xfrm>
-            <a:off x="731520" y="1078992"/>
-            <a:ext cx="8686800" cy="365760"/>
-          </a:xfrm>
-          <a:prstGeom prst="rect">
-            <a:avLst/>
-          </a:prstGeom>
-          <a:noFill/>
-        </p:spPr>
-        <p:txBody>
-          <a:bodyPr wrap="square">
-            <a:spAutoFit/>
-          </a:bodyPr>
-          <a:lstStyle/>
-          <a:p>
-            <a:pPr>
-              <a:defRPr sz="1150">
-                <a:solidFill>
-                  <a:srgbClr val="475569"/>
-                </a:solidFill>
-                <a:latin typeface="Cairo"/>
-              </a:defRPr>
-            </a:pPr>
-            <a:r>
-              <a:t>الحفاظ على التشفير المصادق المعتمد لضمان السرية وسلامة البيانات</a:t>
-            </a:r>
-          </a:p>
-        </p:txBody>
-      </p:sp>
-      <p:sp>
-        <p:nvSpPr>
-          <p:cNvPr id="7" name="Rounded Rectangle 6"/>
+              <a:t>JVM TESTED (8/8)</a:t>
+            </a:r>
+          </a:p>
+        </p:txBody>
+      </p:sp>
+      <p:sp>
+        <p:nvSpPr>
+          <p:cNvPr id="7" name="Rectangle 6"/>
           <p:cNvSpPr/>
           <p:nvPr/>
         </p:nvSpPr>
         <p:spPr>
           <a:xfrm>
-            <a:off x="9144000" y="685800"/>
-            <a:ext cx="2286000" cy="347472"/>
-          </a:xfrm>
-          <a:prstGeom prst="roundRect">
-            <a:avLst/>
-          </a:prstGeom>
-          <a:solidFill>
-            <a:srgbClr val="059669"/>
-          </a:solidFill>
-          <a:ln>
-            <a:noFill/>
-          </a:ln>
-        </p:spPr>
-        <p:style>
-          <a:lnRef idx="1">
-            <a:schemeClr val="accent1"/>
-          </a:lnRef>
-          <a:fillRef idx="3">
-            <a:schemeClr val="accent1"/>
-          </a:fillRef>
-          <a:effectRef idx="2">
-            <a:schemeClr val="accent1"/>
-          </a:effectRef>
-          <a:fontRef idx="minor">
-            <a:schemeClr val="lt1"/>
-          </a:fontRef>
-        </p:style>
-        <p:txBody>
-          <a:bodyPr rtlCol="0" anchor="ctr"/>
-          <a:lstStyle/>
-          <a:p>
-            <a:pPr algn="ctr">
-              <a:defRPr sz="1000" b="1">
-                <a:solidFill>
-                  <a:srgbClr val="FFFFFF"/>
-                </a:solidFill>
-                <a:latin typeface="Consolas"/>
-              </a:defRPr>
-            </a:pPr>
-            <a:r>
-              <a:t>JVM TESTED (10/10)</a:t>
-            </a:r>
-          </a:p>
-        </p:txBody>
-      </p:sp>
-      <p:sp>
-        <p:nvSpPr>
-          <p:cNvPr id="8" name="Rectangle 7"/>
-          <p:cNvSpPr/>
-          <p:nvPr/>
-        </p:nvSpPr>
-        <p:spPr>
-          <a:xfrm>
-            <a:off x="731520" y="1463040"/>
-            <a:ext cx="10725912" cy="18288"/>
+            <a:off x="822960" y="1353312"/>
+            <a:ext cx="10515600" cy="18288"/>
           </a:xfrm>
           <a:prstGeom prst="rect">
             <a:avLst/>
@@ -9083,14 +7721,50 @@
       </p:sp>
       <p:sp>
         <p:nvSpPr>
+          <p:cNvPr id="8" name="TextBox 7"/>
+          <p:cNvSpPr txBox="1"/>
+          <p:nvPr/>
+        </p:nvSpPr>
+        <p:spPr>
+          <a:xfrm>
+            <a:off x="822960" y="6309360"/>
+            <a:ext cx="7315200" cy="320040"/>
+          </a:xfrm>
+          <a:prstGeom prst="rect">
+            <a:avLst/>
+          </a:prstGeom>
+          <a:noFill/>
+        </p:spPr>
+        <p:txBody>
+          <a:bodyPr wrap="none">
+            <a:spAutoFit/>
+          </a:bodyPr>
+          <a:lstStyle/>
+          <a:p>
+            <a:pPr>
+              <a:defRPr sz="1100">
+                <a:solidFill>
+                  <a:srgbClr val="475569"/>
+                </a:solidFill>
+                <a:latin typeface="Arial"/>
+              </a:defRPr>
+            </a:pPr>
+            <a:r>
+              <a:t>مشروع تخرج LOCAL CONTACT — مناقشة أكاديمية محكمة</a:t>
+            </a:r>
+          </a:p>
+        </p:txBody>
+      </p:sp>
+      <p:sp>
+        <p:nvSpPr>
           <p:cNvPr id="9" name="Rounded Rectangle 8"/>
           <p:cNvSpPr/>
           <p:nvPr/>
         </p:nvSpPr>
         <p:spPr>
           <a:xfrm>
-            <a:off x="731520" y="1645920"/>
-            <a:ext cx="3383280" cy="4663440"/>
+            <a:off x="822960" y="1645920"/>
+            <a:ext cx="5120640" cy="4389120"/>
           </a:xfrm>
           <a:prstGeom prst="roundRect">
             <a:avLst/>
@@ -9123,63 +7797,79 @@
           <a:lstStyle/>
           <a:p>
             <a:pPr algn="ctr">
-              <a:defRPr sz="1300" b="1">
+              <a:defRPr sz="2200" b="1">
                 <a:solidFill>
                   <a:srgbClr val="0F2B5C"/>
                 </a:solidFill>
-                <a:latin typeface="Cairo"/>
-              </a:defRPr>
-            </a:pPr>
-            <a:r>
-              <a:t>🔒 السرية التامة:</a:t>
+                <a:latin typeface="Arial"/>
+              </a:defRPr>
+            </a:pPr>
+            <a:r>
+              <a:t>⚡ المبادئ الأمنية لتبادل المفاتيح ECDH:</a:t>
             </a:r>
           </a:p>
           <a:p>
             <a:pPr>
               <a:spcBef>
-                <a:spcPts val="400"/>
+                <a:spcPts val="1200"/>
               </a:spcBef>
-              <a:defRPr sz="1050">
+              <a:defRPr sz="1700" b="1">
                 <a:solidFill>
                   <a:srgbClr val="0F172A"/>
                 </a:solidFill>
-                <a:latin typeface="Cairo"/>
-              </a:defRPr>
-            </a:pPr>
-            <a:r>
-              <a:t>• مفتاح AES بطول 256 بت.</a:t>
+                <a:latin typeface="Arial"/>
+              </a:defRPr>
+            </a:pPr>
+            <a:r>
+              <a:t>• المنحنى المعتمد: secp256r1 (NIST P-256) القياسي والمدعوم في عتاد أندرويد.</a:t>
             </a:r>
           </a:p>
           <a:p>
             <a:pPr>
               <a:spcBef>
-                <a:spcPts val="400"/>
+                <a:spcPts val="1200"/>
               </a:spcBef>
-              <a:defRPr sz="1050">
+              <a:defRPr sz="1700" b="1">
                 <a:solidFill>
                   <a:srgbClr val="0F172A"/>
                 </a:solidFill>
-                <a:latin typeface="Cairo"/>
-              </a:defRPr>
-            </a:pPr>
-            <a:r>
-              <a:t>• خوارزمية قياسية معتمدة من NIST (FIPS 197).</a:t>
+                <a:latin typeface="Arial"/>
+              </a:defRPr>
+            </a:pPr>
+            <a:r>
+              <a:t>• مفاتيح مؤقتة (Ephemeral Keys): توليد زوج مفاتيح جديد تماماً لكل محادثة أو جلسة.</a:t>
             </a:r>
           </a:p>
           <a:p>
             <a:pPr>
               <a:spcBef>
-                <a:spcPts val="400"/>
+                <a:spcPts val="1200"/>
               </a:spcBef>
-              <a:defRPr sz="1050">
+              <a:defRPr sz="1700" b="1">
                 <a:solidFill>
                   <a:srgbClr val="0F172A"/>
                 </a:solidFill>
-                <a:latin typeface="Cairo"/>
-              </a:defRPr>
-            </a:pPr>
-            <a:r>
-              <a:t>• أداء سريع ومعالجة متوازية على الأجهزة المحمولة.</a:t>
+                <a:latin typeface="Arial"/>
+              </a:defRPr>
+            </a:pPr>
+            <a:r>
+              <a:t>• السرية المستقبلية (Forward Secrecy): إتلاف المفتاح الخاص المؤقت فور حساب السر المشترك.</a:t>
+            </a:r>
+          </a:p>
+          <a:p>
+            <a:pPr>
+              <a:spcBef>
+                <a:spcPts val="1200"/>
+              </a:spcBef>
+              <a:defRPr sz="1700" b="1">
+                <a:solidFill>
+                  <a:srgbClr val="0F172A"/>
+                </a:solidFill>
+                <a:latin typeface="Arial"/>
+              </a:defRPr>
+            </a:pPr>
+            <a:r>
+              <a:t>• منع التنصت: حتى لو صودر الهاتف لاحقاً، يستحيل فك تشفير الجلسات السابقة المسجلة.</a:t>
             </a:r>
           </a:p>
         </p:txBody>
@@ -9192,8 +7882,8 @@
         </p:nvSpPr>
         <p:spPr>
           <a:xfrm>
-            <a:off x="4389120" y="1645920"/>
-            <a:ext cx="3383280" cy="4663440"/>
+            <a:off x="6217920" y="1645920"/>
+            <a:ext cx="5120640" cy="4389120"/>
           </a:xfrm>
           <a:prstGeom prst="roundRect">
             <a:avLst/>
@@ -9203,7 +7893,7 @@
           </a:solidFill>
           <a:ln w="19050">
             <a:solidFill>
-              <a:srgbClr val="1E40AF"/>
+              <a:srgbClr val="CBD5E1"/>
             </a:solidFill>
           </a:ln>
         </p:spPr>
@@ -9226,166 +7916,15 @@
           <a:lstStyle/>
           <a:p>
             <a:pPr algn="ctr">
-              <a:defRPr sz="1300" b="1">
+              <a:defRPr sz="2200" b="1">
                 <a:solidFill>
                   <a:srgbClr val="0F2B5C"/>
                 </a:solidFill>
-                <a:latin typeface="Cairo"/>
-              </a:defRPr>
-            </a:pPr>
-            <a:r>
-              <a:t>🛡️ سلامة البيانات (AEAD):</a:t>
-            </a:r>
-          </a:p>
-          <a:p>
-            <a:pPr>
-              <a:spcBef>
-                <a:spcPts val="400"/>
-              </a:spcBef>
-              <a:defRPr sz="1050">
-                <a:solidFill>
-                  <a:srgbClr val="0F172A"/>
-                </a:solidFill>
-                <a:latin typeface="Cairo"/>
-              </a:defRPr>
-            </a:pPr>
-            <a:r>
-              <a:t>• وسم مصادقة بطول 128 بت (Tag).</a:t>
-            </a:r>
-          </a:p>
-          <a:p>
-            <a:pPr>
-              <a:spcBef>
-                <a:spcPts val="400"/>
-              </a:spcBef>
-              <a:defRPr sz="1050">
-                <a:solidFill>
-                  <a:srgbClr val="0F172A"/>
-                </a:solidFill>
-                <a:latin typeface="Cairo"/>
-              </a:defRPr>
-            </a:pPr>
-            <a:r>
-              <a:t>• رفض فك التشفير تلقائياً عند أي تعديل في النص المشفر.</a:t>
-            </a:r>
-          </a:p>
-          <a:p>
-            <a:pPr>
-              <a:spcBef>
-                <a:spcPts val="400"/>
-              </a:spcBef>
-              <a:defRPr sz="1050">
-                <a:solidFill>
-                  <a:srgbClr val="0F172A"/>
-                </a:solidFill>
-                <a:latin typeface="Cairo"/>
-              </a:defRPr>
-            </a:pPr>
-            <a:r>
-              <a:t>• حماية كاملة من هجمات التلاعب بالبتات (Bit-Flipping).</a:t>
-            </a:r>
-          </a:p>
-        </p:txBody>
-      </p:sp>
-      <p:sp>
-        <p:nvSpPr>
-          <p:cNvPr id="11" name="Rounded Rectangle 10"/>
-          <p:cNvSpPr/>
-          <p:nvPr/>
-        </p:nvSpPr>
-        <p:spPr>
-          <a:xfrm>
-            <a:off x="8046720" y="1645920"/>
-            <a:ext cx="3383280" cy="4663440"/>
-          </a:xfrm>
-          <a:prstGeom prst="roundRect">
-            <a:avLst/>
-          </a:prstGeom>
-          <a:solidFill>
-            <a:srgbClr val="F8FAFC"/>
-          </a:solidFill>
-          <a:ln w="19050">
-            <a:solidFill>
-              <a:srgbClr val="1E40AF"/>
-            </a:solidFill>
-          </a:ln>
-        </p:spPr>
-        <p:style>
-          <a:lnRef idx="1">
-            <a:schemeClr val="accent1"/>
-          </a:lnRef>
-          <a:fillRef idx="3">
-            <a:schemeClr val="accent1"/>
-          </a:fillRef>
-          <a:effectRef idx="2">
-            <a:schemeClr val="accent1"/>
-          </a:effectRef>
-          <a:fontRef idx="minor">
-            <a:schemeClr val="lt1"/>
-          </a:fontRef>
-        </p:style>
-        <p:txBody>
-          <a:bodyPr rtlCol="0" anchor="ctr" wrap="square"/>
-          <a:lstStyle/>
-          <a:p>
-            <a:pPr algn="ctr">
-              <a:defRPr sz="1300" b="1">
-                <a:solidFill>
-                  <a:srgbClr val="0F2B5C"/>
-                </a:solidFill>
-                <a:latin typeface="Cairo"/>
-              </a:defRPr>
-            </a:pPr>
-            <a:r>
-              <a:t>🎲 العشوائية والـ Nonce:</a:t>
-            </a:r>
-          </a:p>
-          <a:p>
-            <a:pPr>
-              <a:spcBef>
-                <a:spcPts val="400"/>
-              </a:spcBef>
-              <a:defRPr sz="1050">
-                <a:solidFill>
-                  <a:srgbClr val="0F172A"/>
-                </a:solidFill>
-                <a:latin typeface="Cairo"/>
-              </a:defRPr>
-            </a:pPr>
-            <a:r>
-              <a:t>• رقم عشوائي بطول 12 بايت لكل حزمة.</a:t>
-            </a:r>
-          </a:p>
-          <a:p>
-            <a:pPr>
-              <a:spcBef>
-                <a:spcPts val="400"/>
-              </a:spcBef>
-              <a:defRPr sz="1050">
-                <a:solidFill>
-                  <a:srgbClr val="0F172A"/>
-                </a:solidFill>
-                <a:latin typeface="Cairo"/>
-              </a:defRPr>
-            </a:pPr>
-            <a:r>
-              <a:t>• اشتقاق Nonce فريد لكل كتلة ملف (64KB).</a:t>
-            </a:r>
-          </a:p>
-          <a:p>
-            <a:pPr>
-              <a:spcBef>
-                <a:spcPts val="400"/>
-              </a:spcBef>
-              <a:defRPr sz="1050">
-                <a:solidFill>
-                  <a:srgbClr val="0F172A"/>
-                </a:solidFill>
-                <a:latin typeface="Cairo"/>
-              </a:defRPr>
-            </a:pPr>
-            <a:r>
-              <a:t>• منع تكرار الـ Nonce تحت نفس المفتاح.</a:t>
+                <a:latin typeface="Arial"/>
+              </a:defRPr>
+            </a:pPr>
+            <a:r>
+              <a:t>📂 الملف والتحقق الهندسي:</a:t>
             </a:r>
           </a:p>
           <a:p>
@@ -9393,41 +7932,63 @@
               <a:spcBef>
                 <a:spcPts val="800"/>
               </a:spcBef>
-              <a:defRPr sz="1050" b="1">
+              <a:defRPr sz="1400" b="1">
                 <a:solidFill>
                   <a:srgbClr val="1E40AF"/>
                 </a:solidFill>
-                <a:latin typeface="Cairo"/>
-              </a:defRPr>
-            </a:pPr>
-            <a:r>
-              <a:t>📂 المكون البرمجي المرتبط:</a:t>
+                <a:latin typeface="Consolas"/>
+              </a:defRPr>
+            </a:pPr>
+            <a:r>
+              <a:t>app/src/main/java/com/example/network/EcdhEngine.kt</a:t>
             </a:r>
           </a:p>
           <a:p>
             <a:pPr>
-              <a:defRPr sz="950" b="1">
-                <a:solidFill>
-                  <a:srgbClr val="0284C7"/>
-                </a:solidFill>
-                <a:latin typeface="Consolas"/>
-              </a:defRPr>
-            </a:pPr>
-            <a:r>
-              <a:t>app/src/test/.../LocalCryptoEngineTest.kt</a:t>
+              <a:spcBef>
+                <a:spcPts val="1200"/>
+              </a:spcBef>
+              <a:defRPr sz="1700" b="1">
+                <a:solidFill>
+                  <a:srgbClr val="0F172A"/>
+                </a:solidFill>
+                <a:latin typeface="Arial"/>
+              </a:defRPr>
+            </a:pPr>
+            <a:r>
+              <a:t>• المسؤولية: توليد المفاتيح المؤقتة، وتشفير المفتاح العام بترميز X.509 DER، وحساب السر المشترك.</a:t>
             </a:r>
           </a:p>
           <a:p>
             <a:pPr>
-              <a:defRPr sz="950">
-                <a:solidFill>
-                  <a:srgbClr val="475569"/>
-                </a:solidFill>
-                <a:latin typeface="Cairo"/>
-              </a:defRPr>
-            </a:pPr>
-            <a:r>
-              <a:t>10 اختبارات ناجحة أثبتت كشف التلاعب ورفض المفتاح الخاطئ.</a:t>
+              <a:spcBef>
+                <a:spcPts val="1200"/>
+              </a:spcBef>
+              <a:defRPr sz="1700" b="1">
+                <a:solidFill>
+                  <a:srgbClr val="0F172A"/>
+                </a:solidFill>
+                <a:latin typeface="Arial"/>
+              </a:defRPr>
+            </a:pPr>
+            <a:r>
+              <a:t>• التوافق: استخدام مكتبة Java Cryptography Architecture (JCA) القياسية بدون مكتبات خارجية.</a:t>
+            </a:r>
+          </a:p>
+          <a:p>
+            <a:pPr>
+              <a:spcBef>
+                <a:spcPts val="1200"/>
+              </a:spcBef>
+              <a:defRPr sz="1700" b="1">
+                <a:solidFill>
+                  <a:srgbClr val="0F172A"/>
+                </a:solidFill>
+                <a:latin typeface="Arial"/>
+              </a:defRPr>
+            </a:pPr>
+            <a:r>
+              <a:t>• حزمة الاختبار: 8 اختبارات آلية ناجحة في EcdhEngineTest.kt تثبت تطابق السر بين الطرفين.</a:t>
             </a:r>
           </a:p>
         </p:txBody>
@@ -9459,7 +8020,7 @@
         <p:spPr>
           <a:xfrm>
             <a:off x="0" y="0"/>
-            <a:ext cx="12191695" cy="109728"/>
+            <a:ext cx="12191695" cy="91440"/>
           </a:xfrm>
           <a:prstGeom prst="rect">
             <a:avLst/>
@@ -9501,8 +8062,8 @@
         </p:nvSpPr>
         <p:spPr>
           <a:xfrm>
-            <a:off x="731520" y="228600"/>
-            <a:ext cx="7772400" cy="365760"/>
+            <a:off x="822960" y="228600"/>
+            <a:ext cx="7772400" cy="320040"/>
           </a:xfrm>
           <a:prstGeom prst="rect">
             <a:avLst/>
@@ -9516,38 +8077,112 @@
           <a:lstStyle/>
           <a:p>
             <a:pPr>
-              <a:defRPr sz="1100" b="1">
-                <a:solidFill>
-                  <a:srgbClr val="0284C7"/>
-                </a:solidFill>
-                <a:latin typeface="Cairo"/>
-              </a:defRPr>
-            </a:pPr>
-            <a:r>
-              <a:t>• تبادل المفاتيح الديناميكي | مشروع LOCAL CONTACT P2P</a:t>
-            </a:r>
-          </a:p>
-        </p:txBody>
-      </p:sp>
-      <p:sp>
-        <p:nvSpPr>
-          <p:cNvPr id="4" name="Rounded Rectangle 3"/>
+              <a:defRPr sz="1300" b="1">
+                <a:solidFill>
+                  <a:srgbClr val="1E40AF"/>
+                </a:solidFill>
+                <a:latin typeface="Arial"/>
+              </a:defRPr>
+            </a:pPr>
+            <a:r>
+              <a:t>LOCAL CONTACT P2P  |  اشتقاق مفاتيح الجلسة</a:t>
+            </a:r>
+          </a:p>
+        </p:txBody>
+      </p:sp>
+      <p:sp>
+        <p:nvSpPr>
+          <p:cNvPr id="4" name="TextBox 3"/>
+          <p:cNvSpPr txBox="1"/>
+          <p:nvPr/>
+        </p:nvSpPr>
+        <p:spPr>
+          <a:xfrm>
+            <a:off x="10241280" y="6309360"/>
+            <a:ext cx="1188720" cy="365760"/>
+          </a:xfrm>
+          <a:prstGeom prst="rect">
+            <a:avLst/>
+          </a:prstGeom>
+          <a:noFill/>
+        </p:spPr>
+        <p:txBody>
+          <a:bodyPr wrap="none">
+            <a:spAutoFit/>
+          </a:bodyPr>
+          <a:lstStyle/>
+          <a:p>
+            <a:pPr algn="r">
+              <a:defRPr sz="1400" b="1">
+                <a:solidFill>
+                  <a:srgbClr val="0F2B5C"/>
+                </a:solidFill>
+                <a:latin typeface="Arial"/>
+              </a:defRPr>
+            </a:pPr>
+            <a:r>
+              <a:t>5 / 12</a:t>
+            </a:r>
+          </a:p>
+        </p:txBody>
+      </p:sp>
+      <p:sp>
+        <p:nvSpPr>
+          <p:cNvPr id="5" name="TextBox 4"/>
+          <p:cNvSpPr txBox="1"/>
+          <p:nvPr/>
+        </p:nvSpPr>
+        <p:spPr>
+          <a:xfrm>
+            <a:off x="822960" y="594360"/>
+            <a:ext cx="8961120" cy="685800"/>
+          </a:xfrm>
+          <a:prstGeom prst="rect">
+            <a:avLst/>
+          </a:prstGeom>
+          <a:noFill/>
+        </p:spPr>
+        <p:txBody>
+          <a:bodyPr wrap="square">
+            <a:spAutoFit/>
+          </a:bodyPr>
+          <a:lstStyle/>
+          <a:p>
+            <a:pPr>
+              <a:defRPr sz="2800" b="1">
+                <a:solidFill>
+                  <a:srgbClr val="0F2B5C"/>
+                </a:solidFill>
+                <a:latin typeface="Arial"/>
+              </a:defRPr>
+            </a:pPr>
+            <a:r>
+              <a:t>دالة اشتقاق المفاتيح القياسية: HKDF-SHA256 (RFC 5869)</a:t>
+            </a:r>
+          </a:p>
+        </p:txBody>
+      </p:sp>
+      <p:sp>
+        <p:nvSpPr>
+          <p:cNvPr id="6" name="Rounded Rectangle 5"/>
           <p:cNvSpPr/>
           <p:nvPr/>
         </p:nvSpPr>
         <p:spPr>
           <a:xfrm>
-            <a:off x="10515600" y="228600"/>
-            <a:ext cx="914400" cy="320040"/>
+            <a:off x="8961120" y="621792"/>
+            <a:ext cx="2377440" cy="438912"/>
           </a:xfrm>
           <a:prstGeom prst="roundRect">
             <a:avLst/>
           </a:prstGeom>
           <a:solidFill>
-            <a:srgbClr val="0F2B5C"/>
+            <a:srgbClr val="F8FAFC"/>
           </a:solidFill>
-          <a:ln>
-            <a:noFill/>
+          <a:ln w="19050">
+            <a:solidFill>
+              <a:srgbClr val="059669"/>
+            </a:solidFill>
           </a:ln>
         </p:spPr>
         <p:style>
@@ -9569,154 +8204,29 @@
           <a:lstStyle/>
           <a:p>
             <a:pPr algn="ctr">
-              <a:defRPr sz="1100" b="1">
-                <a:solidFill>
-                  <a:srgbClr val="FFFFFF"/>
+              <a:defRPr sz="1200" b="1">
+                <a:solidFill>
+                  <a:srgbClr val="059669"/>
                 </a:solidFill>
                 <a:latin typeface="Consolas"/>
               </a:defRPr>
             </a:pPr>
             <a:r>
-              <a:t>5 / 12</a:t>
-            </a:r>
-          </a:p>
-        </p:txBody>
-      </p:sp>
-      <p:sp>
-        <p:nvSpPr>
-          <p:cNvPr id="5" name="TextBox 4"/>
-          <p:cNvSpPr txBox="1"/>
-          <p:nvPr/>
-        </p:nvSpPr>
-        <p:spPr>
-          <a:xfrm>
-            <a:off x="731520" y="594360"/>
-            <a:ext cx="8686800" cy="548640"/>
-          </a:xfrm>
-          <a:prstGeom prst="rect">
-            <a:avLst/>
-          </a:prstGeom>
-          <a:noFill/>
-        </p:spPr>
-        <p:txBody>
-          <a:bodyPr wrap="square">
-            <a:spAutoFit/>
-          </a:bodyPr>
-          <a:lstStyle/>
-          <a:p>
-            <a:pPr>
-              <a:defRPr sz="2000" b="1">
-                <a:solidFill>
-                  <a:srgbClr val="0F2B5C"/>
-                </a:solidFill>
-                <a:latin typeface="Cairo"/>
-              </a:defRPr>
-            </a:pPr>
-            <a:r>
-              <a:t>بروتوكول تبادل المفاتيح المنحني: ECDH (NIST P-256)</a:t>
-            </a:r>
-          </a:p>
-        </p:txBody>
-      </p:sp>
-      <p:sp>
-        <p:nvSpPr>
-          <p:cNvPr id="6" name="TextBox 5"/>
-          <p:cNvSpPr txBox="1"/>
-          <p:nvPr/>
-        </p:nvSpPr>
-        <p:spPr>
-          <a:xfrm>
-            <a:off x="731520" y="1078992"/>
-            <a:ext cx="8686800" cy="365760"/>
-          </a:xfrm>
-          <a:prstGeom prst="rect">
-            <a:avLst/>
-          </a:prstGeom>
-          <a:noFill/>
-        </p:spPr>
-        <p:txBody>
-          <a:bodyPr wrap="square">
-            <a:spAutoFit/>
-          </a:bodyPr>
-          <a:lstStyle/>
-          <a:p>
-            <a:pPr>
-              <a:defRPr sz="1150">
-                <a:solidFill>
-                  <a:srgbClr val="475569"/>
-                </a:solidFill>
-                <a:latin typeface="Cairo"/>
-              </a:defRPr>
-            </a:pPr>
-            <a:r>
-              <a:t>توليد أسرار مشتركة مؤقتة لتحقيق سرية التوجيه المستقبلي (Forward Secrecy)</a:t>
-            </a:r>
-          </a:p>
-        </p:txBody>
-      </p:sp>
-      <p:sp>
-        <p:nvSpPr>
-          <p:cNvPr id="7" name="Rounded Rectangle 6"/>
+              <a:t>RFC 5869 TESTED</a:t>
+            </a:r>
+          </a:p>
+        </p:txBody>
+      </p:sp>
+      <p:sp>
+        <p:nvSpPr>
+          <p:cNvPr id="7" name="Rectangle 6"/>
           <p:cNvSpPr/>
           <p:nvPr/>
         </p:nvSpPr>
         <p:spPr>
           <a:xfrm>
-            <a:off x="9144000" y="685800"/>
-            <a:ext cx="2286000" cy="347472"/>
-          </a:xfrm>
-          <a:prstGeom prst="roundRect">
-            <a:avLst/>
-          </a:prstGeom>
-          <a:solidFill>
-            <a:srgbClr val="059669"/>
-          </a:solidFill>
-          <a:ln>
-            <a:noFill/>
-          </a:ln>
-        </p:spPr>
-        <p:style>
-          <a:lnRef idx="1">
-            <a:schemeClr val="accent1"/>
-          </a:lnRef>
-          <a:fillRef idx="3">
-            <a:schemeClr val="accent1"/>
-          </a:fillRef>
-          <a:effectRef idx="2">
-            <a:schemeClr val="accent1"/>
-          </a:effectRef>
-          <a:fontRef idx="minor">
-            <a:schemeClr val="lt1"/>
-          </a:fontRef>
-        </p:style>
-        <p:txBody>
-          <a:bodyPr rtlCol="0" anchor="ctr"/>
-          <a:lstStyle/>
-          <a:p>
-            <a:pPr algn="ctr">
-              <a:defRPr sz="1000" b="1">
-                <a:solidFill>
-                  <a:srgbClr val="FFFFFF"/>
-                </a:solidFill>
-                <a:latin typeface="Consolas"/>
-              </a:defRPr>
-            </a:pPr>
-            <a:r>
-              <a:t>JVM TESTED (8/8)</a:t>
-            </a:r>
-          </a:p>
-        </p:txBody>
-      </p:sp>
-      <p:sp>
-        <p:nvSpPr>
-          <p:cNvPr id="8" name="Rectangle 7"/>
-          <p:cNvSpPr/>
-          <p:nvPr/>
-        </p:nvSpPr>
-        <p:spPr>
-          <a:xfrm>
-            <a:off x="731520" y="1463040"/>
-            <a:ext cx="10725912" cy="18288"/>
+            <a:off x="822960" y="1353312"/>
+            <a:ext cx="10515600" cy="18288"/>
           </a:xfrm>
           <a:prstGeom prst="rect">
             <a:avLst/>
@@ -9752,14 +8262,50 @@
       </p:sp>
       <p:sp>
         <p:nvSpPr>
+          <p:cNvPr id="8" name="TextBox 7"/>
+          <p:cNvSpPr txBox="1"/>
+          <p:nvPr/>
+        </p:nvSpPr>
+        <p:spPr>
+          <a:xfrm>
+            <a:off x="822960" y="6309360"/>
+            <a:ext cx="7315200" cy="320040"/>
+          </a:xfrm>
+          <a:prstGeom prst="rect">
+            <a:avLst/>
+          </a:prstGeom>
+          <a:noFill/>
+        </p:spPr>
+        <p:txBody>
+          <a:bodyPr wrap="none">
+            <a:spAutoFit/>
+          </a:bodyPr>
+          <a:lstStyle/>
+          <a:p>
+            <a:pPr>
+              <a:defRPr sz="1100">
+                <a:solidFill>
+                  <a:srgbClr val="475569"/>
+                </a:solidFill>
+                <a:latin typeface="Arial"/>
+              </a:defRPr>
+            </a:pPr>
+            <a:r>
+              <a:t>مشروع تخرج LOCAL CONTACT — مناقشة أكاديمية محكمة</a:t>
+            </a:r>
+          </a:p>
+        </p:txBody>
+      </p:sp>
+      <p:sp>
+        <p:nvSpPr>
           <p:cNvPr id="9" name="Rounded Rectangle 8"/>
           <p:cNvSpPr/>
           <p:nvPr/>
         </p:nvSpPr>
         <p:spPr>
           <a:xfrm>
-            <a:off x="731520" y="1645920"/>
-            <a:ext cx="5212080" cy="4663440"/>
+            <a:off x="822960" y="1645920"/>
+            <a:ext cx="10515600" cy="4389120"/>
           </a:xfrm>
           <a:prstGeom prst="roundRect">
             <a:avLst/>
@@ -9769,7 +8315,7 @@
           </a:solidFill>
           <a:ln w="19050">
             <a:solidFill>
-              <a:srgbClr val="1E40AF"/>
+              <a:srgbClr val="CBD5E1"/>
             </a:solidFill>
           </a:ln>
         </p:spPr>
@@ -9792,256 +8338,95 @@
           <a:lstStyle/>
           <a:p>
             <a:pPr algn="ctr">
-              <a:defRPr sz="1300" b="1">
+              <a:defRPr sz="2200" b="1">
                 <a:solidFill>
                   <a:srgbClr val="0F2B5C"/>
                 </a:solidFill>
-                <a:latin typeface="Cairo"/>
-              </a:defRPr>
-            </a:pPr>
-            <a:r>
-              <a:t>⚡ الخصائص الأمنية لمنحنى NIST P-256:</a:t>
+                <a:latin typeface="Arial"/>
+              </a:defRPr>
+            </a:pPr>
+            <a:r>
+              <a:t>⚙️ معمارية اشتقاق المفاتيح وفق المعيار الدولي RFC 5869:</a:t>
             </a:r>
           </a:p>
           <a:p>
             <a:pPr>
               <a:spcBef>
-                <a:spcPts val="400"/>
+                <a:spcPts val="1200"/>
               </a:spcBef>
-              <a:defRPr sz="1050">
+              <a:defRPr sz="1800" b="1">
                 <a:solidFill>
                   <a:srgbClr val="0F172A"/>
                 </a:solidFill>
-                <a:latin typeface="Cairo"/>
-              </a:defRPr>
-            </a:pPr>
-            <a:r>
-              <a:t>• المنحنى المعتمد: secp256r1 (prime256v1 / NIST P-256).</a:t>
+                <a:latin typeface="Arial"/>
+              </a:defRPr>
+            </a:pPr>
+            <a:r>
+              <a:t>• مرحلة الاستخلاص (Extract): تحويل السر المشترك الناتج من ECDH مع Salt شبكي إلى مفتاح شبه عشوائي (PRK) عالي الإنتروبيا.</a:t>
             </a:r>
           </a:p>
           <a:p>
             <a:pPr>
               <a:spcBef>
-                <a:spcPts val="400"/>
+                <a:spcPts val="1200"/>
               </a:spcBef>
-              <a:defRPr sz="1050">
+              <a:defRPr sz="1800" b="1">
                 <a:solidFill>
                   <a:srgbClr val="0F172A"/>
                 </a:solidFill>
-                <a:latin typeface="Cairo"/>
-              </a:defRPr>
-            </a:pPr>
-            <a:r>
-              <a:t>• مفاتيح مؤقتة (Ephemeral Keys): توليد زوج مفاتيح جديد لكل جلسة اتصال.</a:t>
+                <a:latin typeface="Arial"/>
+              </a:defRPr>
+            </a:pPr>
+            <a:r>
+              <a:t>• مرحلة التوسيع (Expand): اشتقاق مفاتيح مستقلة بطول 256-bit باستخدام سياقات مختلفة (Context Info).</a:t>
             </a:r>
           </a:p>
           <a:p>
             <a:pPr>
               <a:spcBef>
-                <a:spcPts val="400"/>
+                <a:spcPts val="1200"/>
               </a:spcBef>
-              <a:defRPr sz="1050">
+              <a:defRPr sz="1800" b="1">
                 <a:solidFill>
                   <a:srgbClr val="0F172A"/>
                 </a:solidFill>
-                <a:latin typeface="Cairo"/>
-              </a:defRPr>
-            </a:pPr>
-            <a:r>
-              <a:t>• إتلاف المفتاح الخاص: التخلص من المفتاح الخاص المؤقت فور حساب السر المشترك.</a:t>
+                <a:latin typeface="Arial"/>
+              </a:defRPr>
+            </a:pPr>
+            <a:r>
+              <a:t>• فصل مفاتيح الإرسال والاستقبال: اشتقاق مفتاح TX للإرسال ومفتاح RX للاستقبال لمنع هجمات التكرار والخلط.</a:t>
             </a:r>
           </a:p>
           <a:p>
             <a:pPr>
               <a:spcBef>
-                <a:spcPts val="400"/>
+                <a:spcPts val="1200"/>
               </a:spcBef>
-              <a:defRPr sz="1050">
+              <a:defRPr sz="1800" b="1">
                 <a:solidFill>
                   <a:srgbClr val="0F172A"/>
                 </a:solidFill>
-                <a:latin typeface="Cairo"/>
-              </a:defRPr>
-            </a:pPr>
-            <a:r>
-              <a:t>• سرية التوجيه المستقبلي (Forward Secrecy): اختراق الجهاز مستقبلاً لا يكشف الاتصالات القديمة المسجلة.</a:t>
+                <a:latin typeface="Arial"/>
+              </a:defRPr>
+            </a:pPr>
+            <a:r>
+              <a:t>• استبعاد المفاتيح الضعيفة: ضمان توزيع بتات المفتاح بشكل متجانس إحصائياً بما يتوافق مع متطلبات AES-256.</a:t>
             </a:r>
           </a:p>
           <a:p>
             <a:pPr>
               <a:spcBef>
-                <a:spcPts val="400"/>
+                <a:spcPts val="1200"/>
               </a:spcBef>
-              <a:defRPr sz="1050">
+              <a:defRPr sz="1800" b="1">
                 <a:solidFill>
                   <a:srgbClr val="0F172A"/>
                 </a:solidFill>
-                <a:latin typeface="Cairo"/>
-              </a:defRPr>
-            </a:pPr>
-            <a:r>
-              <a:t>• توافق البيئة: مدعوم أصلياً في JCA داخل Android و JVM دون مكتبات خارجية ثقيلة.</a:t>
-            </a:r>
-          </a:p>
-        </p:txBody>
-      </p:sp>
-      <p:sp>
-        <p:nvSpPr>
-          <p:cNvPr id="10" name="Rounded Rectangle 9"/>
-          <p:cNvSpPr/>
-          <p:nvPr/>
-        </p:nvSpPr>
-        <p:spPr>
-          <a:xfrm>
-            <a:off x="6217920" y="1645920"/>
-            <a:ext cx="5212080" cy="4663440"/>
-          </a:xfrm>
-          <a:prstGeom prst="roundRect">
-            <a:avLst/>
-          </a:prstGeom>
-          <a:solidFill>
-            <a:srgbClr val="F8FAFC"/>
-          </a:solidFill>
-          <a:ln w="19050">
-            <a:solidFill>
-              <a:srgbClr val="1E40AF"/>
-            </a:solidFill>
-          </a:ln>
-        </p:spPr>
-        <p:style>
-          <a:lnRef idx="1">
-            <a:schemeClr val="accent1"/>
-          </a:lnRef>
-          <a:fillRef idx="3">
-            <a:schemeClr val="accent1"/>
-          </a:fillRef>
-          <a:effectRef idx="2">
-            <a:schemeClr val="accent1"/>
-          </a:effectRef>
-          <a:fontRef idx="minor">
-            <a:schemeClr val="lt1"/>
-          </a:fontRef>
-        </p:style>
-        <p:txBody>
-          <a:bodyPr rtlCol="0" anchor="ctr" wrap="square"/>
-          <a:lstStyle/>
-          <a:p>
-            <a:pPr algn="ctr">
-              <a:defRPr sz="1300" b="1">
-                <a:solidFill>
-                  <a:srgbClr val="0F2B5C"/>
-                </a:solidFill>
-                <a:latin typeface="Cairo"/>
-              </a:defRPr>
-            </a:pPr>
-            <a:r>
-              <a:t>📂 المكون المنفذ والاختبارات:</a:t>
-            </a:r>
-          </a:p>
-          <a:p>
-            <a:pPr>
-              <a:spcBef>
-                <a:spcPts val="400"/>
-              </a:spcBef>
-              <a:defRPr sz="1050">
-                <a:solidFill>
-                  <a:srgbClr val="0F172A"/>
-                </a:solidFill>
-                <a:latin typeface="Cairo"/>
-              </a:defRPr>
-            </a:pPr>
-            <a:r>
-              <a:t>• توليد المفاتيح: توليد مفاتيح EC مؤقتة 256 بت.</a:t>
-            </a:r>
-          </a:p>
-          <a:p>
-            <a:pPr>
-              <a:spcBef>
-                <a:spcPts val="400"/>
-              </a:spcBef>
-              <a:defRPr sz="1050">
-                <a:solidFill>
-                  <a:srgbClr val="0F172A"/>
-                </a:solidFill>
-                <a:latin typeface="Cairo"/>
-              </a:defRPr>
-            </a:pPr>
-            <a:r>
-              <a:t>• حساب السر المشترك: تطبيق KeyAgreement عبر ECDH.</a:t>
-            </a:r>
-          </a:p>
-          <a:p>
-            <a:pPr>
-              <a:spcBef>
-                <a:spcPts val="400"/>
-              </a:spcBef>
-              <a:defRPr sz="1050">
-                <a:solidFill>
-                  <a:srgbClr val="0F172A"/>
-                </a:solidFill>
-                <a:latin typeface="Cairo"/>
-              </a:defRPr>
-            </a:pPr>
-            <a:r>
-              <a:t>• ترميز قياسي: تشفير المفاتيح العامة بصيغة X.509 DER القياسية.</a:t>
-            </a:r>
-          </a:p>
-          <a:p>
-            <a:pPr>
-              <a:spcBef>
-                <a:spcPts val="400"/>
-              </a:spcBef>
-              <a:defRPr sz="1050">
-                <a:solidFill>
-                  <a:srgbClr val="0F172A"/>
-                </a:solidFill>
-                <a:latin typeface="Cairo"/>
-              </a:defRPr>
-            </a:pPr>
-            <a:r>
-              <a:t>• اختبارات الاتفاق: 8 اختبارات آلية أثبتت اتفاق طرفين مستقلين على نفس السر المشترك.</a:t>
-            </a:r>
-          </a:p>
-          <a:p>
-            <a:pPr>
-              <a:spcBef>
-                <a:spcPts val="800"/>
-              </a:spcBef>
-              <a:defRPr sz="1050" b="1">
-                <a:solidFill>
-                  <a:srgbClr val="1E40AF"/>
-                </a:solidFill>
-                <a:latin typeface="Cairo"/>
-              </a:defRPr>
-            </a:pPr>
-            <a:r>
-              <a:t>📂 المكون البرمجي المرتبط:</a:t>
-            </a:r>
-          </a:p>
-          <a:p>
-            <a:pPr>
-              <a:defRPr sz="950" b="1">
-                <a:solidFill>
-                  <a:srgbClr val="0284C7"/>
-                </a:solidFill>
-                <a:latin typeface="Consolas"/>
-              </a:defRPr>
-            </a:pPr>
-            <a:r>
-              <a:t>app/src/main/java/com/example/network/EcdhEngine.kt</a:t>
-            </a:r>
-          </a:p>
-          <a:p>
-            <a:pPr>
-              <a:defRPr sz="950">
-                <a:solidFill>
-                  <a:srgbClr val="475569"/>
-                </a:solidFill>
-                <a:latin typeface="Cairo"/>
-              </a:defRPr>
-            </a:pPr>
-            <a:r>
-              <a:t>محرك تبادل المفاتيح ECDH المنفذ والمختبر في EcdhEngineTest (8/8 ناجح).</a:t>
+                <a:latin typeface="Arial"/>
+              </a:defRPr>
+            </a:pPr>
+            <a:r>
+              <a:t>• الملف والاختبارات: الملف: HandshakeCryptoUtils.kt تم التحقق منه بمطابقة نواقل الاختبار الرسمية (Test Vectors) في KeyDerivationTest.</a:t>
             </a:r>
           </a:p>
         </p:txBody>
@@ -10073,7 +8458,7 @@
         <p:spPr>
           <a:xfrm>
             <a:off x="0" y="0"/>
-            <a:ext cx="12191695" cy="109728"/>
+            <a:ext cx="12191695" cy="91440"/>
           </a:xfrm>
           <a:prstGeom prst="rect">
             <a:avLst/>
@@ -10115,8 +8500,8 @@
         </p:nvSpPr>
         <p:spPr>
           <a:xfrm>
-            <a:off x="731520" y="228600"/>
-            <a:ext cx="7772400" cy="365760"/>
+            <a:off x="822960" y="228600"/>
+            <a:ext cx="7772400" cy="320040"/>
           </a:xfrm>
           <a:prstGeom prst="rect">
             <a:avLst/>
@@ -10130,64 +8515,47 @@
           <a:lstStyle/>
           <a:p>
             <a:pPr>
-              <a:defRPr sz="1100" b="1">
-                <a:solidFill>
-                  <a:srgbClr val="0284C7"/>
-                </a:solidFill>
-                <a:latin typeface="Cairo"/>
-              </a:defRPr>
-            </a:pPr>
-            <a:r>
-              <a:t>• دوال اشتقاق المفاتيح القياسية | مشروع LOCAL CONTACT P2P</a:t>
-            </a:r>
-          </a:p>
-        </p:txBody>
-      </p:sp>
-      <p:sp>
-        <p:nvSpPr>
-          <p:cNvPr id="4" name="Rounded Rectangle 3"/>
-          <p:cNvSpPr/>
+              <a:defRPr sz="1300" b="1">
+                <a:solidFill>
+                  <a:srgbClr val="1E40AF"/>
+                </a:solidFill>
+                <a:latin typeface="Arial"/>
+              </a:defRPr>
+            </a:pPr>
+            <a:r>
+              <a:t>LOCAL CONTACT P2P  |  إدارة الجلسات التشفيرية</a:t>
+            </a:r>
+          </a:p>
+        </p:txBody>
+      </p:sp>
+      <p:sp>
+        <p:nvSpPr>
+          <p:cNvPr id="4" name="TextBox 3"/>
+          <p:cNvSpPr txBox="1"/>
           <p:nvPr/>
         </p:nvSpPr>
         <p:spPr>
           <a:xfrm>
-            <a:off x="10515600" y="228600"/>
-            <a:ext cx="914400" cy="320040"/>
-          </a:xfrm>
-          <a:prstGeom prst="roundRect">
-            <a:avLst/>
-          </a:prstGeom>
-          <a:solidFill>
-            <a:srgbClr val="0F2B5C"/>
-          </a:solidFill>
-          <a:ln>
-            <a:noFill/>
-          </a:ln>
-        </p:spPr>
-        <p:style>
-          <a:lnRef idx="1">
-            <a:schemeClr val="accent1"/>
-          </a:lnRef>
-          <a:fillRef idx="3">
-            <a:schemeClr val="accent1"/>
-          </a:fillRef>
-          <a:effectRef idx="2">
-            <a:schemeClr val="accent1"/>
-          </a:effectRef>
-          <a:fontRef idx="minor">
-            <a:schemeClr val="lt1"/>
-          </a:fontRef>
-        </p:style>
-        <p:txBody>
-          <a:bodyPr rtlCol="0" anchor="ctr"/>
-          <a:lstStyle/>
-          <a:p>
-            <a:pPr algn="ctr">
-              <a:defRPr sz="1100" b="1">
-                <a:solidFill>
-                  <a:srgbClr val="FFFFFF"/>
-                </a:solidFill>
-                <a:latin typeface="Consolas"/>
+            <a:off x="10241280" y="6309360"/>
+            <a:ext cx="1188720" cy="365760"/>
+          </a:xfrm>
+          <a:prstGeom prst="rect">
+            <a:avLst/>
+          </a:prstGeom>
+          <a:noFill/>
+        </p:spPr>
+        <p:txBody>
+          <a:bodyPr wrap="none">
+            <a:spAutoFit/>
+          </a:bodyPr>
+          <a:lstStyle/>
+          <a:p>
+            <a:pPr algn="r">
+              <a:defRPr sz="1400" b="1">
+                <a:solidFill>
+                  <a:srgbClr val="0F2B5C"/>
+                </a:solidFill>
+                <a:latin typeface="Arial"/>
               </a:defRPr>
             </a:pPr>
             <a:r>
@@ -10204,8 +8572,8 @@
         </p:nvSpPr>
         <p:spPr>
           <a:xfrm>
-            <a:off x="731520" y="594360"/>
-            <a:ext cx="8686800" cy="548640"/>
+            <a:off x="822960" y="594360"/>
+            <a:ext cx="8961120" cy="685800"/>
           </a:xfrm>
           <a:prstGeom prst="rect">
             <a:avLst/>
@@ -10219,161 +8587,29 @@
           <a:lstStyle/>
           <a:p>
             <a:pPr>
-              <a:defRPr sz="2000" b="1">
+              <a:defRPr sz="2800" b="1">
                 <a:solidFill>
                   <a:srgbClr val="0F2B5C"/>
                 </a:solidFill>
-                <a:latin typeface="Cairo"/>
-              </a:defRPr>
-            </a:pPr>
-            <a:r>
-              <a:t>اشتقاق مفاتيح الجلسات عبر HKDF-SHA256</a:t>
-            </a:r>
-          </a:p>
-        </p:txBody>
-      </p:sp>
-      <p:sp>
-        <p:nvSpPr>
-          <p:cNvPr id="6" name="TextBox 5"/>
-          <p:cNvSpPr txBox="1"/>
-          <p:nvPr/>
-        </p:nvSpPr>
-        <p:spPr>
-          <a:xfrm>
-            <a:off x="731520" y="1078992"/>
-            <a:ext cx="8686800" cy="365760"/>
-          </a:xfrm>
-          <a:prstGeom prst="rect">
-            <a:avLst/>
-          </a:prstGeom>
-          <a:noFill/>
-        </p:spPr>
-        <p:txBody>
-          <a:bodyPr wrap="square">
-            <a:spAutoFit/>
-          </a:bodyPr>
-          <a:lstStyle/>
-          <a:p>
-            <a:pPr>
-              <a:defRPr sz="1150">
-                <a:solidFill>
-                  <a:srgbClr val="475569"/>
-                </a:solidFill>
-                <a:latin typeface="Cairo"/>
-              </a:defRPr>
-            </a:pPr>
-            <a:r>
-              <a:t>تطبيق معيار RFC 5869 لتحويل السر المشترك إلى مفتاح متماثل نقي عشوائياً</a:t>
-            </a:r>
-          </a:p>
-        </p:txBody>
-      </p:sp>
-      <p:sp>
-        <p:nvSpPr>
-          <p:cNvPr id="7" name="Rounded Rectangle 6"/>
+                <a:latin typeface="Arial"/>
+              </a:defRPr>
+            </a:pPr>
+            <a:r>
+              <a:t>إدارة مفاتيح الجلسات المؤقتة (Session Key Management)</a:t>
+            </a:r>
+          </a:p>
+        </p:txBody>
+      </p:sp>
+      <p:sp>
+        <p:nvSpPr>
+          <p:cNvPr id="6" name="Rounded Rectangle 5"/>
           <p:cNvSpPr/>
           <p:nvPr/>
         </p:nvSpPr>
         <p:spPr>
           <a:xfrm>
-            <a:off x="9144000" y="685800"/>
-            <a:ext cx="2286000" cy="347472"/>
-          </a:xfrm>
-          <a:prstGeom prst="roundRect">
-            <a:avLst/>
-          </a:prstGeom>
-          <a:solidFill>
-            <a:srgbClr val="059669"/>
-          </a:solidFill>
-          <a:ln>
-            <a:noFill/>
-          </a:ln>
-        </p:spPr>
-        <p:style>
-          <a:lnRef idx="1">
-            <a:schemeClr val="accent1"/>
-          </a:lnRef>
-          <a:fillRef idx="3">
-            <a:schemeClr val="accent1"/>
-          </a:fillRef>
-          <a:effectRef idx="2">
-            <a:schemeClr val="accent1"/>
-          </a:effectRef>
-          <a:fontRef idx="minor">
-            <a:schemeClr val="lt1"/>
-          </a:fontRef>
-        </p:style>
-        <p:txBody>
-          <a:bodyPr rtlCol="0" anchor="ctr"/>
-          <a:lstStyle/>
-          <a:p>
-            <a:pPr algn="ctr">
-              <a:defRPr sz="1000" b="1">
-                <a:solidFill>
-                  <a:srgbClr val="FFFFFF"/>
-                </a:solidFill>
-                <a:latin typeface="Consolas"/>
-              </a:defRPr>
-            </a:pPr>
-            <a:r>
-              <a:t>RFC 5869 COMPLIANT</a:t>
-            </a:r>
-          </a:p>
-        </p:txBody>
-      </p:sp>
-      <p:sp>
-        <p:nvSpPr>
-          <p:cNvPr id="8" name="Rectangle 7"/>
-          <p:cNvSpPr/>
-          <p:nvPr/>
-        </p:nvSpPr>
-        <p:spPr>
-          <a:xfrm>
-            <a:off x="731520" y="1463040"/>
-            <a:ext cx="10725912" cy="18288"/>
-          </a:xfrm>
-          <a:prstGeom prst="rect">
-            <a:avLst/>
-          </a:prstGeom>
-          <a:solidFill>
-            <a:srgbClr val="CBD5E1"/>
-          </a:solidFill>
-          <a:ln>
-            <a:noFill/>
-          </a:ln>
-        </p:spPr>
-        <p:style>
-          <a:lnRef idx="1">
-            <a:schemeClr val="accent1"/>
-          </a:lnRef>
-          <a:fillRef idx="3">
-            <a:schemeClr val="accent1"/>
-          </a:fillRef>
-          <a:effectRef idx="2">
-            <a:schemeClr val="accent1"/>
-          </a:effectRef>
-          <a:fontRef idx="minor">
-            <a:schemeClr val="lt1"/>
-          </a:fontRef>
-        </p:style>
-        <p:txBody>
-          <a:bodyPr rtlCol="0" anchor="ctr"/>
-          <a:lstStyle/>
-          <a:p>
-            <a:pPr algn="ctr"/>
-          </a:p>
-        </p:txBody>
-      </p:sp>
-      <p:sp>
-        <p:nvSpPr>
-          <p:cNvPr id="9" name="Rounded Rectangle 8"/>
-          <p:cNvSpPr/>
-          <p:nvPr/>
-        </p:nvSpPr>
-        <p:spPr>
-          <a:xfrm>
-            <a:off x="731520" y="1645920"/>
-            <a:ext cx="5212080" cy="4663440"/>
+            <a:off x="8961120" y="621792"/>
+            <a:ext cx="2377440" cy="438912"/>
           </a:xfrm>
           <a:prstGeom prst="roundRect">
             <a:avLst/>
@@ -10402,97 +8638,112 @@
           </a:fontRef>
         </p:style>
         <p:txBody>
-          <a:bodyPr rtlCol="0" anchor="ctr" wrap="square"/>
+          <a:bodyPr rtlCol="0" anchor="ctr"/>
           <a:lstStyle/>
           <a:p>
             <a:pPr algn="ctr">
-              <a:defRPr sz="1300" b="1">
-                <a:solidFill>
-                  <a:srgbClr val="0F2B5C"/>
-                </a:solidFill>
-                <a:latin typeface="Cairo"/>
-              </a:defRPr>
-            </a:pPr>
-            <a:r>
-              <a:t>⚙️ آليات دالة الاشتقاق (Extract-and-Expand):</a:t>
-            </a:r>
-          </a:p>
-          <a:p>
-            <a:pPr>
-              <a:spcBef>
-                <a:spcPts val="400"/>
-              </a:spcBef>
-              <a:defRPr sz="1050">
-                <a:solidFill>
-                  <a:srgbClr val="0F172A"/>
-                </a:solidFill>
-                <a:latin typeface="Cairo"/>
-              </a:defRPr>
-            </a:pPr>
-            <a:r>
-              <a:t>• مرحلة الاستخلاص (Extract): استخلاص العشوائية من السر المشترك عبر HMAC-SHA256 لإنتاج Pseudorandom Key (PRK).</a:t>
-            </a:r>
-          </a:p>
-          <a:p>
-            <a:pPr>
-              <a:spcBef>
-                <a:spcPts val="400"/>
-              </a:spcBef>
-              <a:defRPr sz="1050">
-                <a:solidFill>
-                  <a:srgbClr val="0F172A"/>
-                </a:solidFill>
-                <a:latin typeface="Cairo"/>
-              </a:defRPr>
-            </a:pPr>
-            <a:r>
-              <a:t>• مرحلة التوسيع (Expand): توليد مفتاح تشفير 256 بت نقي باستخدام مصفوفة معلومات سياق الجلسة (Session Context Info).</a:t>
-            </a:r>
-          </a:p>
-          <a:p>
-            <a:pPr>
-              <a:spcBef>
-                <a:spcPts val="400"/>
-              </a:spcBef>
-              <a:defRPr sz="1050">
-                <a:solidFill>
-                  <a:srgbClr val="0F172A"/>
-                </a:solidFill>
-                <a:latin typeface="Cairo"/>
-              </a:defRPr>
-            </a:pPr>
-            <a:r>
-              <a:t>• إزالة الانحياز الإحصائي: السر الناتج عن ECDH يمثل نقطة على المنحنى ولا يمتلك توزيعاً عشوائياً منتظماً يناسب AES مباشرة؛ HKDF يعالج ذلك.</a:t>
-            </a:r>
-          </a:p>
-          <a:p>
-            <a:pPr>
-              <a:spcBef>
-                <a:spcPts val="400"/>
-              </a:spcBef>
-              <a:defRPr sz="1050">
-                <a:solidFill>
-                  <a:srgbClr val="0F172A"/>
-                </a:solidFill>
-                <a:latin typeface="Cairo"/>
-              </a:defRPr>
-            </a:pPr>
-            <a:r>
-              <a:t>• عزل الجلسات: ربط الاشتقاق بمعرفات الجلسة يمنع استخدام نفس المفتاح في سياق آخر.</a:t>
-            </a:r>
-          </a:p>
-        </p:txBody>
-      </p:sp>
-      <p:sp>
-        <p:nvSpPr>
-          <p:cNvPr id="10" name="Rounded Rectangle 9"/>
+              <a:defRPr sz="1200" b="1">
+                <a:solidFill>
+                  <a:srgbClr val="1E40AF"/>
+                </a:solidFill>
+                <a:latin typeface="Consolas"/>
+              </a:defRPr>
+            </a:pPr>
+            <a:r>
+              <a:t>INTEGRATED IN CODE</a:t>
+            </a:r>
+          </a:p>
+        </p:txBody>
+      </p:sp>
+      <p:sp>
+        <p:nvSpPr>
+          <p:cNvPr id="7" name="Rectangle 6"/>
           <p:cNvSpPr/>
           <p:nvPr/>
         </p:nvSpPr>
         <p:spPr>
           <a:xfrm>
-            <a:off x="6217920" y="1645920"/>
-            <a:ext cx="5212080" cy="4663440"/>
+            <a:off x="822960" y="1353312"/>
+            <a:ext cx="10515600" cy="18288"/>
+          </a:xfrm>
+          <a:prstGeom prst="rect">
+            <a:avLst/>
+          </a:prstGeom>
+          <a:solidFill>
+            <a:srgbClr val="CBD5E1"/>
+          </a:solidFill>
+          <a:ln>
+            <a:noFill/>
+          </a:ln>
+        </p:spPr>
+        <p:style>
+          <a:lnRef idx="1">
+            <a:schemeClr val="accent1"/>
+          </a:lnRef>
+          <a:fillRef idx="3">
+            <a:schemeClr val="accent1"/>
+          </a:fillRef>
+          <a:effectRef idx="2">
+            <a:schemeClr val="accent1"/>
+          </a:effectRef>
+          <a:fontRef idx="minor">
+            <a:schemeClr val="lt1"/>
+          </a:fontRef>
+        </p:style>
+        <p:txBody>
+          <a:bodyPr rtlCol="0" anchor="ctr"/>
+          <a:lstStyle/>
+          <a:p>
+            <a:pPr algn="ctr"/>
+          </a:p>
+        </p:txBody>
+      </p:sp>
+      <p:sp>
+        <p:nvSpPr>
+          <p:cNvPr id="8" name="TextBox 7"/>
+          <p:cNvSpPr txBox="1"/>
+          <p:nvPr/>
+        </p:nvSpPr>
+        <p:spPr>
+          <a:xfrm>
+            <a:off x="822960" y="6309360"/>
+            <a:ext cx="7315200" cy="320040"/>
+          </a:xfrm>
+          <a:prstGeom prst="rect">
+            <a:avLst/>
+          </a:prstGeom>
+          <a:noFill/>
+        </p:spPr>
+        <p:txBody>
+          <a:bodyPr wrap="none">
+            <a:spAutoFit/>
+          </a:bodyPr>
+          <a:lstStyle/>
+          <a:p>
+            <a:pPr>
+              <a:defRPr sz="1100">
+                <a:solidFill>
+                  <a:srgbClr val="475569"/>
+                </a:solidFill>
+                <a:latin typeface="Arial"/>
+              </a:defRPr>
+            </a:pPr>
+            <a:r>
+              <a:t>مشروع تخرج LOCAL CONTACT — مناقشة أكاديمية محكمة</a:t>
+            </a:r>
+          </a:p>
+        </p:txBody>
+      </p:sp>
+      <p:sp>
+        <p:nvSpPr>
+          <p:cNvPr id="9" name="Rounded Rectangle 8"/>
+          <p:cNvSpPr/>
+          <p:nvPr/>
+        </p:nvSpPr>
+        <p:spPr>
+          <a:xfrm>
+            <a:off x="822960" y="1645920"/>
+            <a:ext cx="5120640" cy="4389120"/>
           </a:xfrm>
           <a:prstGeom prst="roundRect">
             <a:avLst/>
@@ -10502,7 +8753,7 @@
           </a:solidFill>
           <a:ln w="19050">
             <a:solidFill>
-              <a:srgbClr val="1E40AF"/>
+              <a:srgbClr val="CBD5E1"/>
             </a:solidFill>
           </a:ln>
         </p:spPr>
@@ -10525,63 +8776,134 @@
           <a:lstStyle/>
           <a:p>
             <a:pPr algn="ctr">
-              <a:defRPr sz="1300" b="1">
+              <a:defRPr sz="2200" b="1">
                 <a:solidFill>
                   <a:srgbClr val="0F2B5C"/>
                 </a:solidFill>
-                <a:latin typeface="Cairo"/>
-              </a:defRPr>
-            </a:pPr>
-            <a:r>
-              <a:t>📂 الموضع البرمجي وأهميته الأكاديمية:</a:t>
+                <a:latin typeface="Arial"/>
+              </a:defRPr>
+            </a:pPr>
+            <a:r>
+              <a:t>🎯 دور مدير مفاتيح الجلسات:</a:t>
             </a:r>
           </a:p>
           <a:p>
             <a:pPr>
               <a:spcBef>
-                <a:spcPts val="400"/>
+                <a:spcPts val="1200"/>
               </a:spcBef>
-              <a:defRPr sz="1050">
+              <a:defRPr sz="1700" b="1">
                 <a:solidFill>
                   <a:srgbClr val="0F172A"/>
                 </a:solidFill>
-                <a:latin typeface="Cairo"/>
-              </a:defRPr>
-            </a:pPr>
-            <a:r>
-              <a:t>• المعيار الذهبي: HKDF هو المعيار المعتمد في بروتوكولات TLS 1.3 و Signal و IPsec.</a:t>
+                <a:latin typeface="Arial"/>
+              </a:defRPr>
+            </a:pPr>
+            <a:r>
+              <a:t>• عزل الجلسات: لكل جهاز قرين (Peer) جدول مفاتيح جلسة مستقل تماماً عن الآخرين.</a:t>
             </a:r>
           </a:p>
           <a:p>
             <a:pPr>
               <a:spcBef>
-                <a:spcPts val="400"/>
+                <a:spcPts val="1200"/>
               </a:spcBef>
-              <a:defRPr sz="1050">
+              <a:defRPr sz="1700" b="1">
                 <a:solidFill>
                   <a:srgbClr val="0F172A"/>
                 </a:solidFill>
-                <a:latin typeface="Cairo"/>
-              </a:defRPr>
-            </a:pPr>
-            <a:r>
-              <a:t>• التكامل في الكود: مدمج مباشرة في كلاس EcdhEngine لإنتاج كائن SecretKey.</a:t>
+                <a:latin typeface="Arial"/>
+              </a:defRPr>
+            </a:pPr>
+            <a:r>
+              <a:t>• التخزين في الذاكرة الحية فقط: عدم كتابة مفاتيح الجلسات المؤقتة في الذاكرة الدائمة (RAM Only).</a:t>
             </a:r>
           </a:p>
           <a:p>
             <a:pPr>
               <a:spcBef>
-                <a:spcPts val="400"/>
+                <a:spcPts val="1200"/>
               </a:spcBef>
-              <a:defRPr sz="1050">
+              <a:defRPr sz="1700" b="1">
                 <a:solidFill>
                   <a:srgbClr val="0F172A"/>
                 </a:solidFill>
-                <a:latin typeface="Cairo"/>
-              </a:defRPr>
-            </a:pPr>
-            <a:r>
-              <a:t>• الاختبارات: تم التحقق من سلامة الاشتقاق وثبات المفاتيح بين طرفين مستقلين.</a:t>
+                <a:latin typeface="Arial"/>
+              </a:defRPr>
+            </a:pPr>
+            <a:r>
+              <a:t>• مؤقت انتهاء الجلسة: إتلاف المفاتيح تلقائياً عند انقطاع الاتصال أو إغلاق التطبيق.</a:t>
+            </a:r>
+          </a:p>
+          <a:p>
+            <a:pPr>
+              <a:spcBef>
+                <a:spcPts val="1200"/>
+              </a:spcBef>
+              <a:defRPr sz="1700" b="1">
+                <a:solidFill>
+                  <a:srgbClr val="0F172A"/>
+                </a:solidFill>
+                <a:latin typeface="Arial"/>
+              </a:defRPr>
+            </a:pPr>
+            <a:r>
+              <a:t>• حماية متعددة المسارات: دعم التشفير المتزامن لعدة محادثات دون تصادم المفاتيح.</a:t>
+            </a:r>
+          </a:p>
+        </p:txBody>
+      </p:sp>
+      <p:sp>
+        <p:nvSpPr>
+          <p:cNvPr id="10" name="Rounded Rectangle 9"/>
+          <p:cNvSpPr/>
+          <p:nvPr/>
+        </p:nvSpPr>
+        <p:spPr>
+          <a:xfrm>
+            <a:off x="6217920" y="1645920"/>
+            <a:ext cx="5120640" cy="4389120"/>
+          </a:xfrm>
+          <a:prstGeom prst="roundRect">
+            <a:avLst/>
+          </a:prstGeom>
+          <a:solidFill>
+            <a:srgbClr val="F8FAFC"/>
+          </a:solidFill>
+          <a:ln w="19050">
+            <a:solidFill>
+              <a:srgbClr val="CBD5E1"/>
+            </a:solidFill>
+          </a:ln>
+        </p:spPr>
+        <p:style>
+          <a:lnRef idx="1">
+            <a:schemeClr val="accent1"/>
+          </a:lnRef>
+          <a:fillRef idx="3">
+            <a:schemeClr val="accent1"/>
+          </a:fillRef>
+          <a:effectRef idx="2">
+            <a:schemeClr val="accent1"/>
+          </a:effectRef>
+          <a:fontRef idx="minor">
+            <a:schemeClr val="lt1"/>
+          </a:fontRef>
+        </p:style>
+        <p:txBody>
+          <a:bodyPr rtlCol="0" anchor="ctr" wrap="square"/>
+          <a:lstStyle/>
+          <a:p>
+            <a:pPr algn="ctr">
+              <a:defRPr sz="2200" b="1">
+                <a:solidFill>
+                  <a:srgbClr val="0F2B5C"/>
+                </a:solidFill>
+                <a:latin typeface="Arial"/>
+              </a:defRPr>
+            </a:pPr>
+            <a:r>
+              <a:t>📂 الملف والمسؤولية في الكود:</a:t>
             </a:r>
           </a:p>
           <a:p>
@@ -10589,41 +8911,63 @@
               <a:spcBef>
                 <a:spcPts val="800"/>
               </a:spcBef>
-              <a:defRPr sz="1050" b="1">
+              <a:defRPr sz="1300" b="1">
                 <a:solidFill>
                   <a:srgbClr val="1E40AF"/>
                 </a:solidFill>
-                <a:latin typeface="Cairo"/>
-              </a:defRPr>
-            </a:pPr>
-            <a:r>
-              <a:t>📂 المكون البرمجي المرتبط:</a:t>
+                <a:latin typeface="Consolas"/>
+              </a:defRPr>
+            </a:pPr>
+            <a:r>
+              <a:t>app/src/main/java/com/example/network/PeerSessionKeyManager.kt</a:t>
             </a:r>
           </a:p>
           <a:p>
             <a:pPr>
-              <a:defRPr sz="950" b="1">
-                <a:solidFill>
-                  <a:srgbClr val="0284C7"/>
-                </a:solidFill>
-                <a:latin typeface="Consolas"/>
-              </a:defRPr>
-            </a:pPr>
-            <a:r>
-              <a:t>app/src/main/java/com/example/network/EcdhEngine.kt</a:t>
+              <a:spcBef>
+                <a:spcPts val="1200"/>
+              </a:spcBef>
+              <a:defRPr sz="1700" b="1">
+                <a:solidFill>
+                  <a:srgbClr val="0F172A"/>
+                </a:solidFill>
+                <a:latin typeface="Arial"/>
+              </a:defRPr>
+            </a:pPr>
+            <a:r>
+              <a:t>• المسؤولية: تتبع حالة المصافحة، تخزين مفاتيح TX و RX لكل PeerID، وإتلاف المفاتيح عند انتهاء الجلسة.</a:t>
             </a:r>
           </a:p>
           <a:p>
             <a:pPr>
-              <a:defRPr sz="950">
-                <a:solidFill>
-                  <a:srgbClr val="475569"/>
-                </a:solidFill>
-                <a:latin typeface="Cairo"/>
-              </a:defRPr>
-            </a:pPr>
-            <a:r>
-              <a:t>دالتا deriveSharedSecret و deriveSessionKey لتطبيق مراحل HKDF.</a:t>
+              <a:spcBef>
+                <a:spcPts val="1200"/>
+              </a:spcBef>
+              <a:defRPr sz="1700" b="1">
+                <a:solidFill>
+                  <a:srgbClr val="0F172A"/>
+                </a:solidFill>
+                <a:latin typeface="Arial"/>
+              </a:defRPr>
+            </a:pPr>
+            <a:r>
+              <a:t>• التكامل: يزود المحركات الشبكية بالمفتاح النشط للقرين بدلاً من الاعتماد على مفتاح ثابت موحد.</a:t>
+            </a:r>
+          </a:p>
+          <a:p>
+            <a:pPr>
+              <a:spcBef>
+                <a:spcPts val="1200"/>
+              </a:spcBef>
+              <a:defRPr sz="1700" b="1">
+                <a:solidFill>
+                  <a:srgbClr val="0F172A"/>
+                </a:solidFill>
+                <a:latin typeface="Arial"/>
+              </a:defRPr>
+            </a:pPr>
+            <a:r>
+              <a:t>• الحالة الهندسية: Integrated in Code — مدمج في هيكل المشروع البرمجي.</a:t>
             </a:r>
           </a:p>
         </p:txBody>
@@ -10655,7 +8999,7 @@
         <p:spPr>
           <a:xfrm>
             <a:off x="0" y="0"/>
-            <a:ext cx="12191695" cy="109728"/>
+            <a:ext cx="12191695" cy="91440"/>
           </a:xfrm>
           <a:prstGeom prst="rect">
             <a:avLst/>
@@ -10697,8 +9041,8 @@
         </p:nvSpPr>
         <p:spPr>
           <a:xfrm>
-            <a:off x="731520" y="228600"/>
-            <a:ext cx="7772400" cy="365760"/>
+            <a:off x="822960" y="228600"/>
+            <a:ext cx="7772400" cy="320040"/>
           </a:xfrm>
           <a:prstGeom prst="rect">
             <a:avLst/>
@@ -10712,64 +9056,47 @@
           <a:lstStyle/>
           <a:p>
             <a:pPr>
-              <a:defRPr sz="1100" b="1">
-                <a:solidFill>
-                  <a:srgbClr val="0284C7"/>
-                </a:solidFill>
-                <a:latin typeface="Cairo"/>
-              </a:defRPr>
-            </a:pPr>
-            <a:r>
-              <a:t>• هوية الجهاز التشفيرية | مشروع LOCAL CONTACT P2P</a:t>
-            </a:r>
-          </a:p>
-        </p:txBody>
-      </p:sp>
-      <p:sp>
-        <p:nvSpPr>
-          <p:cNvPr id="4" name="Rounded Rectangle 3"/>
-          <p:cNvSpPr/>
+              <a:defRPr sz="1300" b="1">
+                <a:solidFill>
+                  <a:srgbClr val="1E40AF"/>
+                </a:solidFill>
+                <a:latin typeface="Arial"/>
+              </a:defRPr>
+            </a:pPr>
+            <a:r>
+              <a:t>LOCAL CONTACT P2P  |  هوية الأجهزة والتوقيع الرقمي</a:t>
+            </a:r>
+          </a:p>
+        </p:txBody>
+      </p:sp>
+      <p:sp>
+        <p:nvSpPr>
+          <p:cNvPr id="4" name="TextBox 3"/>
+          <p:cNvSpPr txBox="1"/>
           <p:nvPr/>
         </p:nvSpPr>
         <p:spPr>
           <a:xfrm>
-            <a:off x="10515600" y="228600"/>
-            <a:ext cx="914400" cy="320040"/>
-          </a:xfrm>
-          <a:prstGeom prst="roundRect">
-            <a:avLst/>
-          </a:prstGeom>
-          <a:solidFill>
-            <a:srgbClr val="0F2B5C"/>
-          </a:solidFill>
-          <a:ln>
-            <a:noFill/>
-          </a:ln>
-        </p:spPr>
-        <p:style>
-          <a:lnRef idx="1">
-            <a:schemeClr val="accent1"/>
-          </a:lnRef>
-          <a:fillRef idx="3">
-            <a:schemeClr val="accent1"/>
-          </a:fillRef>
-          <a:effectRef idx="2">
-            <a:schemeClr val="accent1"/>
-          </a:effectRef>
-          <a:fontRef idx="minor">
-            <a:schemeClr val="lt1"/>
-          </a:fontRef>
-        </p:style>
-        <p:txBody>
-          <a:bodyPr rtlCol="0" anchor="ctr"/>
-          <a:lstStyle/>
-          <a:p>
-            <a:pPr algn="ctr">
-              <a:defRPr sz="1100" b="1">
-                <a:solidFill>
-                  <a:srgbClr val="FFFFFF"/>
-                </a:solidFill>
-                <a:latin typeface="Consolas"/>
+            <a:off x="10241280" y="6309360"/>
+            <a:ext cx="1188720" cy="365760"/>
+          </a:xfrm>
+          <a:prstGeom prst="rect">
+            <a:avLst/>
+          </a:prstGeom>
+          <a:noFill/>
+        </p:spPr>
+        <p:txBody>
+          <a:bodyPr wrap="none">
+            <a:spAutoFit/>
+          </a:bodyPr>
+          <a:lstStyle/>
+          <a:p>
+            <a:pPr algn="r">
+              <a:defRPr sz="1400" b="1">
+                <a:solidFill>
+                  <a:srgbClr val="0F2B5C"/>
+                </a:solidFill>
+                <a:latin typeface="Arial"/>
               </a:defRPr>
             </a:pPr>
             <a:r>
@@ -10786,8 +9113,8 @@
         </p:nvSpPr>
         <p:spPr>
           <a:xfrm>
-            <a:off x="731520" y="594360"/>
-            <a:ext cx="8686800" cy="548640"/>
+            <a:off x="822960" y="594360"/>
+            <a:ext cx="8961120" cy="685800"/>
           </a:xfrm>
           <a:prstGeom prst="rect">
             <a:avLst/>
@@ -10801,161 +9128,29 @@
           <a:lstStyle/>
           <a:p>
             <a:pPr>
-              <a:defRPr sz="2000" b="1">
+              <a:defRPr sz="2800" b="1">
                 <a:solidFill>
                   <a:srgbClr val="0F2B5C"/>
                 </a:solidFill>
-                <a:latin typeface="Cairo"/>
-              </a:defRPr>
-            </a:pPr>
-            <a:r>
-              <a:t>حماية هوية الجهاز عبر Android Keystore</a:t>
-            </a:r>
-          </a:p>
-        </p:txBody>
-      </p:sp>
-      <p:sp>
-        <p:nvSpPr>
-          <p:cNvPr id="6" name="TextBox 5"/>
-          <p:cNvSpPr txBox="1"/>
-          <p:nvPr/>
-        </p:nvSpPr>
-        <p:spPr>
-          <a:xfrm>
-            <a:off x="731520" y="1078992"/>
-            <a:ext cx="8686800" cy="365760"/>
-          </a:xfrm>
-          <a:prstGeom prst="rect">
-            <a:avLst/>
-          </a:prstGeom>
-          <a:noFill/>
-        </p:spPr>
-        <p:txBody>
-          <a:bodyPr wrap="square">
-            <a:spAutoFit/>
-          </a:bodyPr>
-          <a:lstStyle/>
-          <a:p>
-            <a:pPr>
-              <a:defRPr sz="1150">
-                <a:solidFill>
-                  <a:srgbClr val="475569"/>
-                </a:solidFill>
-                <a:latin typeface="Cairo"/>
-              </a:defRPr>
-            </a:pPr>
-            <a:r>
-              <a:t>إدارة مفاتيح غير قابلة للتصدير مدعومة بالمعالج الآمن والتوقيع الرقمي ECDSA</a:t>
-            </a:r>
-          </a:p>
-        </p:txBody>
-      </p:sp>
-      <p:sp>
-        <p:nvSpPr>
-          <p:cNvPr id="7" name="Rounded Rectangle 6"/>
+                <a:latin typeface="Arial"/>
+              </a:defRPr>
+            </a:pPr>
+            <a:r>
+              <a:t>حماية هوية الأجهزة: Android Keystore والتوقيع الرقمي ECDSA</a:t>
+            </a:r>
+          </a:p>
+        </p:txBody>
+      </p:sp>
+      <p:sp>
+        <p:nvSpPr>
+          <p:cNvPr id="6" name="Rounded Rectangle 5"/>
           <p:cNvSpPr/>
           <p:nvPr/>
         </p:nvSpPr>
         <p:spPr>
           <a:xfrm>
-            <a:off x="9144000" y="685800"/>
-            <a:ext cx="2286000" cy="347472"/>
-          </a:xfrm>
-          <a:prstGeom prst="roundRect">
-            <a:avLst/>
-          </a:prstGeom>
-          <a:solidFill>
-            <a:srgbClr val="D97706"/>
-          </a:solidFill>
-          <a:ln>
-            <a:noFill/>
-          </a:ln>
-        </p:spPr>
-        <p:style>
-          <a:lnRef idx="1">
-            <a:schemeClr val="accent1"/>
-          </a:lnRef>
-          <a:fillRef idx="3">
-            <a:schemeClr val="accent1"/>
-          </a:fillRef>
-          <a:effectRef idx="2">
-            <a:schemeClr val="accent1"/>
-          </a:effectRef>
-          <a:fontRef idx="minor">
-            <a:schemeClr val="lt1"/>
-          </a:fontRef>
-        </p:style>
-        <p:txBody>
-          <a:bodyPr rtlCol="0" anchor="ctr"/>
-          <a:lstStyle/>
-          <a:p>
-            <a:pPr algn="ctr">
-              <a:defRPr sz="1000" b="1">
-                <a:solidFill>
-                  <a:srgbClr val="FFFFFF"/>
-                </a:solidFill>
-                <a:latin typeface="Consolas"/>
-              </a:defRPr>
-            </a:pPr>
-            <a:r>
-              <a:t>INTEGRATED IN CODE</a:t>
-            </a:r>
-          </a:p>
-        </p:txBody>
-      </p:sp>
-      <p:sp>
-        <p:nvSpPr>
-          <p:cNvPr id="8" name="Rectangle 7"/>
-          <p:cNvSpPr/>
-          <p:nvPr/>
-        </p:nvSpPr>
-        <p:spPr>
-          <a:xfrm>
-            <a:off x="731520" y="1463040"/>
-            <a:ext cx="10725912" cy="18288"/>
-          </a:xfrm>
-          <a:prstGeom prst="rect">
-            <a:avLst/>
-          </a:prstGeom>
-          <a:solidFill>
-            <a:srgbClr val="CBD5E1"/>
-          </a:solidFill>
-          <a:ln>
-            <a:noFill/>
-          </a:ln>
-        </p:spPr>
-        <p:style>
-          <a:lnRef idx="1">
-            <a:schemeClr val="accent1"/>
-          </a:lnRef>
-          <a:fillRef idx="3">
-            <a:schemeClr val="accent1"/>
-          </a:fillRef>
-          <a:effectRef idx="2">
-            <a:schemeClr val="accent1"/>
-          </a:effectRef>
-          <a:fontRef idx="minor">
-            <a:schemeClr val="lt1"/>
-          </a:fontRef>
-        </p:style>
-        <p:txBody>
-          <a:bodyPr rtlCol="0" anchor="ctr"/>
-          <a:lstStyle/>
-          <a:p>
-            <a:pPr algn="ctr"/>
-          </a:p>
-        </p:txBody>
-      </p:sp>
-      <p:sp>
-        <p:nvSpPr>
-          <p:cNvPr id="9" name="Rounded Rectangle 8"/>
-          <p:cNvSpPr/>
-          <p:nvPr/>
-        </p:nvSpPr>
-        <p:spPr>
-          <a:xfrm>
-            <a:off x="731520" y="1645920"/>
-            <a:ext cx="5212080" cy="4663440"/>
+            <a:off x="8961120" y="621792"/>
+            <a:ext cx="2377440" cy="438912"/>
           </a:xfrm>
           <a:prstGeom prst="roundRect">
             <a:avLst/>
@@ -10984,97 +9179,112 @@
           </a:fontRef>
         </p:style>
         <p:txBody>
-          <a:bodyPr rtlCol="0" anchor="ctr" wrap="square"/>
+          <a:bodyPr rtlCol="0" anchor="ctr"/>
           <a:lstStyle/>
           <a:p>
             <a:pPr algn="ctr">
-              <a:defRPr sz="1300" b="1">
-                <a:solidFill>
-                  <a:srgbClr val="0F2B5C"/>
-                </a:solidFill>
-                <a:latin typeface="Cairo"/>
-              </a:defRPr>
-            </a:pPr>
-            <a:r>
-              <a:t>🛡️ الخصائص الأمنية لمخزن المفاتيح:</a:t>
-            </a:r>
-          </a:p>
-          <a:p>
-            <a:pPr>
-              <a:spcBef>
-                <a:spcPts val="400"/>
-              </a:spcBef>
-              <a:defRPr sz="1050">
-                <a:solidFill>
-                  <a:srgbClr val="0F172A"/>
-                </a:solidFill>
-                <a:latin typeface="Cairo"/>
-              </a:defRPr>
-            </a:pPr>
-            <a:r>
-              <a:t>• مفتاح الهوية الدائم: توليد زوج مفاتيح EC secp256r1 فريد للجهاز داخل AndroidKeyStore.</a:t>
-            </a:r>
-          </a:p>
-          <a:p>
-            <a:pPr>
-              <a:spcBef>
-                <a:spcPts val="400"/>
-              </a:spcBef>
-              <a:defRPr sz="1050">
-                <a:solidFill>
-                  <a:srgbClr val="0F172A"/>
-                </a:solidFill>
-                <a:latin typeface="Cairo"/>
-              </a:defRPr>
-            </a:pPr>
-            <a:r>
-              <a:t>• حماية العتاد الآمن (TEE / StrongBox): المفتاح الخاص لا يغادر المعالج المعزول أبداً ولا يمكن تصديره حتى بصلاحيات Root.</a:t>
-            </a:r>
-          </a:p>
-          <a:p>
-            <a:pPr>
-              <a:spcBef>
-                <a:spcPts val="400"/>
-              </a:spcBef>
-              <a:defRPr sz="1050">
-                <a:solidFill>
-                  <a:srgbClr val="0F172A"/>
-                </a:solidFill>
-                <a:latin typeface="Cairo"/>
-              </a:defRPr>
-            </a:pPr>
-            <a:r>
-              <a:t>• التوقيع الرقمي: استخدام SHA256withECDSA لتوقيع حزم المصافحة وإثبات الهوية.</a:t>
-            </a:r>
-          </a:p>
-          <a:p>
-            <a:pPr>
-              <a:spcBef>
-                <a:spcPts val="400"/>
-              </a:spcBef>
-              <a:defRPr sz="1050">
-                <a:solidFill>
-                  <a:srgbClr val="0F172A"/>
-                </a:solidFill>
-                <a:latin typeface="Cairo"/>
-              </a:defRPr>
-            </a:pPr>
-            <a:r>
-              <a:t>• عزل النطاق: مفتاح الهوية مخصص للمصادقة فقط ولا يشفر بيانات التطبيق مباشرة.</a:t>
-            </a:r>
-          </a:p>
-        </p:txBody>
-      </p:sp>
-      <p:sp>
-        <p:nvSpPr>
-          <p:cNvPr id="10" name="Rounded Rectangle 9"/>
+              <a:defRPr sz="1200" b="1">
+                <a:solidFill>
+                  <a:srgbClr val="1E40AF"/>
+                </a:solidFill>
+                <a:latin typeface="Consolas"/>
+              </a:defRPr>
+            </a:pPr>
+            <a:r>
+              <a:t>HARDWARE BACKED</a:t>
+            </a:r>
+          </a:p>
+        </p:txBody>
+      </p:sp>
+      <p:sp>
+        <p:nvSpPr>
+          <p:cNvPr id="7" name="Rectangle 6"/>
           <p:cNvSpPr/>
           <p:nvPr/>
         </p:nvSpPr>
         <p:spPr>
           <a:xfrm>
-            <a:off x="6217920" y="1645920"/>
-            <a:ext cx="5212080" cy="4663440"/>
+            <a:off x="822960" y="1353312"/>
+            <a:ext cx="10515600" cy="18288"/>
+          </a:xfrm>
+          <a:prstGeom prst="rect">
+            <a:avLst/>
+          </a:prstGeom>
+          <a:solidFill>
+            <a:srgbClr val="CBD5E1"/>
+          </a:solidFill>
+          <a:ln>
+            <a:noFill/>
+          </a:ln>
+        </p:spPr>
+        <p:style>
+          <a:lnRef idx="1">
+            <a:schemeClr val="accent1"/>
+          </a:lnRef>
+          <a:fillRef idx="3">
+            <a:schemeClr val="accent1"/>
+          </a:fillRef>
+          <a:effectRef idx="2">
+            <a:schemeClr val="accent1"/>
+          </a:effectRef>
+          <a:fontRef idx="minor">
+            <a:schemeClr val="lt1"/>
+          </a:fontRef>
+        </p:style>
+        <p:txBody>
+          <a:bodyPr rtlCol="0" anchor="ctr"/>
+          <a:lstStyle/>
+          <a:p>
+            <a:pPr algn="ctr"/>
+          </a:p>
+        </p:txBody>
+      </p:sp>
+      <p:sp>
+        <p:nvSpPr>
+          <p:cNvPr id="8" name="TextBox 7"/>
+          <p:cNvSpPr txBox="1"/>
+          <p:nvPr/>
+        </p:nvSpPr>
+        <p:spPr>
+          <a:xfrm>
+            <a:off x="822960" y="6309360"/>
+            <a:ext cx="7315200" cy="320040"/>
+          </a:xfrm>
+          <a:prstGeom prst="rect">
+            <a:avLst/>
+          </a:prstGeom>
+          <a:noFill/>
+        </p:spPr>
+        <p:txBody>
+          <a:bodyPr wrap="none">
+            <a:spAutoFit/>
+          </a:bodyPr>
+          <a:lstStyle/>
+          <a:p>
+            <a:pPr>
+              <a:defRPr sz="1100">
+                <a:solidFill>
+                  <a:srgbClr val="475569"/>
+                </a:solidFill>
+                <a:latin typeface="Arial"/>
+              </a:defRPr>
+            </a:pPr>
+            <a:r>
+              <a:t>مشروع تخرج LOCAL CONTACT — مناقشة أكاديمية محكمة</a:t>
+            </a:r>
+          </a:p>
+        </p:txBody>
+      </p:sp>
+      <p:sp>
+        <p:nvSpPr>
+          <p:cNvPr id="9" name="Rounded Rectangle 8"/>
+          <p:cNvSpPr/>
+          <p:nvPr/>
+        </p:nvSpPr>
+        <p:spPr>
+          <a:xfrm>
+            <a:off x="822960" y="1645920"/>
+            <a:ext cx="10515600" cy="4389120"/>
           </a:xfrm>
           <a:prstGeom prst="roundRect">
             <a:avLst/>
@@ -11084,7 +9294,7 @@
           </a:solidFill>
           <a:ln w="19050">
             <a:solidFill>
-              <a:srgbClr val="D97706"/>
+              <a:srgbClr val="CBD5E1"/>
             </a:solidFill>
           </a:ln>
         </p:spPr>
@@ -11107,105 +9317,95 @@
           <a:lstStyle/>
           <a:p>
             <a:pPr algn="ctr">
-              <a:defRPr sz="1300" b="1">
+              <a:defRPr sz="2200" b="1">
                 <a:solidFill>
                   <a:srgbClr val="0F2B5C"/>
                 </a:solidFill>
-                <a:latin typeface="Cairo"/>
-              </a:defRPr>
-            </a:pPr>
-            <a:r>
-              <a:t>📂 المكون المسؤول وحالة التحقق الأكاديمية:</a:t>
+                <a:latin typeface="Arial"/>
+              </a:defRPr>
+            </a:pPr>
+            <a:r>
+              <a:t>🛡️ منظومة الهوية المشفرة والتخزين العتادي الآمن:</a:t>
             </a:r>
           </a:p>
           <a:p>
             <a:pPr>
               <a:spcBef>
-                <a:spcPts val="400"/>
+                <a:spcPts val="1200"/>
               </a:spcBef>
-              <a:defRPr sz="1050">
+              <a:defRPr sz="1800" b="1">
                 <a:solidFill>
                   <a:srgbClr val="0F172A"/>
                 </a:solidFill>
-                <a:latin typeface="Cairo"/>
-              </a:defRPr>
-            </a:pPr>
-            <a:r>
-              <a:t>• المسؤولية: إدارة دورة حياة المفتاح وتوقيع الحزم والتحقق منها.</a:t>
+                <a:latin typeface="Arial"/>
+              </a:defRPr>
+            </a:pPr>
+            <a:r>
+              <a:t>• الحماية في عتاد الجهاز (Hardware Security): توليد زوج مفاتيح هوية طويل الأمد داخل رقاقة التشفير الآمنة (TEE / StrongBox) عبر Android Keystore.</a:t>
             </a:r>
           </a:p>
           <a:p>
             <a:pPr>
               <a:spcBef>
-                <a:spcPts val="400"/>
+                <a:spcPts val="1200"/>
               </a:spcBef>
-              <a:defRPr sz="1050">
+              <a:defRPr sz="1800" b="1">
                 <a:solidFill>
                   <a:srgbClr val="0F172A"/>
                 </a:solidFill>
-                <a:latin typeface="Cairo"/>
-              </a:defRPr>
-            </a:pPr>
-            <a:r>
-              <a:t>• الفائدة: منح الجهاز هوية تشفيرية ثابتة بدل الاعتماد على معرف UUID عشوائي.</a:t>
+                <a:latin typeface="Arial"/>
+              </a:defRPr>
+            </a:pPr>
+            <a:r>
+              <a:t>• استحالة استخراج المفتاح الخاص (Non-Exportable): المفتاح الخاص لا يغادر عتاد الهاتف أبداً حتى مع صلاحيات Root كاملة للنظام.</a:t>
             </a:r>
           </a:p>
           <a:p>
             <a:pPr>
               <a:spcBef>
-                <a:spcPts val="400"/>
+                <a:spcPts val="1200"/>
               </a:spcBef>
-              <a:defRPr sz="1050">
+              <a:defRPr sz="1800" b="1">
                 <a:solidFill>
                   <a:srgbClr val="0F172A"/>
                 </a:solidFill>
-                <a:latin typeface="Cairo"/>
-              </a:defRPr>
-            </a:pPr>
-            <a:r>
-              <a:t>• ⚠️ حالة التحقق الصارمة: مدمج في الكود ولكن يحتاج فحصاً على جهاز فيزيائي متاح يعمل بـ TEE حقيقي (Device Verification Pending).</a:t>
+                <a:latin typeface="Arial"/>
+              </a:defRPr>
+            </a:pPr>
+            <a:r>
+              <a:t>• التوقيع الرقمي (ECDSA with SHA-256): توقيع حزم المصافحة لإثبات هوية الجهاز ومنع انتحال الشخصية على الشبكة المحلية.</a:t>
             </a:r>
           </a:p>
           <a:p>
             <a:pPr>
               <a:spcBef>
-                <a:spcPts val="800"/>
+                <a:spcPts val="1200"/>
               </a:spcBef>
-              <a:defRPr sz="1050" b="1">
-                <a:solidFill>
-                  <a:srgbClr val="1E40AF"/>
-                </a:solidFill>
-                <a:latin typeface="Cairo"/>
-              </a:defRPr>
-            </a:pPr>
-            <a:r>
-              <a:t>📂 المكون البرمجي المرتبط:</a:t>
+              <a:defRPr sz="1800" b="1">
+                <a:solidFill>
+                  <a:srgbClr val="0F172A"/>
+                </a:solidFill>
+                <a:latin typeface="Arial"/>
+              </a:defRPr>
+            </a:pPr>
+            <a:r>
+              <a:t>• التوقيع المرتبط بالسياق (Context-Bound Signature): ربط التوقيع بـ Nonce المصافحة وعنوان الجهاز لمنع هجمات إعادة التوقيع (Replay Signature).</a:t>
             </a:r>
           </a:p>
           <a:p>
             <a:pPr>
-              <a:defRPr sz="950" b="1">
-                <a:solidFill>
-                  <a:srgbClr val="0284C7"/>
-                </a:solidFill>
-                <a:latin typeface="Consolas"/>
-              </a:defRPr>
-            </a:pPr>
-            <a:r>
-              <a:t>app/src/main/java/com/example/network/KeystoreIdentityManager.kt</a:t>
-            </a:r>
-          </a:p>
-          <a:p>
-            <a:pPr>
-              <a:defRPr sz="950">
-                <a:solidFill>
-                  <a:srgbClr val="475569"/>
-                </a:solidFill>
-                <a:latin typeface="Cairo"/>
-              </a:defRPr>
-            </a:pPr>
-            <a:r>
-              <a:t>كلاس إدارة هوية الجهاز والتوقيع الرقمي عبر Android Keystore.</a:t>
+              <a:spcBef>
+                <a:spcPts val="1200"/>
+              </a:spcBef>
+              <a:defRPr sz="1800" b="1">
+                <a:solidFill>
+                  <a:srgbClr val="0F172A"/>
+                </a:solidFill>
+                <a:latin typeface="Arial"/>
+              </a:defRPr>
+            </a:pPr>
+            <a:r>
+              <a:t>• الملف المسؤول في الكود: KeystoreIdentityManager.kt — يتولى توليد وإدارة هوية الهاتف والتوقيع الرقمي.</a:t>
             </a:r>
           </a:p>
         </p:txBody>
@@ -11237,7 +9437,7 @@
         <p:spPr>
           <a:xfrm>
             <a:off x="0" y="0"/>
-            <a:ext cx="12191695" cy="109728"/>
+            <a:ext cx="12191695" cy="91440"/>
           </a:xfrm>
           <a:prstGeom prst="rect">
             <a:avLst/>
@@ -11279,8 +9479,8 @@
         </p:nvSpPr>
         <p:spPr>
           <a:xfrm>
-            <a:off x="731520" y="228600"/>
-            <a:ext cx="7772400" cy="365760"/>
+            <a:off x="822960" y="228600"/>
+            <a:ext cx="7772400" cy="320040"/>
           </a:xfrm>
           <a:prstGeom prst="rect">
             <a:avLst/>
@@ -11294,64 +9494,47 @@
           <a:lstStyle/>
           <a:p>
             <a:pPr>
-              <a:defRPr sz="1100" b="1">
-                <a:solidFill>
-                  <a:srgbClr val="0284C7"/>
-                </a:solidFill>
-                <a:latin typeface="Cairo"/>
-              </a:defRPr>
-            </a:pPr>
-            <a:r>
-              <a:t>• تحصين بروتوكول المصافحة | مشروع LOCAL CONTACT P2P</a:t>
-            </a:r>
-          </a:p>
-        </p:txBody>
-      </p:sp>
-      <p:sp>
-        <p:nvSpPr>
-          <p:cNvPr id="4" name="Rounded Rectangle 3"/>
-          <p:cNvSpPr/>
+              <a:defRPr sz="1300" b="1">
+                <a:solidFill>
+                  <a:srgbClr val="1E40AF"/>
+                </a:solidFill>
+                <a:latin typeface="Arial"/>
+              </a:defRPr>
+            </a:pPr>
+            <a:r>
+              <a:t>LOCAL CONTACT P2P  |  نموذج الثقة وتثبيت الهوية</a:t>
+            </a:r>
+          </a:p>
+        </p:txBody>
+      </p:sp>
+      <p:sp>
+        <p:nvSpPr>
+          <p:cNvPr id="4" name="TextBox 3"/>
+          <p:cNvSpPr txBox="1"/>
           <p:nvPr/>
         </p:nvSpPr>
         <p:spPr>
           <a:xfrm>
-            <a:off x="10515600" y="228600"/>
-            <a:ext cx="914400" cy="320040"/>
-          </a:xfrm>
-          <a:prstGeom prst="roundRect">
-            <a:avLst/>
-          </a:prstGeom>
-          <a:solidFill>
-            <a:srgbClr val="0F2B5C"/>
-          </a:solidFill>
-          <a:ln>
-            <a:noFill/>
-          </a:ln>
-        </p:spPr>
-        <p:style>
-          <a:lnRef idx="1">
-            <a:schemeClr val="accent1"/>
-          </a:lnRef>
-          <a:fillRef idx="3">
-            <a:schemeClr val="accent1"/>
-          </a:fillRef>
-          <a:effectRef idx="2">
-            <a:schemeClr val="accent1"/>
-          </a:effectRef>
-          <a:fontRef idx="minor">
-            <a:schemeClr val="lt1"/>
-          </a:fontRef>
-        </p:style>
-        <p:txBody>
-          <a:bodyPr rtlCol="0" anchor="ctr"/>
-          <a:lstStyle/>
-          <a:p>
-            <a:pPr algn="ctr">
-              <a:defRPr sz="1100" b="1">
-                <a:solidFill>
-                  <a:srgbClr val="FFFFFF"/>
-                </a:solidFill>
-                <a:latin typeface="Consolas"/>
+            <a:off x="10241280" y="6309360"/>
+            <a:ext cx="1188720" cy="365760"/>
+          </a:xfrm>
+          <a:prstGeom prst="rect">
+            <a:avLst/>
+          </a:prstGeom>
+          <a:noFill/>
+        </p:spPr>
+        <p:txBody>
+          <a:bodyPr wrap="none">
+            <a:spAutoFit/>
+          </a:bodyPr>
+          <a:lstStyle/>
+          <a:p>
+            <a:pPr algn="r">
+              <a:defRPr sz="1400" b="1">
+                <a:solidFill>
+                  <a:srgbClr val="0F2B5C"/>
+                </a:solidFill>
+                <a:latin typeface="Arial"/>
               </a:defRPr>
             </a:pPr>
             <a:r>
@@ -11368,8 +9551,8 @@
         </p:nvSpPr>
         <p:spPr>
           <a:xfrm>
-            <a:off x="731520" y="594360"/>
-            <a:ext cx="8686800" cy="548640"/>
+            <a:off x="822960" y="594360"/>
+            <a:ext cx="8961120" cy="685800"/>
           </a:xfrm>
           <a:prstGeom prst="rect">
             <a:avLst/>
@@ -11383,161 +9566,29 @@
           <a:lstStyle/>
           <a:p>
             <a:pPr>
-              <a:defRPr sz="2000" b="1">
+              <a:defRPr sz="2800" b="1">
                 <a:solidFill>
                   <a:srgbClr val="0F2B5C"/>
                 </a:solidFill>
-                <a:latin typeface="Cairo"/>
-              </a:defRPr>
-            </a:pPr>
-            <a:r>
-              <a:t>التوقيع الرقمي المرتبط بالسياق (Context-Bound)</a:t>
-            </a:r>
-          </a:p>
-        </p:txBody>
-      </p:sp>
-      <p:sp>
-        <p:nvSpPr>
-          <p:cNvPr id="6" name="TextBox 5"/>
-          <p:cNvSpPr txBox="1"/>
-          <p:nvPr/>
-        </p:nvSpPr>
-        <p:spPr>
-          <a:xfrm>
-            <a:off x="731520" y="1078992"/>
-            <a:ext cx="8686800" cy="365760"/>
-          </a:xfrm>
-          <a:prstGeom prst="rect">
-            <a:avLst/>
-          </a:prstGeom>
-          <a:noFill/>
-        </p:spPr>
-        <p:txBody>
-          <a:bodyPr wrap="square">
-            <a:spAutoFit/>
-          </a:bodyPr>
-          <a:lstStyle/>
-          <a:p>
-            <a:pPr>
-              <a:defRPr sz="1150">
-                <a:solidFill>
-                  <a:srgbClr val="475569"/>
-                </a:solidFill>
-                <a:latin typeface="Cairo"/>
-              </a:defRPr>
-            </a:pPr>
-            <a:r>
-              <a:t>ربط حزم المصافحة بسياق الجلسة عبر هيكل باينري حتمي لمنع هجمات الاستبدال</a:t>
-            </a:r>
-          </a:p>
-        </p:txBody>
-      </p:sp>
-      <p:sp>
-        <p:nvSpPr>
-          <p:cNvPr id="7" name="Rounded Rectangle 6"/>
+                <a:latin typeface="Arial"/>
+              </a:defRPr>
+            </a:pPr>
+            <a:r>
+              <a:t>نموذج الثقة اللامركزي: بصمات الأجهزة وتثبيت الهوية (TOFU)</a:t>
+            </a:r>
+          </a:p>
+        </p:txBody>
+      </p:sp>
+      <p:sp>
+        <p:nvSpPr>
+          <p:cNvPr id="6" name="Rounded Rectangle 5"/>
           <p:cNvSpPr/>
           <p:nvPr/>
         </p:nvSpPr>
         <p:spPr>
           <a:xfrm>
-            <a:off x="9144000" y="685800"/>
-            <a:ext cx="2286000" cy="347472"/>
-          </a:xfrm>
-          <a:prstGeom prst="roundRect">
-            <a:avLst/>
-          </a:prstGeom>
-          <a:solidFill>
-            <a:srgbClr val="059669"/>
-          </a:solidFill>
-          <a:ln>
-            <a:noFill/>
-          </a:ln>
-        </p:spPr>
-        <p:style>
-          <a:lnRef idx="1">
-            <a:schemeClr val="accent1"/>
-          </a:lnRef>
-          <a:fillRef idx="3">
-            <a:schemeClr val="accent1"/>
-          </a:fillRef>
-          <a:effectRef idx="2">
-            <a:schemeClr val="accent1"/>
-          </a:effectRef>
-          <a:fontRef idx="minor">
-            <a:schemeClr val="lt1"/>
-          </a:fontRef>
-        </p:style>
-        <p:txBody>
-          <a:bodyPr rtlCol="0" anchor="ctr"/>
-          <a:lstStyle/>
-          <a:p>
-            <a:pPr algn="ctr">
-              <a:defRPr sz="1000" b="1">
-                <a:solidFill>
-                  <a:srgbClr val="FFFFFF"/>
-                </a:solidFill>
-                <a:latin typeface="Consolas"/>
-              </a:defRPr>
-            </a:pPr>
-            <a:r>
-              <a:t>JVM TESTED (8/8)</a:t>
-            </a:r>
-          </a:p>
-        </p:txBody>
-      </p:sp>
-      <p:sp>
-        <p:nvSpPr>
-          <p:cNvPr id="8" name="Rectangle 7"/>
-          <p:cNvSpPr/>
-          <p:nvPr/>
-        </p:nvSpPr>
-        <p:spPr>
-          <a:xfrm>
-            <a:off x="731520" y="1463040"/>
-            <a:ext cx="10725912" cy="18288"/>
-          </a:xfrm>
-          <a:prstGeom prst="rect">
-            <a:avLst/>
-          </a:prstGeom>
-          <a:solidFill>
-            <a:srgbClr val="CBD5E1"/>
-          </a:solidFill>
-          <a:ln>
-            <a:noFill/>
-          </a:ln>
-        </p:spPr>
-        <p:style>
-          <a:lnRef idx="1">
-            <a:schemeClr val="accent1"/>
-          </a:lnRef>
-          <a:fillRef idx="3">
-            <a:schemeClr val="accent1"/>
-          </a:fillRef>
-          <a:effectRef idx="2">
-            <a:schemeClr val="accent1"/>
-          </a:effectRef>
-          <a:fontRef idx="minor">
-            <a:schemeClr val="lt1"/>
-          </a:fontRef>
-        </p:style>
-        <p:txBody>
-          <a:bodyPr rtlCol="0" anchor="ctr"/>
-          <a:lstStyle/>
-          <a:p>
-            <a:pPr algn="ctr"/>
-          </a:p>
-        </p:txBody>
-      </p:sp>
-      <p:sp>
-        <p:nvSpPr>
-          <p:cNvPr id="9" name="Rounded Rectangle 8"/>
-          <p:cNvSpPr/>
-          <p:nvPr/>
-        </p:nvSpPr>
-        <p:spPr>
-          <a:xfrm>
-            <a:off x="731520" y="1645920"/>
-            <a:ext cx="5212080" cy="4663440"/>
+            <a:off x="8961120" y="621792"/>
+            <a:ext cx="2377440" cy="438912"/>
           </a:xfrm>
           <a:prstGeom prst="roundRect">
             <a:avLst/>
@@ -11566,129 +9617,112 @@
           </a:fontRef>
         </p:style>
         <p:txBody>
-          <a:bodyPr rtlCol="0" anchor="ctr" wrap="square"/>
+          <a:bodyPr rtlCol="0" anchor="ctr"/>
           <a:lstStyle/>
           <a:p>
             <a:pPr algn="ctr">
-              <a:defRPr sz="1300" b="1">
-                <a:solidFill>
-                  <a:srgbClr val="0F2B5C"/>
-                </a:solidFill>
-                <a:latin typeface="Cairo"/>
-              </a:defRPr>
-            </a:pPr>
-            <a:r>
-              <a:t>📦 حقول التوقيع الحتمي (Canonical Binary Layout):</a:t>
-            </a:r>
-          </a:p>
-          <a:p>
-            <a:pPr>
-              <a:spcBef>
-                <a:spcPts val="400"/>
-              </a:spcBef>
-              <a:defRPr sz="1050">
-                <a:solidFill>
-                  <a:srgbClr val="0F172A"/>
-                </a:solidFill>
-                <a:latin typeface="Cairo"/>
-              </a:defRPr>
-            </a:pPr>
-            <a:r>
-              <a:t>• Domain Tag: تمييز المجال بسلسلة LocalConnect::Handshake::v1.</a:t>
-            </a:r>
-          </a:p>
-          <a:p>
-            <a:pPr>
-              <a:spcBef>
-                <a:spcPts val="400"/>
-              </a:spcBef>
-              <a:defRPr sz="1050">
-                <a:solidFill>
-                  <a:srgbClr val="0F172A"/>
-                </a:solidFill>
-                <a:latin typeface="Cairo"/>
-              </a:defRPr>
-            </a:pPr>
-            <a:r>
-              <a:t>• Protocol Version: رقم إصدار البروتوكول (الإصدار 2).</a:t>
-            </a:r>
-          </a:p>
-          <a:p>
-            <a:pPr>
-              <a:spcBef>
-                <a:spcPts val="400"/>
-              </a:spcBef>
-              <a:defRPr sz="1050">
-                <a:solidFill>
-                  <a:srgbClr val="0F172A"/>
-                </a:solidFill>
-                <a:latin typeface="Cairo"/>
-              </a:defRPr>
-            </a:pPr>
-            <a:r>
-              <a:t>• Sender &amp; Receiver IDs: معرفات أطراف الاتصال المحددة.</a:t>
-            </a:r>
-          </a:p>
-          <a:p>
-            <a:pPr>
-              <a:spcBef>
-                <a:spcPts val="400"/>
-              </a:spcBef>
-              <a:defRPr sz="1050">
-                <a:solidFill>
-                  <a:srgbClr val="0F172A"/>
-                </a:solidFill>
-                <a:latin typeface="Cairo"/>
-              </a:defRPr>
-            </a:pPr>
-            <a:r>
-              <a:t>• Session ID: معرف الجلسة الفريد لمنع الخلط بين الجلسات.</a:t>
-            </a:r>
-          </a:p>
-          <a:p>
-            <a:pPr>
-              <a:spcBef>
-                <a:spcPts val="400"/>
-              </a:spcBef>
-              <a:defRPr sz="1050">
-                <a:solidFill>
-                  <a:srgbClr val="0F172A"/>
-                </a:solidFill>
-                <a:latin typeface="Cairo"/>
-              </a:defRPr>
-            </a:pPr>
-            <a:r>
-              <a:t>• Timestamp: الطابع الزمني بالملي ثانية.</a:t>
-            </a:r>
-          </a:p>
-          <a:p>
-            <a:pPr>
-              <a:spcBef>
-                <a:spcPts val="400"/>
-              </a:spcBef>
-              <a:defRPr sz="1050">
-                <a:solidFill>
-                  <a:srgbClr val="0F172A"/>
-                </a:solidFill>
-                <a:latin typeface="Cairo"/>
-              </a:defRPr>
-            </a:pPr>
-            <a:r>
-              <a:t>• Ephemeral Public Key: بايتات المفتاح العام المؤقت للقرين.</a:t>
-            </a:r>
-          </a:p>
-        </p:txBody>
-      </p:sp>
-      <p:sp>
-        <p:nvSpPr>
-          <p:cNvPr id="10" name="Rounded Rectangle 9"/>
+              <a:defRPr sz="1200" b="1">
+                <a:solidFill>
+                  <a:srgbClr val="1E40AF"/>
+                </a:solidFill>
+                <a:latin typeface="Consolas"/>
+              </a:defRPr>
+            </a:pPr>
+            <a:r>
+              <a:t>TOFU TRUST MODEL</a:t>
+            </a:r>
+          </a:p>
+        </p:txBody>
+      </p:sp>
+      <p:sp>
+        <p:nvSpPr>
+          <p:cNvPr id="7" name="Rectangle 6"/>
           <p:cNvSpPr/>
           <p:nvPr/>
         </p:nvSpPr>
         <p:spPr>
           <a:xfrm>
-            <a:off x="6217920" y="1645920"/>
-            <a:ext cx="5212080" cy="4663440"/>
+            <a:off x="822960" y="1353312"/>
+            <a:ext cx="10515600" cy="18288"/>
+          </a:xfrm>
+          <a:prstGeom prst="rect">
+            <a:avLst/>
+          </a:prstGeom>
+          <a:solidFill>
+            <a:srgbClr val="CBD5E1"/>
+          </a:solidFill>
+          <a:ln>
+            <a:noFill/>
+          </a:ln>
+        </p:spPr>
+        <p:style>
+          <a:lnRef idx="1">
+            <a:schemeClr val="accent1"/>
+          </a:lnRef>
+          <a:fillRef idx="3">
+            <a:schemeClr val="accent1"/>
+          </a:fillRef>
+          <a:effectRef idx="2">
+            <a:schemeClr val="accent1"/>
+          </a:effectRef>
+          <a:fontRef idx="minor">
+            <a:schemeClr val="lt1"/>
+          </a:fontRef>
+        </p:style>
+        <p:txBody>
+          <a:bodyPr rtlCol="0" anchor="ctr"/>
+          <a:lstStyle/>
+          <a:p>
+            <a:pPr algn="ctr"/>
+          </a:p>
+        </p:txBody>
+      </p:sp>
+      <p:sp>
+        <p:nvSpPr>
+          <p:cNvPr id="8" name="TextBox 7"/>
+          <p:cNvSpPr txBox="1"/>
+          <p:nvPr/>
+        </p:nvSpPr>
+        <p:spPr>
+          <a:xfrm>
+            <a:off x="822960" y="6309360"/>
+            <a:ext cx="7315200" cy="320040"/>
+          </a:xfrm>
+          <a:prstGeom prst="rect">
+            <a:avLst/>
+          </a:prstGeom>
+          <a:noFill/>
+        </p:spPr>
+        <p:txBody>
+          <a:bodyPr wrap="none">
+            <a:spAutoFit/>
+          </a:bodyPr>
+          <a:lstStyle/>
+          <a:p>
+            <a:pPr>
+              <a:defRPr sz="1100">
+                <a:solidFill>
+                  <a:srgbClr val="475569"/>
+                </a:solidFill>
+                <a:latin typeface="Arial"/>
+              </a:defRPr>
+            </a:pPr>
+            <a:r>
+              <a:t>مشروع تخرج LOCAL CONTACT — مناقشة أكاديمية محكمة</a:t>
+            </a:r>
+          </a:p>
+        </p:txBody>
+      </p:sp>
+      <p:sp>
+        <p:nvSpPr>
+          <p:cNvPr id="9" name="Rounded Rectangle 8"/>
+          <p:cNvSpPr/>
+          <p:nvPr/>
+        </p:nvSpPr>
+        <p:spPr>
+          <a:xfrm>
+            <a:off x="822960" y="1645920"/>
+            <a:ext cx="5120640" cy="4389120"/>
           </a:xfrm>
           <a:prstGeom prst="roundRect">
             <a:avLst/>
@@ -11698,7 +9732,7 @@
           </a:solidFill>
           <a:ln w="19050">
             <a:solidFill>
-              <a:srgbClr val="1E40AF"/>
+              <a:srgbClr val="CBD5E1"/>
             </a:solidFill>
           </a:ln>
         </p:spPr>
@@ -11721,79 +9755,134 @@
           <a:lstStyle/>
           <a:p>
             <a:pPr algn="ctr">
-              <a:defRPr sz="1300" b="1">
+              <a:defRPr sz="2200" b="1">
                 <a:solidFill>
                   <a:srgbClr val="0F2B5C"/>
                 </a:solidFill>
-                <a:latin typeface="Cairo"/>
-              </a:defRPr>
-            </a:pPr>
-            <a:r>
-              <a:t>📂 المكونات المسؤولة واختبارات الأمان:</a:t>
+                <a:latin typeface="Arial"/>
+              </a:defRPr>
+            </a:pPr>
+            <a:r>
+              <a:t>🤝 آلية نموذج الثقة عند أول اتصال (TOFU):</a:t>
             </a:r>
           </a:p>
           <a:p>
             <a:pPr>
               <a:spcBef>
-                <a:spcPts val="400"/>
+                <a:spcPts val="1200"/>
               </a:spcBef>
-              <a:defRPr sz="1050">
+              <a:defRPr sz="1700" b="1">
                 <a:solidFill>
                   <a:srgbClr val="0F172A"/>
                 </a:solidFill>
-                <a:latin typeface="Cairo"/>
-              </a:defRPr>
-            </a:pPr>
-            <a:r>
-              <a:t>• منع الاستبدال: تغيير أي بايت في سياق الجلسة يبطل التوقيع فوراً.</a:t>
+                <a:latin typeface="Arial"/>
+              </a:defRPr>
+            </a:pPr>
+            <a:r>
+              <a:t>• لماذا TOFU؟ شبكات P2P تعمل Offline، فلا يمكن الاتصال بهيئة شهادات مركزية (CA).</a:t>
             </a:r>
           </a:p>
           <a:p>
             <a:pPr>
               <a:spcBef>
-                <a:spcPts val="400"/>
+                <a:spcPts val="1200"/>
               </a:spcBef>
-              <a:defRPr sz="1050">
+              <a:defRPr sz="1700" b="1">
                 <a:solidFill>
                   <a:srgbClr val="0F172A"/>
                 </a:solidFill>
-                <a:latin typeface="Cairo"/>
-              </a:defRPr>
-            </a:pPr>
-            <a:r>
-              <a:t>• منع إعادة التوجيه: لا يمكن استخدام نفس التوقيع ضد طرف آخر.</a:t>
+                <a:latin typeface="Arial"/>
+              </a:defRPr>
+            </a:pPr>
+            <a:r>
+              <a:t>• حساب البصمة: حساب بصمة SHA-256 Fingerprint للمفتاح العام لهوية القرين.</a:t>
             </a:r>
           </a:p>
           <a:p>
             <a:pPr>
               <a:spcBef>
-                <a:spcPts val="400"/>
+                <a:spcPts val="1200"/>
               </a:spcBef>
-              <a:defRPr sz="1050">
+              <a:defRPr sz="1700" b="1">
                 <a:solidFill>
                   <a:srgbClr val="0F172A"/>
                 </a:solidFill>
-                <a:latin typeface="Cairo"/>
-              </a:defRPr>
-            </a:pPr>
-            <a:r>
-              <a:t>• الاختبارات الآلية: 8 اختبارات أثبتت كشف التلاعب بالطابع الزمني أو الجلسة.</a:t>
+                <a:latin typeface="Arial"/>
+              </a:defRPr>
+            </a:pPr>
+            <a:r>
+              <a:t>• تثبيت المفتاح (Key Pinning): حفظ البصمة محلياً في قاعدة البيانات عند أول اتصال ناجح.</a:t>
             </a:r>
           </a:p>
           <a:p>
             <a:pPr>
               <a:spcBef>
-                <a:spcPts val="400"/>
+                <a:spcPts val="1200"/>
               </a:spcBef>
-              <a:defRPr sz="1050">
+              <a:defRPr sz="1700" b="1">
                 <a:solidFill>
                   <a:srgbClr val="0F172A"/>
                 </a:solidFill>
-                <a:latin typeface="Cairo"/>
-              </a:defRPr>
-            </a:pPr>
-            <a:r>
-              <a:t>• تنبيه هندسي: هذا يحصن المصافحة لكنه لا يمثل Replay Protection كاملاً لكافة الحزم الشبكية.</a:t>
+                <a:latin typeface="Arial"/>
+              </a:defRPr>
+            </a:pPr>
+            <a:r>
+              <a:t>• كشف التغيير المريب: إطلاق تحذير أمني فوري إذا تغير مفتاح هوية القرين المسجل سابقاً.</a:t>
+            </a:r>
+          </a:p>
+        </p:txBody>
+      </p:sp>
+      <p:sp>
+        <p:nvSpPr>
+          <p:cNvPr id="10" name="Rounded Rectangle 9"/>
+          <p:cNvSpPr/>
+          <p:nvPr/>
+        </p:nvSpPr>
+        <p:spPr>
+          <a:xfrm>
+            <a:off x="6217920" y="1645920"/>
+            <a:ext cx="5120640" cy="4389120"/>
+          </a:xfrm>
+          <a:prstGeom prst="roundRect">
+            <a:avLst/>
+          </a:prstGeom>
+          <a:solidFill>
+            <a:srgbClr val="F8FAFC"/>
+          </a:solidFill>
+          <a:ln w="19050">
+            <a:solidFill>
+              <a:srgbClr val="CBD5E1"/>
+            </a:solidFill>
+          </a:ln>
+        </p:spPr>
+        <p:style>
+          <a:lnRef idx="1">
+            <a:schemeClr val="accent1"/>
+          </a:lnRef>
+          <a:fillRef idx="3">
+            <a:schemeClr val="accent1"/>
+          </a:fillRef>
+          <a:effectRef idx="2">
+            <a:schemeClr val="accent1"/>
+          </a:effectRef>
+          <a:fontRef idx="minor">
+            <a:schemeClr val="lt1"/>
+          </a:fontRef>
+        </p:style>
+        <p:txBody>
+          <a:bodyPr rtlCol="0" anchor="ctr" wrap="square"/>
+          <a:lstStyle/>
+          <a:p>
+            <a:pPr algn="ctr">
+              <a:defRPr sz="2200" b="1">
+                <a:solidFill>
+                  <a:srgbClr val="0F2B5C"/>
+                </a:solidFill>
+                <a:latin typeface="Arial"/>
+              </a:defRPr>
+            </a:pPr>
+            <a:r>
+              <a:t>📂 الملف والمسؤولية في الكود:</a:t>
             </a:r>
           </a:p>
           <a:p>
@@ -11801,41 +9890,63 @@
               <a:spcBef>
                 <a:spcPts val="800"/>
               </a:spcBef>
-              <a:defRPr sz="1050" b="1">
+              <a:defRPr sz="1400" b="1">
                 <a:solidFill>
                   <a:srgbClr val="1E40AF"/>
                 </a:solidFill>
-                <a:latin typeface="Cairo"/>
-              </a:defRPr>
-            </a:pPr>
-            <a:r>
-              <a:t>📂 المكون البرمجي المرتبط:</a:t>
+                <a:latin typeface="Consolas"/>
+              </a:defRPr>
+            </a:pPr>
+            <a:r>
+              <a:t>app/src/main/java/com/example/network/PeerTrustStore.kt</a:t>
             </a:r>
           </a:p>
           <a:p>
             <a:pPr>
-              <a:defRPr sz="950" b="1">
-                <a:solidFill>
-                  <a:srgbClr val="0284C7"/>
-                </a:solidFill>
-                <a:latin typeface="Consolas"/>
-              </a:defRPr>
-            </a:pPr>
-            <a:r>
-              <a:t>app/src/main/java/com/example/network/HandshakeCryptoUtils.kt</a:t>
+              <a:spcBef>
+                <a:spcPts val="1200"/>
+              </a:spcBef>
+              <a:defRPr sz="1700" b="1">
+                <a:solidFill>
+                  <a:srgbClr val="0F172A"/>
+                </a:solidFill>
+                <a:latin typeface="Arial"/>
+              </a:defRPr>
+            </a:pPr>
+            <a:r>
+              <a:t>• المسؤولية: تخزين بصمات الأجهزة الموثوقة ومقارنتها مع كل اتصال وارد.</a:t>
             </a:r>
           </a:p>
           <a:p>
             <a:pPr>
-              <a:defRPr sz="950">
-                <a:solidFill>
-                  <a:srgbClr val="475569"/>
-                </a:solidFill>
-                <a:latin typeface="Cairo"/>
-              </a:defRPr>
-            </a:pPr>
-            <a:r>
-              <a:t>أدوات بناء مصفوفة التوقيع الحتمية وحساب بصمات SHA-256.</a:t>
+              <a:spcBef>
+                <a:spcPts val="1200"/>
+              </a:spcBef>
+              <a:defRPr sz="1700" b="1">
+                <a:solidFill>
+                  <a:srgbClr val="0F172A"/>
+                </a:solidFill>
+                <a:latin typeface="Arial"/>
+              </a:defRPr>
+            </a:pPr>
+            <a:r>
+              <a:t>• إدارة الحالات: تصنيف القرين إلى: جديد (New)، موثوق (Trusted)، أو مشبوه/متغير (Key Changed).</a:t>
+            </a:r>
+          </a:p>
+          <a:p>
+            <a:pPr>
+              <a:spcBef>
+                <a:spcPts val="1200"/>
+              </a:spcBef>
+              <a:defRPr sz="1700" b="1">
+                <a:solidFill>
+                  <a:srgbClr val="0F172A"/>
+                </a:solidFill>
+                <a:latin typeface="Arial"/>
+              </a:defRPr>
+            </a:pPr>
+            <a:r>
+              <a:t>• القيمة الهندسية: تحقيق أمان شبيه بـ SSH Host Keys دون الحاجة لإنترنت أو خادم مركزي.</a:t>
             </a:r>
           </a:p>
         </p:txBody>
@@ -11867,7 +9978,7 @@
         <p:spPr>
           <a:xfrm>
             <a:off x="0" y="0"/>
-            <a:ext cx="12191695" cy="109728"/>
+            <a:ext cx="12191695" cy="91440"/>
           </a:xfrm>
           <a:prstGeom prst="rect">
             <a:avLst/>
@@ -11909,8 +10020,8 @@
         </p:nvSpPr>
         <p:spPr>
           <a:xfrm>
-            <a:off x="731520" y="228600"/>
-            <a:ext cx="7772400" cy="365760"/>
+            <a:off x="822960" y="228600"/>
+            <a:ext cx="7772400" cy="320040"/>
           </a:xfrm>
           <a:prstGeom prst="rect">
             <a:avLst/>
@@ -11924,64 +10035,47 @@
           <a:lstStyle/>
           <a:p>
             <a:pPr>
-              <a:defRPr sz="1100" b="1">
-                <a:solidFill>
-                  <a:srgbClr val="0284C7"/>
-                </a:solidFill>
-                <a:latin typeface="Cairo"/>
-              </a:defRPr>
-            </a:pPr>
-            <a:r>
-              <a:t>• إدارة الثقة اللامركزية | مشروع LOCAL CONTACT P2P</a:t>
-            </a:r>
-          </a:p>
-        </p:txBody>
-      </p:sp>
-      <p:sp>
-        <p:nvSpPr>
-          <p:cNvPr id="4" name="Rounded Rectangle 3"/>
-          <p:cNvSpPr/>
+              <a:defRPr sz="1300" b="1">
+                <a:solidFill>
+                  <a:srgbClr val="1E40AF"/>
+                </a:solidFill>
+                <a:latin typeface="Arial"/>
+              </a:defRPr>
+            </a:pPr>
+            <a:r>
+              <a:t>LOCAL CONTACT P2P  |  بروتوكول المصافحة الشبكية</a:t>
+            </a:r>
+          </a:p>
+        </p:txBody>
+      </p:sp>
+      <p:sp>
+        <p:nvSpPr>
+          <p:cNvPr id="4" name="TextBox 3"/>
+          <p:cNvSpPr txBox="1"/>
           <p:nvPr/>
         </p:nvSpPr>
         <p:spPr>
           <a:xfrm>
-            <a:off x="10515600" y="228600"/>
-            <a:ext cx="914400" cy="320040"/>
-          </a:xfrm>
-          <a:prstGeom prst="roundRect">
-            <a:avLst/>
-          </a:prstGeom>
-          <a:solidFill>
-            <a:srgbClr val="0F2B5C"/>
-          </a:solidFill>
-          <a:ln>
-            <a:noFill/>
-          </a:ln>
-        </p:spPr>
-        <p:style>
-          <a:lnRef idx="1">
-            <a:schemeClr val="accent1"/>
-          </a:lnRef>
-          <a:fillRef idx="3">
-            <a:schemeClr val="accent1"/>
-          </a:fillRef>
-          <a:effectRef idx="2">
-            <a:schemeClr val="accent1"/>
-          </a:effectRef>
-          <a:fontRef idx="minor">
-            <a:schemeClr val="lt1"/>
-          </a:fontRef>
-        </p:style>
-        <p:txBody>
-          <a:bodyPr rtlCol="0" anchor="ctr"/>
-          <a:lstStyle/>
-          <a:p>
-            <a:pPr algn="ctr">
-              <a:defRPr sz="1100" b="1">
-                <a:solidFill>
-                  <a:srgbClr val="FFFFFF"/>
-                </a:solidFill>
-                <a:latin typeface="Consolas"/>
+            <a:off x="10241280" y="6309360"/>
+            <a:ext cx="1188720" cy="365760"/>
+          </a:xfrm>
+          <a:prstGeom prst="rect">
+            <a:avLst/>
+          </a:prstGeom>
+          <a:noFill/>
+        </p:spPr>
+        <p:txBody>
+          <a:bodyPr wrap="none">
+            <a:spAutoFit/>
+          </a:bodyPr>
+          <a:lstStyle/>
+          <a:p>
+            <a:pPr algn="r">
+              <a:defRPr sz="1400" b="1">
+                <a:solidFill>
+                  <a:srgbClr val="0F2B5C"/>
+                </a:solidFill>
+                <a:latin typeface="Arial"/>
               </a:defRPr>
             </a:pPr>
             <a:r>
@@ -11998,8 +10092,8 @@
         </p:nvSpPr>
         <p:spPr>
           <a:xfrm>
-            <a:off x="731520" y="594360"/>
-            <a:ext cx="8686800" cy="548640"/>
+            <a:off x="822960" y="594360"/>
+            <a:ext cx="8961120" cy="685800"/>
           </a:xfrm>
           <a:prstGeom prst="rect">
             <a:avLst/>
@@ -12013,161 +10107,29 @@
           <a:lstStyle/>
           <a:p>
             <a:pPr>
-              <a:defRPr sz="2000" b="1">
+              <a:defRPr sz="2800" b="1">
                 <a:solidFill>
                   <a:srgbClr val="0F2B5C"/>
                 </a:solidFill>
-                <a:latin typeface="Cairo"/>
-              </a:defRPr>
-            </a:pPr>
-            <a:r>
-              <a:t>تثبيت هوية الأقران بنموذج TOFU</a:t>
-            </a:r>
-          </a:p>
-        </p:txBody>
-      </p:sp>
-      <p:sp>
-        <p:nvSpPr>
-          <p:cNvPr id="6" name="TextBox 5"/>
-          <p:cNvSpPr txBox="1"/>
-          <p:nvPr/>
-        </p:nvSpPr>
-        <p:spPr>
-          <a:xfrm>
-            <a:off x="731520" y="1078992"/>
-            <a:ext cx="8686800" cy="365760"/>
-          </a:xfrm>
-          <a:prstGeom prst="rect">
-            <a:avLst/>
-          </a:prstGeom>
-          <a:noFill/>
-        </p:spPr>
-        <p:txBody>
-          <a:bodyPr wrap="square">
-            <a:spAutoFit/>
-          </a:bodyPr>
-          <a:lstStyle/>
-          <a:p>
-            <a:pPr>
-              <a:defRPr sz="1150">
-                <a:solidFill>
-                  <a:srgbClr val="475569"/>
-                </a:solidFill>
-                <a:latin typeface="Cairo"/>
-              </a:defRPr>
-            </a:pPr>
-            <a:r>
-              <a:t>سياسة الثقة عند أول اتصال (Trust On First Use) ومصادقة البصمات الرقمية</a:t>
-            </a:r>
-          </a:p>
-        </p:txBody>
-      </p:sp>
-      <p:sp>
-        <p:nvSpPr>
-          <p:cNvPr id="7" name="Rounded Rectangle 6"/>
+                <a:latin typeface="Arial"/>
+              </a:defRPr>
+            </a:pPr>
+            <a:r>
+              <a:t>خطوات بروتوكول المصافحة والتفاوض الآمن (Handshake Protocol)</a:t>
+            </a:r>
+          </a:p>
+        </p:txBody>
+      </p:sp>
+      <p:sp>
+        <p:nvSpPr>
+          <p:cNvPr id="6" name="Rounded Rectangle 5"/>
           <p:cNvSpPr/>
           <p:nvPr/>
         </p:nvSpPr>
         <p:spPr>
           <a:xfrm>
-            <a:off x="9144000" y="685800"/>
-            <a:ext cx="2286000" cy="347472"/>
-          </a:xfrm>
-          <a:prstGeom prst="roundRect">
-            <a:avLst/>
-          </a:prstGeom>
-          <a:solidFill>
-            <a:srgbClr val="D97706"/>
-          </a:solidFill>
-          <a:ln>
-            <a:noFill/>
-          </a:ln>
-        </p:spPr>
-        <p:style>
-          <a:lnRef idx="1">
-            <a:schemeClr val="accent1"/>
-          </a:lnRef>
-          <a:fillRef idx="3">
-            <a:schemeClr val="accent1"/>
-          </a:fillRef>
-          <a:effectRef idx="2">
-            <a:schemeClr val="accent1"/>
-          </a:effectRef>
-          <a:fontRef idx="minor">
-            <a:schemeClr val="lt1"/>
-          </a:fontRef>
-        </p:style>
-        <p:txBody>
-          <a:bodyPr rtlCol="0" anchor="ctr"/>
-          <a:lstStyle/>
-          <a:p>
-            <a:pPr algn="ctr">
-              <a:defRPr sz="1000" b="1">
-                <a:solidFill>
-                  <a:srgbClr val="FFFFFF"/>
-                </a:solidFill>
-                <a:latin typeface="Consolas"/>
-              </a:defRPr>
-            </a:pPr>
-            <a:r>
-              <a:t>PARTIAL MITM</a:t>
-            </a:r>
-          </a:p>
-        </p:txBody>
-      </p:sp>
-      <p:sp>
-        <p:nvSpPr>
-          <p:cNvPr id="8" name="Rectangle 7"/>
-          <p:cNvSpPr/>
-          <p:nvPr/>
-        </p:nvSpPr>
-        <p:spPr>
-          <a:xfrm>
-            <a:off x="731520" y="1463040"/>
-            <a:ext cx="10725912" cy="18288"/>
-          </a:xfrm>
-          <a:prstGeom prst="rect">
-            <a:avLst/>
-          </a:prstGeom>
-          <a:solidFill>
-            <a:srgbClr val="CBD5E1"/>
-          </a:solidFill>
-          <a:ln>
-            <a:noFill/>
-          </a:ln>
-        </p:spPr>
-        <p:style>
-          <a:lnRef idx="1">
-            <a:schemeClr val="accent1"/>
-          </a:lnRef>
-          <a:fillRef idx="3">
-            <a:schemeClr val="accent1"/>
-          </a:fillRef>
-          <a:effectRef idx="2">
-            <a:schemeClr val="accent1"/>
-          </a:effectRef>
-          <a:fontRef idx="minor">
-            <a:schemeClr val="lt1"/>
-          </a:fontRef>
-        </p:style>
-        <p:txBody>
-          <a:bodyPr rtlCol="0" anchor="ctr"/>
-          <a:lstStyle/>
-          <a:p>
-            <a:pPr algn="ctr"/>
-          </a:p>
-        </p:txBody>
-      </p:sp>
-      <p:sp>
-        <p:nvSpPr>
-          <p:cNvPr id="9" name="Rounded Rectangle 8"/>
-          <p:cNvSpPr/>
-          <p:nvPr/>
-        </p:nvSpPr>
-        <p:spPr>
-          <a:xfrm>
-            <a:off x="731520" y="1645920"/>
-            <a:ext cx="5212080" cy="4663440"/>
+            <a:off x="8961120" y="621792"/>
+            <a:ext cx="2377440" cy="438912"/>
           </a:xfrm>
           <a:prstGeom prst="roundRect">
             <a:avLst/>
@@ -12196,97 +10158,112 @@
           </a:fontRef>
         </p:style>
         <p:txBody>
-          <a:bodyPr rtlCol="0" anchor="ctr" wrap="square"/>
+          <a:bodyPr rtlCol="0" anchor="ctr"/>
           <a:lstStyle/>
           <a:p>
             <a:pPr algn="ctr">
-              <a:defRPr sz="1300" b="1">
-                <a:solidFill>
-                  <a:srgbClr val="0F2B5C"/>
-                </a:solidFill>
-                <a:latin typeface="Cairo"/>
-              </a:defRPr>
-            </a:pPr>
-            <a:r>
-              <a:t>🤝 آلية عمل نموذج TOFU:</a:t>
-            </a:r>
-          </a:p>
-          <a:p>
-            <a:pPr>
-              <a:spcBef>
-                <a:spcPts val="400"/>
-              </a:spcBef>
-              <a:defRPr sz="1050">
-                <a:solidFill>
-                  <a:srgbClr val="0F172A"/>
-                </a:solidFill>
-                <a:latin typeface="Cairo"/>
-              </a:defRPr>
-            </a:pPr>
-            <a:r>
-              <a:t>• في أول اتصال: تسجيل وحفظ بصمة المفتاح العام (SHA-256 Fingerprint) بمخزن الثقة المحلي.</a:t>
-            </a:r>
-          </a:p>
-          <a:p>
-            <a:pPr>
-              <a:spcBef>
-                <a:spcPts val="400"/>
-              </a:spcBef>
-              <a:defRPr sz="1050">
-                <a:solidFill>
-                  <a:srgbClr val="0F172A"/>
-                </a:solidFill>
-                <a:latin typeface="Cairo"/>
-              </a:defRPr>
-            </a:pPr>
-            <a:r>
-              <a:t>• في الاتصالات اللاحقة: مطابقة البصمة القادمة مع البصمة المحفوظة؛ قبول الجلسة فوراً عند التطابق.</a:t>
-            </a:r>
-          </a:p>
-          <a:p>
-            <a:pPr>
-              <a:spcBef>
-                <a:spcPts val="400"/>
-              </a:spcBef>
-              <a:defRPr sz="1050">
-                <a:solidFill>
-                  <a:srgbClr val="0F172A"/>
-                </a:solidFill>
-                <a:latin typeface="Cairo"/>
-              </a:defRPr>
-            </a:pPr>
-            <a:r>
-              <a:t>• كشف التغير: في حال تغير مفتاح القرين، يُرفض الاتصال وتنبيه المستخدم لاحتمال وجود هجوم.</a:t>
-            </a:r>
-          </a:p>
-          <a:p>
-            <a:pPr>
-              <a:spcBef>
-                <a:spcPts val="400"/>
-              </a:spcBef>
-              <a:defRPr sz="1050">
-                <a:solidFill>
-                  <a:srgbClr val="0F172A"/>
-                </a:solidFill>
-                <a:latin typeface="Cairo"/>
-              </a:defRPr>
-            </a:pPr>
-            <a:r>
-              <a:t>• إدارة الحالات: تتبع حالة الأمان (LEGACY, IN_PROGRESS, SECURE) لمنع هجمات التراجع (Downgrade).</a:t>
-            </a:r>
-          </a:p>
-        </p:txBody>
-      </p:sp>
-      <p:sp>
-        <p:nvSpPr>
-          <p:cNvPr id="10" name="Rounded Rectangle 9"/>
+              <a:defRPr sz="1200" b="1">
+                <a:solidFill>
+                  <a:srgbClr val="1E40AF"/>
+                </a:solidFill>
+                <a:latin typeface="Consolas"/>
+              </a:defRPr>
+            </a:pPr>
+            <a:r>
+              <a:t>HANDSHAKE PROTOCOL</a:t>
+            </a:r>
+          </a:p>
+        </p:txBody>
+      </p:sp>
+      <p:sp>
+        <p:nvSpPr>
+          <p:cNvPr id="7" name="Rectangle 6"/>
           <p:cNvSpPr/>
           <p:nvPr/>
         </p:nvSpPr>
         <p:spPr>
           <a:xfrm>
-            <a:off x="6217920" y="1645920"/>
-            <a:ext cx="5212080" cy="4663440"/>
+            <a:off x="822960" y="1353312"/>
+            <a:ext cx="10515600" cy="18288"/>
+          </a:xfrm>
+          <a:prstGeom prst="rect">
+            <a:avLst/>
+          </a:prstGeom>
+          <a:solidFill>
+            <a:srgbClr val="CBD5E1"/>
+          </a:solidFill>
+          <a:ln>
+            <a:noFill/>
+          </a:ln>
+        </p:spPr>
+        <p:style>
+          <a:lnRef idx="1">
+            <a:schemeClr val="accent1"/>
+          </a:lnRef>
+          <a:fillRef idx="3">
+            <a:schemeClr val="accent1"/>
+          </a:fillRef>
+          <a:effectRef idx="2">
+            <a:schemeClr val="accent1"/>
+          </a:effectRef>
+          <a:fontRef idx="minor">
+            <a:schemeClr val="lt1"/>
+          </a:fontRef>
+        </p:style>
+        <p:txBody>
+          <a:bodyPr rtlCol="0" anchor="ctr"/>
+          <a:lstStyle/>
+          <a:p>
+            <a:pPr algn="ctr"/>
+          </a:p>
+        </p:txBody>
+      </p:sp>
+      <p:sp>
+        <p:nvSpPr>
+          <p:cNvPr id="8" name="TextBox 7"/>
+          <p:cNvSpPr txBox="1"/>
+          <p:nvPr/>
+        </p:nvSpPr>
+        <p:spPr>
+          <a:xfrm>
+            <a:off x="822960" y="6309360"/>
+            <a:ext cx="7315200" cy="320040"/>
+          </a:xfrm>
+          <a:prstGeom prst="rect">
+            <a:avLst/>
+          </a:prstGeom>
+          <a:noFill/>
+        </p:spPr>
+        <p:txBody>
+          <a:bodyPr wrap="none">
+            <a:spAutoFit/>
+          </a:bodyPr>
+          <a:lstStyle/>
+          <a:p>
+            <a:pPr>
+              <a:defRPr sz="1100">
+                <a:solidFill>
+                  <a:srgbClr val="475569"/>
+                </a:solidFill>
+                <a:latin typeface="Arial"/>
+              </a:defRPr>
+            </a:pPr>
+            <a:r>
+              <a:t>مشروع تخرج LOCAL CONTACT — مناقشة أكاديمية محكمة</a:t>
+            </a:r>
+          </a:p>
+        </p:txBody>
+      </p:sp>
+      <p:sp>
+        <p:nvSpPr>
+          <p:cNvPr id="9" name="Rounded Rectangle 8"/>
+          <p:cNvSpPr/>
+          <p:nvPr/>
+        </p:nvSpPr>
+        <p:spPr>
+          <a:xfrm>
+            <a:off x="822960" y="1645920"/>
+            <a:ext cx="10515600" cy="4389120"/>
           </a:xfrm>
           <a:prstGeom prst="roundRect">
             <a:avLst/>
@@ -12296,7 +10273,7 @@
           </a:solidFill>
           <a:ln w="19050">
             <a:solidFill>
-              <a:srgbClr val="D97706"/>
+              <a:srgbClr val="CBD5E1"/>
             </a:solidFill>
           </a:ln>
         </p:spPr>
@@ -12319,105 +10296,95 @@
           <a:lstStyle/>
           <a:p>
             <a:pPr algn="ctr">
-              <a:defRPr sz="1300" b="1">
+              <a:defRPr sz="2200" b="1">
                 <a:solidFill>
                   <a:srgbClr val="0F2B5C"/>
                 </a:solidFill>
-                <a:latin typeface="Cairo"/>
-              </a:defRPr>
-            </a:pPr>
-            <a:r>
-              <a:t>📂 المكونات البرمجية والحدود الأمنية:</a:t>
+                <a:latin typeface="Arial"/>
+              </a:defRPr>
+            </a:pPr>
+            <a:r>
+              <a:t>🔄 مراحل المصافحة الأربع المنفذة في HandshakeCryptoUtils.kt:</a:t>
             </a:r>
           </a:p>
           <a:p>
             <a:pPr>
               <a:spcBef>
-                <a:spcPts val="400"/>
+                <a:spcPts val="1100"/>
               </a:spcBef>
-              <a:defRPr sz="1050">
+              <a:defRPr sz="1700" b="1">
                 <a:solidFill>
                   <a:srgbClr val="0F172A"/>
                 </a:solidFill>
-                <a:latin typeface="Cairo"/>
-              </a:defRPr>
-            </a:pPr>
-            <a:r>
-              <a:t>• مخزن الثقة: تخزين بصمات الأقران ومقارنتها بدقة.</a:t>
+                <a:latin typeface="Arial"/>
+              </a:defRPr>
+            </a:pPr>
+            <a:r>
+              <a:t>• المرحلة 1 — طلب المصافحة (Handshake Init): المرسل يولد مفتاح ECDH مؤقت ويرسله مع Nonce ومعرف هويته وبصمته.</a:t>
             </a:r>
           </a:p>
           <a:p>
             <a:pPr>
               <a:spcBef>
-                <a:spcPts val="400"/>
+                <a:spcPts val="1100"/>
               </a:spcBef>
-              <a:defRPr sz="1050">
+              <a:defRPr sz="1700" b="1">
                 <a:solidFill>
                   <a:srgbClr val="0F172A"/>
                 </a:solidFill>
-                <a:latin typeface="Cairo"/>
-              </a:defRPr>
-            </a:pPr>
-            <a:r>
-              <a:t>• إدارة الجلسات: ضبط مهلة المصافحة (30 ثانية) وإلغاء الجلسات المنتهية.</a:t>
+                <a:latin typeface="Arial"/>
+              </a:defRPr>
+            </a:pPr>
+            <a:r>
+              <a:t>• المرحلة 2 — رد المصافحة والتوقيع (Handshake Response): المستقبل يولد مفتاحه المؤقت، ويوقع الحزمة عبر ECDSA، ويرد بمفتاحه وبصمته.</a:t>
             </a:r>
           </a:p>
           <a:p>
             <a:pPr>
               <a:spcBef>
-                <a:spcPts val="400"/>
+                <a:spcPts val="1100"/>
               </a:spcBef>
-              <a:defRPr sz="1050">
+              <a:defRPr sz="1700" b="1">
                 <a:solidFill>
                   <a:srgbClr val="0F172A"/>
                 </a:solidFill>
-                <a:latin typeface="Cairo"/>
-              </a:defRPr>
-            </a:pPr>
-            <a:r>
-              <a:t>• ⚠️ الاعتراف الأكاديمي الصارم: نموذج TOFU يحمي بامتياز بدءاً من الاتصال الثاني فصاعداً. حماية أول اتصال تظل جزئية لغياب التحقق اليدوي (SAS).</a:t>
+                <a:latin typeface="Arial"/>
+              </a:defRPr>
+            </a:pPr>
+            <a:r>
+              <a:t>• المرحلة 3 — التحقق واشتقاق المفاتيح (Verify &amp; Derive): الطرفان يتحققان من صحة التوقيع والبصمة، ويحسبان السر المشترك، ويشتقان مفاتيح الجلسة عبر HKDF.</a:t>
             </a:r>
           </a:p>
           <a:p>
             <a:pPr>
               <a:spcBef>
-                <a:spcPts val="800"/>
+                <a:spcPts val="1100"/>
               </a:spcBef>
-              <a:defRPr sz="1050" b="1">
-                <a:solidFill>
-                  <a:srgbClr val="1E40AF"/>
-                </a:solidFill>
-                <a:latin typeface="Cairo"/>
-              </a:defRPr>
-            </a:pPr>
-            <a:r>
-              <a:t>📂 المكون البرمجي المرتبط:</a:t>
+              <a:defRPr sz="1700" b="1">
+                <a:solidFill>
+                  <a:srgbClr val="0F172A"/>
+                </a:solidFill>
+                <a:latin typeface="Arial"/>
+              </a:defRPr>
+            </a:pPr>
+            <a:r>
+              <a:t>• المرحلة 4 — إتمام وتأكيد الجلسة (Handshake Complete): إرسال حزمة تأكيد مشفرة بمفتاح الجلسة الجديد والانتقال لقناة البيانات المشفرة.</a:t>
             </a:r>
           </a:p>
           <a:p>
             <a:pPr>
-              <a:defRPr sz="950" b="1">
-                <a:solidFill>
-                  <a:srgbClr val="0284C7"/>
-                </a:solidFill>
-                <a:latin typeface="Consolas"/>
-              </a:defRPr>
-            </a:pPr>
-            <a:r>
-              <a:t>app/src/main/java/com/example/network/PeerTrustStore.kt</a:t>
-            </a:r>
-          </a:p>
-          <a:p>
-            <a:pPr>
-              <a:defRPr sz="950">
-                <a:solidFill>
-                  <a:srgbClr val="475569"/>
-                </a:solidFill>
-                <a:latin typeface="Cairo"/>
-              </a:defRPr>
-            </a:pPr>
-            <a:r>
-              <a:t>كلاس مخزن الثقة المحلي وتنسيق الحالات في PeerSessionKeyManager.kt.</a:t>
+              <a:spcBef>
+                <a:spcPts val="1100"/>
+              </a:spcBef>
+              <a:defRPr sz="1700" b="1">
+                <a:solidFill>
+                  <a:srgbClr val="0F172A"/>
+                </a:solidFill>
+                <a:latin typeface="Arial"/>
+              </a:defRPr>
+            </a:pPr>
+            <a:r>
+              <a:t>• الملف المسؤول: HandshakeCryptoUtils.kt — يتولى بناء وتفكيك حزم المصافحة والتحقق الرياضي من التوقيعات.</a:t>
             </a:r>
           </a:p>
         </p:txBody>

--- a/LOCAL_CONTACT_Security_Presentation.pptx
+++ b/LOCAL_CONTACT_Security_Presentation.pptx
@@ -518,7 +518,7 @@
           </a:p>
           <a:p>
             <a:r>
-              <a:t>نبدأ المناقشة بالترحيب بلجنة التحكيم. نناقش اليوم التصميم الأمني لنظام LOCAL CONTACT. هذا النظام يعمل P2P دون إنترنت أو خادم وسيط. نقدم العرض كفريق عمل مكون من: مشعل حاجب، قحطان، محمد العيدروس، أواب النزيلي، ومحمد العواضي.</a:t>
+              <a:t>نرحب بلجنة التحكيم. نناقش اليوم التصميم الأمني والتشفير لنظام LOCAL CONTACT. تم إعداد العمل بواسطة: مشعل حاجب، قحطان، محمد العيدروس، أواب النزيلي، ومحمد العواضي.</a:t>
             </a:r>
           </a:p>
         </p:txBody>
@@ -593,7 +593,7 @@
           </a:p>
           <a:p>
             <a:r>
-              <a:t>نبيّن هنا حماية الوسائط: الملفات تُقسّم إلى كتل 64KB وتشفّر مع Nonce مستقل لكل كتلة لضمان استئناف آمن. والصوت والفيديو يُشفران بنمط AES-GCM الفوري عبر UDP مع إسقاط الحزم التي تفشل في المصادقة لمنع هجمات الحقن الصوتي.</a:t>
+              <a:t>تأمين الوسائط: الملفات تُقسّم إلى كتل 64KB مشفرة مع Nonce مستقل لكل كتلة لدعم الاستئناف الآمن. والصوت والفيديو يُشفران فمشفرين بـ AES-GCM عبر UDP مع إسقاط أي حزمة معدلة.</a:t>
             </a:r>
           </a:p>
         </p:txBody>
@@ -668,7 +668,7 @@
           </a:p>
           <a:p>
             <a:r>
-              <a:t>نقدم للدكتور برهان النجاح البرمجي: 33 اختبار وحدة آلي تم بناؤها واختبارها عبر Gradle ونجحت بالكامل بنسبة 100%. أثبتت الاختبارات أن التشفير سليم، وأن التلاعب بالبايتات يتم كشفه وإسقاطه، وأن دوال HKDF مطابقة لمعايير RFC.</a:t>
+              <a:t>التحقق البرمجي: 33 اختبار وحدة آلي تم بناؤها وتشغيلها بنجاح 100% عبر Gradle. أثبتت صحة التشفير، وتبادل المفاتيح، ودوال HKDF دون أي خلل منطقي أو رياضي.</a:t>
             </a:r>
           </a:p>
         </p:txBody>
@@ -743,7 +743,7 @@
           </a:p>
           <a:p>
             <a:r>
-              <a:t>نختم العرض بالأمانة العلمية: نعترف بوضوح بالقيود التي ما زالت تحتاج تطويراً مثل إضافة كود SAS لمنع MITM في اللقاء الأول، وتشفير الغرف بمفاتيح جماعية. ونؤكد أن المشروع قفز قفزة نوعية من كود بمفتاح ثابت إلى بنية تشفير متكاملة وموثقة ومختبرة. شكراً لكم ومستعدون للمناقشة.</a:t>
+              <a:t>الخاتمة الأمنية: نعترف بالقيود بأمانة علمية: نحتاج مستقبلاً لإضافة SAS لمنع MITM في اللقاء الأول، وتشفير الغرف بمفاتيح جماعية. ونؤكد أن النظام انتقل لبنية تشفير عالمية موثقة ومختبرة.</a:t>
             </a:r>
           </a:p>
         </p:txBody>
@@ -818,7 +818,7 @@
           </a:p>
           <a:p>
             <a:r>
-              <a:t>نوضح هنا للدكتور الثغرة السابقة: التطبيق كان يستخدم AES-GCM لكن المفتاح كان ثابتاً ومشتقاً من كلمة مرور واحدة في الكلاس LocalCryptoEngine. كشف المفتاح كان يكسر أمان كل المحادثات الماضية. هذا ما دفعنا لإعادة هندسة التشفير.</a:t>
+              <a:t>نوضح هنا الثغرة السابقة: التطبيق كان يشتق مفتاحاً ثابتاً موحداً من عبارة واحدة داخل LocalCryptoEngine. كشف هذا المفتاح يعرض كل الجلسات السابقة للفك. هذا ما دفعنا لإعادة هندسة التشفير بالكامل.</a:t>
             </a:r>
           </a:p>
         </p:txBody>
@@ -893,7 +893,7 @@
           </a:p>
           <a:p>
             <a:r>
-              <a:t>نؤكد للدكتور أننا اخترنا AES-256-GCM لأنه نمط AEAD يقدم سرية ومصادقة معاً. وسم الـ Tag يكشف أي عبث بالبايتات ويرفض فك التشفير، والـ Nonce الفريد يمنع كسر الـ GCM. تم إثبات كل ذلك بـ 10 اختبارات JVM ناجحة.</a:t>
+              <a:t>شريحة التشفير المتماثل: اعتمدنا AES-256-GCM لأنه نمط AEAD يوفر سرية ومصادقة معاً عبر وسم 128 بت ورقم عشوائي فريد 12 بايت لكل حزمة، ومثبت بـ 10 اختبارات JVM ناجحة.</a:t>
             </a:r>
           </a:p>
         </p:txBody>
@@ -968,7 +968,7 @@
           </a:p>
           <a:p>
             <a:r>
-              <a:t>هنا نوضح كيف حلت خوارزمية ECDH مشكلة المفتاح الثابت: الطرفان يولدان مفاتيح مؤقتة P-256، يتبادلان المفاتيح العامة، ويحسبان نفس السر المشترك دون إرساله على الشبكة. بمجرد انتهاء المحادثة يُحذف المفتاح الخاص من الذاكرة محققاً Forward Secrecy.</a:t>
+              <a:t>تبادل المفاتيح ECDH: كل طرف يولد مفاتيح مؤقتة P-256، ويتبادلان المفاتيح العامة لحساب نفس السر المشترك دون إرساله على الشبكة. تم إثباتها بـ 8 اختبارات ناجحة.</a:t>
             </a:r>
           </a:p>
         </p:txBody>
@@ -1043,7 +1043,7 @@
           </a:p>
           <a:p>
             <a:r>
-              <a:t>نشرح للدكتور خطوة HKDF-SHA256: السر المشترك الناتج من ECDH لا يصلح كمفتاح AES مباشرة لأنه قد يحتوي على تحيز إحصائي. نطبق RFC 5869 عبر مرحلتي Extract و Expand لتوليد مفاتيح تشفير مستقلة للإرسال والاستقبال. تم اختبار ذلك بنواقل RFC الرسمية.</a:t>
+              <a:t>دالة HKDF-SHA256: السر الناتج من ECDH يتم استخلاصه وتوسيعه وفق معيار RFC 5869 لاشتقاق مفتاحي TX و RX منفصلين تماماً. أثبتنا الدالة بمطابقة نواقل الاختبار الرسمية.</a:t>
             </a:r>
           </a:p>
         </p:txBody>
@@ -1118,7 +1118,7 @@
           </a:p>
           <a:p>
             <a:r>
-              <a:t>نوضح هنا كيفية إدارة المفاتيح عملياً عبر PeerSessionKeyManager: كل جهاز متصل يحصل على جلسة خاصة به ومفاتيح منفصلة مخزنة في الذاكرة العشوائية فقط، مما يعزل المستخدمين ويمنع تسرب البيانات بين المحادثات المختلفة.</a:t>
+              <a:t>إدارة الجلسات: يتولى PeerSessionKeyManager عزل مفاتيح كل جهاز متصل، والاحتفاظ بها في الذاكرة العشوائية فقط، وإتلافها فور انتهاء الجلسة لضمان أقصى حماية.</a:t>
             </a:r>
           </a:p>
         </p:txBody>
@@ -1193,7 +1193,7 @@
           </a:p>
           <a:p>
             <a:r>
-              <a:t>نشرح للدكتور كيف أمّنا هوية الجهاز: لا نعتمد على مجرد IP أو اسم عشوائي، بل نولد مفتاح هوية غير قابل للاستخراج داخل Android Keystore المحمي بالعتاد. يستخدم الجهاز المفتاح لتوقيع حزم المصافحة عبر ECDSA لإثبات هويته دون تسريب المفتاح الخاص.</a:t>
+              <a:t>هوية الأجهزة: نستخدم Android Keystore لحفظ مفتاح هوية خاص داخل رقاقة الأمان بالعتاد. يوقع الجهاز عبر ECDSA حزم المصافحة لمنع الانتحال وإثبات هوية الطرفين.</a:t>
             </a:r>
           </a:p>
         </p:txBody>
@@ -1268,7 +1268,7 @@
           </a:p>
           <a:p>
             <a:r>
-              <a:t>نبيّن هنا كيف تحل مشكلة الثقة دون سيرفر مركزي: نستخدم نموذج TOFU مثل بروتوكول SSH. يتم حفظ بصمة المفتاح العام SHA-256 للمستخدم في PeerTrustStore. إذا حاول أي مهاجم انتحال هويته مستقبلاً بمفتاح آخر، يرفض التطبيق الاتصال فوراً.</a:t>
+              <a:t>نموذج الثقة TOFU: النظام يعمل بدون خادم مركزي، لذا نعتمد نموذج الثقة عند أول اتصال مثل SSH. يتم حفظ بصمة SHA-256 للقرين محلياً، وإذا تغير مفتاحه لاحقاً يرفض التطبيق الاتصال.</a:t>
             </a:r>
           </a:p>
         </p:txBody>
@@ -1343,7 +1343,7 @@
           </a:p>
           <a:p>
             <a:r>
-              <a:t>نستعرض للأستاذ بروتوكول المصافحة المكون من 4 خطوات: يتم تبادل المفاتيح المؤقتة والتوقيعات الرقمية والبصمات، ثم يتم اشتقاق مفاتيح الجلسة وتأكيدها بحزمة مشفرة قبل السماح بمرور أي رسالة نصية أو مكالمة صوتية.</a:t>
+              <a:t>المصافحة المشفرة: تتم في 4 خطوات واضحة لتبادل المفاتيح المؤقتة والتوقيعات الرقمية والبصمات، ثم اشتقاق مفاتيح الجلسة وتأكيدها قبل السماح بنقل أي رسالة أو مكالمة.</a:t>
             </a:r>
           </a:p>
         </p:txBody>
@@ -4400,7 +4400,7 @@
         </p:nvSpPr>
         <p:spPr>
           <a:xfrm>
-            <a:off x="822960" y="640080"/>
+            <a:off x="822960" y="548640"/>
             <a:ext cx="10515600" cy="411480"/>
           </a:xfrm>
           <a:prstGeom prst="rect">
@@ -4414,16 +4414,24 @@
           </a:bodyPr>
           <a:lstStyle/>
           <a:p>
-            <a:pPr>
-              <a:defRPr sz="1500" b="1">
+            <a:pPr algn="r" rtl="1"/>
+            <a:r>
+              <a:rPr sz="1500" b="1" lang="ar-SA" rtl="1">
                 <a:solidFill>
                   <a:srgbClr val="1E40AF"/>
                 </a:solidFill>
                 <a:latin typeface="Arial"/>
-              </a:defRPr>
-            </a:pPr>
-            <a:r>
-              <a:t>LOCAL CONTACT  •  Offline Local P2P Communication</a:t>
+              </a:rPr>
+              <a:t>مشروع التخرج الأكاديمي: </a:t>
+            </a:r>
+            <a:r>
+              <a:rPr sz="1600" b="1" lang="en-US" rtl="0">
+                <a:solidFill>
+                  <a:srgbClr val="0F2B5C"/>
+                </a:solidFill>
+                <a:latin typeface="Consolas"/>
+              </a:rPr>
+              <a:t>LOCAL CONTACT</a:t>
             </a:r>
           </a:p>
         </p:txBody>
@@ -4436,44 +4444,8 @@
         </p:nvSpPr>
         <p:spPr>
           <a:xfrm>
-            <a:off x="822960" y="1143000"/>
-            <a:ext cx="10515600" cy="1005840"/>
-          </a:xfrm>
-          <a:prstGeom prst="rect">
-            <a:avLst/>
-          </a:prstGeom>
-          <a:noFill/>
-        </p:spPr>
-        <p:txBody>
-          <a:bodyPr wrap="square">
-            <a:spAutoFit/>
-          </a:bodyPr>
-          <a:lstStyle/>
-          <a:p>
-            <a:pPr>
-              <a:defRPr sz="3600" b="1">
-                <a:solidFill>
-                  <a:srgbClr val="0F2B5C"/>
-                </a:solidFill>
-                <a:latin typeface="Arial"/>
-              </a:defRPr>
-            </a:pPr>
-            <a:r>
-              <a:t>التصميم الأمني والتشفير في مشروع LOCAL CONTACT</a:t>
-            </a:r>
-          </a:p>
-        </p:txBody>
-      </p:sp>
-      <p:sp>
-        <p:nvSpPr>
-          <p:cNvPr id="5" name="TextBox 4"/>
-          <p:cNvSpPr txBox="1"/>
-          <p:nvPr/>
-        </p:nvSpPr>
-        <p:spPr>
-          <a:xfrm>
-            <a:off x="822960" y="2148840"/>
-            <a:ext cx="10515600" cy="502920"/>
+            <a:off x="822960" y="1005840"/>
+            <a:ext cx="10515600" cy="960120"/>
           </a:xfrm>
           <a:prstGeom prst="rect">
             <a:avLst/>
@@ -4486,16 +4458,50 @@
           </a:bodyPr>
           <a:lstStyle/>
           <a:p>
-            <a:pPr>
-              <a:defRPr sz="1800" b="1">
+            <a:pPr algn="r" rtl="1"/>
+            <a:r>
+              <a:rPr sz="3600" b="1" lang="ar-SA" rtl="1">
+                <a:solidFill>
+                  <a:srgbClr val="0F2B5C"/>
+                </a:solidFill>
+                <a:latin typeface="Arial"/>
+              </a:rPr>
+              <a:t>التصميم الأمني والتشفير المتقدم</a:t>
+            </a:r>
+          </a:p>
+        </p:txBody>
+      </p:sp>
+      <p:sp>
+        <p:nvSpPr>
+          <p:cNvPr id="5" name="TextBox 4"/>
+          <p:cNvSpPr txBox="1"/>
+          <p:nvPr/>
+        </p:nvSpPr>
+        <p:spPr>
+          <a:xfrm>
+            <a:off x="822960" y="2011680"/>
+            <a:ext cx="10515600" cy="457200"/>
+          </a:xfrm>
+          <a:prstGeom prst="rect">
+            <a:avLst/>
+          </a:prstGeom>
+          <a:noFill/>
+        </p:spPr>
+        <p:txBody>
+          <a:bodyPr wrap="none">
+            <a:spAutoFit/>
+          </a:bodyPr>
+          <a:lstStyle/>
+          <a:p>
+            <a:pPr algn="r" rtl="1"/>
+            <a:r>
+              <a:rPr sz="1800" b="1" lang="ar-SA" rtl="1">
                 <a:solidFill>
                   <a:srgbClr val="475569"/>
                 </a:solidFill>
                 <a:latin typeface="Arial"/>
-              </a:defRPr>
-            </a:pPr>
-            <a:r>
-              <a:t>هندسة خوارزميات التشفير وإدارة المفاتيح في نظام اتصال P2P محلي مستقل</a:t>
+              </a:rPr>
+              <a:t>هندسة خوارزميات التشفير وإدارة المفاتيح في نظام اتصال محلي مستقل</a:t>
             </a:r>
           </a:p>
         </p:txBody>
@@ -4508,8 +4514,8 @@
         </p:nvSpPr>
         <p:spPr>
           <a:xfrm>
-            <a:off x="822960" y="2834640"/>
-            <a:ext cx="10515600" cy="594360"/>
+            <a:off x="822960" y="2651760"/>
+            <a:ext cx="10515600" cy="548640"/>
           </a:xfrm>
           <a:prstGeom prst="roundRect">
             <a:avLst/>
@@ -4541,16 +4547,15 @@
           <a:bodyPr rtlCol="0" anchor="ctr"/>
           <a:lstStyle/>
           <a:p>
-            <a:pPr algn="ctr">
-              <a:defRPr sz="1300" b="1">
+            <a:pPr algn="ctr" rtl="0"/>
+            <a:r>
+              <a:rPr sz="1300" b="1" lang="en-US" rtl="0">
                 <a:solidFill>
                   <a:srgbClr val="0F2B5C"/>
                 </a:solidFill>
-                <a:latin typeface="Arial"/>
-              </a:defRPr>
-            </a:pPr>
-            <a:r>
-              <a:t>🔒 المسار الأكاديمي: أمن الشبكات والتشفير المتقدم (Applied Cryptography)  |  Android SDK 36  |  Kotlin 2.2  |  No Central Servers</a:t>
+                <a:latin typeface="Consolas"/>
+              </a:rPr>
+              <a:t>Offline Local P2P Communication  |  Applied Cryptography &amp; Security Architecture</a:t>
             </a:r>
           </a:p>
         </p:txBody>
@@ -4563,8 +4568,8 @@
         </p:nvSpPr>
         <p:spPr>
           <a:xfrm>
-            <a:off x="822960" y="3703320"/>
-            <a:ext cx="10515600" cy="2240280"/>
+            <a:off x="822960" y="3611880"/>
+            <a:ext cx="10515600" cy="2423160"/>
           </a:xfrm>
           <a:prstGeom prst="roundRect">
             <a:avLst/>
@@ -4593,18 +4598,17 @@
           </a:fontRef>
         </p:style>
         <p:txBody>
-          <a:bodyPr rtlCol="0" anchor="ctr" wrap="square"/>
-          <a:lstStyle/>
-          <a:p>
-            <a:pPr algn="ctr">
-              <a:defRPr sz="1600" b="1">
+          <a:bodyPr rtlCol="0" anchor="ctr"/>
+          <a:lstStyle/>
+          <a:p>
+            <a:pPr algn="r" rtl="1"/>
+            <a:r>
+              <a:rPr sz="1800" b="1" lang="ar-SA" rtl="1">
                 <a:solidFill>
                   <a:srgbClr val="0F2B5C"/>
                 </a:solidFill>
                 <a:latin typeface="Arial"/>
-              </a:defRPr>
-            </a:pPr>
-            <a:r>
+              </a:rPr>
               <a:t>إعداد الطلاب:</a:t>
             </a:r>
           </a:p>
@@ -4618,8 +4622,8 @@
         </p:nvSpPr>
         <p:spPr>
           <a:xfrm>
-            <a:off x="1097280" y="4480560"/>
-            <a:ext cx="1874519" cy="822960"/>
+            <a:off x="9281160" y="4434840"/>
+            <a:ext cx="1920240" cy="822960"/>
           </a:xfrm>
           <a:prstGeom prst="roundRect">
             <a:avLst/>
@@ -4627,7 +4631,7 @@
           <a:solidFill>
             <a:srgbClr val="FFFFFF"/>
           </a:solidFill>
-          <a:ln w="12700">
+          <a:ln w="19050">
             <a:solidFill>
               <a:srgbClr val="CBD5E1"/>
             </a:solidFill>
@@ -4651,15 +4655,14 @@
           <a:bodyPr rtlCol="0" anchor="ctr"/>
           <a:lstStyle/>
           <a:p>
-            <a:pPr algn="ctr">
-              <a:defRPr sz="1500" b="1">
+            <a:pPr algn="ctr" rtl="1"/>
+            <a:r>
+              <a:rPr sz="1500" b="1" lang="ar-SA" rtl="1">
                 <a:solidFill>
                   <a:srgbClr val="0F2B5C"/>
                 </a:solidFill>
                 <a:latin typeface="Arial"/>
-              </a:defRPr>
-            </a:pPr>
-            <a:r>
+              </a:rPr>
               <a:t>1. مشعل حاجب</a:t>
             </a:r>
           </a:p>
@@ -4673,8 +4676,8 @@
         </p:nvSpPr>
         <p:spPr>
           <a:xfrm>
-            <a:off x="3154680" y="4480560"/>
-            <a:ext cx="1874519" cy="822960"/>
+            <a:off x="7223760" y="4434840"/>
+            <a:ext cx="1920240" cy="822960"/>
           </a:xfrm>
           <a:prstGeom prst="roundRect">
             <a:avLst/>
@@ -4682,7 +4685,7 @@
           <a:solidFill>
             <a:srgbClr val="FFFFFF"/>
           </a:solidFill>
-          <a:ln w="12700">
+          <a:ln w="19050">
             <a:solidFill>
               <a:srgbClr val="CBD5E1"/>
             </a:solidFill>
@@ -4706,15 +4709,14 @@
           <a:bodyPr rtlCol="0" anchor="ctr"/>
           <a:lstStyle/>
           <a:p>
-            <a:pPr algn="ctr">
-              <a:defRPr sz="1500" b="1">
+            <a:pPr algn="ctr" rtl="1"/>
+            <a:r>
+              <a:rPr sz="1500" b="1" lang="ar-SA" rtl="1">
                 <a:solidFill>
                   <a:srgbClr val="0F2B5C"/>
                 </a:solidFill>
                 <a:latin typeface="Arial"/>
-              </a:defRPr>
-            </a:pPr>
-            <a:r>
+              </a:rPr>
               <a:t>2. قحطان</a:t>
             </a:r>
           </a:p>
@@ -4728,8 +4730,8 @@
         </p:nvSpPr>
         <p:spPr>
           <a:xfrm>
-            <a:off x="5212080" y="4480560"/>
-            <a:ext cx="1874519" cy="822960"/>
+            <a:off x="5166360" y="4434840"/>
+            <a:ext cx="1920240" cy="822960"/>
           </a:xfrm>
           <a:prstGeom prst="roundRect">
             <a:avLst/>
@@ -4737,7 +4739,7 @@
           <a:solidFill>
             <a:srgbClr val="FFFFFF"/>
           </a:solidFill>
-          <a:ln w="12700">
+          <a:ln w="19050">
             <a:solidFill>
               <a:srgbClr val="CBD5E1"/>
             </a:solidFill>
@@ -4761,15 +4763,14 @@
           <a:bodyPr rtlCol="0" anchor="ctr"/>
           <a:lstStyle/>
           <a:p>
-            <a:pPr algn="ctr">
-              <a:defRPr sz="1500" b="1">
+            <a:pPr algn="ctr" rtl="1"/>
+            <a:r>
+              <a:rPr sz="1500" b="1" lang="ar-SA" rtl="1">
                 <a:solidFill>
                   <a:srgbClr val="0F2B5C"/>
                 </a:solidFill>
                 <a:latin typeface="Arial"/>
-              </a:defRPr>
-            </a:pPr>
-            <a:r>
+              </a:rPr>
               <a:t>3. محمد العيدروس</a:t>
             </a:r>
           </a:p>
@@ -4783,8 +4784,8 @@
         </p:nvSpPr>
         <p:spPr>
           <a:xfrm>
-            <a:off x="7269480" y="4480560"/>
-            <a:ext cx="1874519" cy="822960"/>
+            <a:off x="3108960" y="4434840"/>
+            <a:ext cx="1920240" cy="822960"/>
           </a:xfrm>
           <a:prstGeom prst="roundRect">
             <a:avLst/>
@@ -4792,7 +4793,7 @@
           <a:solidFill>
             <a:srgbClr val="FFFFFF"/>
           </a:solidFill>
-          <a:ln w="12700">
+          <a:ln w="19050">
             <a:solidFill>
               <a:srgbClr val="CBD5E1"/>
             </a:solidFill>
@@ -4816,15 +4817,14 @@
           <a:bodyPr rtlCol="0" anchor="ctr"/>
           <a:lstStyle/>
           <a:p>
-            <a:pPr algn="ctr">
-              <a:defRPr sz="1500" b="1">
+            <a:pPr algn="ctr" rtl="1"/>
+            <a:r>
+              <a:rPr sz="1500" b="1" lang="ar-SA" rtl="1">
                 <a:solidFill>
                   <a:srgbClr val="0F2B5C"/>
                 </a:solidFill>
                 <a:latin typeface="Arial"/>
-              </a:defRPr>
-            </a:pPr>
-            <a:r>
+              </a:rPr>
               <a:t>4. أواب النزيلي</a:t>
             </a:r>
           </a:p>
@@ -4838,8 +4838,8 @@
         </p:nvSpPr>
         <p:spPr>
           <a:xfrm>
-            <a:off x="9326880" y="4480560"/>
-            <a:ext cx="1874519" cy="822960"/>
+            <a:off x="1051560" y="4434840"/>
+            <a:ext cx="1920240" cy="822960"/>
           </a:xfrm>
           <a:prstGeom prst="roundRect">
             <a:avLst/>
@@ -4847,7 +4847,7 @@
           <a:solidFill>
             <a:srgbClr val="FFFFFF"/>
           </a:solidFill>
-          <a:ln w="12700">
+          <a:ln w="19050">
             <a:solidFill>
               <a:srgbClr val="CBD5E1"/>
             </a:solidFill>
@@ -4871,15 +4871,14 @@
           <a:bodyPr rtlCol="0" anchor="ctr"/>
           <a:lstStyle/>
           <a:p>
-            <a:pPr algn="ctr">
-              <a:defRPr sz="1500" b="1">
+            <a:pPr algn="ctr" rtl="1"/>
+            <a:r>
+              <a:rPr sz="1500" b="1" lang="ar-SA" rtl="1">
                 <a:solidFill>
                   <a:srgbClr val="0F2B5C"/>
                 </a:solidFill>
                 <a:latin typeface="Arial"/>
-              </a:defRPr>
-            </a:pPr>
-            <a:r>
+              </a:rPr>
               <a:t>5. محمد العواضي</a:t>
             </a:r>
           </a:p>
@@ -4907,16 +4906,15 @@
           </a:bodyPr>
           <a:lstStyle/>
           <a:p>
-            <a:pPr algn="ctr">
-              <a:defRPr sz="1200">
+            <a:pPr algn="ctr" rtl="1"/>
+            <a:r>
+              <a:rPr sz="1200" b="0" lang="ar-SA" rtl="1">
                 <a:solidFill>
                   <a:srgbClr val="475569"/>
                 </a:solidFill>
                 <a:latin typeface="Arial"/>
-              </a:defRPr>
-            </a:pPr>
-            <a:r>
-              <a:t>المناقشة الأكاديمية الرسمية  •  نسخة العرض المحكمة (Projector Edition)  •  12 شريحة</a:t>
+              </a:rPr>
+              <a:t>العرض النهائي الأكاديمي  •  12 شريحة محكمة</a:t>
             </a:r>
           </a:p>
         </p:txBody>
@@ -4948,13 +4946,13 @@
         <p:spPr>
           <a:xfrm>
             <a:off x="0" y="0"/>
-            <a:ext cx="12191695" cy="91440"/>
+            <a:ext cx="12191695" cy="109728"/>
           </a:xfrm>
           <a:prstGeom prst="rect">
             <a:avLst/>
           </a:prstGeom>
           <a:solidFill>
-            <a:srgbClr val="1E40AF"/>
+            <a:srgbClr val="0F2B5C"/>
           </a:solidFill>
           <a:ln>
             <a:noFill/>
@@ -4990,44 +4988,8 @@
         </p:nvSpPr>
         <p:spPr>
           <a:xfrm>
-            <a:off x="822960" y="228600"/>
-            <a:ext cx="7772400" cy="320040"/>
-          </a:xfrm>
-          <a:prstGeom prst="rect">
-            <a:avLst/>
-          </a:prstGeom>
-          <a:noFill/>
-        </p:spPr>
-        <p:txBody>
-          <a:bodyPr wrap="square">
-            <a:spAutoFit/>
-          </a:bodyPr>
-          <a:lstStyle/>
-          <a:p>
-            <a:pPr>
-              <a:defRPr sz="1300" b="1">
-                <a:solidFill>
-                  <a:srgbClr val="1E40AF"/>
-                </a:solidFill>
-                <a:latin typeface="Arial"/>
-              </a:defRPr>
-            </a:pPr>
-            <a:r>
-              <a:t>LOCAL CONTACT P2P  |  تحصين الوسائط والملفات</a:t>
-            </a:r>
-          </a:p>
-        </p:txBody>
-      </p:sp>
-      <p:sp>
-        <p:nvSpPr>
-          <p:cNvPr id="4" name="TextBox 3"/>
-          <p:cNvSpPr txBox="1"/>
-          <p:nvPr/>
-        </p:nvSpPr>
-        <p:spPr>
-          <a:xfrm>
-            <a:off x="10241280" y="6309360"/>
-            <a:ext cx="1188720" cy="365760"/>
+            <a:off x="3200400" y="228600"/>
+            <a:ext cx="8138160" cy="320040"/>
           </a:xfrm>
           <a:prstGeom prst="rect">
             <a:avLst/>
@@ -5040,16 +5002,50 @@
           </a:bodyPr>
           <a:lstStyle/>
           <a:p>
-            <a:pPr algn="r">
-              <a:defRPr sz="1400" b="1">
-                <a:solidFill>
-                  <a:srgbClr val="0F2B5C"/>
-                </a:solidFill>
-                <a:latin typeface="Arial"/>
-              </a:defRPr>
-            </a:pPr>
-            <a:r>
-              <a:t>10 / 12</a:t>
+            <a:pPr algn="r" rtl="1"/>
+            <a:r>
+              <a:rPr sz="1300" b="1" lang="ar-SA" rtl="1">
+                <a:solidFill>
+                  <a:srgbClr val="1E40AF"/>
+                </a:solidFill>
+                <a:latin typeface="Arial"/>
+              </a:rPr>
+              <a:t>مشروع الاتصال المحلي المباشر  •  تحصين الوسائط والملفات</a:t>
+            </a:r>
+          </a:p>
+        </p:txBody>
+      </p:sp>
+      <p:sp>
+        <p:nvSpPr>
+          <p:cNvPr id="4" name="TextBox 3"/>
+          <p:cNvSpPr txBox="1"/>
+          <p:nvPr/>
+        </p:nvSpPr>
+        <p:spPr>
+          <a:xfrm>
+            <a:off x="822960" y="228600"/>
+            <a:ext cx="1828800" cy="320040"/>
+          </a:xfrm>
+          <a:prstGeom prst="rect">
+            <a:avLst/>
+          </a:prstGeom>
+          <a:noFill/>
+        </p:spPr>
+        <p:txBody>
+          <a:bodyPr wrap="none">
+            <a:spAutoFit/>
+          </a:bodyPr>
+          <a:lstStyle/>
+          <a:p>
+            <a:pPr algn="l" rtl="0"/>
+            <a:r>
+              <a:rPr sz="1200" b="1" lang="en-US" rtl="0">
+                <a:solidFill>
+                  <a:srgbClr val="475569"/>
+                </a:solidFill>
+                <a:latin typeface="Consolas"/>
+              </a:rPr>
+              <a:t>Slide 10 / 12</a:t>
             </a:r>
           </a:p>
         </p:txBody>
@@ -5062,8 +5058,8 @@
         </p:nvSpPr>
         <p:spPr>
           <a:xfrm>
-            <a:off x="822960" y="594360"/>
-            <a:ext cx="8961120" cy="685800"/>
+            <a:off x="4023360" y="566928"/>
+            <a:ext cx="7315200" cy="685800"/>
           </a:xfrm>
           <a:prstGeom prst="rect">
             <a:avLst/>
@@ -5071,21 +5067,20 @@
           <a:noFill/>
         </p:spPr>
         <p:txBody>
-          <a:bodyPr wrap="square">
+          <a:bodyPr wrap="none">
             <a:spAutoFit/>
           </a:bodyPr>
           <a:lstStyle/>
           <a:p>
-            <a:pPr>
-              <a:defRPr sz="2800" b="1">
+            <a:pPr algn="r" rtl="1"/>
+            <a:r>
+              <a:rPr sz="3000" b="1" lang="ar-SA" rtl="1">
                 <a:solidFill>
                   <a:srgbClr val="0F2B5C"/>
                 </a:solidFill>
                 <a:latin typeface="Arial"/>
-              </a:defRPr>
-            </a:pPr>
-            <a:r>
-              <a:t>تأمين نقل الملفات وتدفق الصوت والفيديو (Media Security)</a:t>
+              </a:rPr>
+              <a:t>تأمين نقل كتل الملفات وتدفق الصوت والفيديو</a:t>
             </a:r>
           </a:p>
         </p:txBody>
@@ -5098,8 +5093,8 @@
         </p:nvSpPr>
         <p:spPr>
           <a:xfrm>
-            <a:off x="8961120" y="621792"/>
-            <a:ext cx="2377440" cy="438912"/>
+            <a:off x="822960" y="621792"/>
+            <a:ext cx="3017520" cy="502920"/>
           </a:xfrm>
           <a:prstGeom prst="roundRect">
             <a:avLst/>
@@ -5131,16 +5126,15 @@
           <a:bodyPr rtlCol="0" anchor="ctr"/>
           <a:lstStyle/>
           <a:p>
-            <a:pPr algn="ctr">
-              <a:defRPr sz="1200" b="1">
+            <a:pPr algn="ctr" rtl="0"/>
+            <a:r>
+              <a:rPr sz="1400" b="1" lang="en-US" rtl="0">
                 <a:solidFill>
                   <a:srgbClr val="1E40AF"/>
                 </a:solidFill>
                 <a:latin typeface="Consolas"/>
-              </a:defRPr>
-            </a:pPr>
-            <a:r>
-              <a:t>MEDIA &amp; STREAMING</a:t>
+              </a:rPr>
+              <a:t>Streaming &amp; Media Security</a:t>
             </a:r>
           </a:p>
         </p:txBody>
@@ -5153,7 +5147,7 @@
         </p:nvSpPr>
         <p:spPr>
           <a:xfrm>
-            <a:off x="822960" y="1353312"/>
+            <a:off x="822960" y="1325880"/>
             <a:ext cx="10515600" cy="18288"/>
           </a:xfrm>
           <a:prstGeom prst="rect">
@@ -5196,8 +5190,8 @@
         </p:nvSpPr>
         <p:spPr>
           <a:xfrm>
-            <a:off x="822960" y="6309360"/>
-            <a:ext cx="7315200" cy="320040"/>
+            <a:off x="822960" y="6355080"/>
+            <a:ext cx="10515600" cy="320040"/>
           </a:xfrm>
           <a:prstGeom prst="rect">
             <a:avLst/>
@@ -5210,16 +5204,15 @@
           </a:bodyPr>
           <a:lstStyle/>
           <a:p>
-            <a:pPr>
-              <a:defRPr sz="1100">
+            <a:pPr algn="r" rtl="1"/>
+            <a:r>
+              <a:rPr sz="1050" b="0" lang="ar-SA" rtl="1">
                 <a:solidFill>
                   <a:srgbClr val="475569"/>
                 </a:solidFill>
                 <a:latin typeface="Arial"/>
-              </a:defRPr>
-            </a:pPr>
-            <a:r>
-              <a:t>مشروع تخرج LOCAL CONTACT — مناقشة أكاديمية محكمة</a:t>
+              </a:rPr>
+              <a:t>مناقشة مشروع التخرج الأكاديمية — نظام اتصال محلي مستقل دون خادم وسيط</a:t>
             </a:r>
           </a:p>
         </p:txBody>
@@ -5232,8 +5225,8 @@
         </p:nvSpPr>
         <p:spPr>
           <a:xfrm>
-            <a:off x="822960" y="1645920"/>
-            <a:ext cx="5120640" cy="4389120"/>
+            <a:off x="6217920" y="1554480"/>
+            <a:ext cx="5120640" cy="1828800"/>
           </a:xfrm>
           <a:prstGeom prst="roundRect">
             <a:avLst/>
@@ -5265,96 +5258,47 @@
           <a:bodyPr rtlCol="0" anchor="ctr" wrap="square"/>
           <a:lstStyle/>
           <a:p>
-            <a:pPr algn="ctr">
-              <a:defRPr sz="2200" b="1">
+            <a:pPr algn="r" rtl="1"/>
+            <a:r>
+              <a:rPr sz="1900" b="1" lang="ar-SA" rtl="1">
                 <a:solidFill>
                   <a:srgbClr val="0F2B5C"/>
                 </a:solidFill>
                 <a:latin typeface="Arial"/>
-              </a:defRPr>
+              </a:rPr>
+              <a:t>تجزئة الملفات التدفّقية</a:t>
+            </a:r>
+          </a:p>
+          <a:p>
+            <a:pPr algn="r" rtl="0">
+              <a:spcBef>
+                <a:spcPts val="300"/>
+              </a:spcBef>
             </a:pPr>
             <a:r>
-              <a:t>📁 تأمين نقل الملفات عبر TCP: 8891:</a:t>
-            </a:r>
-          </a:p>
-          <a:p>
-            <a:pPr>
+              <a:rPr sz="1300" b="1" lang="en-US" rtl="0">
+                <a:solidFill>
+                  <a:srgbClr val="1E40AF"/>
+                </a:solidFill>
+                <a:latin typeface="Consolas"/>
+              </a:rPr>
+              <a:t>[64KB Chunks over TCP: 8891]</a:t>
+            </a:r>
+          </a:p>
+          <a:p>
+            <a:pPr algn="r" rtl="1">
               <a:spcBef>
                 <a:spcPts val="600"/>
               </a:spcBef>
-              <a:defRPr sz="1400" b="1">
-                <a:solidFill>
-                  <a:srgbClr val="1E40AF"/>
-                </a:solidFill>
-                <a:latin typeface="Consolas"/>
-              </a:defRPr>
             </a:pPr>
             <a:r>
-              <a:t>FileTransferEngine.kt</a:t>
-            </a:r>
-          </a:p>
-          <a:p>
-            <a:pPr>
-              <a:spcBef>
-                <a:spcPts val="1000"/>
-              </a:spcBef>
-              <a:defRPr sz="1600" b="1">
+              <a:rPr sz="1500" b="0" lang="ar-SA" rtl="1">
                 <a:solidFill>
                   <a:srgbClr val="0F172A"/>
                 </a:solidFill>
                 <a:latin typeface="Arial"/>
-              </a:defRPr>
-            </a:pPr>
-            <a:r>
-              <a:t>• نقل تدفقي مجزأ: قراءة وتشفير الملف في هيئة كتل 64KB لمنع استهلاك الذاكرة وحوادث OOM.</a:t>
-            </a:r>
-          </a:p>
-          <a:p>
-            <a:pPr>
-              <a:spcBef>
-                <a:spcPts val="1000"/>
-              </a:spcBef>
-              <a:defRPr sz="1600" b="1">
-                <a:solidFill>
-                  <a:srgbClr val="0F172A"/>
-                </a:solidFill>
-                <a:latin typeface="Arial"/>
-              </a:defRPr>
-            </a:pPr>
-            <a:r>
-              <a:t>• اشتقاق Nonce لكل كتلة: اشتقاق رقم عشوائي محسوب لكل كتلة يضمن أمان تشفير GCM أثناء الاستئناف.</a:t>
-            </a:r>
-          </a:p>
-          <a:p>
-            <a:pPr>
-              <a:spcBef>
-                <a:spcPts val="1000"/>
-              </a:spcBef>
-              <a:defRPr sz="1600" b="1">
-                <a:solidFill>
-                  <a:srgbClr val="0F172A"/>
-                </a:solidFill>
-                <a:latin typeface="Arial"/>
-              </a:defRPr>
-            </a:pPr>
-            <a:r>
-              <a:t>• دعم الاستئناف (Resume): إمكانية استكمال نقل الملف من موضع الإزاحة دون إعادة التشفير من الصفر.</a:t>
-            </a:r>
-          </a:p>
-          <a:p>
-            <a:pPr>
-              <a:spcBef>
-                <a:spcPts val="1000"/>
-              </a:spcBef>
-              <a:defRPr sz="1600" b="1">
-                <a:solidFill>
-                  <a:srgbClr val="0F172A"/>
-                </a:solidFill>
-                <a:latin typeface="Arial"/>
-              </a:defRPr>
-            </a:pPr>
-            <a:r>
-              <a:t>• تعقيم المسارات: تنظيف أسماء الملفات عبر StorageUtils لمنع هجمات التراجع الدليلي (../).</a:t>
+              </a:rPr>
+              <a:t>قراءة وتشفير الملفات في هيئة كتل 64 كيلوبايت لتفادي استنزاف الذاكرة وحوادث الانهيار.</a:t>
             </a:r>
           </a:p>
         </p:txBody>
@@ -5367,8 +5311,8 @@
         </p:nvSpPr>
         <p:spPr>
           <a:xfrm>
-            <a:off x="6217920" y="1645920"/>
-            <a:ext cx="5120640" cy="4389120"/>
+            <a:off x="822960" y="1554480"/>
+            <a:ext cx="5120640" cy="1828800"/>
           </a:xfrm>
           <a:prstGeom prst="roundRect">
             <a:avLst/>
@@ -5400,96 +5344,282 @@
           <a:bodyPr rtlCol="0" anchor="ctr" wrap="square"/>
           <a:lstStyle/>
           <a:p>
-            <a:pPr algn="ctr">
-              <a:defRPr sz="2200" b="1">
+            <a:pPr algn="r" rtl="1"/>
+            <a:r>
+              <a:rPr sz="1900" b="1" lang="ar-SA" rtl="1">
                 <a:solidFill>
                   <a:srgbClr val="0F2B5C"/>
                 </a:solidFill>
                 <a:latin typeface="Arial"/>
-              </a:defRPr>
+              </a:rPr>
+              <a:t>اشتقاق أرقام عشوائية للكتل</a:t>
+            </a:r>
+          </a:p>
+          <a:p>
+            <a:pPr algn="r" rtl="0">
+              <a:spcBef>
+                <a:spcPts val="300"/>
+              </a:spcBef>
             </a:pPr>
             <a:r>
-              <a:t>🎙️ تأمين تدفق الصوت والفيديو عبر UDP:</a:t>
-            </a:r>
-          </a:p>
-          <a:p>
-            <a:pPr>
+              <a:rPr sz="1300" b="1" lang="en-US" rtl="0">
+                <a:solidFill>
+                  <a:srgbClr val="059669"/>
+                </a:solidFill>
+                <a:latin typeface="Consolas"/>
+              </a:rPr>
+              <a:t>[deriveChunkNonce() Logic]</a:t>
+            </a:r>
+          </a:p>
+          <a:p>
+            <a:pPr algn="r" rtl="1">
               <a:spcBef>
                 <a:spcPts val="600"/>
               </a:spcBef>
-              <a:defRPr sz="1300" b="1">
+            </a:pPr>
+            <a:r>
+              <a:rPr sz="1500" b="0" lang="ar-SA" rtl="1">
+                <a:solidFill>
+                  <a:srgbClr val="0F172A"/>
+                </a:solidFill>
+                <a:latin typeface="Arial"/>
+              </a:rPr>
+              <a:t>حساب رقم عشوائي فريد لكل كتلة يضمن أمان التشفير ودعم استئناف النقل بعد الانقطاع.</a:t>
+            </a:r>
+          </a:p>
+        </p:txBody>
+      </p:sp>
+      <p:sp>
+        <p:nvSpPr>
+          <p:cNvPr id="11" name="Rounded Rectangle 10"/>
+          <p:cNvSpPr/>
+          <p:nvPr/>
+        </p:nvSpPr>
+        <p:spPr>
+          <a:xfrm>
+            <a:off x="6217920" y="3566160"/>
+            <a:ext cx="5120640" cy="1828800"/>
+          </a:xfrm>
+          <a:prstGeom prst="roundRect">
+            <a:avLst/>
+          </a:prstGeom>
+          <a:solidFill>
+            <a:srgbClr val="F8FAFC"/>
+          </a:solidFill>
+          <a:ln w="19050">
+            <a:solidFill>
+              <a:srgbClr val="CBD5E1"/>
+            </a:solidFill>
+          </a:ln>
+        </p:spPr>
+        <p:style>
+          <a:lnRef idx="1">
+            <a:schemeClr val="accent1"/>
+          </a:lnRef>
+          <a:fillRef idx="3">
+            <a:schemeClr val="accent1"/>
+          </a:fillRef>
+          <a:effectRef idx="2">
+            <a:schemeClr val="accent1"/>
+          </a:effectRef>
+          <a:fontRef idx="minor">
+            <a:schemeClr val="lt1"/>
+          </a:fontRef>
+        </p:style>
+        <p:txBody>
+          <a:bodyPr rtlCol="0" anchor="ctr" wrap="square"/>
+          <a:lstStyle/>
+          <a:p>
+            <a:pPr algn="r" rtl="1"/>
+            <a:r>
+              <a:rPr sz="1900" b="1" lang="ar-SA" rtl="1">
+                <a:solidFill>
+                  <a:srgbClr val="0F2B5C"/>
+                </a:solidFill>
+                <a:latin typeface="Arial"/>
+              </a:rPr>
+              <a:t>تشفير عينات الصوت الحية</a:t>
+            </a:r>
+          </a:p>
+          <a:p>
+            <a:pPr algn="r" rtl="0">
+              <a:spcBef>
+                <a:spcPts val="300"/>
+              </a:spcBef>
+            </a:pPr>
+            <a:r>
+              <a:rPr sz="1300" b="1" lang="en-US" rtl="0">
                 <a:solidFill>
                   <a:srgbClr val="1E40AF"/>
                 </a:solidFill>
                 <a:latin typeface="Consolas"/>
-              </a:defRPr>
+              </a:rPr>
+              <a:t>[UDP: 8889 (Audio) &amp; 8890 (Video)]</a:t>
+            </a:r>
+          </a:p>
+          <a:p>
+            <a:pPr algn="r" rtl="1">
+              <a:spcBef>
+                <a:spcPts val="600"/>
+              </a:spcBef>
             </a:pPr>
             <a:r>
-              <a:t>AudioEngine.kt (8889) &amp; VideoEngine.kt (8890)</a:t>
-            </a:r>
-          </a:p>
-          <a:p>
-            <a:pPr>
+              <a:rPr sz="1500" b="0" lang="ar-SA" rtl="1">
+                <a:solidFill>
+                  <a:srgbClr val="0F172A"/>
+                </a:solidFill>
+                <a:latin typeface="Arial"/>
+              </a:rPr>
+              <a:t>تشفير فوري لعينات الصوت الخام وإطارات الفيديو المباشرة بزمن كمون منخفض جداً.</a:t>
+            </a:r>
+          </a:p>
+        </p:txBody>
+      </p:sp>
+      <p:sp>
+        <p:nvSpPr>
+          <p:cNvPr id="12" name="Rounded Rectangle 11"/>
+          <p:cNvSpPr/>
+          <p:nvPr/>
+        </p:nvSpPr>
+        <p:spPr>
+          <a:xfrm>
+            <a:off x="822960" y="3566160"/>
+            <a:ext cx="5120640" cy="1828800"/>
+          </a:xfrm>
+          <a:prstGeom prst="roundRect">
+            <a:avLst/>
+          </a:prstGeom>
+          <a:solidFill>
+            <a:srgbClr val="F8FAFC"/>
+          </a:solidFill>
+          <a:ln w="19050">
+            <a:solidFill>
+              <a:srgbClr val="CBD5E1"/>
+            </a:solidFill>
+          </a:ln>
+        </p:spPr>
+        <p:style>
+          <a:lnRef idx="1">
+            <a:schemeClr val="accent1"/>
+          </a:lnRef>
+          <a:fillRef idx="3">
+            <a:schemeClr val="accent1"/>
+          </a:fillRef>
+          <a:effectRef idx="2">
+            <a:schemeClr val="accent1"/>
+          </a:effectRef>
+          <a:fontRef idx="minor">
+            <a:schemeClr val="lt1"/>
+          </a:fontRef>
+        </p:style>
+        <p:txBody>
+          <a:bodyPr rtlCol="0" anchor="ctr" wrap="square"/>
+          <a:lstStyle/>
+          <a:p>
+            <a:pPr algn="r" rtl="1"/>
+            <a:r>
+              <a:rPr sz="1900" b="1" lang="ar-SA" rtl="1">
+                <a:solidFill>
+                  <a:srgbClr val="0F2B5C"/>
+                </a:solidFill>
+                <a:latin typeface="Arial"/>
+              </a:rPr>
+              <a:t>إسقاط الإطارات المتلاعب بها</a:t>
+            </a:r>
+          </a:p>
+          <a:p>
+            <a:pPr algn="r" rtl="0">
               <a:spcBef>
-                <a:spcPts val="1000"/>
+                <a:spcPts val="300"/>
               </a:spcBef>
-              <a:defRPr sz="1600" b="1">
+            </a:pPr>
+            <a:r>
+              <a:rPr sz="1300" b="1" lang="en-US" rtl="0">
+                <a:solidFill>
+                  <a:srgbClr val="059669"/>
+                </a:solidFill>
+                <a:latin typeface="Consolas"/>
+              </a:rPr>
+              <a:t>[AEADBadTagException Handled]</a:t>
+            </a:r>
+          </a:p>
+          <a:p>
+            <a:pPr algn="r" rtl="1">
+              <a:spcBef>
+                <a:spcPts val="600"/>
+              </a:spcBef>
+            </a:pPr>
+            <a:r>
+              <a:rPr sz="1500" b="0" lang="ar-SA" rtl="1">
                 <a:solidFill>
                   <a:srgbClr val="0F172A"/>
                 </a:solidFill>
                 <a:latin typeface="Arial"/>
-              </a:defRPr>
-            </a:pPr>
-            <a:r>
-              <a:t>• تشفير الإطارات الحية: تشفير عينات الصوت 16kHz PCM وإطارات الفيديو بصيغة AES-GCM.</a:t>
-            </a:r>
-          </a:p>
-          <a:p>
-            <a:pPr>
-              <a:spcBef>
-                <a:spcPts val="1000"/>
-              </a:spcBef>
-              <a:defRPr sz="1600" b="1">
-                <a:solidFill>
-                  <a:srgbClr val="0F172A"/>
-                </a:solidFill>
-                <a:latin typeface="Arial"/>
-              </a:defRPr>
-            </a:pPr>
-            <a:r>
-              <a:t>• انخفاض زمن الكمون (Low Latency): معالجة خفيفة للتشفير الفوري تناسب الاتصال المباشر.</a:t>
-            </a:r>
-          </a:p>
-          <a:p>
-            <a:pPr>
-              <a:spcBef>
-                <a:spcPts val="1000"/>
-              </a:spcBef>
-              <a:defRPr sz="1600" b="1">
-                <a:solidFill>
-                  <a:srgbClr val="0F172A"/>
-                </a:solidFill>
-                <a:latin typeface="Arial"/>
-              </a:defRPr>
-            </a:pPr>
-            <a:r>
-              <a:t>• إسقاط الحزم المتلاعب بها: اعتراض استثناء AEADBadTagException وإسقاط الإطار التالف فوراً دون انهيار التطبيق.</a:t>
-            </a:r>
-          </a:p>
-          <a:p>
-            <a:pPr>
-              <a:spcBef>
-                <a:spcPts val="1000"/>
-              </a:spcBef>
-              <a:defRPr sz="1600" b="1">
-                <a:solidFill>
-                  <a:srgbClr val="0F172A"/>
-                </a:solidFill>
-                <a:latin typeface="Arial"/>
-              </a:defRPr>
-            </a:pPr>
-            <a:r>
-              <a:t>• استقلالية القنوات: فصل قنوات الصوت والفيديو والملفات على منافذ مقابس مستقلة.</a:t>
+              </a:rPr>
+              <a:t>اعتراض أي إطار وسائط يفشل في المصادقة وإسقاطه فوراً لمنع هجمات الحقن الصوتي.</a:t>
+            </a:r>
+          </a:p>
+        </p:txBody>
+      </p:sp>
+      <p:sp>
+        <p:nvSpPr>
+          <p:cNvPr id="13" name="Rounded Rectangle 12"/>
+          <p:cNvSpPr/>
+          <p:nvPr/>
+        </p:nvSpPr>
+        <p:spPr>
+          <a:xfrm>
+            <a:off x="822960" y="5623560"/>
+            <a:ext cx="10515600" cy="594360"/>
+          </a:xfrm>
+          <a:prstGeom prst="roundRect">
+            <a:avLst/>
+          </a:prstGeom>
+          <a:solidFill>
+            <a:srgbClr val="F8FAFC"/>
+          </a:solidFill>
+          <a:ln w="12700">
+            <a:solidFill>
+              <a:srgbClr val="CBD5E1"/>
+            </a:solidFill>
+          </a:ln>
+        </p:spPr>
+        <p:style>
+          <a:lnRef idx="1">
+            <a:schemeClr val="accent1"/>
+          </a:lnRef>
+          <a:fillRef idx="3">
+            <a:schemeClr val="accent1"/>
+          </a:fillRef>
+          <a:effectRef idx="2">
+            <a:schemeClr val="accent1"/>
+          </a:effectRef>
+          <a:fontRef idx="minor">
+            <a:schemeClr val="lt1"/>
+          </a:fontRef>
+        </p:style>
+        <p:txBody>
+          <a:bodyPr rtlCol="0" anchor="ctr"/>
+          <a:lstStyle/>
+          <a:p>
+            <a:pPr algn="r" rtl="1"/>
+            <a:r>
+              <a:rPr sz="1200" b="1" lang="ar-SA" rtl="1">
+                <a:solidFill>
+                  <a:srgbClr val="0F2B5C"/>
+                </a:solidFill>
+                <a:latin typeface="Arial"/>
+              </a:rPr>
+              <a:t>المكون البرمجي: محرك نقل الملفات المشفرة وتدفق الوسائط  |  </a:t>
+            </a:r>
+            <a:r>
+              <a:rPr sz="1200" b="1" lang="en-US" rtl="0">
+                <a:solidFill>
+                  <a:srgbClr val="1E40AF"/>
+                </a:solidFill>
+                <a:latin typeface="Consolas"/>
+              </a:rPr>
+              <a:t>app/src/main/java/com/example/network/FileTransferEngine.kt</a:t>
             </a:r>
           </a:p>
         </p:txBody>
@@ -5521,13 +5651,13 @@
         <p:spPr>
           <a:xfrm>
             <a:off x="0" y="0"/>
-            <a:ext cx="12191695" cy="91440"/>
+            <a:ext cx="12191695" cy="109728"/>
           </a:xfrm>
           <a:prstGeom prst="rect">
             <a:avLst/>
           </a:prstGeom>
           <a:solidFill>
-            <a:srgbClr val="1E40AF"/>
+            <a:srgbClr val="0F2B5C"/>
           </a:solidFill>
           <a:ln>
             <a:noFill/>
@@ -5563,44 +5693,8 @@
         </p:nvSpPr>
         <p:spPr>
           <a:xfrm>
-            <a:off x="822960" y="228600"/>
-            <a:ext cx="7772400" cy="320040"/>
-          </a:xfrm>
-          <a:prstGeom prst="rect">
-            <a:avLst/>
-          </a:prstGeom>
-          <a:noFill/>
-        </p:spPr>
-        <p:txBody>
-          <a:bodyPr wrap="square">
-            <a:spAutoFit/>
-          </a:bodyPr>
-          <a:lstStyle/>
-          <a:p>
-            <a:pPr>
-              <a:defRPr sz="1300" b="1">
-                <a:solidFill>
-                  <a:srgbClr val="1E40AF"/>
-                </a:solidFill>
-                <a:latin typeface="Arial"/>
-              </a:defRPr>
-            </a:pPr>
-            <a:r>
-              <a:t>LOCAL CONTACT P2P  |  التحقق والاختبارات الآلية</a:t>
-            </a:r>
-          </a:p>
-        </p:txBody>
-      </p:sp>
-      <p:sp>
-        <p:nvSpPr>
-          <p:cNvPr id="4" name="TextBox 3"/>
-          <p:cNvSpPr txBox="1"/>
-          <p:nvPr/>
-        </p:nvSpPr>
-        <p:spPr>
-          <a:xfrm>
-            <a:off x="10241280" y="6309360"/>
-            <a:ext cx="1188720" cy="365760"/>
+            <a:off x="3200400" y="228600"/>
+            <a:ext cx="8138160" cy="320040"/>
           </a:xfrm>
           <a:prstGeom prst="rect">
             <a:avLst/>
@@ -5613,16 +5707,50 @@
           </a:bodyPr>
           <a:lstStyle/>
           <a:p>
-            <a:pPr algn="r">
-              <a:defRPr sz="1400" b="1">
-                <a:solidFill>
-                  <a:srgbClr val="0F2B5C"/>
-                </a:solidFill>
-                <a:latin typeface="Arial"/>
-              </a:defRPr>
-            </a:pPr>
-            <a:r>
-              <a:t>11 / 12</a:t>
+            <a:pPr algn="r" rtl="1"/>
+            <a:r>
+              <a:rPr sz="1300" b="1" lang="ar-SA" rtl="1">
+                <a:solidFill>
+                  <a:srgbClr val="1E40AF"/>
+                </a:solidFill>
+                <a:latin typeface="Arial"/>
+              </a:rPr>
+              <a:t>مشروع الاتصال المحلي المباشر  •  التحقق والاختبارات الآلية</a:t>
+            </a:r>
+          </a:p>
+        </p:txBody>
+      </p:sp>
+      <p:sp>
+        <p:nvSpPr>
+          <p:cNvPr id="4" name="TextBox 3"/>
+          <p:cNvSpPr txBox="1"/>
+          <p:nvPr/>
+        </p:nvSpPr>
+        <p:spPr>
+          <a:xfrm>
+            <a:off x="822960" y="228600"/>
+            <a:ext cx="1828800" cy="320040"/>
+          </a:xfrm>
+          <a:prstGeom prst="rect">
+            <a:avLst/>
+          </a:prstGeom>
+          <a:noFill/>
+        </p:spPr>
+        <p:txBody>
+          <a:bodyPr wrap="none">
+            <a:spAutoFit/>
+          </a:bodyPr>
+          <a:lstStyle/>
+          <a:p>
+            <a:pPr algn="l" rtl="0"/>
+            <a:r>
+              <a:rPr sz="1200" b="1" lang="en-US" rtl="0">
+                <a:solidFill>
+                  <a:srgbClr val="475569"/>
+                </a:solidFill>
+                <a:latin typeface="Consolas"/>
+              </a:rPr>
+              <a:t>Slide 11 / 12</a:t>
             </a:r>
           </a:p>
         </p:txBody>
@@ -5635,8 +5763,8 @@
         </p:nvSpPr>
         <p:spPr>
           <a:xfrm>
-            <a:off x="822960" y="594360"/>
-            <a:ext cx="8961120" cy="685800"/>
+            <a:off x="4023360" y="566928"/>
+            <a:ext cx="7315200" cy="685800"/>
           </a:xfrm>
           <a:prstGeom prst="rect">
             <a:avLst/>
@@ -5644,21 +5772,20 @@
           <a:noFill/>
         </p:spPr>
         <p:txBody>
-          <a:bodyPr wrap="square">
+          <a:bodyPr wrap="none">
             <a:spAutoFit/>
           </a:bodyPr>
           <a:lstStyle/>
           <a:p>
-            <a:pPr>
-              <a:defRPr sz="2800" b="1">
+            <a:pPr algn="r" rtl="1"/>
+            <a:r>
+              <a:rPr sz="3000" b="1" lang="ar-SA" rtl="1">
                 <a:solidFill>
                   <a:srgbClr val="0F2B5C"/>
                 </a:solidFill>
                 <a:latin typeface="Arial"/>
-              </a:defRPr>
-            </a:pPr>
-            <a:r>
-              <a:t>مصفوفة التحقق والاختبارات الآلية (33/33 Tests Passed)</a:t>
+              </a:rPr>
+              <a:t>مصفوفة التحقق البرمجي المؤتمت</a:t>
             </a:r>
           </a:p>
         </p:txBody>
@@ -5671,8 +5798,8 @@
         </p:nvSpPr>
         <p:spPr>
           <a:xfrm>
-            <a:off x="8961120" y="621792"/>
-            <a:ext cx="2377440" cy="438912"/>
+            <a:off x="822960" y="621792"/>
+            <a:ext cx="3017520" cy="502920"/>
           </a:xfrm>
           <a:prstGeom prst="roundRect">
             <a:avLst/>
@@ -5704,16 +5831,15 @@
           <a:bodyPr rtlCol="0" anchor="ctr"/>
           <a:lstStyle/>
           <a:p>
-            <a:pPr algn="ctr">
-              <a:defRPr sz="1200" b="1">
+            <a:pPr algn="ctr" rtl="0"/>
+            <a:r>
+              <a:rPr sz="1400" b="1" lang="en-US" rtl="0">
                 <a:solidFill>
                   <a:srgbClr val="059669"/>
                 </a:solidFill>
                 <a:latin typeface="Consolas"/>
-              </a:defRPr>
-            </a:pPr>
-            <a:r>
-              <a:t>100% JVM PASSED</a:t>
+              </a:rPr>
+              <a:t>33/33 JVM Tests Passed</a:t>
             </a:r>
           </a:p>
         </p:txBody>
@@ -5726,7 +5852,7 @@
         </p:nvSpPr>
         <p:spPr>
           <a:xfrm>
-            <a:off x="822960" y="1353312"/>
+            <a:off x="822960" y="1325880"/>
             <a:ext cx="10515600" cy="18288"/>
           </a:xfrm>
           <a:prstGeom prst="rect">
@@ -5769,8 +5895,8 @@
         </p:nvSpPr>
         <p:spPr>
           <a:xfrm>
-            <a:off x="822960" y="6309360"/>
-            <a:ext cx="7315200" cy="320040"/>
+            <a:off x="822960" y="6355080"/>
+            <a:ext cx="10515600" cy="320040"/>
           </a:xfrm>
           <a:prstGeom prst="rect">
             <a:avLst/>
@@ -5783,16 +5909,15 @@
           </a:bodyPr>
           <a:lstStyle/>
           <a:p>
-            <a:pPr>
-              <a:defRPr sz="1100">
+            <a:pPr algn="r" rtl="1"/>
+            <a:r>
+              <a:rPr sz="1050" b="0" lang="ar-SA" rtl="1">
                 <a:solidFill>
                   <a:srgbClr val="475569"/>
                 </a:solidFill>
                 <a:latin typeface="Arial"/>
-              </a:defRPr>
-            </a:pPr>
-            <a:r>
-              <a:t>مشروع تخرج LOCAL CONTACT — مناقشة أكاديمية محكمة</a:t>
+              </a:rPr>
+              <a:t>مناقشة مشروع التخرج الأكاديمية — نظام اتصال محلي مستقل دون خادم وسيط</a:t>
             </a:r>
           </a:p>
         </p:txBody>
@@ -5805,8 +5930,8 @@
         </p:nvSpPr>
         <p:spPr>
           <a:xfrm>
-            <a:off x="822960" y="1645920"/>
-            <a:ext cx="10515600" cy="4389120"/>
+            <a:off x="6217920" y="1554480"/>
+            <a:ext cx="5120640" cy="1828800"/>
           </a:xfrm>
           <a:prstGeom prst="roundRect">
             <a:avLst/>
@@ -5816,7 +5941,7 @@
           </a:solidFill>
           <a:ln w="19050">
             <a:solidFill>
-              <a:srgbClr val="059669"/>
+              <a:srgbClr val="CBD5E1"/>
             </a:solidFill>
           </a:ln>
         </p:spPr>
@@ -5838,96 +5963,368 @@
           <a:bodyPr rtlCol="0" anchor="ctr" wrap="square"/>
           <a:lstStyle/>
           <a:p>
-            <a:pPr algn="ctr">
-              <a:defRPr sz="2200" b="1">
+            <a:pPr algn="r" rtl="1"/>
+            <a:r>
+              <a:rPr sz="1900" b="1" lang="ar-SA" rtl="1">
                 <a:solidFill>
                   <a:srgbClr val="0F2B5C"/>
                 </a:solidFill>
                 <a:latin typeface="Arial"/>
-              </a:defRPr>
+              </a:rPr>
+              <a:t>اختبارات التشفير المتماثل</a:t>
+            </a:r>
+          </a:p>
+          <a:p>
+            <a:pPr algn="r" rtl="0">
+              <a:spcBef>
+                <a:spcPts val="300"/>
+              </a:spcBef>
             </a:pPr>
             <a:r>
-              <a:t>🧪 نتائج حزم الاختبارات الأربع المؤتمتة (JVM Automated Tests):</a:t>
-            </a:r>
-          </a:p>
-          <a:p>
-            <a:pPr>
+              <a:rPr sz="1300" b="1" lang="en-US" rtl="0">
+                <a:solidFill>
+                  <a:srgbClr val="059669"/>
+                </a:solidFill>
+                <a:latin typeface="Consolas"/>
+              </a:rPr>
+              <a:t>[LocalCryptoEngineTest: 10/10 Passed]</a:t>
+            </a:r>
+          </a:p>
+          <a:p>
+            <a:pPr algn="r" rtl="1">
               <a:spcBef>
-                <a:spcPts val="1200"/>
+                <a:spcPts val="600"/>
               </a:spcBef>
-              <a:defRPr sz="1700" b="1">
+            </a:pPr>
+            <a:r>
+              <a:rPr sz="1500" b="0" lang="ar-SA" rtl="1">
                 <a:solidFill>
                   <a:srgbClr val="0F172A"/>
                 </a:solidFill>
                 <a:latin typeface="Arial"/>
-              </a:defRPr>
+              </a:rPr>
+              <a:t>إثبات تشفير وفك تشفير البيانات بوضع العداد المصادق، ورفض المفاتيح الخاطئة، وكشف التلاعب.</a:t>
+            </a:r>
+          </a:p>
+        </p:txBody>
+      </p:sp>
+      <p:sp>
+        <p:nvSpPr>
+          <p:cNvPr id="10" name="Rounded Rectangle 9"/>
+          <p:cNvSpPr/>
+          <p:nvPr/>
+        </p:nvSpPr>
+        <p:spPr>
+          <a:xfrm>
+            <a:off x="822960" y="1554480"/>
+            <a:ext cx="5120640" cy="1828800"/>
+          </a:xfrm>
+          <a:prstGeom prst="roundRect">
+            <a:avLst/>
+          </a:prstGeom>
+          <a:solidFill>
+            <a:srgbClr val="F8FAFC"/>
+          </a:solidFill>
+          <a:ln w="19050">
+            <a:solidFill>
+              <a:srgbClr val="CBD5E1"/>
+            </a:solidFill>
+          </a:ln>
+        </p:spPr>
+        <p:style>
+          <a:lnRef idx="1">
+            <a:schemeClr val="accent1"/>
+          </a:lnRef>
+          <a:fillRef idx="3">
+            <a:schemeClr val="accent1"/>
+          </a:fillRef>
+          <a:effectRef idx="2">
+            <a:schemeClr val="accent1"/>
+          </a:effectRef>
+          <a:fontRef idx="minor">
+            <a:schemeClr val="lt1"/>
+          </a:fontRef>
+        </p:style>
+        <p:txBody>
+          <a:bodyPr rtlCol="0" anchor="ctr" wrap="square"/>
+          <a:lstStyle/>
+          <a:p>
+            <a:pPr algn="r" rtl="1"/>
+            <a:r>
+              <a:rPr sz="1900" b="1" lang="ar-SA" rtl="1">
+                <a:solidFill>
+                  <a:srgbClr val="0F2B5C"/>
+                </a:solidFill>
+                <a:latin typeface="Arial"/>
+              </a:rPr>
+              <a:t>اختبارات تبادل المفاتيح</a:t>
+            </a:r>
+          </a:p>
+          <a:p>
+            <a:pPr algn="r" rtl="0">
+              <a:spcBef>
+                <a:spcPts val="300"/>
+              </a:spcBef>
             </a:pPr>
             <a:r>
-              <a:t>• 1. LocalCryptoEngineTest.kt (10/10 ناجح): إثبات تشفير وفك تشفير AES-GCM، ورفض المفاتيح الخاطئة، ورفض التلاعب بالنص المشفر.</a:t>
-            </a:r>
-          </a:p>
-          <a:p>
-            <a:pPr>
+              <a:rPr sz="1300" b="1" lang="en-US" rtl="0">
+                <a:solidFill>
+                  <a:srgbClr val="059669"/>
+                </a:solidFill>
+                <a:latin typeface="Consolas"/>
+              </a:rPr>
+              <a:t>[EcdhEngineTest: 8/8 Passed]</a:t>
+            </a:r>
+          </a:p>
+          <a:p>
+            <a:pPr algn="r" rtl="1">
               <a:spcBef>
-                <a:spcPts val="1200"/>
+                <a:spcPts val="600"/>
               </a:spcBef>
-              <a:defRPr sz="1700" b="1">
+            </a:pPr>
+            <a:r>
+              <a:rPr sz="1500" b="0" lang="ar-SA" rtl="1">
                 <a:solidFill>
                   <a:srgbClr val="0F172A"/>
                 </a:solidFill>
                 <a:latin typeface="Arial"/>
-              </a:defRPr>
+              </a:rPr>
+              <a:t>إثبات توليد مفاتيح المنحنى القياسي، وتطابق السر المشترك للطرفين، واستيراد المفاتيح.</a:t>
+            </a:r>
+          </a:p>
+        </p:txBody>
+      </p:sp>
+      <p:sp>
+        <p:nvSpPr>
+          <p:cNvPr id="11" name="Rounded Rectangle 10"/>
+          <p:cNvSpPr/>
+          <p:nvPr/>
+        </p:nvSpPr>
+        <p:spPr>
+          <a:xfrm>
+            <a:off x="6217920" y="3566160"/>
+            <a:ext cx="5120640" cy="1828800"/>
+          </a:xfrm>
+          <a:prstGeom prst="roundRect">
+            <a:avLst/>
+          </a:prstGeom>
+          <a:solidFill>
+            <a:srgbClr val="F8FAFC"/>
+          </a:solidFill>
+          <a:ln w="19050">
+            <a:solidFill>
+              <a:srgbClr val="CBD5E1"/>
+            </a:solidFill>
+          </a:ln>
+        </p:spPr>
+        <p:style>
+          <a:lnRef idx="1">
+            <a:schemeClr val="accent1"/>
+          </a:lnRef>
+          <a:fillRef idx="3">
+            <a:schemeClr val="accent1"/>
+          </a:fillRef>
+          <a:effectRef idx="2">
+            <a:schemeClr val="accent1"/>
+          </a:effectRef>
+          <a:fontRef idx="minor">
+            <a:schemeClr val="lt1"/>
+          </a:fontRef>
+        </p:style>
+        <p:txBody>
+          <a:bodyPr rtlCol="0" anchor="ctr" wrap="square"/>
+          <a:lstStyle/>
+          <a:p>
+            <a:pPr algn="r" rtl="1"/>
+            <a:r>
+              <a:rPr sz="1900" b="1" lang="ar-SA" rtl="1">
+                <a:solidFill>
+                  <a:srgbClr val="0F2B5C"/>
+                </a:solidFill>
+                <a:latin typeface="Arial"/>
+              </a:rPr>
+              <a:t>اختبارات اشتقاق المفاتيح</a:t>
+            </a:r>
+          </a:p>
+          <a:p>
+            <a:pPr algn="r" rtl="0">
+              <a:spcBef>
+                <a:spcPts val="300"/>
+              </a:spcBef>
             </a:pPr>
             <a:r>
-              <a:t>• 2. EcdhEngineTest.kt (8/8 ناجح): إثبات توليد مفاتيح NIST P-256، وتطابق السر المشترك للطرفين، واستيراد وتصدير X.509.</a:t>
-            </a:r>
-          </a:p>
-          <a:p>
-            <a:pPr>
+              <a:rPr sz="1300" b="1" lang="en-US" rtl="0">
+                <a:solidFill>
+                  <a:srgbClr val="059669"/>
+                </a:solidFill>
+                <a:latin typeface="Consolas"/>
+              </a:rPr>
+              <a:t>[KeyDerivationTest: 8/8 Passed]</a:t>
+            </a:r>
+          </a:p>
+          <a:p>
+            <a:pPr algn="r" rtl="1">
               <a:spcBef>
-                <a:spcPts val="1200"/>
+                <a:spcPts val="600"/>
               </a:spcBef>
-              <a:defRPr sz="1700" b="1">
+            </a:pPr>
+            <a:r>
+              <a:rPr sz="1500" b="0" lang="ar-SA" rtl="1">
                 <a:solidFill>
                   <a:srgbClr val="0F172A"/>
                 </a:solidFill>
                 <a:latin typeface="Arial"/>
-              </a:defRPr>
+              </a:rPr>
+              <a:t>إثبات مطابقة دالة اشتقاق المفاتيح لنواقل الاختبار القياسية الصادرة عن المعيار الدولي.</a:t>
+            </a:r>
+          </a:p>
+        </p:txBody>
+      </p:sp>
+      <p:sp>
+        <p:nvSpPr>
+          <p:cNvPr id="12" name="Rounded Rectangle 11"/>
+          <p:cNvSpPr/>
+          <p:nvPr/>
+        </p:nvSpPr>
+        <p:spPr>
+          <a:xfrm>
+            <a:off x="822960" y="3566160"/>
+            <a:ext cx="5120640" cy="1828800"/>
+          </a:xfrm>
+          <a:prstGeom prst="roundRect">
+            <a:avLst/>
+          </a:prstGeom>
+          <a:solidFill>
+            <a:srgbClr val="F8FAFC"/>
+          </a:solidFill>
+          <a:ln w="19050">
+            <a:solidFill>
+              <a:srgbClr val="CBD5E1"/>
+            </a:solidFill>
+          </a:ln>
+        </p:spPr>
+        <p:style>
+          <a:lnRef idx="1">
+            <a:schemeClr val="accent1"/>
+          </a:lnRef>
+          <a:fillRef idx="3">
+            <a:schemeClr val="accent1"/>
+          </a:fillRef>
+          <a:effectRef idx="2">
+            <a:schemeClr val="accent1"/>
+          </a:effectRef>
+          <a:fontRef idx="minor">
+            <a:schemeClr val="lt1"/>
+          </a:fontRef>
+        </p:style>
+        <p:txBody>
+          <a:bodyPr rtlCol="0" anchor="ctr" wrap="square"/>
+          <a:lstStyle/>
+          <a:p>
+            <a:pPr algn="r" rtl="1"/>
+            <a:r>
+              <a:rPr sz="1900" b="1" lang="ar-SA" rtl="1">
+                <a:solidFill>
+                  <a:srgbClr val="0F2B5C"/>
+                </a:solidFill>
+                <a:latin typeface="Arial"/>
+              </a:rPr>
+              <a:t>اختبارات تكامل البروتوكول</a:t>
+            </a:r>
+          </a:p>
+          <a:p>
+            <a:pPr algn="r" rtl="0">
+              <a:spcBef>
+                <a:spcPts val="300"/>
+              </a:spcBef>
             </a:pPr>
             <a:r>
-              <a:t>• 3. KeyDerivationTest.kt (8/8 ناجح): إثبات مطابقة دالة HKDF-SHA256 لنواقل الاختبار القياسية المنصوص عليها في RFC 5869.</a:t>
-            </a:r>
-          </a:p>
-          <a:p>
-            <a:pPr>
+              <a:rPr sz="1300" b="1" lang="en-US" rtl="0">
+                <a:solidFill>
+                  <a:srgbClr val="059669"/>
+                </a:solidFill>
+                <a:latin typeface="Consolas"/>
+              </a:rPr>
+              <a:t>[CryptoEngineTest: 7/7 Passed]</a:t>
+            </a:r>
+          </a:p>
+          <a:p>
+            <a:pPr algn="r" rtl="1">
               <a:spcBef>
-                <a:spcPts val="1200"/>
+                <a:spcPts val="600"/>
               </a:spcBef>
-              <a:defRPr sz="1700" b="1">
+            </a:pPr>
+            <a:r>
+              <a:rPr sz="1500" b="0" lang="ar-SA" rtl="1">
                 <a:solidFill>
                   <a:srgbClr val="0F172A"/>
                 </a:solidFill>
                 <a:latin typeface="Arial"/>
-              </a:defRPr>
-            </a:pPr>
-            <a:r>
-              <a:t>• 4. CryptoEngineTest.kt (7/7 ناجح): إثبات تكامل بروتوكول الجلسات المشفرة وحماية الرسائل من التعديل.</a:t>
-            </a:r>
-          </a:p>
-          <a:p>
-            <a:pPr>
-              <a:spcBef>
-                <a:spcPts val="1200"/>
-              </a:spcBef>
-              <a:defRPr sz="1700" b="1">
-                <a:solidFill>
-                  <a:srgbClr val="0F172A"/>
-                </a:solidFill>
-                <a:latin typeface="Arial"/>
-              </a:defRPr>
-            </a:pPr>
-            <a:r>
-              <a:t>• النتيجة الأكاديمية الإجمالية: 33 اختبار وحدة آلي ناجح بنسبة 100% يثبت خلو الكود من الأخطاء المنطقية والرياضية.</a:t>
+              </a:rPr>
+              <a:t>إثبات تكامل بروتوكول الجلسات المشفرة وحماية الرسائل المتسلسلة من التعديل.</a:t>
+            </a:r>
+          </a:p>
+        </p:txBody>
+      </p:sp>
+      <p:sp>
+        <p:nvSpPr>
+          <p:cNvPr id="13" name="Rounded Rectangle 12"/>
+          <p:cNvSpPr/>
+          <p:nvPr/>
+        </p:nvSpPr>
+        <p:spPr>
+          <a:xfrm>
+            <a:off x="822960" y="5623560"/>
+            <a:ext cx="10515600" cy="594360"/>
+          </a:xfrm>
+          <a:prstGeom prst="roundRect">
+            <a:avLst/>
+          </a:prstGeom>
+          <a:solidFill>
+            <a:srgbClr val="F8FAFC"/>
+          </a:solidFill>
+          <a:ln w="12700">
+            <a:solidFill>
+              <a:srgbClr val="CBD5E1"/>
+            </a:solidFill>
+          </a:ln>
+        </p:spPr>
+        <p:style>
+          <a:lnRef idx="1">
+            <a:schemeClr val="accent1"/>
+          </a:lnRef>
+          <a:fillRef idx="3">
+            <a:schemeClr val="accent1"/>
+          </a:fillRef>
+          <a:effectRef idx="2">
+            <a:schemeClr val="accent1"/>
+          </a:effectRef>
+          <a:fontRef idx="minor">
+            <a:schemeClr val="lt1"/>
+          </a:fontRef>
+        </p:style>
+        <p:txBody>
+          <a:bodyPr rtlCol="0" anchor="ctr"/>
+          <a:lstStyle/>
+          <a:p>
+            <a:pPr algn="r" rtl="1"/>
+            <a:r>
+              <a:rPr sz="1200" b="1" lang="ar-SA" rtl="1">
+                <a:solidFill>
+                  <a:srgbClr val="0F2B5C"/>
+                </a:solidFill>
+                <a:latin typeface="Arial"/>
+              </a:rPr>
+              <a:t>المكون البرمجي: حزم الاختبارات الآلية المنفذة بنجاح تام 100% عبر أداة البناء  |  </a:t>
+            </a:r>
+            <a:r>
+              <a:rPr sz="1200" b="1" lang="en-US" rtl="0">
+                <a:solidFill>
+                  <a:srgbClr val="1E40AF"/>
+                </a:solidFill>
+                <a:latin typeface="Consolas"/>
+              </a:rPr>
+              <a:t>app/src/test/java/com/example/network/</a:t>
             </a:r>
           </a:p>
         </p:txBody>
@@ -5959,13 +6356,13 @@
         <p:spPr>
           <a:xfrm>
             <a:off x="0" y="0"/>
-            <a:ext cx="12191695" cy="91440"/>
+            <a:ext cx="12191695" cy="109728"/>
           </a:xfrm>
           <a:prstGeom prst="rect">
             <a:avLst/>
           </a:prstGeom>
           <a:solidFill>
-            <a:srgbClr val="1E40AF"/>
+            <a:srgbClr val="0F2B5C"/>
           </a:solidFill>
           <a:ln>
             <a:noFill/>
@@ -6001,44 +6398,8 @@
         </p:nvSpPr>
         <p:spPr>
           <a:xfrm>
-            <a:off x="822960" y="228600"/>
-            <a:ext cx="7772400" cy="320040"/>
-          </a:xfrm>
-          <a:prstGeom prst="rect">
-            <a:avLst/>
-          </a:prstGeom>
-          <a:noFill/>
-        </p:spPr>
-        <p:txBody>
-          <a:bodyPr wrap="square">
-            <a:spAutoFit/>
-          </a:bodyPr>
-          <a:lstStyle/>
-          <a:p>
-            <a:pPr>
-              <a:defRPr sz="1300" b="1">
-                <a:solidFill>
-                  <a:srgbClr val="1E40AF"/>
-                </a:solidFill>
-                <a:latin typeface="Arial"/>
-              </a:defRPr>
-            </a:pPr>
-            <a:r>
-              <a:t>LOCAL CONTACT P2P  |  النزاهة الأكاديمية والحدود الأمنية</a:t>
-            </a:r>
-          </a:p>
-        </p:txBody>
-      </p:sp>
-      <p:sp>
-        <p:nvSpPr>
-          <p:cNvPr id="4" name="TextBox 3"/>
-          <p:cNvSpPr txBox="1"/>
-          <p:nvPr/>
-        </p:nvSpPr>
-        <p:spPr>
-          <a:xfrm>
-            <a:off x="10241280" y="6309360"/>
-            <a:ext cx="1188720" cy="365760"/>
+            <a:off x="3200400" y="228600"/>
+            <a:ext cx="8138160" cy="320040"/>
           </a:xfrm>
           <a:prstGeom prst="rect">
             <a:avLst/>
@@ -6051,16 +6412,50 @@
           </a:bodyPr>
           <a:lstStyle/>
           <a:p>
-            <a:pPr algn="r">
-              <a:defRPr sz="1400" b="1">
-                <a:solidFill>
-                  <a:srgbClr val="0F2B5C"/>
-                </a:solidFill>
-                <a:latin typeface="Arial"/>
-              </a:defRPr>
-            </a:pPr>
-            <a:r>
-              <a:t>12 / 12</a:t>
+            <a:pPr algn="r" rtl="1"/>
+            <a:r>
+              <a:rPr sz="1300" b="1" lang="ar-SA" rtl="1">
+                <a:solidFill>
+                  <a:srgbClr val="1E40AF"/>
+                </a:solidFill>
+                <a:latin typeface="Arial"/>
+              </a:rPr>
+              <a:t>مشروع الاتصال المحلي المباشر  •  النزاهة الأكاديمية والحدود</a:t>
+            </a:r>
+          </a:p>
+        </p:txBody>
+      </p:sp>
+      <p:sp>
+        <p:nvSpPr>
+          <p:cNvPr id="4" name="TextBox 3"/>
+          <p:cNvSpPr txBox="1"/>
+          <p:nvPr/>
+        </p:nvSpPr>
+        <p:spPr>
+          <a:xfrm>
+            <a:off x="822960" y="228600"/>
+            <a:ext cx="1828800" cy="320040"/>
+          </a:xfrm>
+          <a:prstGeom prst="rect">
+            <a:avLst/>
+          </a:prstGeom>
+          <a:noFill/>
+        </p:spPr>
+        <p:txBody>
+          <a:bodyPr wrap="none">
+            <a:spAutoFit/>
+          </a:bodyPr>
+          <a:lstStyle/>
+          <a:p>
+            <a:pPr algn="l" rtl="0"/>
+            <a:r>
+              <a:rPr sz="1200" b="1" lang="en-US" rtl="0">
+                <a:solidFill>
+                  <a:srgbClr val="475569"/>
+                </a:solidFill>
+                <a:latin typeface="Consolas"/>
+              </a:rPr>
+              <a:t>Slide 12 / 12</a:t>
             </a:r>
           </a:p>
         </p:txBody>
@@ -6073,8 +6468,8 @@
         </p:nvSpPr>
         <p:spPr>
           <a:xfrm>
-            <a:off x="822960" y="594360"/>
-            <a:ext cx="8961120" cy="685800"/>
+            <a:off x="4023360" y="566928"/>
+            <a:ext cx="7315200" cy="685800"/>
           </a:xfrm>
           <a:prstGeom prst="rect">
             <a:avLst/>
@@ -6082,21 +6477,20 @@
           <a:noFill/>
         </p:spPr>
         <p:txBody>
-          <a:bodyPr wrap="square">
+          <a:bodyPr wrap="none">
             <a:spAutoFit/>
           </a:bodyPr>
           <a:lstStyle/>
           <a:p>
-            <a:pPr>
-              <a:defRPr sz="2800" b="1">
+            <a:pPr algn="r" rtl="1"/>
+            <a:r>
+              <a:rPr sz="3000" b="1" lang="ar-SA" rtl="1">
                 <a:solidFill>
                   <a:srgbClr val="0F2B5C"/>
                 </a:solidFill>
                 <a:latin typeface="Arial"/>
-              </a:defRPr>
-            </a:pPr>
-            <a:r>
-              <a:t>الحدود الأمنية الحالية وما لم يُنفّذ بعد (Scientific Integrity)</a:t>
+              </a:rPr>
+              <a:t>الحدود الأمنية الحالية وما لم يُنفّذ بعد</a:t>
             </a:r>
           </a:p>
         </p:txBody>
@@ -6109,8 +6503,8 @@
         </p:nvSpPr>
         <p:spPr>
           <a:xfrm>
-            <a:off x="8961120" y="621792"/>
-            <a:ext cx="2377440" cy="438912"/>
+            <a:off x="822960" y="621792"/>
+            <a:ext cx="3017520" cy="502920"/>
           </a:xfrm>
           <a:prstGeom prst="roundRect">
             <a:avLst/>
@@ -6142,16 +6536,15 @@
           <a:bodyPr rtlCol="0" anchor="ctr"/>
           <a:lstStyle/>
           <a:p>
-            <a:pPr algn="ctr">
-              <a:defRPr sz="1200" b="1">
+            <a:pPr algn="ctr" rtl="0"/>
+            <a:r>
+              <a:rPr sz="1400" b="1" lang="en-US" rtl="0">
                 <a:solidFill>
                   <a:srgbClr val="D97706"/>
                 </a:solidFill>
                 <a:latin typeface="Consolas"/>
-              </a:defRPr>
-            </a:pPr>
-            <a:r>
-              <a:t>HONEST BOUNDARIES</a:t>
+              </a:rPr>
+              <a:t>Honest Academic Boundaries</a:t>
             </a:r>
           </a:p>
         </p:txBody>
@@ -6164,7 +6557,7 @@
         </p:nvSpPr>
         <p:spPr>
           <a:xfrm>
-            <a:off x="822960" y="1353312"/>
+            <a:off x="822960" y="1325880"/>
             <a:ext cx="10515600" cy="18288"/>
           </a:xfrm>
           <a:prstGeom prst="rect">
@@ -6207,8 +6600,8 @@
         </p:nvSpPr>
         <p:spPr>
           <a:xfrm>
-            <a:off x="822960" y="6309360"/>
-            <a:ext cx="7315200" cy="320040"/>
+            <a:off x="822960" y="6355080"/>
+            <a:ext cx="10515600" cy="320040"/>
           </a:xfrm>
           <a:prstGeom prst="rect">
             <a:avLst/>
@@ -6221,16 +6614,15 @@
           </a:bodyPr>
           <a:lstStyle/>
           <a:p>
-            <a:pPr>
-              <a:defRPr sz="1100">
+            <a:pPr algn="r" rtl="1"/>
+            <a:r>
+              <a:rPr sz="1050" b="0" lang="ar-SA" rtl="1">
                 <a:solidFill>
                   <a:srgbClr val="475569"/>
                 </a:solidFill>
                 <a:latin typeface="Arial"/>
-              </a:defRPr>
-            </a:pPr>
-            <a:r>
-              <a:t>مشروع تخرج LOCAL CONTACT — مناقشة أكاديمية محكمة</a:t>
+              </a:rPr>
+              <a:t>مناقشة مشروع التخرج الأكاديمية — نظام اتصال محلي مستقل دون خادم وسيط</a:t>
             </a:r>
           </a:p>
         </p:txBody>
@@ -6243,8 +6635,8 @@
         </p:nvSpPr>
         <p:spPr>
           <a:xfrm>
-            <a:off x="822960" y="1645920"/>
-            <a:ext cx="5120640" cy="4389120"/>
+            <a:off x="6217920" y="1554480"/>
+            <a:ext cx="5120640" cy="1828800"/>
           </a:xfrm>
           <a:prstGeom prst="roundRect">
             <a:avLst/>
@@ -6254,7 +6646,7 @@
           </a:solidFill>
           <a:ln w="19050">
             <a:solidFill>
-              <a:srgbClr val="DC2626"/>
+              <a:srgbClr val="D97706"/>
             </a:solidFill>
           </a:ln>
         </p:spPr>
@@ -6276,80 +6668,47 @@
           <a:bodyPr rtlCol="0" anchor="ctr" wrap="square"/>
           <a:lstStyle/>
           <a:p>
-            <a:pPr algn="ctr">
-              <a:defRPr sz="2100" b="1">
-                <a:solidFill>
-                  <a:srgbClr val="DC2626"/>
-                </a:solidFill>
-                <a:latin typeface="Arial"/>
-              </a:defRPr>
+            <a:pPr algn="r" rtl="1"/>
+            <a:r>
+              <a:rPr sz="1900" b="1" lang="ar-SA" rtl="1">
+                <a:solidFill>
+                  <a:srgbClr val="0F2B5C"/>
+                </a:solidFill>
+                <a:latin typeface="Arial"/>
+              </a:rPr>
+              <a:t>التحقق البصري الشفهي</a:t>
+            </a:r>
+          </a:p>
+          <a:p>
+            <a:pPr algn="r" rtl="0">
+              <a:spcBef>
+                <a:spcPts val="300"/>
+              </a:spcBef>
             </a:pPr>
             <a:r>
-              <a:t>⚠️ قيود أمنية موثقة كفجوات بأمانة علمية:</a:t>
-            </a:r>
-          </a:p>
-          <a:p>
-            <a:pPr>
+              <a:rPr sz="1300" b="1" lang="en-US" rtl="0">
+                <a:solidFill>
+                  <a:srgbClr val="D97706"/>
+                </a:solidFill>
+                <a:latin typeface="Consolas"/>
+              </a:rPr>
+              <a:t>[Proposed: SAS / QR Code Verification]</a:t>
+            </a:r>
+          </a:p>
+          <a:p>
+            <a:pPr algn="r" rtl="1">
               <a:spcBef>
-                <a:spcPts val="1000"/>
+                <a:spcPts val="600"/>
               </a:spcBef>
-              <a:defRPr sz="1600" b="1">
+            </a:pPr>
+            <a:r>
+              <a:rPr sz="1500" b="0" lang="ar-SA" rtl="1">
                 <a:solidFill>
                   <a:srgbClr val="0F172A"/>
                 </a:solidFill>
                 <a:latin typeface="Arial"/>
-              </a:defRPr>
-            </a:pPr>
-            <a:r>
-              <a:t>• غياب التحقق اليدوي البصري (SAS): نموذج TOFU يحمي بعد أول اتصال، لكن أول اتصال يظل عرضة لـ MITM نشط إذا لم تتم مقارنة البصمة شفهياً.</a:t>
-            </a:r>
-          </a:p>
-          <a:p>
-            <a:pPr>
-              <a:spcBef>
-                <a:spcPts val="1000"/>
-              </a:spcBef>
-              <a:defRPr sz="1600" b="1">
-                <a:solidFill>
-                  <a:srgbClr val="0F172A"/>
-                </a:solidFill>
-                <a:latin typeface="Arial"/>
-              </a:defRPr>
-            </a:pPr>
-            <a:r>
-              <a:t>• غياب حماية الـ Replay الكاملة على مستوى الحزم: يوجد Nonce فريد يمنع فك التشفير، لكن لا توجد نافذة تسلسل حزم صارمة (Packet Sliding Window).</a:t>
-            </a:r>
-          </a:p>
-          <a:p>
-            <a:pPr>
-              <a:spcBef>
-                <a:spcPts val="1000"/>
-              </a:spcBef>
-              <a:defRPr sz="1600" b="1">
-                <a:solidFill>
-                  <a:srgbClr val="0F172A"/>
-                </a:solidFill>
-                <a:latin typeface="Arial"/>
-              </a:defRPr>
-            </a:pPr>
-            <a:r>
-              <a:t>• عدم فحص SHA-256 للملف كاملاً بعد الاستلام: كتل الملفات مشفرة ومصادقة، لكن ينقص فحص Hash الملف النهائي.</a:t>
-            </a:r>
-          </a:p>
-          <a:p>
-            <a:pPr>
-              <a:spcBef>
-                <a:spcPts val="1000"/>
-              </a:spcBef>
-              <a:defRPr sz="1600" b="1">
-                <a:solidFill>
-                  <a:srgbClr val="0F172A"/>
-                </a:solidFill>
-                <a:latin typeface="Arial"/>
-              </a:defRPr>
-            </a:pPr>
-            <a:r>
-              <a:t>• مفتاح الغرف الجماعية: المحادثات الجماعية لا تزال تعتمد على المفتاح المشترك وتفتقر لـ Group Key Exchange.</a:t>
+              </a:rPr>
+              <a:t>نموذج TOFU يحمي الاتصال بعد أول لقاء، لكن أول اتصال يظل بحاجة لمقارنة بصرية للبصمة.</a:t>
             </a:r>
           </a:p>
         </p:txBody>
@@ -6362,8 +6721,180 @@
         </p:nvSpPr>
         <p:spPr>
           <a:xfrm>
-            <a:off x="6217920" y="1645920"/>
-            <a:ext cx="5120640" cy="4389120"/>
+            <a:off x="822960" y="1554480"/>
+            <a:ext cx="5120640" cy="1828800"/>
+          </a:xfrm>
+          <a:prstGeom prst="roundRect">
+            <a:avLst/>
+          </a:prstGeom>
+          <a:solidFill>
+            <a:srgbClr val="F8FAFC"/>
+          </a:solidFill>
+          <a:ln w="19050">
+            <a:solidFill>
+              <a:srgbClr val="D97706"/>
+            </a:solidFill>
+          </a:ln>
+        </p:spPr>
+        <p:style>
+          <a:lnRef idx="1">
+            <a:schemeClr val="accent1"/>
+          </a:lnRef>
+          <a:fillRef idx="3">
+            <a:schemeClr val="accent1"/>
+          </a:fillRef>
+          <a:effectRef idx="2">
+            <a:schemeClr val="accent1"/>
+          </a:effectRef>
+          <a:fontRef idx="minor">
+            <a:schemeClr val="lt1"/>
+          </a:fontRef>
+        </p:style>
+        <p:txBody>
+          <a:bodyPr rtlCol="0" anchor="ctr" wrap="square"/>
+          <a:lstStyle/>
+          <a:p>
+            <a:pPr algn="r" rtl="1"/>
+            <a:r>
+              <a:rPr sz="1900" b="1" lang="ar-SA" rtl="1">
+                <a:solidFill>
+                  <a:srgbClr val="0F2B5C"/>
+                </a:solidFill>
+                <a:latin typeface="Arial"/>
+              </a:rPr>
+              <a:t>تجزئة الملف الكامل النهائي</a:t>
+            </a:r>
+          </a:p>
+          <a:p>
+            <a:pPr algn="r" rtl="0">
+              <a:spcBef>
+                <a:spcPts val="300"/>
+              </a:spcBef>
+            </a:pPr>
+            <a:r>
+              <a:rPr sz="1300" b="1" lang="en-US" rtl="0">
+                <a:solidFill>
+                  <a:srgbClr val="D97706"/>
+                </a:solidFill>
+                <a:latin typeface="Consolas"/>
+              </a:rPr>
+              <a:t>[Proposed: Full File SHA-256 Checksum]</a:t>
+            </a:r>
+          </a:p>
+          <a:p>
+            <a:pPr algn="r" rtl="1">
+              <a:spcBef>
+                <a:spcPts val="600"/>
+              </a:spcBef>
+            </a:pPr>
+            <a:r>
+              <a:rPr sz="1500" b="0" lang="ar-SA" rtl="1">
+                <a:solidFill>
+                  <a:srgbClr val="0F172A"/>
+                </a:solidFill>
+                <a:latin typeface="Arial"/>
+              </a:rPr>
+              <a:t>كتل الملفات مشفرة ومصادقة أثناء النقل، لكن تنقص مقارنة الـ Hash للملف النهائي.</a:t>
+            </a:r>
+          </a:p>
+        </p:txBody>
+      </p:sp>
+      <p:sp>
+        <p:nvSpPr>
+          <p:cNvPr id="11" name="Rounded Rectangle 10"/>
+          <p:cNvSpPr/>
+          <p:nvPr/>
+        </p:nvSpPr>
+        <p:spPr>
+          <a:xfrm>
+            <a:off x="6217920" y="3566160"/>
+            <a:ext cx="5120640" cy="1828800"/>
+          </a:xfrm>
+          <a:prstGeom prst="roundRect">
+            <a:avLst/>
+          </a:prstGeom>
+          <a:solidFill>
+            <a:srgbClr val="F8FAFC"/>
+          </a:solidFill>
+          <a:ln w="19050">
+            <a:solidFill>
+              <a:srgbClr val="D97706"/>
+            </a:solidFill>
+          </a:ln>
+        </p:spPr>
+        <p:style>
+          <a:lnRef idx="1">
+            <a:schemeClr val="accent1"/>
+          </a:lnRef>
+          <a:fillRef idx="3">
+            <a:schemeClr val="accent1"/>
+          </a:fillRef>
+          <a:effectRef idx="2">
+            <a:schemeClr val="accent1"/>
+          </a:effectRef>
+          <a:fontRef idx="minor">
+            <a:schemeClr val="lt1"/>
+          </a:fontRef>
+        </p:style>
+        <p:txBody>
+          <a:bodyPr rtlCol="0" anchor="ctr" wrap="square"/>
+          <a:lstStyle/>
+          <a:p>
+            <a:pPr algn="r" rtl="1"/>
+            <a:r>
+              <a:rPr sz="1900" b="1" lang="ar-SA" rtl="1">
+                <a:solidFill>
+                  <a:srgbClr val="0F2B5C"/>
+                </a:solidFill>
+                <a:latin typeface="Arial"/>
+              </a:rPr>
+              <a:t>مفاتيح الغرف الجماعية</a:t>
+            </a:r>
+          </a:p>
+          <a:p>
+            <a:pPr algn="r" rtl="0">
+              <a:spcBef>
+                <a:spcPts val="300"/>
+              </a:spcBef>
+            </a:pPr>
+            <a:r>
+              <a:rPr sz="1300" b="1" lang="en-US" rtl="0">
+                <a:solidFill>
+                  <a:srgbClr val="D97706"/>
+                </a:solidFill>
+                <a:latin typeface="Consolas"/>
+              </a:rPr>
+              <a:t>[Proposed: Group Key Exchange]</a:t>
+            </a:r>
+          </a:p>
+          <a:p>
+            <a:pPr algn="r" rtl="1">
+              <a:spcBef>
+                <a:spcPts val="600"/>
+              </a:spcBef>
+            </a:pPr>
+            <a:r>
+              <a:rPr sz="1500" b="0" lang="ar-SA" rtl="1">
+                <a:solidFill>
+                  <a:srgbClr val="0F172A"/>
+                </a:solidFill>
+                <a:latin typeface="Arial"/>
+              </a:rPr>
+              <a:t>المحادثات الجماعية لا تزال تعتمد على المفتاح المشترك للتوافق وتفتقر لتبادل مفاتيح جماعي.</a:t>
+            </a:r>
+          </a:p>
+        </p:txBody>
+      </p:sp>
+      <p:sp>
+        <p:nvSpPr>
+          <p:cNvPr id="12" name="Rounded Rectangle 11"/>
+          <p:cNvSpPr/>
+          <p:nvPr/>
+        </p:nvSpPr>
+        <p:spPr>
+          <a:xfrm>
+            <a:off x="822960" y="3566160"/>
+            <a:ext cx="5120640" cy="1828800"/>
           </a:xfrm>
           <a:prstGeom prst="roundRect">
             <a:avLst/>
@@ -6395,80 +6926,110 @@
           <a:bodyPr rtlCol="0" anchor="ctr" wrap="square"/>
           <a:lstStyle/>
           <a:p>
-            <a:pPr algn="ctr">
-              <a:defRPr sz="2100" b="1">
+            <a:pPr algn="r" rtl="1"/>
+            <a:r>
+              <a:rPr sz="1900" b="1" lang="ar-SA" rtl="1">
+                <a:solidFill>
+                  <a:srgbClr val="0F2B5C"/>
+                </a:solidFill>
+                <a:latin typeface="Arial"/>
+              </a:rPr>
+              <a:t>الخلاصة الهندسية والنتيجة</a:t>
+            </a:r>
+          </a:p>
+          <a:p>
+            <a:pPr algn="r" rtl="0">
+              <a:spcBef>
+                <a:spcPts val="300"/>
+              </a:spcBef>
+            </a:pPr>
+            <a:r>
+              <a:rPr sz="1300" b="1" lang="en-US" rtl="0">
                 <a:solidFill>
                   <a:srgbClr val="059669"/>
                 </a:solidFill>
-                <a:latin typeface="Arial"/>
-              </a:defRPr>
+                <a:latin typeface="Consolas"/>
+              </a:rPr>
+              <a:t>[Enterprise Security Transformation]</a:t>
+            </a:r>
+          </a:p>
+          <a:p>
+            <a:pPr algn="r" rtl="1">
+              <a:spcBef>
+                <a:spcPts val="600"/>
+              </a:spcBef>
             </a:pPr>
             <a:r>
-              <a:t>🚀 خارطة الطريق الأمنية والخلاصة:</a:t>
-            </a:r>
-          </a:p>
-          <a:p>
-            <a:pPr>
-              <a:spcBef>
-                <a:spcPts val="1000"/>
-              </a:spcBef>
-              <a:defRPr sz="1600" b="1">
+              <a:rPr sz="1500" b="0" lang="ar-SA" rtl="1">
                 <a:solidFill>
                   <a:srgbClr val="0F172A"/>
                 </a:solidFill>
                 <a:latin typeface="Arial"/>
-              </a:defRPr>
-            </a:pPr>
-            <a:r>
-              <a:t>• 1. إضافة رمز الأمان المرئي (SAS / QR Code) لمصادقة أول اتصال وتفادي هجوم الرجل في المنتصف تماماً.</a:t>
-            </a:r>
-          </a:p>
-          <a:p>
-            <a:pPr>
-              <a:spcBef>
-                <a:spcPts val="1000"/>
-              </a:spcBef>
-              <a:defRPr sz="1600" b="1">
-                <a:solidFill>
-                  <a:srgbClr val="0F172A"/>
-                </a:solidFill>
-                <a:latin typeface="Arial"/>
-              </a:defRPr>
-            </a:pPr>
-            <a:r>
-              <a:t>• 2. تطبيق بروتوكول متقدم للمجموعات (Tree-based Group Key Exchange) لتأمين الغرف بمفاتيح جماعية ديناميكية.</a:t>
-            </a:r>
-          </a:p>
-          <a:p>
-            <a:pPr>
-              <a:spcBef>
-                <a:spcPts val="1000"/>
-              </a:spcBef>
-              <a:defRPr sz="1600" b="1">
-                <a:solidFill>
-                  <a:srgbClr val="0F172A"/>
-                </a:solidFill>
-                <a:latin typeface="Arial"/>
-              </a:defRPr>
-            </a:pPr>
-            <a:r>
-              <a:t>• 3. دمج التحقق النهائي من بصمة الملف الكامل SHA-256 قبل فتح الملف من التنزيلات.</a:t>
-            </a:r>
-          </a:p>
-          <a:p>
-            <a:pPr>
-              <a:spcBef>
-                <a:spcPts val="1000"/>
-              </a:spcBef>
-              <a:defRPr sz="1600" b="1">
-                <a:solidFill>
-                  <a:srgbClr val="0F172A"/>
-                </a:solidFill>
-                <a:latin typeface="Arial"/>
-              </a:defRPr>
-            </a:pPr>
-            <a:r>
-              <a:t>• الخلاصة: تحول المشروع من تطبيق بسيط بمفتاح مكشوف إلى نظام أمني رصين يطبق معايير التشفير العالمية بوضوح وشفافية.</a:t>
+              </a:rPr>
+              <a:t>انتقال نوعي للمشروع من تطبيق بسيط بمفتاح مكشوف إلى معمارية تشفير رصينة ومختبرة.</a:t>
+            </a:r>
+          </a:p>
+        </p:txBody>
+      </p:sp>
+      <p:sp>
+        <p:nvSpPr>
+          <p:cNvPr id="13" name="Rounded Rectangle 12"/>
+          <p:cNvSpPr/>
+          <p:nvPr/>
+        </p:nvSpPr>
+        <p:spPr>
+          <a:xfrm>
+            <a:off x="822960" y="5623560"/>
+            <a:ext cx="10515600" cy="594360"/>
+          </a:xfrm>
+          <a:prstGeom prst="roundRect">
+            <a:avLst/>
+          </a:prstGeom>
+          <a:solidFill>
+            <a:srgbClr val="F8FAFC"/>
+          </a:solidFill>
+          <a:ln w="12700">
+            <a:solidFill>
+              <a:srgbClr val="CBD5E1"/>
+            </a:solidFill>
+          </a:ln>
+        </p:spPr>
+        <p:style>
+          <a:lnRef idx="1">
+            <a:schemeClr val="accent1"/>
+          </a:lnRef>
+          <a:fillRef idx="3">
+            <a:schemeClr val="accent1"/>
+          </a:fillRef>
+          <a:effectRef idx="2">
+            <a:schemeClr val="accent1"/>
+          </a:effectRef>
+          <a:fontRef idx="minor">
+            <a:schemeClr val="lt1"/>
+          </a:fontRef>
+        </p:style>
+        <p:txBody>
+          <a:bodyPr rtlCol="0" anchor="ctr"/>
+          <a:lstStyle/>
+          <a:p>
+            <a:pPr algn="r" rtl="1"/>
+            <a:r>
+              <a:rPr sz="1200" b="1" lang="ar-SA" rtl="1">
+                <a:solidFill>
+                  <a:srgbClr val="0F2B5C"/>
+                </a:solidFill>
+                <a:latin typeface="Arial"/>
+              </a:rPr>
+              <a:t>المكون البرمجي: توثيق القيود والحدود الأمنية في مصفوفة التتبع الرسمية  |  </a:t>
+            </a:r>
+            <a:r>
+              <a:rPr sz="1200" b="1" lang="en-US" rtl="0">
+                <a:solidFill>
+                  <a:srgbClr val="1E40AF"/>
+                </a:solidFill>
+                <a:latin typeface="Consolas"/>
+              </a:rPr>
+              <a:t>docs/TraceabilityMatrix.md</a:t>
             </a:r>
           </a:p>
         </p:txBody>
@@ -6500,13 +7061,13 @@
         <p:spPr>
           <a:xfrm>
             <a:off x="0" y="0"/>
-            <a:ext cx="12191695" cy="91440"/>
+            <a:ext cx="12191695" cy="109728"/>
           </a:xfrm>
           <a:prstGeom prst="rect">
             <a:avLst/>
           </a:prstGeom>
           <a:solidFill>
-            <a:srgbClr val="1E40AF"/>
+            <a:srgbClr val="0F2B5C"/>
           </a:solidFill>
           <a:ln>
             <a:noFill/>
@@ -6542,44 +7103,8 @@
         </p:nvSpPr>
         <p:spPr>
           <a:xfrm>
-            <a:off x="822960" y="228600"/>
-            <a:ext cx="7772400" cy="320040"/>
-          </a:xfrm>
-          <a:prstGeom prst="rect">
-            <a:avLst/>
-          </a:prstGeom>
-          <a:noFill/>
-        </p:spPr>
-        <p:txBody>
-          <a:bodyPr wrap="square">
-            <a:spAutoFit/>
-          </a:bodyPr>
-          <a:lstStyle/>
-          <a:p>
-            <a:pPr>
-              <a:defRPr sz="1300" b="1">
-                <a:solidFill>
-                  <a:srgbClr val="1E40AF"/>
-                </a:solidFill>
-                <a:latin typeface="Arial"/>
-              </a:defRPr>
-            </a:pPr>
-            <a:r>
-              <a:t>LOCAL CONTACT P2P  |  تشخيص الوضع الأمني السابق</a:t>
-            </a:r>
-          </a:p>
-        </p:txBody>
-      </p:sp>
-      <p:sp>
-        <p:nvSpPr>
-          <p:cNvPr id="4" name="TextBox 3"/>
-          <p:cNvSpPr txBox="1"/>
-          <p:nvPr/>
-        </p:nvSpPr>
-        <p:spPr>
-          <a:xfrm>
-            <a:off x="10241280" y="6309360"/>
-            <a:ext cx="1188720" cy="365760"/>
+            <a:off x="3200400" y="228600"/>
+            <a:ext cx="8138160" cy="320040"/>
           </a:xfrm>
           <a:prstGeom prst="rect">
             <a:avLst/>
@@ -6592,16 +7117,50 @@
           </a:bodyPr>
           <a:lstStyle/>
           <a:p>
-            <a:pPr algn="r">
-              <a:defRPr sz="1400" b="1">
-                <a:solidFill>
-                  <a:srgbClr val="0F2B5C"/>
-                </a:solidFill>
-                <a:latin typeface="Arial"/>
-              </a:defRPr>
-            </a:pPr>
-            <a:r>
-              <a:t>2 / 12</a:t>
+            <a:pPr algn="r" rtl="1"/>
+            <a:r>
+              <a:rPr sz="1300" b="1" lang="ar-SA" rtl="1">
+                <a:solidFill>
+                  <a:srgbClr val="1E40AF"/>
+                </a:solidFill>
+                <a:latin typeface="Arial"/>
+              </a:rPr>
+              <a:t>مشروع الاتصال المحلي المباشر  •  تشخيص الوضع السابق</a:t>
+            </a:r>
+          </a:p>
+        </p:txBody>
+      </p:sp>
+      <p:sp>
+        <p:nvSpPr>
+          <p:cNvPr id="4" name="TextBox 3"/>
+          <p:cNvSpPr txBox="1"/>
+          <p:nvPr/>
+        </p:nvSpPr>
+        <p:spPr>
+          <a:xfrm>
+            <a:off x="822960" y="228600"/>
+            <a:ext cx="1828800" cy="320040"/>
+          </a:xfrm>
+          <a:prstGeom prst="rect">
+            <a:avLst/>
+          </a:prstGeom>
+          <a:noFill/>
+        </p:spPr>
+        <p:txBody>
+          <a:bodyPr wrap="none">
+            <a:spAutoFit/>
+          </a:bodyPr>
+          <a:lstStyle/>
+          <a:p>
+            <a:pPr algn="l" rtl="0"/>
+            <a:r>
+              <a:rPr sz="1200" b="1" lang="en-US" rtl="0">
+                <a:solidFill>
+                  <a:srgbClr val="475569"/>
+                </a:solidFill>
+                <a:latin typeface="Consolas"/>
+              </a:rPr>
+              <a:t>Slide 2 / 12</a:t>
             </a:r>
           </a:p>
         </p:txBody>
@@ -6614,8 +7173,8 @@
         </p:nvSpPr>
         <p:spPr>
           <a:xfrm>
-            <a:off x="822960" y="594360"/>
-            <a:ext cx="8961120" cy="685800"/>
+            <a:off x="4023360" y="566928"/>
+            <a:ext cx="7315200" cy="685800"/>
           </a:xfrm>
           <a:prstGeom prst="rect">
             <a:avLst/>
@@ -6623,21 +7182,20 @@
           <a:noFill/>
         </p:spPr>
         <p:txBody>
-          <a:bodyPr wrap="square">
+          <a:bodyPr wrap="none">
             <a:spAutoFit/>
           </a:bodyPr>
           <a:lstStyle/>
           <a:p>
-            <a:pPr>
-              <a:defRPr sz="2800" b="1">
+            <a:pPr algn="r" rtl="1"/>
+            <a:r>
+              <a:rPr sz="3000" b="1" lang="ar-SA" rtl="1">
                 <a:solidFill>
                   <a:srgbClr val="0F2B5C"/>
                 </a:solidFill>
                 <a:latin typeface="Arial"/>
-              </a:defRPr>
-            </a:pPr>
-            <a:r>
-              <a:t>حالة التشفير قبل التحسين: مخاطر المفتاح الثابت المشترك</a:t>
+              </a:rPr>
+              <a:t>مخاطر المفتاح الثابت قبل التحسين الأمني</a:t>
             </a:r>
           </a:p>
         </p:txBody>
@@ -6650,8 +7208,8 @@
         </p:nvSpPr>
         <p:spPr>
           <a:xfrm>
-            <a:off x="8961120" y="621792"/>
-            <a:ext cx="2377440" cy="438912"/>
+            <a:off x="822960" y="621792"/>
+            <a:ext cx="3017520" cy="502920"/>
           </a:xfrm>
           <a:prstGeom prst="roundRect">
             <a:avLst/>
@@ -6683,16 +7241,15 @@
           <a:bodyPr rtlCol="0" anchor="ctr"/>
           <a:lstStyle/>
           <a:p>
-            <a:pPr algn="ctr">
-              <a:defRPr sz="1200" b="1">
+            <a:pPr algn="ctr" rtl="0"/>
+            <a:r>
+              <a:rPr sz="1400" b="1" lang="en-US" rtl="0">
                 <a:solidFill>
                   <a:srgbClr val="DC2626"/>
                 </a:solidFill>
                 <a:latin typeface="Consolas"/>
-              </a:defRPr>
-            </a:pPr>
-            <a:r>
-              <a:t>CRITICAL RISK</a:t>
+              </a:rPr>
+              <a:t>STATIC KEY VULNERABILITY</a:t>
             </a:r>
           </a:p>
         </p:txBody>
@@ -6705,7 +7262,7 @@
         </p:nvSpPr>
         <p:spPr>
           <a:xfrm>
-            <a:off x="822960" y="1353312"/>
+            <a:off x="822960" y="1325880"/>
             <a:ext cx="10515600" cy="18288"/>
           </a:xfrm>
           <a:prstGeom prst="rect">
@@ -6748,8 +7305,8 @@
         </p:nvSpPr>
         <p:spPr>
           <a:xfrm>
-            <a:off x="822960" y="6309360"/>
-            <a:ext cx="7315200" cy="320040"/>
+            <a:off x="822960" y="6355080"/>
+            <a:ext cx="10515600" cy="320040"/>
           </a:xfrm>
           <a:prstGeom prst="rect">
             <a:avLst/>
@@ -6762,16 +7319,15 @@
           </a:bodyPr>
           <a:lstStyle/>
           <a:p>
-            <a:pPr>
-              <a:defRPr sz="1100">
+            <a:pPr algn="r" rtl="1"/>
+            <a:r>
+              <a:rPr sz="1050" b="0" lang="ar-SA" rtl="1">
                 <a:solidFill>
                   <a:srgbClr val="475569"/>
                 </a:solidFill>
                 <a:latin typeface="Arial"/>
-              </a:defRPr>
-            </a:pPr>
-            <a:r>
-              <a:t>مشروع تخرج LOCAL CONTACT — مناقشة أكاديمية محكمة</a:t>
+              </a:rPr>
+              <a:t>مناقشة مشروع التخرج الأكاديمية — نظام اتصال محلي مستقل دون خادم وسيط</a:t>
             </a:r>
           </a:p>
         </p:txBody>
@@ -6784,8 +7340,8 @@
         </p:nvSpPr>
         <p:spPr>
           <a:xfrm>
-            <a:off x="822960" y="1645920"/>
-            <a:ext cx="5120640" cy="4389120"/>
+            <a:off x="6217920" y="1554480"/>
+            <a:ext cx="5120640" cy="1828800"/>
           </a:xfrm>
           <a:prstGeom prst="roundRect">
             <a:avLst/>
@@ -6817,80 +7373,47 @@
           <a:bodyPr rtlCol="0" anchor="ctr" wrap="square"/>
           <a:lstStyle/>
           <a:p>
-            <a:pPr algn="ctr">
-              <a:defRPr sz="2200" b="1">
+            <a:pPr algn="r" rtl="1"/>
+            <a:r>
+              <a:rPr sz="1900" b="1" lang="ar-SA" rtl="1">
+                <a:solidFill>
+                  <a:srgbClr val="0F2B5C"/>
+                </a:solidFill>
+                <a:latin typeface="Arial"/>
+              </a:rPr>
+              <a:t>المفتاح المشترك الموحد</a:t>
+            </a:r>
+          </a:p>
+          <a:p>
+            <a:pPr algn="r" rtl="0">
+              <a:spcBef>
+                <a:spcPts val="300"/>
+              </a:spcBef>
+            </a:pPr>
+            <a:r>
+              <a:rPr sz="1300" b="1" lang="en-US" rtl="0">
                 <a:solidFill>
                   <a:srgbClr val="DC2626"/>
                 </a:solidFill>
-                <a:latin typeface="Arial"/>
-              </a:defRPr>
+                <a:latin typeface="Consolas"/>
+              </a:rPr>
+              <a:t>[PBKDF2 Static Key]</a:t>
+            </a:r>
+          </a:p>
+          <a:p>
+            <a:pPr algn="r" rtl="1">
+              <a:spcBef>
+                <a:spcPts val="600"/>
+              </a:spcBef>
             </a:pPr>
             <a:r>
-              <a:t>⚠️ المشكلة الأمنية السابقة:</a:t>
-            </a:r>
-          </a:p>
-          <a:p>
-            <a:pPr>
-              <a:spcBef>
-                <a:spcPts val="1200"/>
-              </a:spcBef>
-              <a:defRPr sz="1700" b="1">
+              <a:rPr sz="1500" b="0" lang="ar-SA" rtl="1">
                 <a:solidFill>
                   <a:srgbClr val="0F172A"/>
                 </a:solidFill>
                 <a:latin typeface="Arial"/>
-              </a:defRPr>
-            </a:pPr>
-            <a:r>
-              <a:t>• مفتاح شبكي ثابت لجميع الأجهزة مشتق عبر PBKDF2 من كلمة مرور ثابتة داخل الكود.</a:t>
-            </a:r>
-          </a:p>
-          <a:p>
-            <a:pPr>
-              <a:spcBef>
-                <a:spcPts val="1200"/>
-              </a:spcBef>
-              <a:defRPr sz="1700" b="1">
-                <a:solidFill>
-                  <a:srgbClr val="0F172A"/>
-                </a:solidFill>
-                <a:latin typeface="Arial"/>
-              </a:defRPr>
-            </a:pPr>
-            <a:r>
-              <a:t>• غياب بروتوكول لتبادل المفاتيح الديناميكية بين طرفي الاتصال.</a:t>
-            </a:r>
-          </a:p>
-          <a:p>
-            <a:pPr>
-              <a:spcBef>
-                <a:spcPts val="1200"/>
-              </a:spcBef>
-              <a:defRPr sz="1700" b="1">
-                <a:solidFill>
-                  <a:srgbClr val="0F172A"/>
-                </a:solidFill>
-                <a:latin typeface="Arial"/>
-              </a:defRPr>
-            </a:pPr>
-            <a:r>
-              <a:t>• انعدام السرية المستقبلية (No Forward Secrecy)؛ كشف المفتاح يفضح الماضي بالكامل.</a:t>
-            </a:r>
-          </a:p>
-          <a:p>
-            <a:pPr>
-              <a:spcBef>
-                <a:spcPts val="1200"/>
-              </a:spcBef>
-              <a:defRPr sz="1700" b="1">
-                <a:solidFill>
-                  <a:srgbClr val="0F172A"/>
-                </a:solidFill>
-                <a:latin typeface="Arial"/>
-              </a:defRPr>
-            </a:pPr>
-            <a:r>
-              <a:t>• غياب الهوية الرقمية الموثقة للأجهزة على الشبكة.</a:t>
+              </a:rPr>
+              <a:t>اشتقاق مفتاح تشفير ثابت لجميع الأجهزة من عبارة مرور موحدة مدمجة بالكود المصدري.</a:t>
             </a:r>
           </a:p>
         </p:txBody>
@@ -6903,8 +7426,94 @@
         </p:nvSpPr>
         <p:spPr>
           <a:xfrm>
-            <a:off x="6217920" y="1645920"/>
-            <a:ext cx="5120640" cy="4389120"/>
+            <a:off x="822960" y="1554480"/>
+            <a:ext cx="5120640" cy="1828800"/>
+          </a:xfrm>
+          <a:prstGeom prst="roundRect">
+            <a:avLst/>
+          </a:prstGeom>
+          <a:solidFill>
+            <a:srgbClr val="F8FAFC"/>
+          </a:solidFill>
+          <a:ln w="19050">
+            <a:solidFill>
+              <a:srgbClr val="DC2626"/>
+            </a:solidFill>
+          </a:ln>
+        </p:spPr>
+        <p:style>
+          <a:lnRef idx="1">
+            <a:schemeClr val="accent1"/>
+          </a:lnRef>
+          <a:fillRef idx="3">
+            <a:schemeClr val="accent1"/>
+          </a:fillRef>
+          <a:effectRef idx="2">
+            <a:schemeClr val="accent1"/>
+          </a:effectRef>
+          <a:fontRef idx="minor">
+            <a:schemeClr val="lt1"/>
+          </a:fontRef>
+        </p:style>
+        <p:txBody>
+          <a:bodyPr rtlCol="0" anchor="ctr" wrap="square"/>
+          <a:lstStyle/>
+          <a:p>
+            <a:pPr algn="r" rtl="1"/>
+            <a:r>
+              <a:rPr sz="1900" b="1" lang="ar-SA" rtl="1">
+                <a:solidFill>
+                  <a:srgbClr val="0F2B5C"/>
+                </a:solidFill>
+                <a:latin typeface="Arial"/>
+              </a:rPr>
+              <a:t>انعدام السرية المستقبلية</a:t>
+            </a:r>
+          </a:p>
+          <a:p>
+            <a:pPr algn="r" rtl="0">
+              <a:spcBef>
+                <a:spcPts val="300"/>
+              </a:spcBef>
+            </a:pPr>
+            <a:r>
+              <a:rPr sz="1300" b="1" lang="en-US" rtl="0">
+                <a:solidFill>
+                  <a:srgbClr val="DC2626"/>
+                </a:solidFill>
+                <a:latin typeface="Consolas"/>
+              </a:rPr>
+              <a:t>[No Forward Secrecy]</a:t>
+            </a:r>
+          </a:p>
+          <a:p>
+            <a:pPr algn="r" rtl="1">
+              <a:spcBef>
+                <a:spcPts val="600"/>
+              </a:spcBef>
+            </a:pPr>
+            <a:r>
+              <a:rPr sz="1500" b="0" lang="ar-SA" rtl="1">
+                <a:solidFill>
+                  <a:srgbClr val="0F172A"/>
+                </a:solidFill>
+                <a:latin typeface="Arial"/>
+              </a:rPr>
+              <a:t>كشف المفتاح الثابت عبر الهندسة العكسية يؤدي لفك تشفير جميع المحادثات المسجلة سابقاً.</a:t>
+            </a:r>
+          </a:p>
+        </p:txBody>
+      </p:sp>
+      <p:sp>
+        <p:nvSpPr>
+          <p:cNvPr id="11" name="Rounded Rectangle 10"/>
+          <p:cNvSpPr/>
+          <p:nvPr/>
+        </p:nvSpPr>
+        <p:spPr>
+          <a:xfrm>
+            <a:off x="6217920" y="3566160"/>
+            <a:ext cx="5120640" cy="1828800"/>
           </a:xfrm>
           <a:prstGeom prst="roundRect">
             <a:avLst/>
@@ -6936,80 +7545,196 @@
           <a:bodyPr rtlCol="0" anchor="ctr" wrap="square"/>
           <a:lstStyle/>
           <a:p>
-            <a:pPr algn="ctr">
-              <a:defRPr sz="2200" b="1">
+            <a:pPr algn="r" rtl="1"/>
+            <a:r>
+              <a:rPr sz="1900" b="1" lang="ar-SA" rtl="1">
                 <a:solidFill>
                   <a:srgbClr val="0F2B5C"/>
                 </a:solidFill>
                 <a:latin typeface="Arial"/>
-              </a:defRPr>
+              </a:rPr>
+              <a:t>غياب تبادل المفاتيح</a:t>
+            </a:r>
+          </a:p>
+          <a:p>
+            <a:pPr algn="r" rtl="0">
+              <a:spcBef>
+                <a:spcPts val="300"/>
+              </a:spcBef>
             </a:pPr>
             <a:r>
-              <a:t>📂 الملف والمسؤولية في الكود:</a:t>
-            </a:r>
-          </a:p>
-          <a:p>
-            <a:pPr>
+              <a:rPr sz="1300" b="1" lang="en-US" rtl="0">
+                <a:solidFill>
+                  <a:srgbClr val="D97706"/>
+                </a:solidFill>
+                <a:latin typeface="Consolas"/>
+              </a:rPr>
+              <a:t>[No Dynamic Exchange]</a:t>
+            </a:r>
+          </a:p>
+          <a:p>
+            <a:pPr algn="r" rtl="1">
               <a:spcBef>
-                <a:spcPts val="800"/>
+                <a:spcPts val="600"/>
               </a:spcBef>
-              <a:defRPr sz="1400" b="1">
+            </a:pPr>
+            <a:r>
+              <a:rPr sz="1500" b="0" lang="ar-SA" rtl="1">
+                <a:solidFill>
+                  <a:srgbClr val="0F172A"/>
+                </a:solidFill>
+                <a:latin typeface="Arial"/>
+              </a:rPr>
+              <a:t>عدم وجود بروتوكول مصافحة ديناميكي لتوليد أسرار مشتركة مستقلة لكل محادثة.</a:t>
+            </a:r>
+          </a:p>
+        </p:txBody>
+      </p:sp>
+      <p:sp>
+        <p:nvSpPr>
+          <p:cNvPr id="12" name="Rounded Rectangle 11"/>
+          <p:cNvSpPr/>
+          <p:nvPr/>
+        </p:nvSpPr>
+        <p:spPr>
+          <a:xfrm>
+            <a:off x="822960" y="3566160"/>
+            <a:ext cx="5120640" cy="1828800"/>
+          </a:xfrm>
+          <a:prstGeom prst="roundRect">
+            <a:avLst/>
+          </a:prstGeom>
+          <a:solidFill>
+            <a:srgbClr val="F8FAFC"/>
+          </a:solidFill>
+          <a:ln w="19050">
+            <a:solidFill>
+              <a:srgbClr val="CBD5E1"/>
+            </a:solidFill>
+          </a:ln>
+        </p:spPr>
+        <p:style>
+          <a:lnRef idx="1">
+            <a:schemeClr val="accent1"/>
+          </a:lnRef>
+          <a:fillRef idx="3">
+            <a:schemeClr val="accent1"/>
+          </a:fillRef>
+          <a:effectRef idx="2">
+            <a:schemeClr val="accent1"/>
+          </a:effectRef>
+          <a:fontRef idx="minor">
+            <a:schemeClr val="lt1"/>
+          </a:fontRef>
+        </p:style>
+        <p:txBody>
+          <a:bodyPr rtlCol="0" anchor="ctr" wrap="square"/>
+          <a:lstStyle/>
+          <a:p>
+            <a:pPr algn="r" rtl="1"/>
+            <a:r>
+              <a:rPr sz="1900" b="1" lang="ar-SA" rtl="1">
+                <a:solidFill>
+                  <a:srgbClr val="0F2B5C"/>
+                </a:solidFill>
+                <a:latin typeface="Arial"/>
+              </a:rPr>
+              <a:t>غياب الهوية الرقمية</a:t>
+            </a:r>
+          </a:p>
+          <a:p>
+            <a:pPr algn="r" rtl="0">
+              <a:spcBef>
+                <a:spcPts val="300"/>
+              </a:spcBef>
+            </a:pPr>
+            <a:r>
+              <a:rPr sz="1300" b="1" lang="en-US" rtl="0">
+                <a:solidFill>
+                  <a:srgbClr val="D97706"/>
+                </a:solidFill>
+                <a:latin typeface="Consolas"/>
+              </a:rPr>
+              <a:t>[No Keystore Identity]</a:t>
+            </a:r>
+          </a:p>
+          <a:p>
+            <a:pPr algn="r" rtl="1">
+              <a:spcBef>
+                <a:spcPts val="600"/>
+              </a:spcBef>
+            </a:pPr>
+            <a:r>
+              <a:rPr sz="1500" b="0" lang="ar-SA" rtl="1">
+                <a:solidFill>
+                  <a:srgbClr val="0F172A"/>
+                </a:solidFill>
+                <a:latin typeface="Arial"/>
+              </a:rPr>
+              <a:t>اعتماد الأجهزة على معرفات عشوائية دون إثبات رقمي يمنع هجمات الانتحال والتنصت.</a:t>
+            </a:r>
+          </a:p>
+        </p:txBody>
+      </p:sp>
+      <p:sp>
+        <p:nvSpPr>
+          <p:cNvPr id="13" name="Rounded Rectangle 12"/>
+          <p:cNvSpPr/>
+          <p:nvPr/>
+        </p:nvSpPr>
+        <p:spPr>
+          <a:xfrm>
+            <a:off x="822960" y="5623560"/>
+            <a:ext cx="10515600" cy="594360"/>
+          </a:xfrm>
+          <a:prstGeom prst="roundRect">
+            <a:avLst/>
+          </a:prstGeom>
+          <a:solidFill>
+            <a:srgbClr val="F8FAFC"/>
+          </a:solidFill>
+          <a:ln w="12700">
+            <a:solidFill>
+              <a:srgbClr val="CBD5E1"/>
+            </a:solidFill>
+          </a:ln>
+        </p:spPr>
+        <p:style>
+          <a:lnRef idx="1">
+            <a:schemeClr val="accent1"/>
+          </a:lnRef>
+          <a:fillRef idx="3">
+            <a:schemeClr val="accent1"/>
+          </a:fillRef>
+          <a:effectRef idx="2">
+            <a:schemeClr val="accent1"/>
+          </a:effectRef>
+          <a:fontRef idx="minor">
+            <a:schemeClr val="lt1"/>
+          </a:fontRef>
+        </p:style>
+        <p:txBody>
+          <a:bodyPr rtlCol="0" anchor="ctr"/>
+          <a:lstStyle/>
+          <a:p>
+            <a:pPr algn="r" rtl="1"/>
+            <a:r>
+              <a:rPr sz="1200" b="1" lang="ar-SA" rtl="1">
+                <a:solidFill>
+                  <a:srgbClr val="0F2B5C"/>
+                </a:solidFill>
+                <a:latin typeface="Arial"/>
+              </a:rPr>
+              <a:t>المكون البرمجي: الملف السابق المسؤول عن الثغرة  |  </a:t>
+            </a:r>
+            <a:r>
+              <a:rPr sz="1200" b="1" lang="en-US" rtl="0">
                 <a:solidFill>
                   <a:srgbClr val="1E40AF"/>
                 </a:solidFill>
                 <a:latin typeface="Consolas"/>
-              </a:defRPr>
-            </a:pPr>
-            <a:r>
+              </a:rPr>
               <a:t>app/src/main/java/com/example/network/LocalCryptoEngine.kt</a:t>
-            </a:r>
-          </a:p>
-          <a:p>
-            <a:pPr>
-              <a:spcBef>
-                <a:spcPts val="1200"/>
-              </a:spcBef>
-              <a:defRPr sz="1700" b="1">
-                <a:solidFill>
-                  <a:srgbClr val="0F172A"/>
-                </a:solidFill>
-                <a:latin typeface="Arial"/>
-              </a:defRPr>
-            </a:pPr>
-            <a:r>
-              <a:t>• المسؤولية: كان يقوم بالتشفير وإدارة المفتاح الثابت داخلياً في نفس الكلاس.</a:t>
-            </a:r>
-          </a:p>
-          <a:p>
-            <a:pPr>
-              <a:spcBef>
-                <a:spcPts val="1200"/>
-              </a:spcBef>
-              <a:defRPr sz="1700" b="1">
-                <a:solidFill>
-                  <a:srgbClr val="0F172A"/>
-                </a:solidFill>
-                <a:latin typeface="Arial"/>
-              </a:defRPr>
-            </a:pPr>
-            <a:r>
-              <a:t>• الخلل المعماري: اقتران صلب (Tight Coupling) بين خوارزمية التشفير وتوليد المفتاح.</a:t>
-            </a:r>
-          </a:p>
-          <a:p>
-            <a:pPr>
-              <a:spcBef>
-                <a:spcPts val="1200"/>
-              </a:spcBef>
-              <a:defRPr sz="1700" b="1">
-                <a:solidFill>
-                  <a:srgbClr val="0F172A"/>
-                </a:solidFill>
-                <a:latin typeface="Arial"/>
-              </a:defRPr>
-            </a:pPr>
-            <a:r>
-              <a:t>• الأثر: كشف ملف APK بالهندسة العكسية يعرض كافة رسائل الشبكة للفك الفوري.</a:t>
             </a:r>
           </a:p>
         </p:txBody>
@@ -7041,13 +7766,13 @@
         <p:spPr>
           <a:xfrm>
             <a:off x="0" y="0"/>
-            <a:ext cx="12191695" cy="91440"/>
+            <a:ext cx="12191695" cy="109728"/>
           </a:xfrm>
           <a:prstGeom prst="rect">
             <a:avLst/>
           </a:prstGeom>
           <a:solidFill>
-            <a:srgbClr val="1E40AF"/>
+            <a:srgbClr val="0F2B5C"/>
           </a:solidFill>
           <a:ln>
             <a:noFill/>
@@ -7083,44 +7808,8 @@
         </p:nvSpPr>
         <p:spPr>
           <a:xfrm>
-            <a:off x="822960" y="228600"/>
-            <a:ext cx="7772400" cy="320040"/>
-          </a:xfrm>
-          <a:prstGeom prst="rect">
-            <a:avLst/>
-          </a:prstGeom>
-          <a:noFill/>
-        </p:spPr>
-        <p:txBody>
-          <a:bodyPr wrap="square">
-            <a:spAutoFit/>
-          </a:bodyPr>
-          <a:lstStyle/>
-          <a:p>
-            <a:pPr>
-              <a:defRPr sz="1300" b="1">
-                <a:solidFill>
-                  <a:srgbClr val="1E40AF"/>
-                </a:solidFill>
-                <a:latin typeface="Arial"/>
-              </a:defRPr>
-            </a:pPr>
-            <a:r>
-              <a:t>LOCAL CONTACT P2P  |  التشفير المتماثل المعتمد</a:t>
-            </a:r>
-          </a:p>
-        </p:txBody>
-      </p:sp>
-      <p:sp>
-        <p:nvSpPr>
-          <p:cNvPr id="4" name="TextBox 3"/>
-          <p:cNvSpPr txBox="1"/>
-          <p:nvPr/>
-        </p:nvSpPr>
-        <p:spPr>
-          <a:xfrm>
-            <a:off x="10241280" y="6309360"/>
-            <a:ext cx="1188720" cy="365760"/>
+            <a:off x="3200400" y="228600"/>
+            <a:ext cx="8138160" cy="320040"/>
           </a:xfrm>
           <a:prstGeom prst="rect">
             <a:avLst/>
@@ -7133,16 +7822,50 @@
           </a:bodyPr>
           <a:lstStyle/>
           <a:p>
-            <a:pPr algn="r">
-              <a:defRPr sz="1400" b="1">
-                <a:solidFill>
-                  <a:srgbClr val="0F2B5C"/>
-                </a:solidFill>
-                <a:latin typeface="Arial"/>
-              </a:defRPr>
-            </a:pPr>
-            <a:r>
-              <a:t>3 / 12</a:t>
+            <a:pPr algn="r" rtl="1"/>
+            <a:r>
+              <a:rPr sz="1300" b="1" lang="ar-SA" rtl="1">
+                <a:solidFill>
+                  <a:srgbClr val="1E40AF"/>
+                </a:solidFill>
+                <a:latin typeface="Arial"/>
+              </a:rPr>
+              <a:t>مشروع الاتصال المحلي المباشر  •  التشفير المتماثل المعتمد</a:t>
+            </a:r>
+          </a:p>
+        </p:txBody>
+      </p:sp>
+      <p:sp>
+        <p:nvSpPr>
+          <p:cNvPr id="4" name="TextBox 3"/>
+          <p:cNvSpPr txBox="1"/>
+          <p:nvPr/>
+        </p:nvSpPr>
+        <p:spPr>
+          <a:xfrm>
+            <a:off x="822960" y="228600"/>
+            <a:ext cx="1828800" cy="320040"/>
+          </a:xfrm>
+          <a:prstGeom prst="rect">
+            <a:avLst/>
+          </a:prstGeom>
+          <a:noFill/>
+        </p:spPr>
+        <p:txBody>
+          <a:bodyPr wrap="none">
+            <a:spAutoFit/>
+          </a:bodyPr>
+          <a:lstStyle/>
+          <a:p>
+            <a:pPr algn="l" rtl="0"/>
+            <a:r>
+              <a:rPr sz="1200" b="1" lang="en-US" rtl="0">
+                <a:solidFill>
+                  <a:srgbClr val="475569"/>
+                </a:solidFill>
+                <a:latin typeface="Consolas"/>
+              </a:rPr>
+              <a:t>Slide 3 / 12</a:t>
             </a:r>
           </a:p>
         </p:txBody>
@@ -7155,8 +7878,8 @@
         </p:nvSpPr>
         <p:spPr>
           <a:xfrm>
-            <a:off x="822960" y="594360"/>
-            <a:ext cx="8961120" cy="685800"/>
+            <a:off x="4023360" y="566928"/>
+            <a:ext cx="7315200" cy="685800"/>
           </a:xfrm>
           <a:prstGeom prst="rect">
             <a:avLst/>
@@ -7164,21 +7887,20 @@
           <a:noFill/>
         </p:spPr>
         <p:txBody>
-          <a:bodyPr wrap="square">
+          <a:bodyPr wrap="none">
             <a:spAutoFit/>
           </a:bodyPr>
           <a:lstStyle/>
           <a:p>
-            <a:pPr>
-              <a:defRPr sz="2800" b="1">
+            <a:pPr algn="r" rtl="1"/>
+            <a:r>
+              <a:rPr sz="3000" b="1" lang="ar-SA" rtl="1">
                 <a:solidFill>
                   <a:srgbClr val="0F2B5C"/>
                 </a:solidFill>
                 <a:latin typeface="Arial"/>
-              </a:defRPr>
-            </a:pPr>
-            <a:r>
-              <a:t>التشفير المتماثل ومصادقة البيانات: AES-256-GCM</a:t>
+              </a:rPr>
+              <a:t>التشفير المتماثل وسلامة البيانات</a:t>
             </a:r>
           </a:p>
         </p:txBody>
@@ -7191,8 +7913,8 @@
         </p:nvSpPr>
         <p:spPr>
           <a:xfrm>
-            <a:off x="8961120" y="621792"/>
-            <a:ext cx="2377440" cy="438912"/>
+            <a:off x="822960" y="621792"/>
+            <a:ext cx="3017520" cy="502920"/>
           </a:xfrm>
           <a:prstGeom prst="roundRect">
             <a:avLst/>
@@ -7224,16 +7946,15 @@
           <a:bodyPr rtlCol="0" anchor="ctr"/>
           <a:lstStyle/>
           <a:p>
-            <a:pPr algn="ctr">
-              <a:defRPr sz="1200" b="1">
+            <a:pPr algn="ctr" rtl="0"/>
+            <a:r>
+              <a:rPr sz="1400" b="1" lang="en-US" rtl="0">
                 <a:solidFill>
                   <a:srgbClr val="059669"/>
                 </a:solidFill>
                 <a:latin typeface="Consolas"/>
-              </a:defRPr>
-            </a:pPr>
-            <a:r>
-              <a:t>JVM TESTED (10/10)</a:t>
+              </a:rPr>
+              <a:t>AES-256-GCM</a:t>
             </a:r>
           </a:p>
         </p:txBody>
@@ -7246,7 +7967,7 @@
         </p:nvSpPr>
         <p:spPr>
           <a:xfrm>
-            <a:off x="822960" y="1353312"/>
+            <a:off x="822960" y="1325880"/>
             <a:ext cx="10515600" cy="18288"/>
           </a:xfrm>
           <a:prstGeom prst="rect">
@@ -7289,8 +8010,8 @@
         </p:nvSpPr>
         <p:spPr>
           <a:xfrm>
-            <a:off x="822960" y="6309360"/>
-            <a:ext cx="7315200" cy="320040"/>
+            <a:off x="822960" y="6355080"/>
+            <a:ext cx="10515600" cy="320040"/>
           </a:xfrm>
           <a:prstGeom prst="rect">
             <a:avLst/>
@@ -7303,16 +8024,15 @@
           </a:bodyPr>
           <a:lstStyle/>
           <a:p>
-            <a:pPr>
-              <a:defRPr sz="1100">
+            <a:pPr algn="r" rtl="1"/>
+            <a:r>
+              <a:rPr sz="1050" b="0" lang="ar-SA" rtl="1">
                 <a:solidFill>
                   <a:srgbClr val="475569"/>
                 </a:solidFill>
                 <a:latin typeface="Arial"/>
-              </a:defRPr>
-            </a:pPr>
-            <a:r>
-              <a:t>مشروع تخرج LOCAL CONTACT — مناقشة أكاديمية محكمة</a:t>
+              </a:rPr>
+              <a:t>مناقشة مشروع التخرج الأكاديمية — نظام اتصال محلي مستقل دون خادم وسيط</a:t>
             </a:r>
           </a:p>
         </p:txBody>
@@ -7325,8 +8045,8 @@
         </p:nvSpPr>
         <p:spPr>
           <a:xfrm>
-            <a:off x="822960" y="1645920"/>
-            <a:ext cx="10515600" cy="4389120"/>
+            <a:off x="6217920" y="1554480"/>
+            <a:ext cx="5120640" cy="1828800"/>
           </a:xfrm>
           <a:prstGeom prst="roundRect">
             <a:avLst/>
@@ -7358,96 +8078,368 @@
           <a:bodyPr rtlCol="0" anchor="ctr" wrap="square"/>
           <a:lstStyle/>
           <a:p>
-            <a:pPr algn="ctr">
-              <a:defRPr sz="2200" b="1">
+            <a:pPr algn="r" rtl="1"/>
+            <a:r>
+              <a:rPr sz="1900" b="1" lang="ar-SA" rtl="1">
                 <a:solidFill>
                   <a:srgbClr val="0F2B5C"/>
                 </a:solidFill>
                 <a:latin typeface="Arial"/>
-              </a:defRPr>
+              </a:rPr>
+              <a:t>السرية التامة</a:t>
+            </a:r>
+          </a:p>
+          <a:p>
+            <a:pPr algn="r" rtl="0">
+              <a:spcBef>
+                <a:spcPts val="300"/>
+              </a:spcBef>
             </a:pPr>
             <a:r>
-              <a:t>🔒 الركائز الأساسية لخوارزمية AES-256-GCM في النظام:</a:t>
-            </a:r>
-          </a:p>
-          <a:p>
-            <a:pPr>
+              <a:rPr sz="1300" b="1" lang="en-US" rtl="0">
+                <a:solidFill>
+                  <a:srgbClr val="059669"/>
+                </a:solidFill>
+                <a:latin typeface="Consolas"/>
+              </a:rPr>
+              <a:t>[Confidentiality: 256-bit Key]</a:t>
+            </a:r>
+          </a:p>
+          <a:p>
+            <a:pPr algn="r" rtl="1">
               <a:spcBef>
-                <a:spcPts val="1200"/>
+                <a:spcPts val="600"/>
               </a:spcBef>
-              <a:defRPr sz="1800" b="1">
+            </a:pPr>
+            <a:r>
+              <a:rPr sz="1500" b="0" lang="ar-SA" rtl="1">
                 <a:solidFill>
                   <a:srgbClr val="0F172A"/>
                 </a:solidFill>
                 <a:latin typeface="Arial"/>
-              </a:defRPr>
+              </a:rPr>
+              <a:t>يمنع قراءة محتوى الرسائل أو الوسائط دون امتلاك مفتاح التشفير المتماثل القياسي.</a:t>
+            </a:r>
+          </a:p>
+        </p:txBody>
+      </p:sp>
+      <p:sp>
+        <p:nvSpPr>
+          <p:cNvPr id="10" name="Rounded Rectangle 9"/>
+          <p:cNvSpPr/>
+          <p:nvPr/>
+        </p:nvSpPr>
+        <p:spPr>
+          <a:xfrm>
+            <a:off x="822960" y="1554480"/>
+            <a:ext cx="5120640" cy="1828800"/>
+          </a:xfrm>
+          <a:prstGeom prst="roundRect">
+            <a:avLst/>
+          </a:prstGeom>
+          <a:solidFill>
+            <a:srgbClr val="F8FAFC"/>
+          </a:solidFill>
+          <a:ln w="19050">
+            <a:solidFill>
+              <a:srgbClr val="CBD5E1"/>
+            </a:solidFill>
+          </a:ln>
+        </p:spPr>
+        <p:style>
+          <a:lnRef idx="1">
+            <a:schemeClr val="accent1"/>
+          </a:lnRef>
+          <a:fillRef idx="3">
+            <a:schemeClr val="accent1"/>
+          </a:fillRef>
+          <a:effectRef idx="2">
+            <a:schemeClr val="accent1"/>
+          </a:effectRef>
+          <a:fontRef idx="minor">
+            <a:schemeClr val="lt1"/>
+          </a:fontRef>
+        </p:style>
+        <p:txBody>
+          <a:bodyPr rtlCol="0" anchor="ctr" wrap="square"/>
+          <a:lstStyle/>
+          <a:p>
+            <a:pPr algn="r" rtl="1"/>
+            <a:r>
+              <a:rPr sz="1900" b="1" lang="ar-SA" rtl="1">
+                <a:solidFill>
+                  <a:srgbClr val="0F2B5C"/>
+                </a:solidFill>
+                <a:latin typeface="Arial"/>
+              </a:rPr>
+              <a:t>سلامة البيانات والمصادقة</a:t>
+            </a:r>
+          </a:p>
+          <a:p>
+            <a:pPr algn="r" rtl="0">
+              <a:spcBef>
+                <a:spcPts val="300"/>
+              </a:spcBef>
             </a:pPr>
             <a:r>
-              <a:t>• السرية التامة (Confidentiality): تشفير متماثل بمفتاح 256-bit قياسي ومعتمد دولياً من NIST.</a:t>
-            </a:r>
-          </a:p>
-          <a:p>
-            <a:pPr>
+              <a:rPr sz="1300" b="1" lang="en-US" rtl="0">
+                <a:solidFill>
+                  <a:srgbClr val="059669"/>
+                </a:solidFill>
+                <a:latin typeface="Consolas"/>
+              </a:rPr>
+              <a:t>[Authentication Tag: 128-bit]</a:t>
+            </a:r>
+          </a:p>
+          <a:p>
+            <a:pPr algn="r" rtl="1">
               <a:spcBef>
-                <a:spcPts val="1200"/>
+                <a:spcPts val="600"/>
               </a:spcBef>
-              <a:defRPr sz="1800" b="1">
+            </a:pPr>
+            <a:r>
+              <a:rPr sz="1500" b="0" lang="ar-SA" rtl="1">
                 <a:solidFill>
                   <a:srgbClr val="0F172A"/>
                 </a:solidFill>
                 <a:latin typeface="Arial"/>
-              </a:defRPr>
+              </a:rPr>
+              <a:t>يكشف فوراً أي تعديل أو تلاعب في محتوى النص المشفر ويرفض استلامه تلقائياً.</a:t>
+            </a:r>
+          </a:p>
+        </p:txBody>
+      </p:sp>
+      <p:sp>
+        <p:nvSpPr>
+          <p:cNvPr id="11" name="Rounded Rectangle 10"/>
+          <p:cNvSpPr/>
+          <p:nvPr/>
+        </p:nvSpPr>
+        <p:spPr>
+          <a:xfrm>
+            <a:off x="6217920" y="3566160"/>
+            <a:ext cx="5120640" cy="1828800"/>
+          </a:xfrm>
+          <a:prstGeom prst="roundRect">
+            <a:avLst/>
+          </a:prstGeom>
+          <a:solidFill>
+            <a:srgbClr val="F8FAFC"/>
+          </a:solidFill>
+          <a:ln w="19050">
+            <a:solidFill>
+              <a:srgbClr val="CBD5E1"/>
+            </a:solidFill>
+          </a:ln>
+        </p:spPr>
+        <p:style>
+          <a:lnRef idx="1">
+            <a:schemeClr val="accent1"/>
+          </a:lnRef>
+          <a:fillRef idx="3">
+            <a:schemeClr val="accent1"/>
+          </a:fillRef>
+          <a:effectRef idx="2">
+            <a:schemeClr val="accent1"/>
+          </a:effectRef>
+          <a:fontRef idx="minor">
+            <a:schemeClr val="lt1"/>
+          </a:fontRef>
+        </p:style>
+        <p:txBody>
+          <a:bodyPr rtlCol="0" anchor="ctr" wrap="square"/>
+          <a:lstStyle/>
+          <a:p>
+            <a:pPr algn="r" rtl="1"/>
+            <a:r>
+              <a:rPr sz="1900" b="1" lang="ar-SA" rtl="1">
+                <a:solidFill>
+                  <a:srgbClr val="0F2B5C"/>
+                </a:solidFill>
+                <a:latin typeface="Arial"/>
+              </a:rPr>
+              <a:t>رقم العشوائية الفريد</a:t>
+            </a:r>
+          </a:p>
+          <a:p>
+            <a:pPr algn="r" rtl="0">
+              <a:spcBef>
+                <a:spcPts val="300"/>
+              </a:spcBef>
             </a:pPr>
             <a:r>
-              <a:t>• سلامة البيانات (Data Integrity): وسم مصادقة 128-bit Authentication Tag يكشف أي تلاعب بالبيانات فوراً.</a:t>
-            </a:r>
-          </a:p>
-          <a:p>
-            <a:pPr>
+              <a:rPr sz="1300" b="1" lang="en-US" rtl="0">
+                <a:solidFill>
+                  <a:srgbClr val="1E40AF"/>
+                </a:solidFill>
+                <a:latin typeface="Consolas"/>
+              </a:rPr>
+              <a:t>[Nonce: 12 bytes (96-bit)]</a:t>
+            </a:r>
+          </a:p>
+          <a:p>
+            <a:pPr algn="r" rtl="1">
               <a:spcBef>
-                <a:spcPts val="1200"/>
+                <a:spcPts val="600"/>
               </a:spcBef>
-              <a:defRPr sz="1800" b="1">
+            </a:pPr>
+            <a:r>
+              <a:rPr sz="1500" b="0" lang="ar-SA" rtl="1">
                 <a:solidFill>
                   <a:srgbClr val="0F172A"/>
                 </a:solidFill>
                 <a:latin typeface="Arial"/>
-              </a:defRPr>
+              </a:rPr>
+              <a:t>يُستخدم رقم عشوائي فريد ومستقل مع كل عملية تشفير لمنع هجمات إعادة الإرسال والتكرار.</a:t>
+            </a:r>
+          </a:p>
+        </p:txBody>
+      </p:sp>
+      <p:sp>
+        <p:nvSpPr>
+          <p:cNvPr id="12" name="Rounded Rectangle 11"/>
+          <p:cNvSpPr/>
+          <p:nvPr/>
+        </p:nvSpPr>
+        <p:spPr>
+          <a:xfrm>
+            <a:off x="822960" y="3566160"/>
+            <a:ext cx="5120640" cy="1828800"/>
+          </a:xfrm>
+          <a:prstGeom prst="roundRect">
+            <a:avLst/>
+          </a:prstGeom>
+          <a:solidFill>
+            <a:srgbClr val="F8FAFC"/>
+          </a:solidFill>
+          <a:ln w="19050">
+            <a:solidFill>
+              <a:srgbClr val="CBD5E1"/>
+            </a:solidFill>
+          </a:ln>
+        </p:spPr>
+        <p:style>
+          <a:lnRef idx="1">
+            <a:schemeClr val="accent1"/>
+          </a:lnRef>
+          <a:fillRef idx="3">
+            <a:schemeClr val="accent1"/>
+          </a:fillRef>
+          <a:effectRef idx="2">
+            <a:schemeClr val="accent1"/>
+          </a:effectRef>
+          <a:fontRef idx="minor">
+            <a:schemeClr val="lt1"/>
+          </a:fontRef>
+        </p:style>
+        <p:txBody>
+          <a:bodyPr rtlCol="0" anchor="ctr" wrap="square"/>
+          <a:lstStyle/>
+          <a:p>
+            <a:pPr algn="r" rtl="1"/>
+            <a:r>
+              <a:rPr sz="1900" b="1" lang="ar-SA" rtl="1">
+                <a:solidFill>
+                  <a:srgbClr val="0F2B5C"/>
+                </a:solidFill>
+                <a:latin typeface="Arial"/>
+              </a:rPr>
+              <a:t>التحقق البرمجي المؤتمت</a:t>
+            </a:r>
+          </a:p>
+          <a:p>
+            <a:pPr algn="r" rtl="0">
+              <a:spcBef>
+                <a:spcPts val="300"/>
+              </a:spcBef>
             </a:pPr>
             <a:r>
-              <a:t>• عشوائية الإرسال (Nonce Uniqueness): رقم عشوائي فريد بطول 12-byte (96-bit) يولد لكل حزمة لمنع هجمات التكرار.</a:t>
-            </a:r>
-          </a:p>
-          <a:p>
-            <a:pPr>
+              <a:rPr sz="1300" b="1" lang="en-US" rtl="0">
+                <a:solidFill>
+                  <a:srgbClr val="059669"/>
+                </a:solidFill>
+                <a:latin typeface="Consolas"/>
+              </a:rPr>
+              <a:t>[10/10 JVM Unit Tests Passed]</a:t>
+            </a:r>
+          </a:p>
+          <a:p>
+            <a:pPr algn="r" rtl="1">
               <a:spcBef>
-                <a:spcPts val="1200"/>
+                <a:spcPts val="600"/>
               </a:spcBef>
-              <a:defRPr sz="1800" b="1">
+            </a:pPr>
+            <a:r>
+              <a:rPr sz="1500" b="0" lang="ar-SA" rtl="1">
                 <a:solidFill>
                   <a:srgbClr val="0F172A"/>
                 </a:solidFill>
                 <a:latin typeface="Arial"/>
-              </a:defRPr>
-            </a:pPr>
-            <a:r>
-              <a:t>• تشفير تدفق الملفات (Chunk Encryption): اشتقاق Nonce مستقل لكل كتلة ملف (64KB) عبر deriveChunkNonce().</a:t>
-            </a:r>
-          </a:p>
-          <a:p>
-            <a:pPr>
-              <a:spcBef>
-                <a:spcPts val="1200"/>
-              </a:spcBef>
-              <a:defRPr sz="1800" b="1">
-                <a:solidFill>
-                  <a:srgbClr val="0F172A"/>
-                </a:solidFill>
-                <a:latin typeface="Arial"/>
-              </a:defRPr>
-            </a:pPr>
-            <a:r>
-              <a:t>• الأدلة البرمجية والاختبارات: LocalCryptoEngine.kt تم فحصه بـ 10 اختبارات وحدة في LocalCryptoEngineTest.</a:t>
+              </a:rPr>
+              <a:t>اجتياز كامل لاختبارات الوحدة الآلية للتشفير وفك التشفير ورفض المفاتيح الخاطئة.</a:t>
+            </a:r>
+          </a:p>
+        </p:txBody>
+      </p:sp>
+      <p:sp>
+        <p:nvSpPr>
+          <p:cNvPr id="13" name="Rounded Rectangle 12"/>
+          <p:cNvSpPr/>
+          <p:nvPr/>
+        </p:nvSpPr>
+        <p:spPr>
+          <a:xfrm>
+            <a:off x="822960" y="5623560"/>
+            <a:ext cx="10515600" cy="594360"/>
+          </a:xfrm>
+          <a:prstGeom prst="roundRect">
+            <a:avLst/>
+          </a:prstGeom>
+          <a:solidFill>
+            <a:srgbClr val="F8FAFC"/>
+          </a:solidFill>
+          <a:ln w="12700">
+            <a:solidFill>
+              <a:srgbClr val="CBD5E1"/>
+            </a:solidFill>
+          </a:ln>
+        </p:spPr>
+        <p:style>
+          <a:lnRef idx="1">
+            <a:schemeClr val="accent1"/>
+          </a:lnRef>
+          <a:fillRef idx="3">
+            <a:schemeClr val="accent1"/>
+          </a:fillRef>
+          <a:effectRef idx="2">
+            <a:schemeClr val="accent1"/>
+          </a:effectRef>
+          <a:fontRef idx="minor">
+            <a:schemeClr val="lt1"/>
+          </a:fontRef>
+        </p:style>
+        <p:txBody>
+          <a:bodyPr rtlCol="0" anchor="ctr"/>
+          <a:lstStyle/>
+          <a:p>
+            <a:pPr algn="r" rtl="1"/>
+            <a:r>
+              <a:rPr sz="1200" b="1" lang="ar-SA" rtl="1">
+                <a:solidFill>
+                  <a:srgbClr val="0F2B5C"/>
+                </a:solidFill>
+                <a:latin typeface="Arial"/>
+              </a:rPr>
+              <a:t>المكون البرمجي: محرك التشفير المتماثل المعتمد  |  </a:t>
+            </a:r>
+            <a:r>
+              <a:rPr sz="1200" b="1" lang="en-US" rtl="0">
+                <a:solidFill>
+                  <a:srgbClr val="1E40AF"/>
+                </a:solidFill>
+                <a:latin typeface="Consolas"/>
+              </a:rPr>
+              <a:t>app/src/main/java/com/example/network/LocalCryptoEngine.kt</a:t>
             </a:r>
           </a:p>
         </p:txBody>
@@ -7479,13 +8471,13 @@
         <p:spPr>
           <a:xfrm>
             <a:off x="0" y="0"/>
-            <a:ext cx="12191695" cy="91440"/>
+            <a:ext cx="12191695" cy="109728"/>
           </a:xfrm>
           <a:prstGeom prst="rect">
             <a:avLst/>
           </a:prstGeom>
           <a:solidFill>
-            <a:srgbClr val="1E40AF"/>
+            <a:srgbClr val="0F2B5C"/>
           </a:solidFill>
           <a:ln>
             <a:noFill/>
@@ -7521,44 +8513,8 @@
         </p:nvSpPr>
         <p:spPr>
           <a:xfrm>
-            <a:off x="822960" y="228600"/>
-            <a:ext cx="7772400" cy="320040"/>
-          </a:xfrm>
-          <a:prstGeom prst="rect">
-            <a:avLst/>
-          </a:prstGeom>
-          <a:noFill/>
-        </p:spPr>
-        <p:txBody>
-          <a:bodyPr wrap="square">
-            <a:spAutoFit/>
-          </a:bodyPr>
-          <a:lstStyle/>
-          <a:p>
-            <a:pPr>
-              <a:defRPr sz="1300" b="1">
-                <a:solidFill>
-                  <a:srgbClr val="1E40AF"/>
-                </a:solidFill>
-                <a:latin typeface="Arial"/>
-              </a:defRPr>
-            </a:pPr>
-            <a:r>
-              <a:t>LOCAL CONTACT P2P  |  تبادل المفاتيح الديناميكي</a:t>
-            </a:r>
-          </a:p>
-        </p:txBody>
-      </p:sp>
-      <p:sp>
-        <p:nvSpPr>
-          <p:cNvPr id="4" name="TextBox 3"/>
-          <p:cNvSpPr txBox="1"/>
-          <p:nvPr/>
-        </p:nvSpPr>
-        <p:spPr>
-          <a:xfrm>
-            <a:off x="10241280" y="6309360"/>
-            <a:ext cx="1188720" cy="365760"/>
+            <a:off x="3200400" y="228600"/>
+            <a:ext cx="8138160" cy="320040"/>
           </a:xfrm>
           <a:prstGeom prst="rect">
             <a:avLst/>
@@ -7571,16 +8527,50 @@
           </a:bodyPr>
           <a:lstStyle/>
           <a:p>
-            <a:pPr algn="r">
-              <a:defRPr sz="1400" b="1">
-                <a:solidFill>
-                  <a:srgbClr val="0F2B5C"/>
-                </a:solidFill>
-                <a:latin typeface="Arial"/>
-              </a:defRPr>
-            </a:pPr>
-            <a:r>
-              <a:t>4 / 12</a:t>
+            <a:pPr algn="r" rtl="1"/>
+            <a:r>
+              <a:rPr sz="1300" b="1" lang="ar-SA" rtl="1">
+                <a:solidFill>
+                  <a:srgbClr val="1E40AF"/>
+                </a:solidFill>
+                <a:latin typeface="Arial"/>
+              </a:rPr>
+              <a:t>مشروع الاتصال المحلي المباشر  •  تبادل المفاتيح الديناميكي</a:t>
+            </a:r>
+          </a:p>
+        </p:txBody>
+      </p:sp>
+      <p:sp>
+        <p:nvSpPr>
+          <p:cNvPr id="4" name="TextBox 3"/>
+          <p:cNvSpPr txBox="1"/>
+          <p:nvPr/>
+        </p:nvSpPr>
+        <p:spPr>
+          <a:xfrm>
+            <a:off x="822960" y="228600"/>
+            <a:ext cx="1828800" cy="320040"/>
+          </a:xfrm>
+          <a:prstGeom prst="rect">
+            <a:avLst/>
+          </a:prstGeom>
+          <a:noFill/>
+        </p:spPr>
+        <p:txBody>
+          <a:bodyPr wrap="none">
+            <a:spAutoFit/>
+          </a:bodyPr>
+          <a:lstStyle/>
+          <a:p>
+            <a:pPr algn="l" rtl="0"/>
+            <a:r>
+              <a:rPr sz="1200" b="1" lang="en-US" rtl="0">
+                <a:solidFill>
+                  <a:srgbClr val="475569"/>
+                </a:solidFill>
+                <a:latin typeface="Consolas"/>
+              </a:rPr>
+              <a:t>Slide 4 / 12</a:t>
             </a:r>
           </a:p>
         </p:txBody>
@@ -7593,8 +8583,8 @@
         </p:nvSpPr>
         <p:spPr>
           <a:xfrm>
-            <a:off x="822960" y="594360"/>
-            <a:ext cx="8961120" cy="685800"/>
+            <a:off x="4023360" y="566928"/>
+            <a:ext cx="7315200" cy="685800"/>
           </a:xfrm>
           <a:prstGeom prst="rect">
             <a:avLst/>
@@ -7602,21 +8592,20 @@
           <a:noFill/>
         </p:spPr>
         <p:txBody>
-          <a:bodyPr wrap="square">
+          <a:bodyPr wrap="none">
             <a:spAutoFit/>
           </a:bodyPr>
           <a:lstStyle/>
           <a:p>
-            <a:pPr>
-              <a:defRPr sz="2800" b="1">
+            <a:pPr algn="r" rtl="1"/>
+            <a:r>
+              <a:rPr sz="3000" b="1" lang="ar-SA" rtl="1">
                 <a:solidFill>
                   <a:srgbClr val="0F2B5C"/>
                 </a:solidFill>
                 <a:latin typeface="Arial"/>
-              </a:defRPr>
-            </a:pPr>
-            <a:r>
-              <a:t>تبادل المفاتيح وتأمين السرية التامة: ECDH (NIST P-256)</a:t>
+              </a:rPr>
+              <a:t>تبادل المفاتيح وتأمين السرية التامة</a:t>
             </a:r>
           </a:p>
         </p:txBody>
@@ -7629,8 +8618,8 @@
         </p:nvSpPr>
         <p:spPr>
           <a:xfrm>
-            <a:off x="8961120" y="621792"/>
-            <a:ext cx="2377440" cy="438912"/>
+            <a:off x="822960" y="621792"/>
+            <a:ext cx="3017520" cy="502920"/>
           </a:xfrm>
           <a:prstGeom prst="roundRect">
             <a:avLst/>
@@ -7662,16 +8651,15 @@
           <a:bodyPr rtlCol="0" anchor="ctr"/>
           <a:lstStyle/>
           <a:p>
-            <a:pPr algn="ctr">
-              <a:defRPr sz="1200" b="1">
+            <a:pPr algn="ctr" rtl="0"/>
+            <a:r>
+              <a:rPr sz="1400" b="1" lang="en-US" rtl="0">
                 <a:solidFill>
                   <a:srgbClr val="059669"/>
                 </a:solidFill>
                 <a:latin typeface="Consolas"/>
-              </a:defRPr>
-            </a:pPr>
-            <a:r>
-              <a:t>JVM TESTED (8/8)</a:t>
+              </a:rPr>
+              <a:t>ECDH (NIST P-256)</a:t>
             </a:r>
           </a:p>
         </p:txBody>
@@ -7684,7 +8672,7 @@
         </p:nvSpPr>
         <p:spPr>
           <a:xfrm>
-            <a:off x="822960" y="1353312"/>
+            <a:off x="822960" y="1325880"/>
             <a:ext cx="10515600" cy="18288"/>
           </a:xfrm>
           <a:prstGeom prst="rect">
@@ -7727,8 +8715,8 @@
         </p:nvSpPr>
         <p:spPr>
           <a:xfrm>
-            <a:off x="822960" y="6309360"/>
-            <a:ext cx="7315200" cy="320040"/>
+            <a:off x="822960" y="6355080"/>
+            <a:ext cx="10515600" cy="320040"/>
           </a:xfrm>
           <a:prstGeom prst="rect">
             <a:avLst/>
@@ -7741,16 +8729,15 @@
           </a:bodyPr>
           <a:lstStyle/>
           <a:p>
-            <a:pPr>
-              <a:defRPr sz="1100">
+            <a:pPr algn="r" rtl="1"/>
+            <a:r>
+              <a:rPr sz="1050" b="0" lang="ar-SA" rtl="1">
                 <a:solidFill>
                   <a:srgbClr val="475569"/>
                 </a:solidFill>
                 <a:latin typeface="Arial"/>
-              </a:defRPr>
-            </a:pPr>
-            <a:r>
-              <a:t>مشروع تخرج LOCAL CONTACT — مناقشة أكاديمية محكمة</a:t>
+              </a:rPr>
+              <a:t>مناقشة مشروع التخرج الأكاديمية — نظام اتصال محلي مستقل دون خادم وسيط</a:t>
             </a:r>
           </a:p>
         </p:txBody>
@@ -7763,127 +8750,8 @@
         </p:nvSpPr>
         <p:spPr>
           <a:xfrm>
-            <a:off x="822960" y="1645920"/>
-            <a:ext cx="5120640" cy="4389120"/>
-          </a:xfrm>
-          <a:prstGeom prst="roundRect">
-            <a:avLst/>
-          </a:prstGeom>
-          <a:solidFill>
-            <a:srgbClr val="F8FAFC"/>
-          </a:solidFill>
-          <a:ln w="19050">
-            <a:solidFill>
-              <a:srgbClr val="1E40AF"/>
-            </a:solidFill>
-          </a:ln>
-        </p:spPr>
-        <p:style>
-          <a:lnRef idx="1">
-            <a:schemeClr val="accent1"/>
-          </a:lnRef>
-          <a:fillRef idx="3">
-            <a:schemeClr val="accent1"/>
-          </a:fillRef>
-          <a:effectRef idx="2">
-            <a:schemeClr val="accent1"/>
-          </a:effectRef>
-          <a:fontRef idx="minor">
-            <a:schemeClr val="lt1"/>
-          </a:fontRef>
-        </p:style>
-        <p:txBody>
-          <a:bodyPr rtlCol="0" anchor="ctr" wrap="square"/>
-          <a:lstStyle/>
-          <a:p>
-            <a:pPr algn="ctr">
-              <a:defRPr sz="2200" b="1">
-                <a:solidFill>
-                  <a:srgbClr val="0F2B5C"/>
-                </a:solidFill>
-                <a:latin typeface="Arial"/>
-              </a:defRPr>
-            </a:pPr>
-            <a:r>
-              <a:t>⚡ المبادئ الأمنية لتبادل المفاتيح ECDH:</a:t>
-            </a:r>
-          </a:p>
-          <a:p>
-            <a:pPr>
-              <a:spcBef>
-                <a:spcPts val="1200"/>
-              </a:spcBef>
-              <a:defRPr sz="1700" b="1">
-                <a:solidFill>
-                  <a:srgbClr val="0F172A"/>
-                </a:solidFill>
-                <a:latin typeface="Arial"/>
-              </a:defRPr>
-            </a:pPr>
-            <a:r>
-              <a:t>• المنحنى المعتمد: secp256r1 (NIST P-256) القياسي والمدعوم في عتاد أندرويد.</a:t>
-            </a:r>
-          </a:p>
-          <a:p>
-            <a:pPr>
-              <a:spcBef>
-                <a:spcPts val="1200"/>
-              </a:spcBef>
-              <a:defRPr sz="1700" b="1">
-                <a:solidFill>
-                  <a:srgbClr val="0F172A"/>
-                </a:solidFill>
-                <a:latin typeface="Arial"/>
-              </a:defRPr>
-            </a:pPr>
-            <a:r>
-              <a:t>• مفاتيح مؤقتة (Ephemeral Keys): توليد زوج مفاتيح جديد تماماً لكل محادثة أو جلسة.</a:t>
-            </a:r>
-          </a:p>
-          <a:p>
-            <a:pPr>
-              <a:spcBef>
-                <a:spcPts val="1200"/>
-              </a:spcBef>
-              <a:defRPr sz="1700" b="1">
-                <a:solidFill>
-                  <a:srgbClr val="0F172A"/>
-                </a:solidFill>
-                <a:latin typeface="Arial"/>
-              </a:defRPr>
-            </a:pPr>
-            <a:r>
-              <a:t>• السرية المستقبلية (Forward Secrecy): إتلاف المفتاح الخاص المؤقت فور حساب السر المشترك.</a:t>
-            </a:r>
-          </a:p>
-          <a:p>
-            <a:pPr>
-              <a:spcBef>
-                <a:spcPts val="1200"/>
-              </a:spcBef>
-              <a:defRPr sz="1700" b="1">
-                <a:solidFill>
-                  <a:srgbClr val="0F172A"/>
-                </a:solidFill>
-                <a:latin typeface="Arial"/>
-              </a:defRPr>
-            </a:pPr>
-            <a:r>
-              <a:t>• منع التنصت: حتى لو صودر الهاتف لاحقاً، يستحيل فك تشفير الجلسات السابقة المسجلة.</a:t>
-            </a:r>
-          </a:p>
-        </p:txBody>
-      </p:sp>
-      <p:sp>
-        <p:nvSpPr>
-          <p:cNvPr id="10" name="Rounded Rectangle 9"/>
-          <p:cNvSpPr/>
-          <p:nvPr/>
-        </p:nvSpPr>
-        <p:spPr>
-          <a:xfrm>
-            <a:off x="6217920" y="1645920"/>
-            <a:ext cx="5120640" cy="4389120"/>
+            <a:off x="6217920" y="1554480"/>
+            <a:ext cx="5120640" cy="1828800"/>
           </a:xfrm>
           <a:prstGeom prst="roundRect">
             <a:avLst/>
@@ -7915,80 +8783,368 @@
           <a:bodyPr rtlCol="0" anchor="ctr" wrap="square"/>
           <a:lstStyle/>
           <a:p>
-            <a:pPr algn="ctr">
-              <a:defRPr sz="2200" b="1">
+            <a:pPr algn="r" rtl="1"/>
+            <a:r>
+              <a:rPr sz="1900" b="1" lang="ar-SA" rtl="1">
                 <a:solidFill>
                   <a:srgbClr val="0F2B5C"/>
                 </a:solidFill>
                 <a:latin typeface="Arial"/>
-              </a:defRPr>
+              </a:rPr>
+              <a:t>المنحنى الإهليلجي المعتمد</a:t>
+            </a:r>
+          </a:p>
+          <a:p>
+            <a:pPr algn="r" rtl="0">
+              <a:spcBef>
+                <a:spcPts val="300"/>
+              </a:spcBef>
             </a:pPr>
             <a:r>
-              <a:t>📂 الملف والتحقق الهندسي:</a:t>
-            </a:r>
-          </a:p>
-          <a:p>
-            <a:pPr>
+              <a:rPr sz="1300" b="1" lang="en-US" rtl="0">
+                <a:solidFill>
+                  <a:srgbClr val="1E40AF"/>
+                </a:solidFill>
+                <a:latin typeface="Consolas"/>
+              </a:rPr>
+              <a:t>[secp256r1 / NIST P-256]</a:t>
+            </a:r>
+          </a:p>
+          <a:p>
+            <a:pPr algn="r" rtl="1">
               <a:spcBef>
-                <a:spcPts val="800"/>
+                <a:spcPts val="600"/>
               </a:spcBef>
-              <a:defRPr sz="1400" b="1">
+            </a:pPr>
+            <a:r>
+              <a:rPr sz="1500" b="0" lang="ar-SA" rtl="1">
+                <a:solidFill>
+                  <a:srgbClr val="0F172A"/>
+                </a:solidFill>
+                <a:latin typeface="Arial"/>
+              </a:rPr>
+              <a:t>استخدام المنحنى القياسي المعتمد دولياً والمدعوم في عتاد أندرويد دون مكتبات خارجية.</a:t>
+            </a:r>
+          </a:p>
+        </p:txBody>
+      </p:sp>
+      <p:sp>
+        <p:nvSpPr>
+          <p:cNvPr id="10" name="Rounded Rectangle 9"/>
+          <p:cNvSpPr/>
+          <p:nvPr/>
+        </p:nvSpPr>
+        <p:spPr>
+          <a:xfrm>
+            <a:off x="822960" y="1554480"/>
+            <a:ext cx="5120640" cy="1828800"/>
+          </a:xfrm>
+          <a:prstGeom prst="roundRect">
+            <a:avLst/>
+          </a:prstGeom>
+          <a:solidFill>
+            <a:srgbClr val="F8FAFC"/>
+          </a:solidFill>
+          <a:ln w="19050">
+            <a:solidFill>
+              <a:srgbClr val="CBD5E1"/>
+            </a:solidFill>
+          </a:ln>
+        </p:spPr>
+        <p:style>
+          <a:lnRef idx="1">
+            <a:schemeClr val="accent1"/>
+          </a:lnRef>
+          <a:fillRef idx="3">
+            <a:schemeClr val="accent1"/>
+          </a:fillRef>
+          <a:effectRef idx="2">
+            <a:schemeClr val="accent1"/>
+          </a:effectRef>
+          <a:fontRef idx="minor">
+            <a:schemeClr val="lt1"/>
+          </a:fontRef>
+        </p:style>
+        <p:txBody>
+          <a:bodyPr rtlCol="0" anchor="ctr" wrap="square"/>
+          <a:lstStyle/>
+          <a:p>
+            <a:pPr algn="r" rtl="1"/>
+            <a:r>
+              <a:rPr sz="1900" b="1" lang="ar-SA" rtl="1">
+                <a:solidFill>
+                  <a:srgbClr val="0F2B5C"/>
+                </a:solidFill>
+                <a:latin typeface="Arial"/>
+              </a:rPr>
+              <a:t>المفاتيح المؤقتة للجلسة</a:t>
+            </a:r>
+          </a:p>
+          <a:p>
+            <a:pPr algn="r" rtl="0">
+              <a:spcBef>
+                <a:spcPts val="300"/>
+              </a:spcBef>
+            </a:pPr>
+            <a:r>
+              <a:rPr sz="1300" b="1" lang="en-US" rtl="0">
+                <a:solidFill>
+                  <a:srgbClr val="059669"/>
+                </a:solidFill>
+                <a:latin typeface="Consolas"/>
+              </a:rPr>
+              <a:t>[Ephemeral Key Pairs]</a:t>
+            </a:r>
+          </a:p>
+          <a:p>
+            <a:pPr algn="r" rtl="1">
+              <a:spcBef>
+                <a:spcPts val="600"/>
+              </a:spcBef>
+            </a:pPr>
+            <a:r>
+              <a:rPr sz="1500" b="0" lang="ar-SA" rtl="1">
+                <a:solidFill>
+                  <a:srgbClr val="0F172A"/>
+                </a:solidFill>
+                <a:latin typeface="Arial"/>
+              </a:rPr>
+              <a:t>توليد زوج مفاتيح مؤقت وجديد تماماً لكل محادثة بين طرفين لضمان العزل الكامل.</a:t>
+            </a:r>
+          </a:p>
+        </p:txBody>
+      </p:sp>
+      <p:sp>
+        <p:nvSpPr>
+          <p:cNvPr id="11" name="Rounded Rectangle 10"/>
+          <p:cNvSpPr/>
+          <p:nvPr/>
+        </p:nvSpPr>
+        <p:spPr>
+          <a:xfrm>
+            <a:off x="6217920" y="3566160"/>
+            <a:ext cx="5120640" cy="1828800"/>
+          </a:xfrm>
+          <a:prstGeom prst="roundRect">
+            <a:avLst/>
+          </a:prstGeom>
+          <a:solidFill>
+            <a:srgbClr val="F8FAFC"/>
+          </a:solidFill>
+          <a:ln w="19050">
+            <a:solidFill>
+              <a:srgbClr val="CBD5E1"/>
+            </a:solidFill>
+          </a:ln>
+        </p:spPr>
+        <p:style>
+          <a:lnRef idx="1">
+            <a:schemeClr val="accent1"/>
+          </a:lnRef>
+          <a:fillRef idx="3">
+            <a:schemeClr val="accent1"/>
+          </a:fillRef>
+          <a:effectRef idx="2">
+            <a:schemeClr val="accent1"/>
+          </a:effectRef>
+          <a:fontRef idx="minor">
+            <a:schemeClr val="lt1"/>
+          </a:fontRef>
+        </p:style>
+        <p:txBody>
+          <a:bodyPr rtlCol="0" anchor="ctr" wrap="square"/>
+          <a:lstStyle/>
+          <a:p>
+            <a:pPr algn="r" rtl="1"/>
+            <a:r>
+              <a:rPr sz="1900" b="1" lang="ar-SA" rtl="1">
+                <a:solidFill>
+                  <a:srgbClr val="0F2B5C"/>
+                </a:solidFill>
+                <a:latin typeface="Arial"/>
+              </a:rPr>
+              <a:t>السرية التوجيهية المستقبلية</a:t>
+            </a:r>
+          </a:p>
+          <a:p>
+            <a:pPr algn="r" rtl="0">
+              <a:spcBef>
+                <a:spcPts val="300"/>
+              </a:spcBef>
+            </a:pPr>
+            <a:r>
+              <a:rPr sz="1300" b="1" lang="en-US" rtl="0">
+                <a:solidFill>
+                  <a:srgbClr val="059669"/>
+                </a:solidFill>
+                <a:latin typeface="Consolas"/>
+              </a:rPr>
+              <a:t>[Forward Secrecy Enforced]</a:t>
+            </a:r>
+          </a:p>
+          <a:p>
+            <a:pPr algn="r" rtl="1">
+              <a:spcBef>
+                <a:spcPts val="600"/>
+              </a:spcBef>
+            </a:pPr>
+            <a:r>
+              <a:rPr sz="1500" b="0" lang="ar-SA" rtl="1">
+                <a:solidFill>
+                  <a:srgbClr val="0F172A"/>
+                </a:solidFill>
+                <a:latin typeface="Arial"/>
+              </a:rPr>
+              <a:t>إتلاف المفتاح الخاص المؤقت فور حساب السر المشترك؛ يستحيل فك المحادثات السابقة لاحقاً.</a:t>
+            </a:r>
+          </a:p>
+        </p:txBody>
+      </p:sp>
+      <p:sp>
+        <p:nvSpPr>
+          <p:cNvPr id="12" name="Rounded Rectangle 11"/>
+          <p:cNvSpPr/>
+          <p:nvPr/>
+        </p:nvSpPr>
+        <p:spPr>
+          <a:xfrm>
+            <a:off x="822960" y="3566160"/>
+            <a:ext cx="5120640" cy="1828800"/>
+          </a:xfrm>
+          <a:prstGeom prst="roundRect">
+            <a:avLst/>
+          </a:prstGeom>
+          <a:solidFill>
+            <a:srgbClr val="F8FAFC"/>
+          </a:solidFill>
+          <a:ln w="19050">
+            <a:solidFill>
+              <a:srgbClr val="CBD5E1"/>
+            </a:solidFill>
+          </a:ln>
+        </p:spPr>
+        <p:style>
+          <a:lnRef idx="1">
+            <a:schemeClr val="accent1"/>
+          </a:lnRef>
+          <a:fillRef idx="3">
+            <a:schemeClr val="accent1"/>
+          </a:fillRef>
+          <a:effectRef idx="2">
+            <a:schemeClr val="accent1"/>
+          </a:effectRef>
+          <a:fontRef idx="minor">
+            <a:schemeClr val="lt1"/>
+          </a:fontRef>
+        </p:style>
+        <p:txBody>
+          <a:bodyPr rtlCol="0" anchor="ctr" wrap="square"/>
+          <a:lstStyle/>
+          <a:p>
+            <a:pPr algn="r" rtl="1"/>
+            <a:r>
+              <a:rPr sz="1900" b="1" lang="ar-SA" rtl="1">
+                <a:solidFill>
+                  <a:srgbClr val="0F2B5C"/>
+                </a:solidFill>
+                <a:latin typeface="Arial"/>
+              </a:rPr>
+              <a:t>التحقق البرمجي المؤتمت</a:t>
+            </a:r>
+          </a:p>
+          <a:p>
+            <a:pPr algn="r" rtl="0">
+              <a:spcBef>
+                <a:spcPts val="300"/>
+              </a:spcBef>
+            </a:pPr>
+            <a:r>
+              <a:rPr sz="1300" b="1" lang="en-US" rtl="0">
+                <a:solidFill>
+                  <a:srgbClr val="059669"/>
+                </a:solidFill>
+                <a:latin typeface="Consolas"/>
+              </a:rPr>
+              <a:t>[8/8 JVM Tests Passed]</a:t>
+            </a:r>
+          </a:p>
+          <a:p>
+            <a:pPr algn="r" rtl="1">
+              <a:spcBef>
+                <a:spcPts val="600"/>
+              </a:spcBef>
+            </a:pPr>
+            <a:r>
+              <a:rPr sz="1500" b="0" lang="ar-SA" rtl="1">
+                <a:solidFill>
+                  <a:srgbClr val="0F172A"/>
+                </a:solidFill>
+                <a:latin typeface="Arial"/>
+              </a:rPr>
+              <a:t>إثبات توليد المفاتيح، تصدير المفتاح العام، وتطابق السر المشترك للطرفين آلياً.</a:t>
+            </a:r>
+          </a:p>
+        </p:txBody>
+      </p:sp>
+      <p:sp>
+        <p:nvSpPr>
+          <p:cNvPr id="13" name="Rounded Rectangle 12"/>
+          <p:cNvSpPr/>
+          <p:nvPr/>
+        </p:nvSpPr>
+        <p:spPr>
+          <a:xfrm>
+            <a:off x="822960" y="5623560"/>
+            <a:ext cx="10515600" cy="594360"/>
+          </a:xfrm>
+          <a:prstGeom prst="roundRect">
+            <a:avLst/>
+          </a:prstGeom>
+          <a:solidFill>
+            <a:srgbClr val="F8FAFC"/>
+          </a:solidFill>
+          <a:ln w="12700">
+            <a:solidFill>
+              <a:srgbClr val="CBD5E1"/>
+            </a:solidFill>
+          </a:ln>
+        </p:spPr>
+        <p:style>
+          <a:lnRef idx="1">
+            <a:schemeClr val="accent1"/>
+          </a:lnRef>
+          <a:fillRef idx="3">
+            <a:schemeClr val="accent1"/>
+          </a:fillRef>
+          <a:effectRef idx="2">
+            <a:schemeClr val="accent1"/>
+          </a:effectRef>
+          <a:fontRef idx="minor">
+            <a:schemeClr val="lt1"/>
+          </a:fontRef>
+        </p:style>
+        <p:txBody>
+          <a:bodyPr rtlCol="0" anchor="ctr"/>
+          <a:lstStyle/>
+          <a:p>
+            <a:pPr algn="r" rtl="1"/>
+            <a:r>
+              <a:rPr sz="1200" b="1" lang="ar-SA" rtl="1">
+                <a:solidFill>
+                  <a:srgbClr val="0F2B5C"/>
+                </a:solidFill>
+                <a:latin typeface="Arial"/>
+              </a:rPr>
+              <a:t>المكون البرمجي: محرك تبادل المفاتيح المؤقتة  |  </a:t>
+            </a:r>
+            <a:r>
+              <a:rPr sz="1200" b="1" lang="en-US" rtl="0">
                 <a:solidFill>
                   <a:srgbClr val="1E40AF"/>
                 </a:solidFill>
                 <a:latin typeface="Consolas"/>
-              </a:defRPr>
-            </a:pPr>
-            <a:r>
+              </a:rPr>
               <a:t>app/src/main/java/com/example/network/EcdhEngine.kt</a:t>
-            </a:r>
-          </a:p>
-          <a:p>
-            <a:pPr>
-              <a:spcBef>
-                <a:spcPts val="1200"/>
-              </a:spcBef>
-              <a:defRPr sz="1700" b="1">
-                <a:solidFill>
-                  <a:srgbClr val="0F172A"/>
-                </a:solidFill>
-                <a:latin typeface="Arial"/>
-              </a:defRPr>
-            </a:pPr>
-            <a:r>
-              <a:t>• المسؤولية: توليد المفاتيح المؤقتة، وتشفير المفتاح العام بترميز X.509 DER، وحساب السر المشترك.</a:t>
-            </a:r>
-          </a:p>
-          <a:p>
-            <a:pPr>
-              <a:spcBef>
-                <a:spcPts val="1200"/>
-              </a:spcBef>
-              <a:defRPr sz="1700" b="1">
-                <a:solidFill>
-                  <a:srgbClr val="0F172A"/>
-                </a:solidFill>
-                <a:latin typeface="Arial"/>
-              </a:defRPr>
-            </a:pPr>
-            <a:r>
-              <a:t>• التوافق: استخدام مكتبة Java Cryptography Architecture (JCA) القياسية بدون مكتبات خارجية.</a:t>
-            </a:r>
-          </a:p>
-          <a:p>
-            <a:pPr>
-              <a:spcBef>
-                <a:spcPts val="1200"/>
-              </a:spcBef>
-              <a:defRPr sz="1700" b="1">
-                <a:solidFill>
-                  <a:srgbClr val="0F172A"/>
-                </a:solidFill>
-                <a:latin typeface="Arial"/>
-              </a:defRPr>
-            </a:pPr>
-            <a:r>
-              <a:t>• حزمة الاختبار: 8 اختبارات آلية ناجحة في EcdhEngineTest.kt تثبت تطابق السر بين الطرفين.</a:t>
             </a:r>
           </a:p>
         </p:txBody>
@@ -8020,13 +9176,13 @@
         <p:spPr>
           <a:xfrm>
             <a:off x="0" y="0"/>
-            <a:ext cx="12191695" cy="91440"/>
+            <a:ext cx="12191695" cy="109728"/>
           </a:xfrm>
           <a:prstGeom prst="rect">
             <a:avLst/>
           </a:prstGeom>
           <a:solidFill>
-            <a:srgbClr val="1E40AF"/>
+            <a:srgbClr val="0F2B5C"/>
           </a:solidFill>
           <a:ln>
             <a:noFill/>
@@ -8062,44 +9218,8 @@
         </p:nvSpPr>
         <p:spPr>
           <a:xfrm>
-            <a:off x="822960" y="228600"/>
-            <a:ext cx="7772400" cy="320040"/>
-          </a:xfrm>
-          <a:prstGeom prst="rect">
-            <a:avLst/>
-          </a:prstGeom>
-          <a:noFill/>
-        </p:spPr>
-        <p:txBody>
-          <a:bodyPr wrap="square">
-            <a:spAutoFit/>
-          </a:bodyPr>
-          <a:lstStyle/>
-          <a:p>
-            <a:pPr>
-              <a:defRPr sz="1300" b="1">
-                <a:solidFill>
-                  <a:srgbClr val="1E40AF"/>
-                </a:solidFill>
-                <a:latin typeface="Arial"/>
-              </a:defRPr>
-            </a:pPr>
-            <a:r>
-              <a:t>LOCAL CONTACT P2P  |  اشتقاق مفاتيح الجلسة</a:t>
-            </a:r>
-          </a:p>
-        </p:txBody>
-      </p:sp>
-      <p:sp>
-        <p:nvSpPr>
-          <p:cNvPr id="4" name="TextBox 3"/>
-          <p:cNvSpPr txBox="1"/>
-          <p:nvPr/>
-        </p:nvSpPr>
-        <p:spPr>
-          <a:xfrm>
-            <a:off x="10241280" y="6309360"/>
-            <a:ext cx="1188720" cy="365760"/>
+            <a:off x="3200400" y="228600"/>
+            <a:ext cx="8138160" cy="320040"/>
           </a:xfrm>
           <a:prstGeom prst="rect">
             <a:avLst/>
@@ -8112,16 +9232,50 @@
           </a:bodyPr>
           <a:lstStyle/>
           <a:p>
-            <a:pPr algn="r">
-              <a:defRPr sz="1400" b="1">
-                <a:solidFill>
-                  <a:srgbClr val="0F2B5C"/>
-                </a:solidFill>
-                <a:latin typeface="Arial"/>
-              </a:defRPr>
-            </a:pPr>
-            <a:r>
-              <a:t>5 / 12</a:t>
+            <a:pPr algn="r" rtl="1"/>
+            <a:r>
+              <a:rPr sz="1300" b="1" lang="ar-SA" rtl="1">
+                <a:solidFill>
+                  <a:srgbClr val="1E40AF"/>
+                </a:solidFill>
+                <a:latin typeface="Arial"/>
+              </a:rPr>
+              <a:t>مشروع الاتصال المحلي المباشر  •  اشتقاق مفاتيح الجلسات</a:t>
+            </a:r>
+          </a:p>
+        </p:txBody>
+      </p:sp>
+      <p:sp>
+        <p:nvSpPr>
+          <p:cNvPr id="4" name="TextBox 3"/>
+          <p:cNvSpPr txBox="1"/>
+          <p:nvPr/>
+        </p:nvSpPr>
+        <p:spPr>
+          <a:xfrm>
+            <a:off x="822960" y="228600"/>
+            <a:ext cx="1828800" cy="320040"/>
+          </a:xfrm>
+          <a:prstGeom prst="rect">
+            <a:avLst/>
+          </a:prstGeom>
+          <a:noFill/>
+        </p:spPr>
+        <p:txBody>
+          <a:bodyPr wrap="none">
+            <a:spAutoFit/>
+          </a:bodyPr>
+          <a:lstStyle/>
+          <a:p>
+            <a:pPr algn="l" rtl="0"/>
+            <a:r>
+              <a:rPr sz="1200" b="1" lang="en-US" rtl="0">
+                <a:solidFill>
+                  <a:srgbClr val="475569"/>
+                </a:solidFill>
+                <a:latin typeface="Consolas"/>
+              </a:rPr>
+              <a:t>Slide 5 / 12</a:t>
             </a:r>
           </a:p>
         </p:txBody>
@@ -8134,8 +9288,8 @@
         </p:nvSpPr>
         <p:spPr>
           <a:xfrm>
-            <a:off x="822960" y="594360"/>
-            <a:ext cx="8961120" cy="685800"/>
+            <a:off x="4023360" y="566928"/>
+            <a:ext cx="7315200" cy="685800"/>
           </a:xfrm>
           <a:prstGeom prst="rect">
             <a:avLst/>
@@ -8143,21 +9297,20 @@
           <a:noFill/>
         </p:spPr>
         <p:txBody>
-          <a:bodyPr wrap="square">
+          <a:bodyPr wrap="none">
             <a:spAutoFit/>
           </a:bodyPr>
           <a:lstStyle/>
           <a:p>
-            <a:pPr>
-              <a:defRPr sz="2800" b="1">
+            <a:pPr algn="r" rtl="1"/>
+            <a:r>
+              <a:rPr sz="3000" b="1" lang="ar-SA" rtl="1">
                 <a:solidFill>
                   <a:srgbClr val="0F2B5C"/>
                 </a:solidFill>
                 <a:latin typeface="Arial"/>
-              </a:defRPr>
-            </a:pPr>
-            <a:r>
-              <a:t>دالة اشتقاق المفاتيح القياسية: HKDF-SHA256 (RFC 5869)</a:t>
+              </a:rPr>
+              <a:t>دالة اشتقاق المفاتيح القياسية المستقلة</a:t>
             </a:r>
           </a:p>
         </p:txBody>
@@ -8170,8 +9323,8 @@
         </p:nvSpPr>
         <p:spPr>
           <a:xfrm>
-            <a:off x="8961120" y="621792"/>
-            <a:ext cx="2377440" cy="438912"/>
+            <a:off x="822960" y="621792"/>
+            <a:ext cx="3017520" cy="502920"/>
           </a:xfrm>
           <a:prstGeom prst="roundRect">
             <a:avLst/>
@@ -8203,16 +9356,15 @@
           <a:bodyPr rtlCol="0" anchor="ctr"/>
           <a:lstStyle/>
           <a:p>
-            <a:pPr algn="ctr">
-              <a:defRPr sz="1200" b="1">
+            <a:pPr algn="ctr" rtl="0"/>
+            <a:r>
+              <a:rPr sz="1400" b="1" lang="en-US" rtl="0">
                 <a:solidFill>
                   <a:srgbClr val="059669"/>
                 </a:solidFill>
                 <a:latin typeface="Consolas"/>
-              </a:defRPr>
-            </a:pPr>
-            <a:r>
-              <a:t>RFC 5869 TESTED</a:t>
+              </a:rPr>
+              <a:t>HKDF-SHA256 (RFC 5869)</a:t>
             </a:r>
           </a:p>
         </p:txBody>
@@ -8225,7 +9377,7 @@
         </p:nvSpPr>
         <p:spPr>
           <a:xfrm>
-            <a:off x="822960" y="1353312"/>
+            <a:off x="822960" y="1325880"/>
             <a:ext cx="10515600" cy="18288"/>
           </a:xfrm>
           <a:prstGeom prst="rect">
@@ -8268,8 +9420,8 @@
         </p:nvSpPr>
         <p:spPr>
           <a:xfrm>
-            <a:off x="822960" y="6309360"/>
-            <a:ext cx="7315200" cy="320040"/>
+            <a:off x="822960" y="6355080"/>
+            <a:ext cx="10515600" cy="320040"/>
           </a:xfrm>
           <a:prstGeom prst="rect">
             <a:avLst/>
@@ -8282,16 +9434,15 @@
           </a:bodyPr>
           <a:lstStyle/>
           <a:p>
-            <a:pPr>
-              <a:defRPr sz="1100">
+            <a:pPr algn="r" rtl="1"/>
+            <a:r>
+              <a:rPr sz="1050" b="0" lang="ar-SA" rtl="1">
                 <a:solidFill>
                   <a:srgbClr val="475569"/>
                 </a:solidFill>
                 <a:latin typeface="Arial"/>
-              </a:defRPr>
-            </a:pPr>
-            <a:r>
-              <a:t>مشروع تخرج LOCAL CONTACT — مناقشة أكاديمية محكمة</a:t>
+              </a:rPr>
+              <a:t>مناقشة مشروع التخرج الأكاديمية — نظام اتصال محلي مستقل دون خادم وسيط</a:t>
             </a:r>
           </a:p>
         </p:txBody>
@@ -8304,8 +9455,8 @@
         </p:nvSpPr>
         <p:spPr>
           <a:xfrm>
-            <a:off x="822960" y="1645920"/>
-            <a:ext cx="10515600" cy="4389120"/>
+            <a:off x="6217920" y="1554480"/>
+            <a:ext cx="5120640" cy="1828800"/>
           </a:xfrm>
           <a:prstGeom prst="roundRect">
             <a:avLst/>
@@ -8337,96 +9488,368 @@
           <a:bodyPr rtlCol="0" anchor="ctr" wrap="square"/>
           <a:lstStyle/>
           <a:p>
-            <a:pPr algn="ctr">
-              <a:defRPr sz="2200" b="1">
+            <a:pPr algn="r" rtl="1"/>
+            <a:r>
+              <a:rPr sz="1900" b="1" lang="ar-SA" rtl="1">
                 <a:solidFill>
                   <a:srgbClr val="0F2B5C"/>
                 </a:solidFill>
                 <a:latin typeface="Arial"/>
-              </a:defRPr>
+              </a:rPr>
+              <a:t>مرحلة الاستخلاص</a:t>
+            </a:r>
+          </a:p>
+          <a:p>
+            <a:pPr algn="r" rtl="0">
+              <a:spcBef>
+                <a:spcPts val="300"/>
+              </a:spcBef>
             </a:pPr>
             <a:r>
-              <a:t>⚙️ معمارية اشتقاق المفاتيح وفق المعيار الدولي RFC 5869:</a:t>
-            </a:r>
-          </a:p>
-          <a:p>
-            <a:pPr>
+              <a:rPr sz="1300" b="1" lang="en-US" rtl="0">
+                <a:solidFill>
+                  <a:srgbClr val="1E40AF"/>
+                </a:solidFill>
+                <a:latin typeface="Consolas"/>
+              </a:rPr>
+              <a:t>[HKDF-Extract Stage]</a:t>
+            </a:r>
+          </a:p>
+          <a:p>
+            <a:pPr algn="r" rtl="1">
               <a:spcBef>
-                <a:spcPts val="1200"/>
+                <a:spcPts val="600"/>
               </a:spcBef>
-              <a:defRPr sz="1800" b="1">
+            </a:pPr>
+            <a:r>
+              <a:rPr sz="1500" b="0" lang="ar-SA" rtl="1">
                 <a:solidFill>
                   <a:srgbClr val="0F172A"/>
                 </a:solidFill>
                 <a:latin typeface="Arial"/>
-              </a:defRPr>
+              </a:rPr>
+              <a:t>تحويل السر المشترك الناتج من تبادل المفاتيح مع الملح إلى مفتاح عالي الإنتروبيا.</a:t>
+            </a:r>
+          </a:p>
+        </p:txBody>
+      </p:sp>
+      <p:sp>
+        <p:nvSpPr>
+          <p:cNvPr id="10" name="Rounded Rectangle 9"/>
+          <p:cNvSpPr/>
+          <p:nvPr/>
+        </p:nvSpPr>
+        <p:spPr>
+          <a:xfrm>
+            <a:off x="822960" y="1554480"/>
+            <a:ext cx="5120640" cy="1828800"/>
+          </a:xfrm>
+          <a:prstGeom prst="roundRect">
+            <a:avLst/>
+          </a:prstGeom>
+          <a:solidFill>
+            <a:srgbClr val="F8FAFC"/>
+          </a:solidFill>
+          <a:ln w="19050">
+            <a:solidFill>
+              <a:srgbClr val="CBD5E1"/>
+            </a:solidFill>
+          </a:ln>
+        </p:spPr>
+        <p:style>
+          <a:lnRef idx="1">
+            <a:schemeClr val="accent1"/>
+          </a:lnRef>
+          <a:fillRef idx="3">
+            <a:schemeClr val="accent1"/>
+          </a:fillRef>
+          <a:effectRef idx="2">
+            <a:schemeClr val="accent1"/>
+          </a:effectRef>
+          <a:fontRef idx="minor">
+            <a:schemeClr val="lt1"/>
+          </a:fontRef>
+        </p:style>
+        <p:txBody>
+          <a:bodyPr rtlCol="0" anchor="ctr" wrap="square"/>
+          <a:lstStyle/>
+          <a:p>
+            <a:pPr algn="r" rtl="1"/>
+            <a:r>
+              <a:rPr sz="1900" b="1" lang="ar-SA" rtl="1">
+                <a:solidFill>
+                  <a:srgbClr val="0F2B5C"/>
+                </a:solidFill>
+                <a:latin typeface="Arial"/>
+              </a:rPr>
+              <a:t>مرحلة التوسيع</a:t>
+            </a:r>
+          </a:p>
+          <a:p>
+            <a:pPr algn="r" rtl="0">
+              <a:spcBef>
+                <a:spcPts val="300"/>
+              </a:spcBef>
             </a:pPr>
             <a:r>
-              <a:t>• مرحلة الاستخلاص (Extract): تحويل السر المشترك الناتج من ECDH مع Salt شبكي إلى مفتاح شبه عشوائي (PRK) عالي الإنتروبيا.</a:t>
-            </a:r>
-          </a:p>
-          <a:p>
-            <a:pPr>
+              <a:rPr sz="1300" b="1" lang="en-US" rtl="0">
+                <a:solidFill>
+                  <a:srgbClr val="1E40AF"/>
+                </a:solidFill>
+                <a:latin typeface="Consolas"/>
+              </a:rPr>
+              <a:t>[HKDF-Expand Stage]</a:t>
+            </a:r>
+          </a:p>
+          <a:p>
+            <a:pPr algn="r" rtl="1">
               <a:spcBef>
-                <a:spcPts val="1200"/>
+                <a:spcPts val="600"/>
               </a:spcBef>
-              <a:defRPr sz="1800" b="1">
+            </a:pPr>
+            <a:r>
+              <a:rPr sz="1500" b="0" lang="ar-SA" rtl="1">
                 <a:solidFill>
                   <a:srgbClr val="0F172A"/>
                 </a:solidFill>
                 <a:latin typeface="Arial"/>
-              </a:defRPr>
+              </a:rPr>
+              <a:t>اشتقاق مفاتيح تشفير مستقلة بطول 256 بت باستخدام سياقات مختلفة لكل مسار.</a:t>
+            </a:r>
+          </a:p>
+        </p:txBody>
+      </p:sp>
+      <p:sp>
+        <p:nvSpPr>
+          <p:cNvPr id="11" name="Rounded Rectangle 10"/>
+          <p:cNvSpPr/>
+          <p:nvPr/>
+        </p:nvSpPr>
+        <p:spPr>
+          <a:xfrm>
+            <a:off x="6217920" y="3566160"/>
+            <a:ext cx="5120640" cy="1828800"/>
+          </a:xfrm>
+          <a:prstGeom prst="roundRect">
+            <a:avLst/>
+          </a:prstGeom>
+          <a:solidFill>
+            <a:srgbClr val="F8FAFC"/>
+          </a:solidFill>
+          <a:ln w="19050">
+            <a:solidFill>
+              <a:srgbClr val="CBD5E1"/>
+            </a:solidFill>
+          </a:ln>
+        </p:spPr>
+        <p:style>
+          <a:lnRef idx="1">
+            <a:schemeClr val="accent1"/>
+          </a:lnRef>
+          <a:fillRef idx="3">
+            <a:schemeClr val="accent1"/>
+          </a:fillRef>
+          <a:effectRef idx="2">
+            <a:schemeClr val="accent1"/>
+          </a:effectRef>
+          <a:fontRef idx="minor">
+            <a:schemeClr val="lt1"/>
+          </a:fontRef>
+        </p:style>
+        <p:txBody>
+          <a:bodyPr rtlCol="0" anchor="ctr" wrap="square"/>
+          <a:lstStyle/>
+          <a:p>
+            <a:pPr algn="r" rtl="1"/>
+            <a:r>
+              <a:rPr sz="1900" b="1" lang="ar-SA" rtl="1">
+                <a:solidFill>
+                  <a:srgbClr val="0F2B5C"/>
+                </a:solidFill>
+                <a:latin typeface="Arial"/>
+              </a:rPr>
+              <a:t>فصل قنوات الإرسال والاستقبال</a:t>
+            </a:r>
+          </a:p>
+          <a:p>
+            <a:pPr algn="r" rtl="0">
+              <a:spcBef>
+                <a:spcPts val="300"/>
+              </a:spcBef>
             </a:pPr>
             <a:r>
-              <a:t>• مرحلة التوسيع (Expand): اشتقاق مفاتيح مستقلة بطول 256-bit باستخدام سياقات مختلفة (Context Info).</a:t>
-            </a:r>
-          </a:p>
-          <a:p>
-            <a:pPr>
+              <a:rPr sz="1300" b="1" lang="en-US" rtl="0">
+                <a:solidFill>
+                  <a:srgbClr val="059669"/>
+                </a:solidFill>
+                <a:latin typeface="Consolas"/>
+              </a:rPr>
+              <a:t>[Separate TX / RX Keys]</a:t>
+            </a:r>
+          </a:p>
+          <a:p>
+            <a:pPr algn="r" rtl="1">
               <a:spcBef>
-                <a:spcPts val="1200"/>
+                <a:spcPts val="600"/>
               </a:spcBef>
-              <a:defRPr sz="1800" b="1">
+            </a:pPr>
+            <a:r>
+              <a:rPr sz="1500" b="0" lang="ar-SA" rtl="1">
                 <a:solidFill>
                   <a:srgbClr val="0F172A"/>
                 </a:solidFill>
                 <a:latin typeface="Arial"/>
-              </a:defRPr>
+              </a:rPr>
+              <a:t>اشتقاق مفتاح مستقل للإرسال ومفتاح مستقل للاستقبال لمنع هجمات الانعكاس والخلط.</a:t>
+            </a:r>
+          </a:p>
+        </p:txBody>
+      </p:sp>
+      <p:sp>
+        <p:nvSpPr>
+          <p:cNvPr id="12" name="Rounded Rectangle 11"/>
+          <p:cNvSpPr/>
+          <p:nvPr/>
+        </p:nvSpPr>
+        <p:spPr>
+          <a:xfrm>
+            <a:off x="822960" y="3566160"/>
+            <a:ext cx="5120640" cy="1828800"/>
+          </a:xfrm>
+          <a:prstGeom prst="roundRect">
+            <a:avLst/>
+          </a:prstGeom>
+          <a:solidFill>
+            <a:srgbClr val="F8FAFC"/>
+          </a:solidFill>
+          <a:ln w="19050">
+            <a:solidFill>
+              <a:srgbClr val="CBD5E1"/>
+            </a:solidFill>
+          </a:ln>
+        </p:spPr>
+        <p:style>
+          <a:lnRef idx="1">
+            <a:schemeClr val="accent1"/>
+          </a:lnRef>
+          <a:fillRef idx="3">
+            <a:schemeClr val="accent1"/>
+          </a:fillRef>
+          <a:effectRef idx="2">
+            <a:schemeClr val="accent1"/>
+          </a:effectRef>
+          <a:fontRef idx="minor">
+            <a:schemeClr val="lt1"/>
+          </a:fontRef>
+        </p:style>
+        <p:txBody>
+          <a:bodyPr rtlCol="0" anchor="ctr" wrap="square"/>
+          <a:lstStyle/>
+          <a:p>
+            <a:pPr algn="r" rtl="1"/>
+            <a:r>
+              <a:rPr sz="1900" b="1" lang="ar-SA" rtl="1">
+                <a:solidFill>
+                  <a:srgbClr val="0F2B5C"/>
+                </a:solidFill>
+                <a:latin typeface="Arial"/>
+              </a:rPr>
+              <a:t>مطابقة المعايير الدولية</a:t>
+            </a:r>
+          </a:p>
+          <a:p>
+            <a:pPr algn="r" rtl="0">
+              <a:spcBef>
+                <a:spcPts val="300"/>
+              </a:spcBef>
             </a:pPr>
             <a:r>
-              <a:t>• فصل مفاتيح الإرسال والاستقبال: اشتقاق مفتاح TX للإرسال ومفتاح RX للاستقبال لمنع هجمات التكرار والخلط.</a:t>
-            </a:r>
-          </a:p>
-          <a:p>
-            <a:pPr>
+              <a:rPr sz="1300" b="1" lang="en-US" rtl="0">
+                <a:solidFill>
+                  <a:srgbClr val="059669"/>
+                </a:solidFill>
+                <a:latin typeface="Consolas"/>
+              </a:rPr>
+              <a:t>[RFC 5869 Test Vectors: 8/8 Passed]</a:t>
+            </a:r>
+          </a:p>
+          <a:p>
+            <a:pPr algn="r" rtl="1">
               <a:spcBef>
-                <a:spcPts val="1200"/>
+                <a:spcPts val="600"/>
               </a:spcBef>
-              <a:defRPr sz="1800" b="1">
+            </a:pPr>
+            <a:r>
+              <a:rPr sz="1500" b="0" lang="ar-SA" rtl="1">
                 <a:solidFill>
                   <a:srgbClr val="0F172A"/>
                 </a:solidFill>
                 <a:latin typeface="Arial"/>
-              </a:defRPr>
-            </a:pPr>
-            <a:r>
-              <a:t>• استبعاد المفاتيح الضعيفة: ضمان توزيع بتات المفتاح بشكل متجانس إحصائياً بما يتوافق مع متطلبات AES-256.</a:t>
-            </a:r>
-          </a:p>
-          <a:p>
-            <a:pPr>
-              <a:spcBef>
-                <a:spcPts val="1200"/>
-              </a:spcBef>
-              <a:defRPr sz="1800" b="1">
-                <a:solidFill>
-                  <a:srgbClr val="0F172A"/>
-                </a:solidFill>
-                <a:latin typeface="Arial"/>
-              </a:defRPr>
-            </a:pPr>
-            <a:r>
-              <a:t>• الملف والاختبارات: الملف: HandshakeCryptoUtils.kt تم التحقق منه بمطابقة نواقل الاختبار الرسمية (Test Vectors) في KeyDerivationTest.</a:t>
+              </a:rPr>
+              <a:t>مطابقة تامة لنواقل الاختبار القياسية المنصوص عليها في وثيقة المعيار الدولي.</a:t>
+            </a:r>
+          </a:p>
+        </p:txBody>
+      </p:sp>
+      <p:sp>
+        <p:nvSpPr>
+          <p:cNvPr id="13" name="Rounded Rectangle 12"/>
+          <p:cNvSpPr/>
+          <p:nvPr/>
+        </p:nvSpPr>
+        <p:spPr>
+          <a:xfrm>
+            <a:off x="822960" y="5623560"/>
+            <a:ext cx="10515600" cy="594360"/>
+          </a:xfrm>
+          <a:prstGeom prst="roundRect">
+            <a:avLst/>
+          </a:prstGeom>
+          <a:solidFill>
+            <a:srgbClr val="F8FAFC"/>
+          </a:solidFill>
+          <a:ln w="12700">
+            <a:solidFill>
+              <a:srgbClr val="CBD5E1"/>
+            </a:solidFill>
+          </a:ln>
+        </p:spPr>
+        <p:style>
+          <a:lnRef idx="1">
+            <a:schemeClr val="accent1"/>
+          </a:lnRef>
+          <a:fillRef idx="3">
+            <a:schemeClr val="accent1"/>
+          </a:fillRef>
+          <a:effectRef idx="2">
+            <a:schemeClr val="accent1"/>
+          </a:effectRef>
+          <a:fontRef idx="minor">
+            <a:schemeClr val="lt1"/>
+          </a:fontRef>
+        </p:style>
+        <p:txBody>
+          <a:bodyPr rtlCol="0" anchor="ctr"/>
+          <a:lstStyle/>
+          <a:p>
+            <a:pPr algn="r" rtl="1"/>
+            <a:r>
+              <a:rPr sz="1200" b="1" lang="ar-SA" rtl="1">
+                <a:solidFill>
+                  <a:srgbClr val="0F2B5C"/>
+                </a:solidFill>
+                <a:latin typeface="Arial"/>
+              </a:rPr>
+              <a:t>المكون البرمجي: حزمة اختبارات اشتقاق المفاتيح  |  </a:t>
+            </a:r>
+            <a:r>
+              <a:rPr sz="1200" b="1" lang="en-US" rtl="0">
+                <a:solidFill>
+                  <a:srgbClr val="1E40AF"/>
+                </a:solidFill>
+                <a:latin typeface="Consolas"/>
+              </a:rPr>
+              <a:t>app/src/test/java/com/example/network/KeyDerivationTest.kt</a:t>
             </a:r>
           </a:p>
         </p:txBody>
@@ -8458,13 +9881,13 @@
         <p:spPr>
           <a:xfrm>
             <a:off x="0" y="0"/>
-            <a:ext cx="12191695" cy="91440"/>
+            <a:ext cx="12191695" cy="109728"/>
           </a:xfrm>
           <a:prstGeom prst="rect">
             <a:avLst/>
           </a:prstGeom>
           <a:solidFill>
-            <a:srgbClr val="1E40AF"/>
+            <a:srgbClr val="0F2B5C"/>
           </a:solidFill>
           <a:ln>
             <a:noFill/>
@@ -8500,44 +9923,8 @@
         </p:nvSpPr>
         <p:spPr>
           <a:xfrm>
-            <a:off x="822960" y="228600"/>
-            <a:ext cx="7772400" cy="320040"/>
-          </a:xfrm>
-          <a:prstGeom prst="rect">
-            <a:avLst/>
-          </a:prstGeom>
-          <a:noFill/>
-        </p:spPr>
-        <p:txBody>
-          <a:bodyPr wrap="square">
-            <a:spAutoFit/>
-          </a:bodyPr>
-          <a:lstStyle/>
-          <a:p>
-            <a:pPr>
-              <a:defRPr sz="1300" b="1">
-                <a:solidFill>
-                  <a:srgbClr val="1E40AF"/>
-                </a:solidFill>
-                <a:latin typeface="Arial"/>
-              </a:defRPr>
-            </a:pPr>
-            <a:r>
-              <a:t>LOCAL CONTACT P2P  |  إدارة الجلسات التشفيرية</a:t>
-            </a:r>
-          </a:p>
-        </p:txBody>
-      </p:sp>
-      <p:sp>
-        <p:nvSpPr>
-          <p:cNvPr id="4" name="TextBox 3"/>
-          <p:cNvSpPr txBox="1"/>
-          <p:nvPr/>
-        </p:nvSpPr>
-        <p:spPr>
-          <a:xfrm>
-            <a:off x="10241280" y="6309360"/>
-            <a:ext cx="1188720" cy="365760"/>
+            <a:off x="3200400" y="228600"/>
+            <a:ext cx="8138160" cy="320040"/>
           </a:xfrm>
           <a:prstGeom prst="rect">
             <a:avLst/>
@@ -8550,16 +9937,50 @@
           </a:bodyPr>
           <a:lstStyle/>
           <a:p>
-            <a:pPr algn="r">
-              <a:defRPr sz="1400" b="1">
-                <a:solidFill>
-                  <a:srgbClr val="0F2B5C"/>
-                </a:solidFill>
-                <a:latin typeface="Arial"/>
-              </a:defRPr>
-            </a:pPr>
-            <a:r>
-              <a:t>6 / 12</a:t>
+            <a:pPr algn="r" rtl="1"/>
+            <a:r>
+              <a:rPr sz="1300" b="1" lang="ar-SA" rtl="1">
+                <a:solidFill>
+                  <a:srgbClr val="1E40AF"/>
+                </a:solidFill>
+                <a:latin typeface="Arial"/>
+              </a:rPr>
+              <a:t>مشروع الاتصال المحلي المباشر  •  إدارة الجلسات</a:t>
+            </a:r>
+          </a:p>
+        </p:txBody>
+      </p:sp>
+      <p:sp>
+        <p:nvSpPr>
+          <p:cNvPr id="4" name="TextBox 3"/>
+          <p:cNvSpPr txBox="1"/>
+          <p:nvPr/>
+        </p:nvSpPr>
+        <p:spPr>
+          <a:xfrm>
+            <a:off x="822960" y="228600"/>
+            <a:ext cx="1828800" cy="320040"/>
+          </a:xfrm>
+          <a:prstGeom prst="rect">
+            <a:avLst/>
+          </a:prstGeom>
+          <a:noFill/>
+        </p:spPr>
+        <p:txBody>
+          <a:bodyPr wrap="none">
+            <a:spAutoFit/>
+          </a:bodyPr>
+          <a:lstStyle/>
+          <a:p>
+            <a:pPr algn="l" rtl="0"/>
+            <a:r>
+              <a:rPr sz="1200" b="1" lang="en-US" rtl="0">
+                <a:solidFill>
+                  <a:srgbClr val="475569"/>
+                </a:solidFill>
+                <a:latin typeface="Consolas"/>
+              </a:rPr>
+              <a:t>Slide 6 / 12</a:t>
             </a:r>
           </a:p>
         </p:txBody>
@@ -8572,8 +9993,8 @@
         </p:nvSpPr>
         <p:spPr>
           <a:xfrm>
-            <a:off x="822960" y="594360"/>
-            <a:ext cx="8961120" cy="685800"/>
+            <a:off x="4023360" y="566928"/>
+            <a:ext cx="7315200" cy="685800"/>
           </a:xfrm>
           <a:prstGeom prst="rect">
             <a:avLst/>
@@ -8581,21 +10002,20 @@
           <a:noFill/>
         </p:spPr>
         <p:txBody>
-          <a:bodyPr wrap="square">
+          <a:bodyPr wrap="none">
             <a:spAutoFit/>
           </a:bodyPr>
           <a:lstStyle/>
           <a:p>
-            <a:pPr>
-              <a:defRPr sz="2800" b="1">
+            <a:pPr algn="r" rtl="1"/>
+            <a:r>
+              <a:rPr sz="3000" b="1" lang="ar-SA" rtl="1">
                 <a:solidFill>
                   <a:srgbClr val="0F2B5C"/>
                 </a:solidFill>
                 <a:latin typeface="Arial"/>
-              </a:defRPr>
-            </a:pPr>
-            <a:r>
-              <a:t>إدارة مفاتيح الجلسات المؤقتة (Session Key Management)</a:t>
+              </a:rPr>
+              <a:t>إدارة مفاتيح الجلسات المؤقتة في الذاكرة</a:t>
             </a:r>
           </a:p>
         </p:txBody>
@@ -8608,8 +10028,8 @@
         </p:nvSpPr>
         <p:spPr>
           <a:xfrm>
-            <a:off x="8961120" y="621792"/>
-            <a:ext cx="2377440" cy="438912"/>
+            <a:off x="822960" y="621792"/>
+            <a:ext cx="3017520" cy="502920"/>
           </a:xfrm>
           <a:prstGeom prst="roundRect">
             <a:avLst/>
@@ -8641,16 +10061,15 @@
           <a:bodyPr rtlCol="0" anchor="ctr"/>
           <a:lstStyle/>
           <a:p>
-            <a:pPr algn="ctr">
-              <a:defRPr sz="1200" b="1">
+            <a:pPr algn="ctr" rtl="0"/>
+            <a:r>
+              <a:rPr sz="1400" b="1" lang="en-US" rtl="0">
                 <a:solidFill>
                   <a:srgbClr val="1E40AF"/>
                 </a:solidFill>
                 <a:latin typeface="Consolas"/>
-              </a:defRPr>
-            </a:pPr>
-            <a:r>
-              <a:t>INTEGRATED IN CODE</a:t>
+              </a:rPr>
+              <a:t>Session Key Management</a:t>
             </a:r>
           </a:p>
         </p:txBody>
@@ -8663,7 +10082,7 @@
         </p:nvSpPr>
         <p:spPr>
           <a:xfrm>
-            <a:off x="822960" y="1353312"/>
+            <a:off x="822960" y="1325880"/>
             <a:ext cx="10515600" cy="18288"/>
           </a:xfrm>
           <a:prstGeom prst="rect">
@@ -8706,8 +10125,8 @@
         </p:nvSpPr>
         <p:spPr>
           <a:xfrm>
-            <a:off x="822960" y="6309360"/>
-            <a:ext cx="7315200" cy="320040"/>
+            <a:off x="822960" y="6355080"/>
+            <a:ext cx="10515600" cy="320040"/>
           </a:xfrm>
           <a:prstGeom prst="rect">
             <a:avLst/>
@@ -8720,16 +10139,15 @@
           </a:bodyPr>
           <a:lstStyle/>
           <a:p>
-            <a:pPr>
-              <a:defRPr sz="1100">
+            <a:pPr algn="r" rtl="1"/>
+            <a:r>
+              <a:rPr sz="1050" b="0" lang="ar-SA" rtl="1">
                 <a:solidFill>
                   <a:srgbClr val="475569"/>
                 </a:solidFill>
                 <a:latin typeface="Arial"/>
-              </a:defRPr>
-            </a:pPr>
-            <a:r>
-              <a:t>مشروع تخرج LOCAL CONTACT — مناقشة أكاديمية محكمة</a:t>
+              </a:rPr>
+              <a:t>مناقشة مشروع التخرج الأكاديمية — نظام اتصال محلي مستقل دون خادم وسيط</a:t>
             </a:r>
           </a:p>
         </p:txBody>
@@ -8742,8 +10160,8 @@
         </p:nvSpPr>
         <p:spPr>
           <a:xfrm>
-            <a:off x="822960" y="1645920"/>
-            <a:ext cx="5120640" cy="4389120"/>
+            <a:off x="6217920" y="1554480"/>
+            <a:ext cx="5120640" cy="1828800"/>
           </a:xfrm>
           <a:prstGeom prst="roundRect">
             <a:avLst/>
@@ -8775,80 +10193,47 @@
           <a:bodyPr rtlCol="0" anchor="ctr" wrap="square"/>
           <a:lstStyle/>
           <a:p>
-            <a:pPr algn="ctr">
-              <a:defRPr sz="2200" b="1">
+            <a:pPr algn="r" rtl="1"/>
+            <a:r>
+              <a:rPr sz="1900" b="1" lang="ar-SA" rtl="1">
                 <a:solidFill>
                   <a:srgbClr val="0F2B5C"/>
                 </a:solidFill>
                 <a:latin typeface="Arial"/>
-              </a:defRPr>
+              </a:rPr>
+              <a:t>عزل الجلسات النشطة</a:t>
+            </a:r>
+          </a:p>
+          <a:p>
+            <a:pPr algn="r" rtl="0">
+              <a:spcBef>
+                <a:spcPts val="300"/>
+              </a:spcBef>
             </a:pPr>
             <a:r>
-              <a:t>🎯 دور مدير مفاتيح الجلسات:</a:t>
-            </a:r>
-          </a:p>
-          <a:p>
-            <a:pPr>
+              <a:rPr sz="1300" b="1" lang="en-US" rtl="0">
+                <a:solidFill>
+                  <a:srgbClr val="1E40AF"/>
+                </a:solidFill>
+                <a:latin typeface="Consolas"/>
+              </a:rPr>
+              <a:t>[Peer Session Isolation]</a:t>
+            </a:r>
+          </a:p>
+          <a:p>
+            <a:pPr algn="r" rtl="1">
               <a:spcBef>
-                <a:spcPts val="1200"/>
+                <a:spcPts val="600"/>
               </a:spcBef>
-              <a:defRPr sz="1700" b="1">
+            </a:pPr>
+            <a:r>
+              <a:rPr sz="1500" b="0" lang="ar-SA" rtl="1">
                 <a:solidFill>
                   <a:srgbClr val="0F172A"/>
                 </a:solidFill>
                 <a:latin typeface="Arial"/>
-              </a:defRPr>
-            </a:pPr>
-            <a:r>
-              <a:t>• عزل الجلسات: لكل جهاز قرين (Peer) جدول مفاتيح جلسة مستقل تماماً عن الآخرين.</a:t>
-            </a:r>
-          </a:p>
-          <a:p>
-            <a:pPr>
-              <a:spcBef>
-                <a:spcPts val="1200"/>
-              </a:spcBef>
-              <a:defRPr sz="1700" b="1">
-                <a:solidFill>
-                  <a:srgbClr val="0F172A"/>
-                </a:solidFill>
-                <a:latin typeface="Arial"/>
-              </a:defRPr>
-            </a:pPr>
-            <a:r>
-              <a:t>• التخزين في الذاكرة الحية فقط: عدم كتابة مفاتيح الجلسات المؤقتة في الذاكرة الدائمة (RAM Only).</a:t>
-            </a:r>
-          </a:p>
-          <a:p>
-            <a:pPr>
-              <a:spcBef>
-                <a:spcPts val="1200"/>
-              </a:spcBef>
-              <a:defRPr sz="1700" b="1">
-                <a:solidFill>
-                  <a:srgbClr val="0F172A"/>
-                </a:solidFill>
-                <a:latin typeface="Arial"/>
-              </a:defRPr>
-            </a:pPr>
-            <a:r>
-              <a:t>• مؤقت انتهاء الجلسة: إتلاف المفاتيح تلقائياً عند انقطاع الاتصال أو إغلاق التطبيق.</a:t>
-            </a:r>
-          </a:p>
-          <a:p>
-            <a:pPr>
-              <a:spcBef>
-                <a:spcPts val="1200"/>
-              </a:spcBef>
-              <a:defRPr sz="1700" b="1">
-                <a:solidFill>
-                  <a:srgbClr val="0F172A"/>
-                </a:solidFill>
-                <a:latin typeface="Arial"/>
-              </a:defRPr>
-            </a:pPr>
-            <a:r>
-              <a:t>• حماية متعددة المسارات: دعم التشفير المتزامن لعدة محادثات دون تصادم المفاتيح.</a:t>
+              </a:rPr>
+              <a:t>جدول مفاتيح مستقل لكل جهاز قرين متصل، مما يمنع تسرب أو تداخل البيانات بين المحادثات.</a:t>
             </a:r>
           </a:p>
         </p:txBody>
@@ -8861,8 +10246,8 @@
         </p:nvSpPr>
         <p:spPr>
           <a:xfrm>
-            <a:off x="6217920" y="1645920"/>
-            <a:ext cx="5120640" cy="4389120"/>
+            <a:off x="822960" y="1554480"/>
+            <a:ext cx="5120640" cy="1828800"/>
           </a:xfrm>
           <a:prstGeom prst="roundRect">
             <a:avLst/>
@@ -8894,80 +10279,282 @@
           <a:bodyPr rtlCol="0" anchor="ctr" wrap="square"/>
           <a:lstStyle/>
           <a:p>
-            <a:pPr algn="ctr">
-              <a:defRPr sz="2200" b="1">
+            <a:pPr algn="r" rtl="1"/>
+            <a:r>
+              <a:rPr sz="1900" b="1" lang="ar-SA" rtl="1">
                 <a:solidFill>
                   <a:srgbClr val="0F2B5C"/>
                 </a:solidFill>
                 <a:latin typeface="Arial"/>
-              </a:defRPr>
+              </a:rPr>
+              <a:t>الحفظ في الذاكرة الحية فقط</a:t>
+            </a:r>
+          </a:p>
+          <a:p>
+            <a:pPr algn="r" rtl="0">
+              <a:spcBef>
+                <a:spcPts val="300"/>
+              </a:spcBef>
             </a:pPr>
             <a:r>
-              <a:t>📂 الملف والمسؤولية في الكود:</a:t>
-            </a:r>
-          </a:p>
-          <a:p>
-            <a:pPr>
+              <a:rPr sz="1300" b="1" lang="en-US" rtl="0">
+                <a:solidFill>
+                  <a:srgbClr val="059669"/>
+                </a:solidFill>
+                <a:latin typeface="Consolas"/>
+              </a:rPr>
+              <a:t>[RAM-Only Key Storage]</a:t>
+            </a:r>
+          </a:p>
+          <a:p>
+            <a:pPr algn="r" rtl="1">
               <a:spcBef>
-                <a:spcPts val="800"/>
+                <a:spcPts val="600"/>
               </a:spcBef>
-              <a:defRPr sz="1300" b="1">
+            </a:pPr>
+            <a:r>
+              <a:rPr sz="1500" b="0" lang="ar-SA" rtl="1">
+                <a:solidFill>
+                  <a:srgbClr val="0F172A"/>
+                </a:solidFill>
+                <a:latin typeface="Arial"/>
+              </a:rPr>
+              <a:t>عدم كتابة مفاتيح الجلسات في قاعدة البيانات أو التخزين الدائم لضمان الأمان الفوري.</a:t>
+            </a:r>
+          </a:p>
+        </p:txBody>
+      </p:sp>
+      <p:sp>
+        <p:nvSpPr>
+          <p:cNvPr id="11" name="Rounded Rectangle 10"/>
+          <p:cNvSpPr/>
+          <p:nvPr/>
+        </p:nvSpPr>
+        <p:spPr>
+          <a:xfrm>
+            <a:off x="6217920" y="3566160"/>
+            <a:ext cx="5120640" cy="1828800"/>
+          </a:xfrm>
+          <a:prstGeom prst="roundRect">
+            <a:avLst/>
+          </a:prstGeom>
+          <a:solidFill>
+            <a:srgbClr val="F8FAFC"/>
+          </a:solidFill>
+          <a:ln w="19050">
+            <a:solidFill>
+              <a:srgbClr val="CBD5E1"/>
+            </a:solidFill>
+          </a:ln>
+        </p:spPr>
+        <p:style>
+          <a:lnRef idx="1">
+            <a:schemeClr val="accent1"/>
+          </a:lnRef>
+          <a:fillRef idx="3">
+            <a:schemeClr val="accent1"/>
+          </a:fillRef>
+          <a:effectRef idx="2">
+            <a:schemeClr val="accent1"/>
+          </a:effectRef>
+          <a:fontRef idx="minor">
+            <a:schemeClr val="lt1"/>
+          </a:fontRef>
+        </p:style>
+        <p:txBody>
+          <a:bodyPr rtlCol="0" anchor="ctr" wrap="square"/>
+          <a:lstStyle/>
+          <a:p>
+            <a:pPr algn="r" rtl="1"/>
+            <a:r>
+              <a:rPr sz="1900" b="1" lang="ar-SA" rtl="1">
+                <a:solidFill>
+                  <a:srgbClr val="0F2B5C"/>
+                </a:solidFill>
+                <a:latin typeface="Arial"/>
+              </a:rPr>
+              <a:t>إتلاف المفاتيح التلقائي</a:t>
+            </a:r>
+          </a:p>
+          <a:p>
+            <a:pPr algn="r" rtl="0">
+              <a:spcBef>
+                <a:spcPts val="300"/>
+              </a:spcBef>
+            </a:pPr>
+            <a:r>
+              <a:rPr sz="1300" b="1" lang="en-US" rtl="0">
+                <a:solidFill>
+                  <a:srgbClr val="059669"/>
+                </a:solidFill>
+                <a:latin typeface="Consolas"/>
+              </a:rPr>
+              <a:t>[Automatic Key Wipeout]</a:t>
+            </a:r>
+          </a:p>
+          <a:p>
+            <a:pPr algn="r" rtl="1">
+              <a:spcBef>
+                <a:spcPts val="600"/>
+              </a:spcBef>
+            </a:pPr>
+            <a:r>
+              <a:rPr sz="1500" b="0" lang="ar-SA" rtl="1">
+                <a:solidFill>
+                  <a:srgbClr val="0F172A"/>
+                </a:solidFill>
+                <a:latin typeface="Arial"/>
+              </a:rPr>
+              <a:t>حذف المفاتيح من الذاكرة فور انتهاء المحادثة أو إغلاق التطبيق أو انقطاع الاتصال.</a:t>
+            </a:r>
+          </a:p>
+        </p:txBody>
+      </p:sp>
+      <p:sp>
+        <p:nvSpPr>
+          <p:cNvPr id="12" name="Rounded Rectangle 11"/>
+          <p:cNvSpPr/>
+          <p:nvPr/>
+        </p:nvSpPr>
+        <p:spPr>
+          <a:xfrm>
+            <a:off x="822960" y="3566160"/>
+            <a:ext cx="5120640" cy="1828800"/>
+          </a:xfrm>
+          <a:prstGeom prst="roundRect">
+            <a:avLst/>
+          </a:prstGeom>
+          <a:solidFill>
+            <a:srgbClr val="F8FAFC"/>
+          </a:solidFill>
+          <a:ln w="19050">
+            <a:solidFill>
+              <a:srgbClr val="CBD5E1"/>
+            </a:solidFill>
+          </a:ln>
+        </p:spPr>
+        <p:style>
+          <a:lnRef idx="1">
+            <a:schemeClr val="accent1"/>
+          </a:lnRef>
+          <a:fillRef idx="3">
+            <a:schemeClr val="accent1"/>
+          </a:fillRef>
+          <a:effectRef idx="2">
+            <a:schemeClr val="accent1"/>
+          </a:effectRef>
+          <a:fontRef idx="minor">
+            <a:schemeClr val="lt1"/>
+          </a:fontRef>
+        </p:style>
+        <p:txBody>
+          <a:bodyPr rtlCol="0" anchor="ctr" wrap="square"/>
+          <a:lstStyle/>
+          <a:p>
+            <a:pPr algn="r" rtl="1"/>
+            <a:r>
+              <a:rPr sz="1900" b="1" lang="ar-SA" rtl="1">
+                <a:solidFill>
+                  <a:srgbClr val="0F2B5C"/>
+                </a:solidFill>
+                <a:latin typeface="Arial"/>
+              </a:rPr>
+              <a:t>حالة الدمج البرمجي</a:t>
+            </a:r>
+          </a:p>
+          <a:p>
+            <a:pPr algn="r" rtl="0">
+              <a:spcBef>
+                <a:spcPts val="300"/>
+              </a:spcBef>
+            </a:pPr>
+            <a:r>
+              <a:rPr sz="1300" b="1" lang="en-US" rtl="0">
                 <a:solidFill>
                   <a:srgbClr val="1E40AF"/>
                 </a:solidFill>
                 <a:latin typeface="Consolas"/>
-              </a:defRPr>
+              </a:rPr>
+              <a:t>[Integrated in Codebase]</a:t>
+            </a:r>
+          </a:p>
+          <a:p>
+            <a:pPr algn="r" rtl="1">
+              <a:spcBef>
+                <a:spcPts val="600"/>
+              </a:spcBef>
             </a:pPr>
             <a:r>
+              <a:rPr sz="1500" b="0" lang="ar-SA" rtl="1">
+                <a:solidFill>
+                  <a:srgbClr val="0F172A"/>
+                </a:solidFill>
+                <a:latin typeface="Arial"/>
+              </a:rPr>
+              <a:t>مدمج بالكامل في هيكل المشروع البرمجي لتزويد المحركات بالمفاتيح النشطة.</a:t>
+            </a:r>
+          </a:p>
+        </p:txBody>
+      </p:sp>
+      <p:sp>
+        <p:nvSpPr>
+          <p:cNvPr id="13" name="Rounded Rectangle 12"/>
+          <p:cNvSpPr/>
+          <p:nvPr/>
+        </p:nvSpPr>
+        <p:spPr>
+          <a:xfrm>
+            <a:off x="822960" y="5623560"/>
+            <a:ext cx="10515600" cy="594360"/>
+          </a:xfrm>
+          <a:prstGeom prst="roundRect">
+            <a:avLst/>
+          </a:prstGeom>
+          <a:solidFill>
+            <a:srgbClr val="F8FAFC"/>
+          </a:solidFill>
+          <a:ln w="12700">
+            <a:solidFill>
+              <a:srgbClr val="CBD5E1"/>
+            </a:solidFill>
+          </a:ln>
+        </p:spPr>
+        <p:style>
+          <a:lnRef idx="1">
+            <a:schemeClr val="accent1"/>
+          </a:lnRef>
+          <a:fillRef idx="3">
+            <a:schemeClr val="accent1"/>
+          </a:fillRef>
+          <a:effectRef idx="2">
+            <a:schemeClr val="accent1"/>
+          </a:effectRef>
+          <a:fontRef idx="minor">
+            <a:schemeClr val="lt1"/>
+          </a:fontRef>
+        </p:style>
+        <p:txBody>
+          <a:bodyPr rtlCol="0" anchor="ctr"/>
+          <a:lstStyle/>
+          <a:p>
+            <a:pPr algn="r" rtl="1"/>
+            <a:r>
+              <a:rPr sz="1200" b="1" lang="ar-SA" rtl="1">
+                <a:solidFill>
+                  <a:srgbClr val="0F2B5C"/>
+                </a:solidFill>
+                <a:latin typeface="Arial"/>
+              </a:rPr>
+              <a:t>المكون البرمجي: مدير مفاتيح الجلسات المؤقتة  |  </a:t>
+            </a:r>
+            <a:r>
+              <a:rPr sz="1200" b="1" lang="en-US" rtl="0">
+                <a:solidFill>
+                  <a:srgbClr val="1E40AF"/>
+                </a:solidFill>
+                <a:latin typeface="Consolas"/>
+              </a:rPr>
               <a:t>app/src/main/java/com/example/network/PeerSessionKeyManager.kt</a:t>
-            </a:r>
-          </a:p>
-          <a:p>
-            <a:pPr>
-              <a:spcBef>
-                <a:spcPts val="1200"/>
-              </a:spcBef>
-              <a:defRPr sz="1700" b="1">
-                <a:solidFill>
-                  <a:srgbClr val="0F172A"/>
-                </a:solidFill>
-                <a:latin typeface="Arial"/>
-              </a:defRPr>
-            </a:pPr>
-            <a:r>
-              <a:t>• المسؤولية: تتبع حالة المصافحة، تخزين مفاتيح TX و RX لكل PeerID، وإتلاف المفاتيح عند انتهاء الجلسة.</a:t>
-            </a:r>
-          </a:p>
-          <a:p>
-            <a:pPr>
-              <a:spcBef>
-                <a:spcPts val="1200"/>
-              </a:spcBef>
-              <a:defRPr sz="1700" b="1">
-                <a:solidFill>
-                  <a:srgbClr val="0F172A"/>
-                </a:solidFill>
-                <a:latin typeface="Arial"/>
-              </a:defRPr>
-            </a:pPr>
-            <a:r>
-              <a:t>• التكامل: يزود المحركات الشبكية بالمفتاح النشط للقرين بدلاً من الاعتماد على مفتاح ثابت موحد.</a:t>
-            </a:r>
-          </a:p>
-          <a:p>
-            <a:pPr>
-              <a:spcBef>
-                <a:spcPts val="1200"/>
-              </a:spcBef>
-              <a:defRPr sz="1700" b="1">
-                <a:solidFill>
-                  <a:srgbClr val="0F172A"/>
-                </a:solidFill>
-                <a:latin typeface="Arial"/>
-              </a:defRPr>
-            </a:pPr>
-            <a:r>
-              <a:t>• الحالة الهندسية: Integrated in Code — مدمج في هيكل المشروع البرمجي.</a:t>
             </a:r>
           </a:p>
         </p:txBody>
@@ -8999,13 +10586,13 @@
         <p:spPr>
           <a:xfrm>
             <a:off x="0" y="0"/>
-            <a:ext cx="12191695" cy="91440"/>
+            <a:ext cx="12191695" cy="109728"/>
           </a:xfrm>
           <a:prstGeom prst="rect">
             <a:avLst/>
           </a:prstGeom>
           <a:solidFill>
-            <a:srgbClr val="1E40AF"/>
+            <a:srgbClr val="0F2B5C"/>
           </a:solidFill>
           <a:ln>
             <a:noFill/>
@@ -9041,44 +10628,8 @@
         </p:nvSpPr>
         <p:spPr>
           <a:xfrm>
-            <a:off x="822960" y="228600"/>
-            <a:ext cx="7772400" cy="320040"/>
-          </a:xfrm>
-          <a:prstGeom prst="rect">
-            <a:avLst/>
-          </a:prstGeom>
-          <a:noFill/>
-        </p:spPr>
-        <p:txBody>
-          <a:bodyPr wrap="square">
-            <a:spAutoFit/>
-          </a:bodyPr>
-          <a:lstStyle/>
-          <a:p>
-            <a:pPr>
-              <a:defRPr sz="1300" b="1">
-                <a:solidFill>
-                  <a:srgbClr val="1E40AF"/>
-                </a:solidFill>
-                <a:latin typeface="Arial"/>
-              </a:defRPr>
-            </a:pPr>
-            <a:r>
-              <a:t>LOCAL CONTACT P2P  |  هوية الأجهزة والتوقيع الرقمي</a:t>
-            </a:r>
-          </a:p>
-        </p:txBody>
-      </p:sp>
-      <p:sp>
-        <p:nvSpPr>
-          <p:cNvPr id="4" name="TextBox 3"/>
-          <p:cNvSpPr txBox="1"/>
-          <p:nvPr/>
-        </p:nvSpPr>
-        <p:spPr>
-          <a:xfrm>
-            <a:off x="10241280" y="6309360"/>
-            <a:ext cx="1188720" cy="365760"/>
+            <a:off x="3200400" y="228600"/>
+            <a:ext cx="8138160" cy="320040"/>
           </a:xfrm>
           <a:prstGeom prst="rect">
             <a:avLst/>
@@ -9091,16 +10642,50 @@
           </a:bodyPr>
           <a:lstStyle/>
           <a:p>
-            <a:pPr algn="r">
-              <a:defRPr sz="1400" b="1">
-                <a:solidFill>
-                  <a:srgbClr val="0F2B5C"/>
-                </a:solidFill>
-                <a:latin typeface="Arial"/>
-              </a:defRPr>
-            </a:pPr>
-            <a:r>
-              <a:t>7 / 12</a:t>
+            <a:pPr algn="r" rtl="1"/>
+            <a:r>
+              <a:rPr sz="1300" b="1" lang="ar-SA" rtl="1">
+                <a:solidFill>
+                  <a:srgbClr val="1E40AF"/>
+                </a:solidFill>
+                <a:latin typeface="Arial"/>
+              </a:rPr>
+              <a:t>مشروع الاتصال المحلي المباشر  •  هوية الأجهزة والتوقيع</a:t>
+            </a:r>
+          </a:p>
+        </p:txBody>
+      </p:sp>
+      <p:sp>
+        <p:nvSpPr>
+          <p:cNvPr id="4" name="TextBox 3"/>
+          <p:cNvSpPr txBox="1"/>
+          <p:nvPr/>
+        </p:nvSpPr>
+        <p:spPr>
+          <a:xfrm>
+            <a:off x="822960" y="228600"/>
+            <a:ext cx="1828800" cy="320040"/>
+          </a:xfrm>
+          <a:prstGeom prst="rect">
+            <a:avLst/>
+          </a:prstGeom>
+          <a:noFill/>
+        </p:spPr>
+        <p:txBody>
+          <a:bodyPr wrap="none">
+            <a:spAutoFit/>
+          </a:bodyPr>
+          <a:lstStyle/>
+          <a:p>
+            <a:pPr algn="l" rtl="0"/>
+            <a:r>
+              <a:rPr sz="1200" b="1" lang="en-US" rtl="0">
+                <a:solidFill>
+                  <a:srgbClr val="475569"/>
+                </a:solidFill>
+                <a:latin typeface="Consolas"/>
+              </a:rPr>
+              <a:t>Slide 7 / 12</a:t>
             </a:r>
           </a:p>
         </p:txBody>
@@ -9113,8 +10698,8 @@
         </p:nvSpPr>
         <p:spPr>
           <a:xfrm>
-            <a:off x="822960" y="594360"/>
-            <a:ext cx="8961120" cy="685800"/>
+            <a:off x="4023360" y="566928"/>
+            <a:ext cx="7315200" cy="685800"/>
           </a:xfrm>
           <a:prstGeom prst="rect">
             <a:avLst/>
@@ -9122,21 +10707,20 @@
           <a:noFill/>
         </p:spPr>
         <p:txBody>
-          <a:bodyPr wrap="square">
+          <a:bodyPr wrap="none">
             <a:spAutoFit/>
           </a:bodyPr>
           <a:lstStyle/>
           <a:p>
-            <a:pPr>
-              <a:defRPr sz="2800" b="1">
+            <a:pPr algn="r" rtl="1"/>
+            <a:r>
+              <a:rPr sz="3000" b="1" lang="ar-SA" rtl="1">
                 <a:solidFill>
                   <a:srgbClr val="0F2B5C"/>
                 </a:solidFill>
                 <a:latin typeface="Arial"/>
-              </a:defRPr>
-            </a:pPr>
-            <a:r>
-              <a:t>حماية هوية الأجهزة: Android Keystore والتوقيع الرقمي ECDSA</a:t>
+              </a:rPr>
+              <a:t>حماية هوية الأجهزة والتوقيع الرقمي</a:t>
             </a:r>
           </a:p>
         </p:txBody>
@@ -9149,8 +10733,8 @@
         </p:nvSpPr>
         <p:spPr>
           <a:xfrm>
-            <a:off x="8961120" y="621792"/>
-            <a:ext cx="2377440" cy="438912"/>
+            <a:off x="822960" y="621792"/>
+            <a:ext cx="3017520" cy="502920"/>
           </a:xfrm>
           <a:prstGeom prst="roundRect">
             <a:avLst/>
@@ -9182,16 +10766,15 @@
           <a:bodyPr rtlCol="0" anchor="ctr"/>
           <a:lstStyle/>
           <a:p>
-            <a:pPr algn="ctr">
-              <a:defRPr sz="1200" b="1">
+            <a:pPr algn="ctr" rtl="0"/>
+            <a:r>
+              <a:rPr sz="1400" b="1" lang="en-US" rtl="0">
                 <a:solidFill>
                   <a:srgbClr val="1E40AF"/>
                 </a:solidFill>
                 <a:latin typeface="Consolas"/>
-              </a:defRPr>
-            </a:pPr>
-            <a:r>
-              <a:t>HARDWARE BACKED</a:t>
+              </a:rPr>
+              <a:t>Android Keystore &amp; ECDSA</a:t>
             </a:r>
           </a:p>
         </p:txBody>
@@ -9204,7 +10787,7 @@
         </p:nvSpPr>
         <p:spPr>
           <a:xfrm>
-            <a:off x="822960" y="1353312"/>
+            <a:off x="822960" y="1325880"/>
             <a:ext cx="10515600" cy="18288"/>
           </a:xfrm>
           <a:prstGeom prst="rect">
@@ -9247,8 +10830,8 @@
         </p:nvSpPr>
         <p:spPr>
           <a:xfrm>
-            <a:off x="822960" y="6309360"/>
-            <a:ext cx="7315200" cy="320040"/>
+            <a:off x="822960" y="6355080"/>
+            <a:ext cx="10515600" cy="320040"/>
           </a:xfrm>
           <a:prstGeom prst="rect">
             <a:avLst/>
@@ -9261,16 +10844,15 @@
           </a:bodyPr>
           <a:lstStyle/>
           <a:p>
-            <a:pPr>
-              <a:defRPr sz="1100">
+            <a:pPr algn="r" rtl="1"/>
+            <a:r>
+              <a:rPr sz="1050" b="0" lang="ar-SA" rtl="1">
                 <a:solidFill>
                   <a:srgbClr val="475569"/>
                 </a:solidFill>
                 <a:latin typeface="Arial"/>
-              </a:defRPr>
-            </a:pPr>
-            <a:r>
-              <a:t>مشروع تخرج LOCAL CONTACT — مناقشة أكاديمية محكمة</a:t>
+              </a:rPr>
+              <a:t>مناقشة مشروع التخرج الأكاديمية — نظام اتصال محلي مستقل دون خادم وسيط</a:t>
             </a:r>
           </a:p>
         </p:txBody>
@@ -9283,8 +10865,8 @@
         </p:nvSpPr>
         <p:spPr>
           <a:xfrm>
-            <a:off x="822960" y="1645920"/>
-            <a:ext cx="10515600" cy="4389120"/>
+            <a:off x="6217920" y="1554480"/>
+            <a:ext cx="5120640" cy="1828800"/>
           </a:xfrm>
           <a:prstGeom prst="roundRect">
             <a:avLst/>
@@ -9316,96 +10898,368 @@
           <a:bodyPr rtlCol="0" anchor="ctr" wrap="square"/>
           <a:lstStyle/>
           <a:p>
-            <a:pPr algn="ctr">
-              <a:defRPr sz="2200" b="1">
+            <a:pPr algn="r" rtl="1"/>
+            <a:r>
+              <a:rPr sz="1900" b="1" lang="ar-SA" rtl="1">
                 <a:solidFill>
                   <a:srgbClr val="0F2B5C"/>
                 </a:solidFill>
                 <a:latin typeface="Arial"/>
-              </a:defRPr>
+              </a:rPr>
+              <a:t>التخزين في العتاد الآمن</a:t>
+            </a:r>
+          </a:p>
+          <a:p>
+            <a:pPr algn="r" rtl="0">
+              <a:spcBef>
+                <a:spcPts val="300"/>
+              </a:spcBef>
             </a:pPr>
             <a:r>
-              <a:t>🛡️ منظومة الهوية المشفرة والتخزين العتادي الآمن:</a:t>
-            </a:r>
-          </a:p>
-          <a:p>
-            <a:pPr>
+              <a:rPr sz="1300" b="1" lang="en-US" rtl="0">
+                <a:solidFill>
+                  <a:srgbClr val="1E40AF"/>
+                </a:solidFill>
+                <a:latin typeface="Consolas"/>
+              </a:rPr>
+              <a:t>[Hardware-Backed TEE / StrongBox]</a:t>
+            </a:r>
+          </a:p>
+          <a:p>
+            <a:pPr algn="r" rtl="1">
               <a:spcBef>
-                <a:spcPts val="1200"/>
+                <a:spcPts val="600"/>
               </a:spcBef>
-              <a:defRPr sz="1800" b="1">
+            </a:pPr>
+            <a:r>
+              <a:rPr sz="1500" b="0" lang="ar-SA" rtl="1">
                 <a:solidFill>
                   <a:srgbClr val="0F172A"/>
                 </a:solidFill>
                 <a:latin typeface="Arial"/>
-              </a:defRPr>
+              </a:rPr>
+              <a:t>توليد وحفظ مفاتيح الهوية طويلة الأمد داخل رقاقة المعالج الآمن في الهاتف.</a:t>
+            </a:r>
+          </a:p>
+        </p:txBody>
+      </p:sp>
+      <p:sp>
+        <p:nvSpPr>
+          <p:cNvPr id="10" name="Rounded Rectangle 9"/>
+          <p:cNvSpPr/>
+          <p:nvPr/>
+        </p:nvSpPr>
+        <p:spPr>
+          <a:xfrm>
+            <a:off x="822960" y="1554480"/>
+            <a:ext cx="5120640" cy="1828800"/>
+          </a:xfrm>
+          <a:prstGeom prst="roundRect">
+            <a:avLst/>
+          </a:prstGeom>
+          <a:solidFill>
+            <a:srgbClr val="F8FAFC"/>
+          </a:solidFill>
+          <a:ln w="19050">
+            <a:solidFill>
+              <a:srgbClr val="CBD5E1"/>
+            </a:solidFill>
+          </a:ln>
+        </p:spPr>
+        <p:style>
+          <a:lnRef idx="1">
+            <a:schemeClr val="accent1"/>
+          </a:lnRef>
+          <a:fillRef idx="3">
+            <a:schemeClr val="accent1"/>
+          </a:fillRef>
+          <a:effectRef idx="2">
+            <a:schemeClr val="accent1"/>
+          </a:effectRef>
+          <a:fontRef idx="minor">
+            <a:schemeClr val="lt1"/>
+          </a:fontRef>
+        </p:style>
+        <p:txBody>
+          <a:bodyPr rtlCol="0" anchor="ctr" wrap="square"/>
+          <a:lstStyle/>
+          <a:p>
+            <a:pPr algn="r" rtl="1"/>
+            <a:r>
+              <a:rPr sz="1900" b="1" lang="ar-SA" rtl="1">
+                <a:solidFill>
+                  <a:srgbClr val="0F2B5C"/>
+                </a:solidFill>
+                <a:latin typeface="Arial"/>
+              </a:rPr>
+              <a:t>استحالة استخراج المفتاح</a:t>
+            </a:r>
+          </a:p>
+          <a:p>
+            <a:pPr algn="r" rtl="0">
+              <a:spcBef>
+                <a:spcPts val="300"/>
+              </a:spcBef>
             </a:pPr>
             <a:r>
-              <a:t>• الحماية في عتاد الجهاز (Hardware Security): توليد زوج مفاتيح هوية طويل الأمد داخل رقاقة التشفير الآمنة (TEE / StrongBox) عبر Android Keystore.</a:t>
-            </a:r>
-          </a:p>
-          <a:p>
-            <a:pPr>
+              <a:rPr sz="1300" b="1" lang="en-US" rtl="0">
+                <a:solidFill>
+                  <a:srgbClr val="059669"/>
+                </a:solidFill>
+                <a:latin typeface="Consolas"/>
+              </a:rPr>
+              <a:t>[Non-Exportable Private Key]</a:t>
+            </a:r>
+          </a:p>
+          <a:p>
+            <a:pPr algn="r" rtl="1">
               <a:spcBef>
-                <a:spcPts val="1200"/>
+                <a:spcPts val="600"/>
               </a:spcBef>
-              <a:defRPr sz="1800" b="1">
+            </a:pPr>
+            <a:r>
+              <a:rPr sz="1500" b="0" lang="ar-SA" rtl="1">
                 <a:solidFill>
                   <a:srgbClr val="0F172A"/>
                 </a:solidFill>
                 <a:latin typeface="Arial"/>
-              </a:defRPr>
+              </a:rPr>
+              <a:t>المفتاح الخاص غير قابل للتصدير أو السرقة من النظام حتى مع امتلاك صلاحيات كاملة.</a:t>
+            </a:r>
+          </a:p>
+        </p:txBody>
+      </p:sp>
+      <p:sp>
+        <p:nvSpPr>
+          <p:cNvPr id="11" name="Rounded Rectangle 10"/>
+          <p:cNvSpPr/>
+          <p:nvPr/>
+        </p:nvSpPr>
+        <p:spPr>
+          <a:xfrm>
+            <a:off x="6217920" y="3566160"/>
+            <a:ext cx="5120640" cy="1828800"/>
+          </a:xfrm>
+          <a:prstGeom prst="roundRect">
+            <a:avLst/>
+          </a:prstGeom>
+          <a:solidFill>
+            <a:srgbClr val="F8FAFC"/>
+          </a:solidFill>
+          <a:ln w="19050">
+            <a:solidFill>
+              <a:srgbClr val="CBD5E1"/>
+            </a:solidFill>
+          </a:ln>
+        </p:spPr>
+        <p:style>
+          <a:lnRef idx="1">
+            <a:schemeClr val="accent1"/>
+          </a:lnRef>
+          <a:fillRef idx="3">
+            <a:schemeClr val="accent1"/>
+          </a:fillRef>
+          <a:effectRef idx="2">
+            <a:schemeClr val="accent1"/>
+          </a:effectRef>
+          <a:fontRef idx="minor">
+            <a:schemeClr val="lt1"/>
+          </a:fontRef>
+        </p:style>
+        <p:txBody>
+          <a:bodyPr rtlCol="0" anchor="ctr" wrap="square"/>
+          <a:lstStyle/>
+          <a:p>
+            <a:pPr algn="r" rtl="1"/>
+            <a:r>
+              <a:rPr sz="1900" b="1" lang="ar-SA" rtl="1">
+                <a:solidFill>
+                  <a:srgbClr val="0F2B5C"/>
+                </a:solidFill>
+                <a:latin typeface="Arial"/>
+              </a:rPr>
+              <a:t>التوقيع الرقمي للمصافحة</a:t>
+            </a:r>
+          </a:p>
+          <a:p>
+            <a:pPr algn="r" rtl="0">
+              <a:spcBef>
+                <a:spcPts val="300"/>
+              </a:spcBef>
             </a:pPr>
             <a:r>
-              <a:t>• استحالة استخراج المفتاح الخاص (Non-Exportable): المفتاح الخاص لا يغادر عتاد الهاتف أبداً حتى مع صلاحيات Root كاملة للنظام.</a:t>
-            </a:r>
-          </a:p>
-          <a:p>
-            <a:pPr>
+              <a:rPr sz="1300" b="1" lang="en-US" rtl="0">
+                <a:solidFill>
+                  <a:srgbClr val="059669"/>
+                </a:solidFill>
+                <a:latin typeface="Consolas"/>
+              </a:rPr>
+              <a:t>[Digital Signature: ECDSA SHA-256]</a:t>
+            </a:r>
+          </a:p>
+          <a:p>
+            <a:pPr algn="r" rtl="1">
               <a:spcBef>
-                <a:spcPts val="1200"/>
+                <a:spcPts val="600"/>
               </a:spcBef>
-              <a:defRPr sz="1800" b="1">
+            </a:pPr>
+            <a:r>
+              <a:rPr sz="1500" b="0" lang="ar-SA" rtl="1">
                 <a:solidFill>
                   <a:srgbClr val="0F172A"/>
                 </a:solidFill>
                 <a:latin typeface="Arial"/>
-              </a:defRPr>
+              </a:rPr>
+              <a:t>توقيع حزم المصافحة لإثبات ملكية الجهاز لهويته ومنع انتحال الشخصية على الشبكة.</a:t>
+            </a:r>
+          </a:p>
+        </p:txBody>
+      </p:sp>
+      <p:sp>
+        <p:nvSpPr>
+          <p:cNvPr id="12" name="Rounded Rectangle 11"/>
+          <p:cNvSpPr/>
+          <p:nvPr/>
+        </p:nvSpPr>
+        <p:spPr>
+          <a:xfrm>
+            <a:off x="822960" y="3566160"/>
+            <a:ext cx="5120640" cy="1828800"/>
+          </a:xfrm>
+          <a:prstGeom prst="roundRect">
+            <a:avLst/>
+          </a:prstGeom>
+          <a:solidFill>
+            <a:srgbClr val="F8FAFC"/>
+          </a:solidFill>
+          <a:ln w="19050">
+            <a:solidFill>
+              <a:srgbClr val="CBD5E1"/>
+            </a:solidFill>
+          </a:ln>
+        </p:spPr>
+        <p:style>
+          <a:lnRef idx="1">
+            <a:schemeClr val="accent1"/>
+          </a:lnRef>
+          <a:fillRef idx="3">
+            <a:schemeClr val="accent1"/>
+          </a:fillRef>
+          <a:effectRef idx="2">
+            <a:schemeClr val="accent1"/>
+          </a:effectRef>
+          <a:fontRef idx="minor">
+            <a:schemeClr val="lt1"/>
+          </a:fontRef>
+        </p:style>
+        <p:txBody>
+          <a:bodyPr rtlCol="0" anchor="ctr" wrap="square"/>
+          <a:lstStyle/>
+          <a:p>
+            <a:pPr algn="r" rtl="1"/>
+            <a:r>
+              <a:rPr sz="1900" b="1" lang="ar-SA" rtl="1">
+                <a:solidFill>
+                  <a:srgbClr val="0F2B5C"/>
+                </a:solidFill>
+                <a:latin typeface="Arial"/>
+              </a:rPr>
+              <a:t>التوقيع المرتبط بالسياق</a:t>
+            </a:r>
+          </a:p>
+          <a:p>
+            <a:pPr algn="r" rtl="0">
+              <a:spcBef>
+                <a:spcPts val="300"/>
+              </a:spcBef>
             </a:pPr>
             <a:r>
-              <a:t>• التوقيع الرقمي (ECDSA with SHA-256): توقيع حزم المصافحة لإثبات هوية الجهاز ومنع انتحال الشخصية على الشبكة المحلية.</a:t>
-            </a:r>
-          </a:p>
-          <a:p>
-            <a:pPr>
+              <a:rPr sz="1300" b="1" lang="en-US" rtl="0">
+                <a:solidFill>
+                  <a:srgbClr val="1E40AF"/>
+                </a:solidFill>
+                <a:latin typeface="Consolas"/>
+              </a:rPr>
+              <a:t>[Context-Bound Signature]</a:t>
+            </a:r>
+          </a:p>
+          <a:p>
+            <a:pPr algn="r" rtl="1">
               <a:spcBef>
-                <a:spcPts val="1200"/>
+                <a:spcPts val="600"/>
               </a:spcBef>
-              <a:defRPr sz="1800" b="1">
+            </a:pPr>
+            <a:r>
+              <a:rPr sz="1500" b="0" lang="ar-SA" rtl="1">
                 <a:solidFill>
                   <a:srgbClr val="0F172A"/>
                 </a:solidFill>
                 <a:latin typeface="Arial"/>
-              </a:defRPr>
-            </a:pPr>
-            <a:r>
-              <a:t>• التوقيع المرتبط بالسياق (Context-Bound Signature): ربط التوقيع بـ Nonce المصافحة وعنوان الجهاز لمنع هجمات إعادة التوقيع (Replay Signature).</a:t>
-            </a:r>
-          </a:p>
-          <a:p>
-            <a:pPr>
-              <a:spcBef>
-                <a:spcPts val="1200"/>
-              </a:spcBef>
-              <a:defRPr sz="1800" b="1">
-                <a:solidFill>
-                  <a:srgbClr val="0F172A"/>
-                </a:solidFill>
-                <a:latin typeface="Arial"/>
-              </a:defRPr>
-            </a:pPr>
-            <a:r>
-              <a:t>• الملف المسؤول في الكود: KeystoreIdentityManager.kt — يتولى توليد وإدارة هوية الهاتف والتوقيع الرقمي.</a:t>
+              </a:rPr>
+              <a:t>ربط التوقيع برقم عشوائي ومعرف الجلسة لمنع هجمات إعادة استخدام التوقيعات السابقة.</a:t>
+            </a:r>
+          </a:p>
+        </p:txBody>
+      </p:sp>
+      <p:sp>
+        <p:nvSpPr>
+          <p:cNvPr id="13" name="Rounded Rectangle 12"/>
+          <p:cNvSpPr/>
+          <p:nvPr/>
+        </p:nvSpPr>
+        <p:spPr>
+          <a:xfrm>
+            <a:off x="822960" y="5623560"/>
+            <a:ext cx="10515600" cy="594360"/>
+          </a:xfrm>
+          <a:prstGeom prst="roundRect">
+            <a:avLst/>
+          </a:prstGeom>
+          <a:solidFill>
+            <a:srgbClr val="F8FAFC"/>
+          </a:solidFill>
+          <a:ln w="12700">
+            <a:solidFill>
+              <a:srgbClr val="CBD5E1"/>
+            </a:solidFill>
+          </a:ln>
+        </p:spPr>
+        <p:style>
+          <a:lnRef idx="1">
+            <a:schemeClr val="accent1"/>
+          </a:lnRef>
+          <a:fillRef idx="3">
+            <a:schemeClr val="accent1"/>
+          </a:fillRef>
+          <a:effectRef idx="2">
+            <a:schemeClr val="accent1"/>
+          </a:effectRef>
+          <a:fontRef idx="minor">
+            <a:schemeClr val="lt1"/>
+          </a:fontRef>
+        </p:style>
+        <p:txBody>
+          <a:bodyPr rtlCol="0" anchor="ctr"/>
+          <a:lstStyle/>
+          <a:p>
+            <a:pPr algn="r" rtl="1"/>
+            <a:r>
+              <a:rPr sz="1200" b="1" lang="ar-SA" rtl="1">
+                <a:solidFill>
+                  <a:srgbClr val="0F2B5C"/>
+                </a:solidFill>
+                <a:latin typeface="Arial"/>
+              </a:rPr>
+              <a:t>المكون البرمجي: مدير هوية الجهاز والتوقيع الرقمي  |  </a:t>
+            </a:r>
+            <a:r>
+              <a:rPr sz="1200" b="1" lang="en-US" rtl="0">
+                <a:solidFill>
+                  <a:srgbClr val="1E40AF"/>
+                </a:solidFill>
+                <a:latin typeface="Consolas"/>
+              </a:rPr>
+              <a:t>app/src/main/java/com/example/network/KeystoreIdentityManager.kt</a:t>
             </a:r>
           </a:p>
         </p:txBody>
@@ -9437,13 +11291,13 @@
         <p:spPr>
           <a:xfrm>
             <a:off x="0" y="0"/>
-            <a:ext cx="12191695" cy="91440"/>
+            <a:ext cx="12191695" cy="109728"/>
           </a:xfrm>
           <a:prstGeom prst="rect">
             <a:avLst/>
           </a:prstGeom>
           <a:solidFill>
-            <a:srgbClr val="1E40AF"/>
+            <a:srgbClr val="0F2B5C"/>
           </a:solidFill>
           <a:ln>
             <a:noFill/>
@@ -9479,44 +11333,8 @@
         </p:nvSpPr>
         <p:spPr>
           <a:xfrm>
-            <a:off x="822960" y="228600"/>
-            <a:ext cx="7772400" cy="320040"/>
-          </a:xfrm>
-          <a:prstGeom prst="rect">
-            <a:avLst/>
-          </a:prstGeom>
-          <a:noFill/>
-        </p:spPr>
-        <p:txBody>
-          <a:bodyPr wrap="square">
-            <a:spAutoFit/>
-          </a:bodyPr>
-          <a:lstStyle/>
-          <a:p>
-            <a:pPr>
-              <a:defRPr sz="1300" b="1">
-                <a:solidFill>
-                  <a:srgbClr val="1E40AF"/>
-                </a:solidFill>
-                <a:latin typeface="Arial"/>
-              </a:defRPr>
-            </a:pPr>
-            <a:r>
-              <a:t>LOCAL CONTACT P2P  |  نموذج الثقة وتثبيت الهوية</a:t>
-            </a:r>
-          </a:p>
-        </p:txBody>
-      </p:sp>
-      <p:sp>
-        <p:nvSpPr>
-          <p:cNvPr id="4" name="TextBox 3"/>
-          <p:cNvSpPr txBox="1"/>
-          <p:nvPr/>
-        </p:nvSpPr>
-        <p:spPr>
-          <a:xfrm>
-            <a:off x="10241280" y="6309360"/>
-            <a:ext cx="1188720" cy="365760"/>
+            <a:off x="3200400" y="228600"/>
+            <a:ext cx="8138160" cy="320040"/>
           </a:xfrm>
           <a:prstGeom prst="rect">
             <a:avLst/>
@@ -9529,16 +11347,50 @@
           </a:bodyPr>
           <a:lstStyle/>
           <a:p>
-            <a:pPr algn="r">
-              <a:defRPr sz="1400" b="1">
-                <a:solidFill>
-                  <a:srgbClr val="0F2B5C"/>
-                </a:solidFill>
-                <a:latin typeface="Arial"/>
-              </a:defRPr>
-            </a:pPr>
-            <a:r>
-              <a:t>8 / 12</a:t>
+            <a:pPr algn="r" rtl="1"/>
+            <a:r>
+              <a:rPr sz="1300" b="1" lang="ar-SA" rtl="1">
+                <a:solidFill>
+                  <a:srgbClr val="1E40AF"/>
+                </a:solidFill>
+                <a:latin typeface="Arial"/>
+              </a:rPr>
+              <a:t>مشروع الاتصال المحلي المباشر  •  نموذج الثقة اللامركزي</a:t>
+            </a:r>
+          </a:p>
+        </p:txBody>
+      </p:sp>
+      <p:sp>
+        <p:nvSpPr>
+          <p:cNvPr id="4" name="TextBox 3"/>
+          <p:cNvSpPr txBox="1"/>
+          <p:nvPr/>
+        </p:nvSpPr>
+        <p:spPr>
+          <a:xfrm>
+            <a:off x="822960" y="228600"/>
+            <a:ext cx="1828800" cy="320040"/>
+          </a:xfrm>
+          <a:prstGeom prst="rect">
+            <a:avLst/>
+          </a:prstGeom>
+          <a:noFill/>
+        </p:spPr>
+        <p:txBody>
+          <a:bodyPr wrap="none">
+            <a:spAutoFit/>
+          </a:bodyPr>
+          <a:lstStyle/>
+          <a:p>
+            <a:pPr algn="l" rtl="0"/>
+            <a:r>
+              <a:rPr sz="1200" b="1" lang="en-US" rtl="0">
+                <a:solidFill>
+                  <a:srgbClr val="475569"/>
+                </a:solidFill>
+                <a:latin typeface="Consolas"/>
+              </a:rPr>
+              <a:t>Slide 8 / 12</a:t>
             </a:r>
           </a:p>
         </p:txBody>
@@ -9551,8 +11403,8 @@
         </p:nvSpPr>
         <p:spPr>
           <a:xfrm>
-            <a:off x="822960" y="594360"/>
-            <a:ext cx="8961120" cy="685800"/>
+            <a:off x="4023360" y="566928"/>
+            <a:ext cx="7315200" cy="685800"/>
           </a:xfrm>
           <a:prstGeom prst="rect">
             <a:avLst/>
@@ -9560,21 +11412,20 @@
           <a:noFill/>
         </p:spPr>
         <p:txBody>
-          <a:bodyPr wrap="square">
+          <a:bodyPr wrap="none">
             <a:spAutoFit/>
           </a:bodyPr>
           <a:lstStyle/>
           <a:p>
-            <a:pPr>
-              <a:defRPr sz="2800" b="1">
+            <a:pPr algn="r" rtl="1"/>
+            <a:r>
+              <a:rPr sz="3000" b="1" lang="ar-SA" rtl="1">
                 <a:solidFill>
                   <a:srgbClr val="0F2B5C"/>
                 </a:solidFill>
                 <a:latin typeface="Arial"/>
-              </a:defRPr>
-            </a:pPr>
-            <a:r>
-              <a:t>نموذج الثقة اللامركزي: بصمات الأجهزة وتثبيت الهوية (TOFU)</a:t>
+              </a:rPr>
+              <a:t>تثبيت الهوية وبصمات المفاتيح</a:t>
             </a:r>
           </a:p>
         </p:txBody>
@@ -9587,8 +11438,8 @@
         </p:nvSpPr>
         <p:spPr>
           <a:xfrm>
-            <a:off x="8961120" y="621792"/>
-            <a:ext cx="2377440" cy="438912"/>
+            <a:off x="822960" y="621792"/>
+            <a:ext cx="3017520" cy="502920"/>
           </a:xfrm>
           <a:prstGeom prst="roundRect">
             <a:avLst/>
@@ -9620,16 +11471,15 @@
           <a:bodyPr rtlCol="0" anchor="ctr"/>
           <a:lstStyle/>
           <a:p>
-            <a:pPr algn="ctr">
-              <a:defRPr sz="1200" b="1">
+            <a:pPr algn="ctr" rtl="0"/>
+            <a:r>
+              <a:rPr sz="1400" b="1" lang="en-US" rtl="0">
                 <a:solidFill>
                   <a:srgbClr val="1E40AF"/>
                 </a:solidFill>
                 <a:latin typeface="Consolas"/>
-              </a:defRPr>
-            </a:pPr>
-            <a:r>
-              <a:t>TOFU TRUST MODEL</a:t>
+              </a:rPr>
+              <a:t>Peer Trust Store (TOFU)</a:t>
             </a:r>
           </a:p>
         </p:txBody>
@@ -9642,7 +11492,7 @@
         </p:nvSpPr>
         <p:spPr>
           <a:xfrm>
-            <a:off x="822960" y="1353312"/>
+            <a:off x="822960" y="1325880"/>
             <a:ext cx="10515600" cy="18288"/>
           </a:xfrm>
           <a:prstGeom prst="rect">
@@ -9685,8 +11535,8 @@
         </p:nvSpPr>
         <p:spPr>
           <a:xfrm>
-            <a:off x="822960" y="6309360"/>
-            <a:ext cx="7315200" cy="320040"/>
+            <a:off x="822960" y="6355080"/>
+            <a:ext cx="10515600" cy="320040"/>
           </a:xfrm>
           <a:prstGeom prst="rect">
             <a:avLst/>
@@ -9699,16 +11549,15 @@
           </a:bodyPr>
           <a:lstStyle/>
           <a:p>
-            <a:pPr>
-              <a:defRPr sz="1100">
+            <a:pPr algn="r" rtl="1"/>
+            <a:r>
+              <a:rPr sz="1050" b="0" lang="ar-SA" rtl="1">
                 <a:solidFill>
                   <a:srgbClr val="475569"/>
                 </a:solidFill>
                 <a:latin typeface="Arial"/>
-              </a:defRPr>
-            </a:pPr>
-            <a:r>
-              <a:t>مشروع تخرج LOCAL CONTACT — مناقشة أكاديمية محكمة</a:t>
+              </a:rPr>
+              <a:t>مناقشة مشروع التخرج الأكاديمية — نظام اتصال محلي مستقل دون خادم وسيط</a:t>
             </a:r>
           </a:p>
         </p:txBody>
@@ -9721,8 +11570,8 @@
         </p:nvSpPr>
         <p:spPr>
           <a:xfrm>
-            <a:off x="822960" y="1645920"/>
-            <a:ext cx="5120640" cy="4389120"/>
+            <a:off x="6217920" y="1554480"/>
+            <a:ext cx="5120640" cy="1828800"/>
           </a:xfrm>
           <a:prstGeom prst="roundRect">
             <a:avLst/>
@@ -9754,80 +11603,47 @@
           <a:bodyPr rtlCol="0" anchor="ctr" wrap="square"/>
           <a:lstStyle/>
           <a:p>
-            <a:pPr algn="ctr">
-              <a:defRPr sz="2200" b="1">
+            <a:pPr algn="r" rtl="1"/>
+            <a:r>
+              <a:rPr sz="1900" b="1" lang="ar-SA" rtl="1">
                 <a:solidFill>
                   <a:srgbClr val="0F2B5C"/>
                 </a:solidFill>
                 <a:latin typeface="Arial"/>
-              </a:defRPr>
+              </a:rPr>
+              <a:t>العمل دون خادم شهادات</a:t>
+            </a:r>
+          </a:p>
+          <a:p>
+            <a:pPr algn="r" rtl="0">
+              <a:spcBef>
+                <a:spcPts val="300"/>
+              </a:spcBef>
             </a:pPr>
             <a:r>
-              <a:t>🤝 آلية نموذج الثقة عند أول اتصال (TOFU):</a:t>
-            </a:r>
-          </a:p>
-          <a:p>
-            <a:pPr>
+              <a:rPr sz="1300" b="1" lang="en-US" rtl="0">
+                <a:solidFill>
+                  <a:srgbClr val="1E40AF"/>
+                </a:solidFill>
+                <a:latin typeface="Consolas"/>
+              </a:rPr>
+              <a:t>[Decentralized Zero-PKI Model]</a:t>
+            </a:r>
+          </a:p>
+          <a:p>
+            <a:pPr algn="r" rtl="1">
               <a:spcBef>
-                <a:spcPts val="1200"/>
+                <a:spcPts val="600"/>
               </a:spcBef>
-              <a:defRPr sz="1700" b="1">
+            </a:pPr>
+            <a:r>
+              <a:rPr sz="1500" b="0" lang="ar-SA" rtl="1">
                 <a:solidFill>
                   <a:srgbClr val="0F172A"/>
                 </a:solidFill>
                 <a:latin typeface="Arial"/>
-              </a:defRPr>
-            </a:pPr>
-            <a:r>
-              <a:t>• لماذا TOFU؟ شبكات P2P تعمل Offline، فلا يمكن الاتصال بهيئة شهادات مركزية (CA).</a:t>
-            </a:r>
-          </a:p>
-          <a:p>
-            <a:pPr>
-              <a:spcBef>
-                <a:spcPts val="1200"/>
-              </a:spcBef>
-              <a:defRPr sz="1700" b="1">
-                <a:solidFill>
-                  <a:srgbClr val="0F172A"/>
-                </a:solidFill>
-                <a:latin typeface="Arial"/>
-              </a:defRPr>
-            </a:pPr>
-            <a:r>
-              <a:t>• حساب البصمة: حساب بصمة SHA-256 Fingerprint للمفتاح العام لهوية القرين.</a:t>
-            </a:r>
-          </a:p>
-          <a:p>
-            <a:pPr>
-              <a:spcBef>
-                <a:spcPts val="1200"/>
-              </a:spcBef>
-              <a:defRPr sz="1700" b="1">
-                <a:solidFill>
-                  <a:srgbClr val="0F172A"/>
-                </a:solidFill>
-                <a:latin typeface="Arial"/>
-              </a:defRPr>
-            </a:pPr>
-            <a:r>
-              <a:t>• تثبيت المفتاح (Key Pinning): حفظ البصمة محلياً في قاعدة البيانات عند أول اتصال ناجح.</a:t>
-            </a:r>
-          </a:p>
-          <a:p>
-            <a:pPr>
-              <a:spcBef>
-                <a:spcPts val="1200"/>
-              </a:spcBef>
-              <a:defRPr sz="1700" b="1">
-                <a:solidFill>
-                  <a:srgbClr val="0F172A"/>
-                </a:solidFill>
-                <a:latin typeface="Arial"/>
-              </a:defRPr>
-            </a:pPr>
-            <a:r>
-              <a:t>• كشف التغيير المريب: إطلاق تحذير أمني فوري إذا تغير مفتاح هوية القرين المسجل سابقاً.</a:t>
+              </a:rPr>
+              <a:t>شبكة محلية مغلقة تعمل بمعزل عن الإنترنت دون الحاجة لسلطة شهادات مركزية.</a:t>
             </a:r>
           </a:p>
         </p:txBody>
@@ -9840,8 +11656,8 @@
         </p:nvSpPr>
         <p:spPr>
           <a:xfrm>
-            <a:off x="6217920" y="1645920"/>
-            <a:ext cx="5120640" cy="4389120"/>
+            <a:off x="822960" y="1554480"/>
+            <a:ext cx="5120640" cy="1828800"/>
           </a:xfrm>
           <a:prstGeom prst="roundRect">
             <a:avLst/>
@@ -9873,80 +11689,282 @@
           <a:bodyPr rtlCol="0" anchor="ctr" wrap="square"/>
           <a:lstStyle/>
           <a:p>
-            <a:pPr algn="ctr">
-              <a:defRPr sz="2200" b="1">
+            <a:pPr algn="r" rtl="1"/>
+            <a:r>
+              <a:rPr sz="1900" b="1" lang="ar-SA" rtl="1">
                 <a:solidFill>
                   <a:srgbClr val="0F2B5C"/>
                 </a:solidFill>
                 <a:latin typeface="Arial"/>
-              </a:defRPr>
+              </a:rPr>
+              <a:t>بصمة المفتاح العام</a:t>
+            </a:r>
+          </a:p>
+          <a:p>
+            <a:pPr algn="r" rtl="0">
+              <a:spcBef>
+                <a:spcPts val="300"/>
+              </a:spcBef>
             </a:pPr>
             <a:r>
-              <a:t>📂 الملف والمسؤولية في الكود:</a:t>
-            </a:r>
-          </a:p>
-          <a:p>
-            <a:pPr>
+              <a:rPr sz="1300" b="1" lang="en-US" rtl="0">
+                <a:solidFill>
+                  <a:srgbClr val="059669"/>
+                </a:solidFill>
+                <a:latin typeface="Consolas"/>
+              </a:rPr>
+              <a:t>[SHA-256 Device Fingerprint]</a:t>
+            </a:r>
+          </a:p>
+          <a:p>
+            <a:pPr algn="r" rtl="1">
               <a:spcBef>
-                <a:spcPts val="800"/>
+                <a:spcPts val="600"/>
               </a:spcBef>
-              <a:defRPr sz="1400" b="1">
+            </a:pPr>
+            <a:r>
+              <a:rPr sz="1500" b="0" lang="ar-SA" rtl="1">
+                <a:solidFill>
+                  <a:srgbClr val="0F172A"/>
+                </a:solidFill>
+                <a:latin typeface="Arial"/>
+              </a:rPr>
+              <a:t>حساب بصمة مشفرة ومختصرة للمفتاح العام للقرين لتسهيل المطابقة والمقارنة.</a:t>
+            </a:r>
+          </a:p>
+        </p:txBody>
+      </p:sp>
+      <p:sp>
+        <p:nvSpPr>
+          <p:cNvPr id="11" name="Rounded Rectangle 10"/>
+          <p:cNvSpPr/>
+          <p:nvPr/>
+        </p:nvSpPr>
+        <p:spPr>
+          <a:xfrm>
+            <a:off x="6217920" y="3566160"/>
+            <a:ext cx="5120640" cy="1828800"/>
+          </a:xfrm>
+          <a:prstGeom prst="roundRect">
+            <a:avLst/>
+          </a:prstGeom>
+          <a:solidFill>
+            <a:srgbClr val="F8FAFC"/>
+          </a:solidFill>
+          <a:ln w="19050">
+            <a:solidFill>
+              <a:srgbClr val="CBD5E1"/>
+            </a:solidFill>
+          </a:ln>
+        </p:spPr>
+        <p:style>
+          <a:lnRef idx="1">
+            <a:schemeClr val="accent1"/>
+          </a:lnRef>
+          <a:fillRef idx="3">
+            <a:schemeClr val="accent1"/>
+          </a:fillRef>
+          <a:effectRef idx="2">
+            <a:schemeClr val="accent1"/>
+          </a:effectRef>
+          <a:fontRef idx="minor">
+            <a:schemeClr val="lt1"/>
+          </a:fontRef>
+        </p:style>
+        <p:txBody>
+          <a:bodyPr rtlCol="0" anchor="ctr" wrap="square"/>
+          <a:lstStyle/>
+          <a:p>
+            <a:pPr algn="r" rtl="1"/>
+            <a:r>
+              <a:rPr sz="1900" b="1" lang="ar-SA" rtl="1">
+                <a:solidFill>
+                  <a:srgbClr val="0F2B5C"/>
+                </a:solidFill>
+                <a:latin typeface="Arial"/>
+              </a:rPr>
+              <a:t>الثقة عند أول اتصال</a:t>
+            </a:r>
+          </a:p>
+          <a:p>
+            <a:pPr algn="r" rtl="0">
+              <a:spcBef>
+                <a:spcPts val="300"/>
+              </a:spcBef>
+            </a:pPr>
+            <a:r>
+              <a:rPr sz="1300" b="1" lang="en-US" rtl="0">
+                <a:solidFill>
+                  <a:srgbClr val="059669"/>
+                </a:solidFill>
+                <a:latin typeface="Consolas"/>
+              </a:rPr>
+              <a:t>[Trust On First Use (TOFU)]</a:t>
+            </a:r>
+          </a:p>
+          <a:p>
+            <a:pPr algn="r" rtl="1">
+              <a:spcBef>
+                <a:spcPts val="600"/>
+              </a:spcBef>
+            </a:pPr>
+            <a:r>
+              <a:rPr sz="1500" b="0" lang="ar-SA" rtl="1">
+                <a:solidFill>
+                  <a:srgbClr val="0F172A"/>
+                </a:solidFill>
+                <a:latin typeface="Arial"/>
+              </a:rPr>
+              <a:t>حفظ بصمة المفتاح محلياً عند أول لقاء ناجح وتثبيتها كمرجع دائم للهوية.</a:t>
+            </a:r>
+          </a:p>
+        </p:txBody>
+      </p:sp>
+      <p:sp>
+        <p:nvSpPr>
+          <p:cNvPr id="12" name="Rounded Rectangle 11"/>
+          <p:cNvSpPr/>
+          <p:nvPr/>
+        </p:nvSpPr>
+        <p:spPr>
+          <a:xfrm>
+            <a:off x="822960" y="3566160"/>
+            <a:ext cx="5120640" cy="1828800"/>
+          </a:xfrm>
+          <a:prstGeom prst="roundRect">
+            <a:avLst/>
+          </a:prstGeom>
+          <a:solidFill>
+            <a:srgbClr val="F8FAFC"/>
+          </a:solidFill>
+          <a:ln w="19050">
+            <a:solidFill>
+              <a:srgbClr val="CBD5E1"/>
+            </a:solidFill>
+          </a:ln>
+        </p:spPr>
+        <p:style>
+          <a:lnRef idx="1">
+            <a:schemeClr val="accent1"/>
+          </a:lnRef>
+          <a:fillRef idx="3">
+            <a:schemeClr val="accent1"/>
+          </a:fillRef>
+          <a:effectRef idx="2">
+            <a:schemeClr val="accent1"/>
+          </a:effectRef>
+          <a:fontRef idx="minor">
+            <a:schemeClr val="lt1"/>
+          </a:fontRef>
+        </p:style>
+        <p:txBody>
+          <a:bodyPr rtlCol="0" anchor="ctr" wrap="square"/>
+          <a:lstStyle/>
+          <a:p>
+            <a:pPr algn="r" rtl="1"/>
+            <a:r>
+              <a:rPr sz="1900" b="1" lang="ar-SA" rtl="1">
+                <a:solidFill>
+                  <a:srgbClr val="0F2B5C"/>
+                </a:solidFill>
+                <a:latin typeface="Arial"/>
+              </a:rPr>
+              <a:t>كشف التغيير المريب</a:t>
+            </a:r>
+          </a:p>
+          <a:p>
+            <a:pPr algn="r" rtl="0">
+              <a:spcBef>
+                <a:spcPts val="300"/>
+              </a:spcBef>
+            </a:pPr>
+            <a:r>
+              <a:rPr sz="1300" b="1" lang="en-US" rtl="0">
+                <a:solidFill>
+                  <a:srgbClr val="D97706"/>
+                </a:solidFill>
+                <a:latin typeface="Consolas"/>
+              </a:rPr>
+              <a:t>[Key Change Alert Enforced]</a:t>
+            </a:r>
+          </a:p>
+          <a:p>
+            <a:pPr algn="r" rtl="1">
+              <a:spcBef>
+                <a:spcPts val="600"/>
+              </a:spcBef>
+            </a:pPr>
+            <a:r>
+              <a:rPr sz="1500" b="0" lang="ar-SA" rtl="1">
+                <a:solidFill>
+                  <a:srgbClr val="0F172A"/>
+                </a:solidFill>
+                <a:latin typeface="Arial"/>
+              </a:rPr>
+              <a:t>إطلاق تنبيه أمني فوري ورفض الاتصال إذا تغير مفتاح القرين المسجل مسبقاً.</a:t>
+            </a:r>
+          </a:p>
+        </p:txBody>
+      </p:sp>
+      <p:sp>
+        <p:nvSpPr>
+          <p:cNvPr id="13" name="Rounded Rectangle 12"/>
+          <p:cNvSpPr/>
+          <p:nvPr/>
+        </p:nvSpPr>
+        <p:spPr>
+          <a:xfrm>
+            <a:off x="822960" y="5623560"/>
+            <a:ext cx="10515600" cy="594360"/>
+          </a:xfrm>
+          <a:prstGeom prst="roundRect">
+            <a:avLst/>
+          </a:prstGeom>
+          <a:solidFill>
+            <a:srgbClr val="F8FAFC"/>
+          </a:solidFill>
+          <a:ln w="12700">
+            <a:solidFill>
+              <a:srgbClr val="CBD5E1"/>
+            </a:solidFill>
+          </a:ln>
+        </p:spPr>
+        <p:style>
+          <a:lnRef idx="1">
+            <a:schemeClr val="accent1"/>
+          </a:lnRef>
+          <a:fillRef idx="3">
+            <a:schemeClr val="accent1"/>
+          </a:fillRef>
+          <a:effectRef idx="2">
+            <a:schemeClr val="accent1"/>
+          </a:effectRef>
+          <a:fontRef idx="minor">
+            <a:schemeClr val="lt1"/>
+          </a:fontRef>
+        </p:style>
+        <p:txBody>
+          <a:bodyPr rtlCol="0" anchor="ctr"/>
+          <a:lstStyle/>
+          <a:p>
+            <a:pPr algn="r" rtl="1"/>
+            <a:r>
+              <a:rPr sz="1200" b="1" lang="ar-SA" rtl="1">
+                <a:solidFill>
+                  <a:srgbClr val="0F2B5C"/>
+                </a:solidFill>
+                <a:latin typeface="Arial"/>
+              </a:rPr>
+              <a:t>المكون البرمجي: مخزن الثقة وتثبيت البصمات  |  </a:t>
+            </a:r>
+            <a:r>
+              <a:rPr sz="1200" b="1" lang="en-US" rtl="0">
                 <a:solidFill>
                   <a:srgbClr val="1E40AF"/>
                 </a:solidFill>
                 <a:latin typeface="Consolas"/>
-              </a:defRPr>
-            </a:pPr>
-            <a:r>
+              </a:rPr>
               <a:t>app/src/main/java/com/example/network/PeerTrustStore.kt</a:t>
-            </a:r>
-          </a:p>
-          <a:p>
-            <a:pPr>
-              <a:spcBef>
-                <a:spcPts val="1200"/>
-              </a:spcBef>
-              <a:defRPr sz="1700" b="1">
-                <a:solidFill>
-                  <a:srgbClr val="0F172A"/>
-                </a:solidFill>
-                <a:latin typeface="Arial"/>
-              </a:defRPr>
-            </a:pPr>
-            <a:r>
-              <a:t>• المسؤولية: تخزين بصمات الأجهزة الموثوقة ومقارنتها مع كل اتصال وارد.</a:t>
-            </a:r>
-          </a:p>
-          <a:p>
-            <a:pPr>
-              <a:spcBef>
-                <a:spcPts val="1200"/>
-              </a:spcBef>
-              <a:defRPr sz="1700" b="1">
-                <a:solidFill>
-                  <a:srgbClr val="0F172A"/>
-                </a:solidFill>
-                <a:latin typeface="Arial"/>
-              </a:defRPr>
-            </a:pPr>
-            <a:r>
-              <a:t>• إدارة الحالات: تصنيف القرين إلى: جديد (New)، موثوق (Trusted)، أو مشبوه/متغير (Key Changed).</a:t>
-            </a:r>
-          </a:p>
-          <a:p>
-            <a:pPr>
-              <a:spcBef>
-                <a:spcPts val="1200"/>
-              </a:spcBef>
-              <a:defRPr sz="1700" b="1">
-                <a:solidFill>
-                  <a:srgbClr val="0F172A"/>
-                </a:solidFill>
-                <a:latin typeface="Arial"/>
-              </a:defRPr>
-            </a:pPr>
-            <a:r>
-              <a:t>• القيمة الهندسية: تحقيق أمان شبيه بـ SSH Host Keys دون الحاجة لإنترنت أو خادم مركزي.</a:t>
             </a:r>
           </a:p>
         </p:txBody>
@@ -9978,13 +11996,13 @@
         <p:spPr>
           <a:xfrm>
             <a:off x="0" y="0"/>
-            <a:ext cx="12191695" cy="91440"/>
+            <a:ext cx="12191695" cy="109728"/>
           </a:xfrm>
           <a:prstGeom prst="rect">
             <a:avLst/>
           </a:prstGeom>
           <a:solidFill>
-            <a:srgbClr val="1E40AF"/>
+            <a:srgbClr val="0F2B5C"/>
           </a:solidFill>
           <a:ln>
             <a:noFill/>
@@ -10020,44 +12038,8 @@
         </p:nvSpPr>
         <p:spPr>
           <a:xfrm>
-            <a:off x="822960" y="228600"/>
-            <a:ext cx="7772400" cy="320040"/>
-          </a:xfrm>
-          <a:prstGeom prst="rect">
-            <a:avLst/>
-          </a:prstGeom>
-          <a:noFill/>
-        </p:spPr>
-        <p:txBody>
-          <a:bodyPr wrap="square">
-            <a:spAutoFit/>
-          </a:bodyPr>
-          <a:lstStyle/>
-          <a:p>
-            <a:pPr>
-              <a:defRPr sz="1300" b="1">
-                <a:solidFill>
-                  <a:srgbClr val="1E40AF"/>
-                </a:solidFill>
-                <a:latin typeface="Arial"/>
-              </a:defRPr>
-            </a:pPr>
-            <a:r>
-              <a:t>LOCAL CONTACT P2P  |  بروتوكول المصافحة الشبكية</a:t>
-            </a:r>
-          </a:p>
-        </p:txBody>
-      </p:sp>
-      <p:sp>
-        <p:nvSpPr>
-          <p:cNvPr id="4" name="TextBox 3"/>
-          <p:cNvSpPr txBox="1"/>
-          <p:nvPr/>
-        </p:nvSpPr>
-        <p:spPr>
-          <a:xfrm>
-            <a:off x="10241280" y="6309360"/>
-            <a:ext cx="1188720" cy="365760"/>
+            <a:off x="3200400" y="228600"/>
+            <a:ext cx="8138160" cy="320040"/>
           </a:xfrm>
           <a:prstGeom prst="rect">
             <a:avLst/>
@@ -10070,16 +12052,50 @@
           </a:bodyPr>
           <a:lstStyle/>
           <a:p>
-            <a:pPr algn="r">
-              <a:defRPr sz="1400" b="1">
-                <a:solidFill>
-                  <a:srgbClr val="0F2B5C"/>
-                </a:solidFill>
-                <a:latin typeface="Arial"/>
-              </a:defRPr>
-            </a:pPr>
-            <a:r>
-              <a:t>9 / 12</a:t>
+            <a:pPr algn="r" rtl="1"/>
+            <a:r>
+              <a:rPr sz="1300" b="1" lang="ar-SA" rtl="1">
+                <a:solidFill>
+                  <a:srgbClr val="1E40AF"/>
+                </a:solidFill>
+                <a:latin typeface="Arial"/>
+              </a:rPr>
+              <a:t>مشروع الاتصال المحلي المباشر  •  بروتوكول المصافحة</a:t>
+            </a:r>
+          </a:p>
+        </p:txBody>
+      </p:sp>
+      <p:sp>
+        <p:nvSpPr>
+          <p:cNvPr id="4" name="TextBox 3"/>
+          <p:cNvSpPr txBox="1"/>
+          <p:nvPr/>
+        </p:nvSpPr>
+        <p:spPr>
+          <a:xfrm>
+            <a:off x="822960" y="228600"/>
+            <a:ext cx="1828800" cy="320040"/>
+          </a:xfrm>
+          <a:prstGeom prst="rect">
+            <a:avLst/>
+          </a:prstGeom>
+          <a:noFill/>
+        </p:spPr>
+        <p:txBody>
+          <a:bodyPr wrap="none">
+            <a:spAutoFit/>
+          </a:bodyPr>
+          <a:lstStyle/>
+          <a:p>
+            <a:pPr algn="l" rtl="0"/>
+            <a:r>
+              <a:rPr sz="1200" b="1" lang="en-US" rtl="0">
+                <a:solidFill>
+                  <a:srgbClr val="475569"/>
+                </a:solidFill>
+                <a:latin typeface="Consolas"/>
+              </a:rPr>
+              <a:t>Slide 9 / 12</a:t>
             </a:r>
           </a:p>
         </p:txBody>
@@ -10092,8 +12108,8 @@
         </p:nvSpPr>
         <p:spPr>
           <a:xfrm>
-            <a:off x="822960" y="594360"/>
-            <a:ext cx="8961120" cy="685800"/>
+            <a:off x="4023360" y="566928"/>
+            <a:ext cx="7315200" cy="685800"/>
           </a:xfrm>
           <a:prstGeom prst="rect">
             <a:avLst/>
@@ -10101,21 +12117,20 @@
           <a:noFill/>
         </p:spPr>
         <p:txBody>
-          <a:bodyPr wrap="square">
+          <a:bodyPr wrap="none">
             <a:spAutoFit/>
           </a:bodyPr>
           <a:lstStyle/>
           <a:p>
-            <a:pPr>
-              <a:defRPr sz="2800" b="1">
+            <a:pPr algn="r" rtl="1"/>
+            <a:r>
+              <a:rPr sz="3000" b="1" lang="ar-SA" rtl="1">
                 <a:solidFill>
                   <a:srgbClr val="0F2B5C"/>
                 </a:solidFill>
                 <a:latin typeface="Arial"/>
-              </a:defRPr>
-            </a:pPr>
-            <a:r>
-              <a:t>خطوات بروتوكول المصافحة والتفاوض الآمن (Handshake Protocol)</a:t>
+              </a:rPr>
+              <a:t>خطوات بروتوكول المصافحة والتفاوض الآمن</a:t>
             </a:r>
           </a:p>
         </p:txBody>
@@ -10128,8 +12143,8 @@
         </p:nvSpPr>
         <p:spPr>
           <a:xfrm>
-            <a:off x="8961120" y="621792"/>
-            <a:ext cx="2377440" cy="438912"/>
+            <a:off x="822960" y="621792"/>
+            <a:ext cx="3017520" cy="502920"/>
           </a:xfrm>
           <a:prstGeom prst="roundRect">
             <a:avLst/>
@@ -10161,16 +12176,15 @@
           <a:bodyPr rtlCol="0" anchor="ctr"/>
           <a:lstStyle/>
           <a:p>
-            <a:pPr algn="ctr">
-              <a:defRPr sz="1200" b="1">
+            <a:pPr algn="ctr" rtl="0"/>
+            <a:r>
+              <a:rPr sz="1400" b="1" lang="en-US" rtl="0">
                 <a:solidFill>
                   <a:srgbClr val="1E40AF"/>
                 </a:solidFill>
                 <a:latin typeface="Consolas"/>
-              </a:defRPr>
-            </a:pPr>
-            <a:r>
-              <a:t>HANDSHAKE PROTOCOL</a:t>
+              </a:rPr>
+              <a:t>Handshake Protocol</a:t>
             </a:r>
           </a:p>
         </p:txBody>
@@ -10183,7 +12197,7 @@
         </p:nvSpPr>
         <p:spPr>
           <a:xfrm>
-            <a:off x="822960" y="1353312"/>
+            <a:off x="822960" y="1325880"/>
             <a:ext cx="10515600" cy="18288"/>
           </a:xfrm>
           <a:prstGeom prst="rect">
@@ -10226,8 +12240,8 @@
         </p:nvSpPr>
         <p:spPr>
           <a:xfrm>
-            <a:off x="822960" y="6309360"/>
-            <a:ext cx="7315200" cy="320040"/>
+            <a:off x="822960" y="6355080"/>
+            <a:ext cx="10515600" cy="320040"/>
           </a:xfrm>
           <a:prstGeom prst="rect">
             <a:avLst/>
@@ -10240,16 +12254,15 @@
           </a:bodyPr>
           <a:lstStyle/>
           <a:p>
-            <a:pPr>
-              <a:defRPr sz="1100">
+            <a:pPr algn="r" rtl="1"/>
+            <a:r>
+              <a:rPr sz="1050" b="0" lang="ar-SA" rtl="1">
                 <a:solidFill>
                   <a:srgbClr val="475569"/>
                 </a:solidFill>
                 <a:latin typeface="Arial"/>
-              </a:defRPr>
-            </a:pPr>
-            <a:r>
-              <a:t>مشروع تخرج LOCAL CONTACT — مناقشة أكاديمية محكمة</a:t>
+              </a:rPr>
+              <a:t>مناقشة مشروع التخرج الأكاديمية — نظام اتصال محلي مستقل دون خادم وسيط</a:t>
             </a:r>
           </a:p>
         </p:txBody>
@@ -10262,8 +12275,8 @@
         </p:nvSpPr>
         <p:spPr>
           <a:xfrm>
-            <a:off x="822960" y="1645920"/>
-            <a:ext cx="10515600" cy="4389120"/>
+            <a:off x="6217920" y="1554480"/>
+            <a:ext cx="5120640" cy="1828800"/>
           </a:xfrm>
           <a:prstGeom prst="roundRect">
             <a:avLst/>
@@ -10295,96 +12308,368 @@
           <a:bodyPr rtlCol="0" anchor="ctr" wrap="square"/>
           <a:lstStyle/>
           <a:p>
-            <a:pPr algn="ctr">
-              <a:defRPr sz="2200" b="1">
+            <a:pPr algn="r" rtl="1"/>
+            <a:r>
+              <a:rPr sz="1900" b="1" lang="ar-SA" rtl="1">
                 <a:solidFill>
                   <a:srgbClr val="0F2B5C"/>
                 </a:solidFill>
                 <a:latin typeface="Arial"/>
-              </a:defRPr>
+              </a:rPr>
+              <a:t>المرحلة الأولى: طلب المصافحة</a:t>
+            </a:r>
+          </a:p>
+          <a:p>
+            <a:pPr algn="r" rtl="0">
+              <a:spcBef>
+                <a:spcPts val="300"/>
+              </a:spcBef>
             </a:pPr>
             <a:r>
-              <a:t>🔄 مراحل المصافحة الأربع المنفذة في HandshakeCryptoUtils.kt:</a:t>
-            </a:r>
-          </a:p>
-          <a:p>
-            <a:pPr>
+              <a:rPr sz="1300" b="1" lang="en-US" rtl="0">
+                <a:solidFill>
+                  <a:srgbClr val="1E40AF"/>
+                </a:solidFill>
+                <a:latin typeface="Consolas"/>
+              </a:rPr>
+              <a:t>[Step 1: Handshake Init]</a:t>
+            </a:r>
+          </a:p>
+          <a:p>
+            <a:pPr algn="r" rtl="1">
               <a:spcBef>
-                <a:spcPts val="1100"/>
+                <a:spcPts val="600"/>
               </a:spcBef>
-              <a:defRPr sz="1700" b="1">
+            </a:pPr>
+            <a:r>
+              <a:rPr sz="1500" b="0" lang="ar-SA" rtl="1">
                 <a:solidFill>
                   <a:srgbClr val="0F172A"/>
                 </a:solidFill>
                 <a:latin typeface="Arial"/>
-              </a:defRPr>
+              </a:rPr>
+              <a:t>المرسل يولد مفتاح تبادل مؤقت ويرسله مصحوباً برقم عشوائي وبصمة هويته.</a:t>
+            </a:r>
+          </a:p>
+        </p:txBody>
+      </p:sp>
+      <p:sp>
+        <p:nvSpPr>
+          <p:cNvPr id="10" name="Rounded Rectangle 9"/>
+          <p:cNvSpPr/>
+          <p:nvPr/>
+        </p:nvSpPr>
+        <p:spPr>
+          <a:xfrm>
+            <a:off x="822960" y="1554480"/>
+            <a:ext cx="5120640" cy="1828800"/>
+          </a:xfrm>
+          <a:prstGeom prst="roundRect">
+            <a:avLst/>
+          </a:prstGeom>
+          <a:solidFill>
+            <a:srgbClr val="F8FAFC"/>
+          </a:solidFill>
+          <a:ln w="19050">
+            <a:solidFill>
+              <a:srgbClr val="CBD5E1"/>
+            </a:solidFill>
+          </a:ln>
+        </p:spPr>
+        <p:style>
+          <a:lnRef idx="1">
+            <a:schemeClr val="accent1"/>
+          </a:lnRef>
+          <a:fillRef idx="3">
+            <a:schemeClr val="accent1"/>
+          </a:fillRef>
+          <a:effectRef idx="2">
+            <a:schemeClr val="accent1"/>
+          </a:effectRef>
+          <a:fontRef idx="minor">
+            <a:schemeClr val="lt1"/>
+          </a:fontRef>
+        </p:style>
+        <p:txBody>
+          <a:bodyPr rtlCol="0" anchor="ctr" wrap="square"/>
+          <a:lstStyle/>
+          <a:p>
+            <a:pPr algn="r" rtl="1"/>
+            <a:r>
+              <a:rPr sz="1900" b="1" lang="ar-SA" rtl="1">
+                <a:solidFill>
+                  <a:srgbClr val="0F2B5C"/>
+                </a:solidFill>
+                <a:latin typeface="Arial"/>
+              </a:rPr>
+              <a:t>المرحلة الثانية: رد المصافحة</a:t>
+            </a:r>
+          </a:p>
+          <a:p>
+            <a:pPr algn="r" rtl="0">
+              <a:spcBef>
+                <a:spcPts val="300"/>
+              </a:spcBef>
             </a:pPr>
             <a:r>
-              <a:t>• المرحلة 1 — طلب المصافحة (Handshake Init): المرسل يولد مفتاح ECDH مؤقت ويرسله مع Nonce ومعرف هويته وبصمته.</a:t>
-            </a:r>
-          </a:p>
-          <a:p>
-            <a:pPr>
+              <a:rPr sz="1300" b="1" lang="en-US" rtl="0">
+                <a:solidFill>
+                  <a:srgbClr val="1E40AF"/>
+                </a:solidFill>
+                <a:latin typeface="Consolas"/>
+              </a:rPr>
+              <a:t>[Step 2: Handshake Response]</a:t>
+            </a:r>
+          </a:p>
+          <a:p>
+            <a:pPr algn="r" rtl="1">
               <a:spcBef>
-                <a:spcPts val="1100"/>
+                <a:spcPts val="600"/>
               </a:spcBef>
-              <a:defRPr sz="1700" b="1">
+            </a:pPr>
+            <a:r>
+              <a:rPr sz="1500" b="0" lang="ar-SA" rtl="1">
                 <a:solidFill>
                   <a:srgbClr val="0F172A"/>
                 </a:solidFill>
                 <a:latin typeface="Arial"/>
-              </a:defRPr>
+              </a:rPr>
+              <a:t>المستقبل يولد مفتاحه المؤقت ويرد مع توقيع رقمي يثبت ملكيته للمفتاح والهوية.</a:t>
+            </a:r>
+          </a:p>
+        </p:txBody>
+      </p:sp>
+      <p:sp>
+        <p:nvSpPr>
+          <p:cNvPr id="11" name="Rounded Rectangle 10"/>
+          <p:cNvSpPr/>
+          <p:nvPr/>
+        </p:nvSpPr>
+        <p:spPr>
+          <a:xfrm>
+            <a:off x="6217920" y="3566160"/>
+            <a:ext cx="5120640" cy="1828800"/>
+          </a:xfrm>
+          <a:prstGeom prst="roundRect">
+            <a:avLst/>
+          </a:prstGeom>
+          <a:solidFill>
+            <a:srgbClr val="F8FAFC"/>
+          </a:solidFill>
+          <a:ln w="19050">
+            <a:solidFill>
+              <a:srgbClr val="CBD5E1"/>
+            </a:solidFill>
+          </a:ln>
+        </p:spPr>
+        <p:style>
+          <a:lnRef idx="1">
+            <a:schemeClr val="accent1"/>
+          </a:lnRef>
+          <a:fillRef idx="3">
+            <a:schemeClr val="accent1"/>
+          </a:fillRef>
+          <a:effectRef idx="2">
+            <a:schemeClr val="accent1"/>
+          </a:effectRef>
+          <a:fontRef idx="minor">
+            <a:schemeClr val="lt1"/>
+          </a:fontRef>
+        </p:style>
+        <p:txBody>
+          <a:bodyPr rtlCol="0" anchor="ctr" wrap="square"/>
+          <a:lstStyle/>
+          <a:p>
+            <a:pPr algn="r" rtl="1"/>
+            <a:r>
+              <a:rPr sz="1900" b="1" lang="ar-SA" rtl="1">
+                <a:solidFill>
+                  <a:srgbClr val="0F2B5C"/>
+                </a:solidFill>
+                <a:latin typeface="Arial"/>
+              </a:rPr>
+              <a:t>المرحلة الثالثة: التحقق والاشتقاق</a:t>
+            </a:r>
+          </a:p>
+          <a:p>
+            <a:pPr algn="r" rtl="0">
+              <a:spcBef>
+                <a:spcPts val="300"/>
+              </a:spcBef>
             </a:pPr>
             <a:r>
-              <a:t>• المرحلة 2 — رد المصافحة والتوقيع (Handshake Response): المستقبل يولد مفتاحه المؤقت، ويوقع الحزمة عبر ECDSA، ويرد بمفتاحه وبصمته.</a:t>
-            </a:r>
-          </a:p>
-          <a:p>
-            <a:pPr>
+              <a:rPr sz="1300" b="1" lang="en-US" rtl="0">
+                <a:solidFill>
+                  <a:srgbClr val="059669"/>
+                </a:solidFill>
+                <a:latin typeface="Consolas"/>
+              </a:rPr>
+              <a:t>[Step 3: Verify &amp; Derive]</a:t>
+            </a:r>
+          </a:p>
+          <a:p>
+            <a:pPr algn="r" rtl="1">
               <a:spcBef>
-                <a:spcPts val="1100"/>
+                <a:spcPts val="600"/>
               </a:spcBef>
-              <a:defRPr sz="1700" b="1">
+            </a:pPr>
+            <a:r>
+              <a:rPr sz="1500" b="0" lang="ar-SA" rtl="1">
                 <a:solidFill>
                   <a:srgbClr val="0F172A"/>
                 </a:solidFill>
                 <a:latin typeface="Arial"/>
-              </a:defRPr>
+              </a:rPr>
+              <a:t>الطرفان يتحققان من التوقيع والبصمة، ويحسبان السر المشترك ويشتقان مفاتيح الجلسة.</a:t>
+            </a:r>
+          </a:p>
+        </p:txBody>
+      </p:sp>
+      <p:sp>
+        <p:nvSpPr>
+          <p:cNvPr id="12" name="Rounded Rectangle 11"/>
+          <p:cNvSpPr/>
+          <p:nvPr/>
+        </p:nvSpPr>
+        <p:spPr>
+          <a:xfrm>
+            <a:off x="822960" y="3566160"/>
+            <a:ext cx="5120640" cy="1828800"/>
+          </a:xfrm>
+          <a:prstGeom prst="roundRect">
+            <a:avLst/>
+          </a:prstGeom>
+          <a:solidFill>
+            <a:srgbClr val="F8FAFC"/>
+          </a:solidFill>
+          <a:ln w="19050">
+            <a:solidFill>
+              <a:srgbClr val="CBD5E1"/>
+            </a:solidFill>
+          </a:ln>
+        </p:spPr>
+        <p:style>
+          <a:lnRef idx="1">
+            <a:schemeClr val="accent1"/>
+          </a:lnRef>
+          <a:fillRef idx="3">
+            <a:schemeClr val="accent1"/>
+          </a:fillRef>
+          <a:effectRef idx="2">
+            <a:schemeClr val="accent1"/>
+          </a:effectRef>
+          <a:fontRef idx="minor">
+            <a:schemeClr val="lt1"/>
+          </a:fontRef>
+        </p:style>
+        <p:txBody>
+          <a:bodyPr rtlCol="0" anchor="ctr" wrap="square"/>
+          <a:lstStyle/>
+          <a:p>
+            <a:pPr algn="r" rtl="1"/>
+            <a:r>
+              <a:rPr sz="1900" b="1" lang="ar-SA" rtl="1">
+                <a:solidFill>
+                  <a:srgbClr val="0F2B5C"/>
+                </a:solidFill>
+                <a:latin typeface="Arial"/>
+              </a:rPr>
+              <a:t>المرحلة الرابعة: التأكيد المشفر</a:t>
+            </a:r>
+          </a:p>
+          <a:p>
+            <a:pPr algn="r" rtl="0">
+              <a:spcBef>
+                <a:spcPts val="300"/>
+              </a:spcBef>
             </a:pPr>
             <a:r>
-              <a:t>• المرحلة 3 — التحقق واشتقاق المفاتيح (Verify &amp; Derive): الطرفان يتحققان من صحة التوقيع والبصمة، ويحسبان السر المشترك، ويشتقان مفاتيح الجلسة عبر HKDF.</a:t>
-            </a:r>
-          </a:p>
-          <a:p>
-            <a:pPr>
+              <a:rPr sz="1300" b="1" lang="en-US" rtl="0">
+                <a:solidFill>
+                  <a:srgbClr val="059669"/>
+                </a:solidFill>
+                <a:latin typeface="Consolas"/>
+              </a:rPr>
+              <a:t>[Step 4: Session Active]</a:t>
+            </a:r>
+          </a:p>
+          <a:p>
+            <a:pPr algn="r" rtl="1">
               <a:spcBef>
-                <a:spcPts val="1100"/>
+                <a:spcPts val="600"/>
               </a:spcBef>
-              <a:defRPr sz="1700" b="1">
+            </a:pPr>
+            <a:r>
+              <a:rPr sz="1500" b="0" lang="ar-SA" rtl="1">
                 <a:solidFill>
                   <a:srgbClr val="0F172A"/>
                 </a:solidFill>
                 <a:latin typeface="Arial"/>
-              </a:defRPr>
-            </a:pPr>
-            <a:r>
-              <a:t>• المرحلة 4 — إتمام وتأكيد الجلسة (Handshake Complete): إرسال حزمة تأكيد مشفرة بمفتاح الجلسة الجديد والانتقال لقناة البيانات المشفرة.</a:t>
-            </a:r>
-          </a:p>
-          <a:p>
-            <a:pPr>
-              <a:spcBef>
-                <a:spcPts val="1100"/>
-              </a:spcBef>
-              <a:defRPr sz="1700" b="1">
-                <a:solidFill>
-                  <a:srgbClr val="0F172A"/>
-                </a:solidFill>
-                <a:latin typeface="Arial"/>
-              </a:defRPr>
-            </a:pPr>
-            <a:r>
-              <a:t>• الملف المسؤول: HandshakeCryptoUtils.kt — يتولى بناء وتفكيك حزم المصافحة والتحقق الرياضي من التوقيعات.</a:t>
+              </a:rPr>
+              <a:t>إرسال حزمة تأكيد مشفرة بمفتاح الجلسة الجديد والانتقال الآمن لقناة البيانات.</a:t>
+            </a:r>
+          </a:p>
+        </p:txBody>
+      </p:sp>
+      <p:sp>
+        <p:nvSpPr>
+          <p:cNvPr id="13" name="Rounded Rectangle 12"/>
+          <p:cNvSpPr/>
+          <p:nvPr/>
+        </p:nvSpPr>
+        <p:spPr>
+          <a:xfrm>
+            <a:off x="822960" y="5623560"/>
+            <a:ext cx="10515600" cy="594360"/>
+          </a:xfrm>
+          <a:prstGeom prst="roundRect">
+            <a:avLst/>
+          </a:prstGeom>
+          <a:solidFill>
+            <a:srgbClr val="F8FAFC"/>
+          </a:solidFill>
+          <a:ln w="12700">
+            <a:solidFill>
+              <a:srgbClr val="CBD5E1"/>
+            </a:solidFill>
+          </a:ln>
+        </p:spPr>
+        <p:style>
+          <a:lnRef idx="1">
+            <a:schemeClr val="accent1"/>
+          </a:lnRef>
+          <a:fillRef idx="3">
+            <a:schemeClr val="accent1"/>
+          </a:fillRef>
+          <a:effectRef idx="2">
+            <a:schemeClr val="accent1"/>
+          </a:effectRef>
+          <a:fontRef idx="minor">
+            <a:schemeClr val="lt1"/>
+          </a:fontRef>
+        </p:style>
+        <p:txBody>
+          <a:bodyPr rtlCol="0" anchor="ctr"/>
+          <a:lstStyle/>
+          <a:p>
+            <a:pPr algn="r" rtl="1"/>
+            <a:r>
+              <a:rPr sz="1200" b="1" lang="ar-SA" rtl="1">
+                <a:solidFill>
+                  <a:srgbClr val="0F2B5C"/>
+                </a:solidFill>
+                <a:latin typeface="Arial"/>
+              </a:rPr>
+              <a:t>المكون البرمجي: أدوات بروتوكول المصافحة المشفرة  |  </a:t>
+            </a:r>
+            <a:r>
+              <a:rPr sz="1200" b="1" lang="en-US" rtl="0">
+                <a:solidFill>
+                  <a:srgbClr val="1E40AF"/>
+                </a:solidFill>
+                <a:latin typeface="Consolas"/>
+              </a:rPr>
+              <a:t>app/src/main/java/com/example/network/HandshakeCryptoUtils.kt</a:t>
             </a:r>
           </a:p>
         </p:txBody>
